--- a/Master-Zoo-Bolt-Food-Partnership.pptx
+++ b/Master-Zoo-Bolt-Food-Partnership.pptx
@@ -25,6 +25,7 @@
     <p:sldId id="273" r:id="rId24"/>
     <p:sldId id="274" r:id="rId25"/>
     <p:sldId id="275" r:id="rId26"/>
+    <p:sldId id="276" r:id="rId27"/>
   </p:sldIdLst>
   <p:sldSz cx="9144000" cy="5143500" type="screen4x3"/>
   <p:notesSz cx="6858000" cy="9144000"/>
@@ -3396,7 +3397,7 @@
                 </a:solidFill>
                 <a:latin typeface="Arial"/>
               </a:rPr>
-              <a:t>ДОСВІД КОРИСТУВАЧА</a:t>
+              <a:t>ПОТЕНЦІАЛ СПІВПРАЦІ · BOLT+</a:t>
             </a:r>
           </a:p>
           <a:p>
@@ -3407,7 +3408,7 @@
                 </a:solidFill>
                 <a:latin typeface="Arial"/>
               </a:rPr>
-              <a:t>Bolt інвестує в Consumer Experience</a:t>
+              <a:t>Bolt+: 0,4% комісії проти +20% GMV</a:t>
             </a:r>
           </a:p>
         </p:txBody>
@@ -3420,8 +3421,8 @@
         </p:nvSpPr>
         <p:spPr>
           <a:xfrm>
-            <a:off x="548640" y="1874519"/>
-            <a:ext cx="3931920" cy="1234440"/>
+            <a:off x="548640" y="1828800"/>
+            <a:ext cx="3931920" cy="1874519"/>
           </a:xfrm>
           <a:prstGeom prst="roundRect">
             <a:avLst/>
@@ -3464,10 +3465,132 @@
         </p:nvSpPr>
         <p:spPr>
           <a:xfrm>
-            <a:off x="548640" y="1874519"/>
-            <a:ext cx="82296" cy="1234440"/>
-          </a:xfrm>
-          <a:prstGeom prst="rect">
+            <a:off x="548640" y="1828800"/>
+            <a:ext cx="3931920" cy="91440"/>
+          </a:xfrm>
+          <a:prstGeom prst="rect">
+            <a:avLst/>
+          </a:prstGeom>
+          <a:solidFill>
+            <a:srgbClr val="6B7080"/>
+          </a:solidFill>
+          <a:ln>
+            <a:noFill/>
+          </a:ln>
+          <a:effectLst/>
+        </p:spPr>
+        <p:style>
+          <a:lnRef idx="1">
+            <a:schemeClr val="accent1"/>
+          </a:lnRef>
+          <a:fillRef idx="3">
+            <a:schemeClr val="accent1"/>
+          </a:fillRef>
+          <a:effectRef idx="2">
+            <a:schemeClr val="accent1"/>
+          </a:effectRef>
+          <a:fontRef idx="minor">
+            <a:schemeClr val="lt1"/>
+          </a:fontRef>
+        </p:style>
+        <p:txBody>
+          <a:bodyPr rtlCol="0" anchor="ctr"/>
+          <a:lstStyle/>
+          <a:p>
+            <a:pPr algn="ctr"/>
+          </a:p>
+        </p:txBody>
+      </p:sp>
+      <p:sp>
+        <p:nvSpPr>
+          <p:cNvPr id="7" name="TextBox 6"/>
+          <p:cNvSpPr txBox="1"/>
+          <p:nvPr/>
+        </p:nvSpPr>
+        <p:spPr>
+          <a:xfrm>
+            <a:off x="777240" y="1993392"/>
+            <a:ext cx="3520440" cy="1645920"/>
+          </a:xfrm>
+          <a:prstGeom prst="rect">
+            <a:avLst/>
+          </a:prstGeom>
+          <a:noFill/>
+        </p:spPr>
+        <p:txBody>
+          <a:bodyPr wrap="square">
+            <a:spAutoFit/>
+          </a:bodyPr>
+          <a:lstStyle/>
+          <a:p>
+            <a:r>
+              <a:rPr sz="1350" b="1">
+                <a:solidFill>
+                  <a:srgbClr val="2F313F"/>
+                </a:solidFill>
+                <a:latin typeface="Arial"/>
+              </a:rPr>
+              <a:t>Вартість Bolt+</a:t>
+            </a:r>
+          </a:p>
+          <a:p>
+            <a:r>
+              <a:rPr sz="1000" b="0">
+                <a:solidFill>
+                  <a:srgbClr val="6B7080"/>
+                </a:solidFill>
+                <a:latin typeface="Arial"/>
+              </a:rPr>
+              <a:t>середньозважена надбавка (20% × 2%)</a:t>
+            </a:r>
+          </a:p>
+          <a:p>
+            <a:r>
+              <a:rPr sz="2600" b="1">
+                <a:solidFill>
+                  <a:srgbClr val="2F313F"/>
+                </a:solidFill>
+                <a:latin typeface="Arial"/>
+              </a:rPr>
+              <a:t>+0,4 п.п.</a:t>
+            </a:r>
+          </a:p>
+          <a:p>
+            <a:r>
+              <a:rPr sz="1150" b="0">
+                <a:solidFill>
+                  <a:srgbClr val="6B7080"/>
+                </a:solidFill>
+                <a:latin typeface="Arial"/>
+              </a:rPr>
+              <a:t>≈ 10 200 ₴ / міс (міс 6)</a:t>
+            </a:r>
+          </a:p>
+          <a:p>
+            <a:r>
+              <a:rPr sz="1150" b="0">
+                <a:solidFill>
+                  <a:srgbClr val="6B7080"/>
+                </a:solidFill>
+                <a:latin typeface="Arial"/>
+              </a:rPr>
+              <a:t>≈ 46 000 ₴ за 6 міс</a:t>
+            </a:r>
+          </a:p>
+        </p:txBody>
+      </p:sp>
+      <p:sp>
+        <p:nvSpPr>
+          <p:cNvPr id="8" name="Rounded Rectangle 7"/>
+          <p:cNvSpPr/>
+          <p:nvPr/>
+        </p:nvSpPr>
+        <p:spPr>
+          <a:xfrm>
+            <a:off x="4663440" y="1828800"/>
+            <a:ext cx="3931920" cy="1874519"/>
+          </a:xfrm>
+          <a:prstGeom prst="roundRect">
             <a:avLst/>
           </a:prstGeom>
           <a:solidFill>
@@ -3502,14 +3625,14 @@
       </p:sp>
       <p:sp>
         <p:nvSpPr>
-          <p:cNvPr id="7" name="TextBox 6"/>
+          <p:cNvPr id="9" name="TextBox 8"/>
           <p:cNvSpPr txBox="1"/>
           <p:nvPr/>
         </p:nvSpPr>
         <p:spPr>
           <a:xfrm>
-            <a:off x="804672" y="2020824"/>
-            <a:ext cx="3566160" cy="1005840"/>
+            <a:off x="4892040" y="1993392"/>
+            <a:ext cx="3520440" cy="1645920"/>
           </a:xfrm>
           <a:prstGeom prst="rect">
             <a:avLst/>
@@ -3525,42 +3648,75 @@
             <a:r>
               <a:rPr sz="1350" b="1">
                 <a:solidFill>
-                  <a:srgbClr val="2F313F"/>
-                </a:solidFill>
-                <a:latin typeface="Arial"/>
-              </a:rPr>
-              <a:t>Персоналізований контент</a:t>
-            </a:r>
-          </a:p>
-          <a:p>
-            <a:r>
-              <a:rPr sz="1050" b="0">
-                <a:solidFill>
-                  <a:srgbClr val="6B7080"/>
-                </a:solidFill>
-                <a:latin typeface="Arial"/>
-              </a:rPr>
-              <a:t>Рекомендації на основі історії та вподобань користувача.</a:t>
-            </a:r>
-          </a:p>
-        </p:txBody>
-      </p:sp>
-      <p:sp>
-        <p:nvSpPr>
-          <p:cNvPr id="8" name="Rounded Rectangle 7"/>
+                  <a:srgbClr val="FFFFFF"/>
+                </a:solidFill>
+                <a:latin typeface="Arial"/>
+              </a:rPr>
+              <a:t>Приріст GMV від Bolt+</a:t>
+            </a:r>
+          </a:p>
+          <a:p>
+            <a:r>
+              <a:rPr sz="1000" b="0">
+                <a:solidFill>
+                  <a:srgbClr val="EAFFF4"/>
+                </a:solidFill>
+                <a:latin typeface="Arial"/>
+              </a:rPr>
+              <a:t>частіші замовлення преміум-аудиторії</a:t>
+            </a:r>
+          </a:p>
+          <a:p>
+            <a:r>
+              <a:rPr sz="2600" b="1">
+                <a:solidFill>
+                  <a:srgbClr val="FFFFFF"/>
+                </a:solidFill>
+                <a:latin typeface="Arial"/>
+              </a:rPr>
+              <a:t>+20%</a:t>
+            </a:r>
+          </a:p>
+          <a:p>
+            <a:r>
+              <a:rPr sz="1150" b="0">
+                <a:solidFill>
+                  <a:srgbClr val="FFFFFF"/>
+                </a:solidFill>
+                <a:latin typeface="Arial"/>
+              </a:rPr>
+              <a:t>+510 000 ₴ / міс (міс 6)</a:t>
+            </a:r>
+          </a:p>
+          <a:p>
+            <a:r>
+              <a:rPr sz="1150" b="0">
+                <a:solidFill>
+                  <a:srgbClr val="FFFFFF"/>
+                </a:solidFill>
+                <a:latin typeface="Arial"/>
+              </a:rPr>
+              <a:t>+2,3 млн ₴ за 6 міс</a:t>
+            </a:r>
+          </a:p>
+        </p:txBody>
+      </p:sp>
+      <p:sp>
+        <p:nvSpPr>
+          <p:cNvPr id="10" name="Rounded Rectangle 9"/>
           <p:cNvSpPr/>
           <p:nvPr/>
         </p:nvSpPr>
         <p:spPr>
           <a:xfrm>
-            <a:off x="4663440" y="1874519"/>
-            <a:ext cx="3931920" cy="1234440"/>
+            <a:off x="548640" y="3886200"/>
+            <a:ext cx="8046720" cy="566928"/>
           </a:xfrm>
           <a:prstGeom prst="roundRect">
             <a:avLst/>
           </a:prstGeom>
           <a:solidFill>
-            <a:srgbClr val="EEF6F1"/>
+            <a:srgbClr val="2F313F"/>
           </a:solidFill>
           <a:ln>
             <a:noFill/>
@@ -3591,58 +3747,14 @@
       </p:sp>
       <p:sp>
         <p:nvSpPr>
-          <p:cNvPr id="9" name="Rectangle 8"/>
-          <p:cNvSpPr/>
-          <p:nvPr/>
-        </p:nvSpPr>
-        <p:spPr>
-          <a:xfrm>
-            <a:off x="4663440" y="1874519"/>
-            <a:ext cx="82296" cy="1234440"/>
-          </a:xfrm>
-          <a:prstGeom prst="rect">
-            <a:avLst/>
-          </a:prstGeom>
-          <a:solidFill>
-            <a:srgbClr val="34D186"/>
-          </a:solidFill>
-          <a:ln>
-            <a:noFill/>
-          </a:ln>
-          <a:effectLst/>
-        </p:spPr>
-        <p:style>
-          <a:lnRef idx="1">
-            <a:schemeClr val="accent1"/>
-          </a:lnRef>
-          <a:fillRef idx="3">
-            <a:schemeClr val="accent1"/>
-          </a:fillRef>
-          <a:effectRef idx="2">
-            <a:schemeClr val="accent1"/>
-          </a:effectRef>
-          <a:fontRef idx="minor">
-            <a:schemeClr val="lt1"/>
-          </a:fontRef>
-        </p:style>
-        <p:txBody>
-          <a:bodyPr rtlCol="0" anchor="ctr"/>
-          <a:lstStyle/>
-          <a:p>
-            <a:pPr algn="ctr"/>
-          </a:p>
-        </p:txBody>
-      </p:sp>
-      <p:sp>
-        <p:nvSpPr>
-          <p:cNvPr id="10" name="TextBox 9"/>
+          <p:cNvPr id="11" name="TextBox 10"/>
           <p:cNvSpPr txBox="1"/>
           <p:nvPr/>
         </p:nvSpPr>
         <p:spPr>
           <a:xfrm>
-            <a:off x="4919472" y="2020824"/>
-            <a:ext cx="3566160" cy="1005840"/>
+            <a:off x="731520" y="3968496"/>
+            <a:ext cx="7680960" cy="420624"/>
           </a:xfrm>
           <a:prstGeom prst="rect">
             <a:avLst/>
@@ -3655,127 +3767,29 @@
           </a:bodyPr>
           <a:lstStyle/>
           <a:p>
-            <a:r>
-              <a:rPr sz="1350" b="1">
-                <a:solidFill>
-                  <a:srgbClr val="2F313F"/>
-                </a:solidFill>
-                <a:latin typeface="Arial"/>
-              </a:rPr>
-              <a:t>Зручний пошук і фільтри</a:t>
-            </a:r>
-          </a:p>
-          <a:p>
-            <a:r>
-              <a:rPr sz="1050" b="0">
-                <a:solidFill>
-                  <a:srgbClr val="6B7080"/>
-                </a:solidFill>
-                <a:latin typeface="Arial"/>
-              </a:rPr>
-              <a:t>Швидка навігація, що показує більше релевантних товарів.</a:t>
-            </a:r>
-          </a:p>
-        </p:txBody>
-      </p:sp>
-      <p:sp>
-        <p:nvSpPr>
-          <p:cNvPr id="11" name="Rounded Rectangle 10"/>
-          <p:cNvSpPr/>
-          <p:nvPr/>
-        </p:nvSpPr>
-        <p:spPr>
-          <a:xfrm>
-            <a:off x="548640" y="3246120"/>
-            <a:ext cx="3931920" cy="1234440"/>
-          </a:xfrm>
-          <a:prstGeom prst="roundRect">
-            <a:avLst/>
-          </a:prstGeom>
-          <a:solidFill>
-            <a:srgbClr val="EEF6F1"/>
-          </a:solidFill>
-          <a:ln>
-            <a:noFill/>
-          </a:ln>
-          <a:effectLst/>
-        </p:spPr>
-        <p:style>
-          <a:lnRef idx="1">
-            <a:schemeClr val="accent1"/>
-          </a:lnRef>
-          <a:fillRef idx="3">
-            <a:schemeClr val="accent1"/>
-          </a:fillRef>
-          <a:effectRef idx="2">
-            <a:schemeClr val="accent1"/>
-          </a:effectRef>
-          <a:fontRef idx="minor">
-            <a:schemeClr val="lt1"/>
-          </a:fontRef>
-        </p:style>
-        <p:txBody>
-          <a:bodyPr rtlCol="0" anchor="ctr"/>
-          <a:lstStyle/>
-          <a:p>
-            <a:pPr algn="ctr"/>
-          </a:p>
-        </p:txBody>
-      </p:sp>
-      <p:sp>
-        <p:nvSpPr>
-          <p:cNvPr id="12" name="Rectangle 11"/>
-          <p:cNvSpPr/>
-          <p:nvPr/>
-        </p:nvSpPr>
-        <p:spPr>
-          <a:xfrm>
-            <a:off x="548640" y="3246120"/>
-            <a:ext cx="82296" cy="1234440"/>
-          </a:xfrm>
-          <a:prstGeom prst="rect">
-            <a:avLst/>
-          </a:prstGeom>
-          <a:solidFill>
-            <a:srgbClr val="34D186"/>
-          </a:solidFill>
-          <a:ln>
-            <a:noFill/>
-          </a:ln>
-          <a:effectLst/>
-        </p:spPr>
-        <p:style>
-          <a:lnRef idx="1">
-            <a:schemeClr val="accent1"/>
-          </a:lnRef>
-          <a:fillRef idx="3">
-            <a:schemeClr val="accent1"/>
-          </a:fillRef>
-          <a:effectRef idx="2">
-            <a:schemeClr val="accent1"/>
-          </a:effectRef>
-          <a:fontRef idx="minor">
-            <a:schemeClr val="lt1"/>
-          </a:fontRef>
-        </p:style>
-        <p:txBody>
-          <a:bodyPr rtlCol="0" anchor="ctr"/>
-          <a:lstStyle/>
-          <a:p>
-            <a:pPr algn="ctr"/>
-          </a:p>
-        </p:txBody>
-      </p:sp>
-      <p:sp>
-        <p:nvSpPr>
-          <p:cNvPr id="13" name="TextBox 12"/>
+            <a:pPr algn="ctr"/>
+            <a:r>
+              <a:rPr sz="1250" b="1">
+                <a:solidFill>
+                  <a:srgbClr val="FFFFFF"/>
+                </a:solidFill>
+                <a:latin typeface="Arial"/>
+              </a:rPr>
+              <a:t>Кожна 1 ₴ комісії → ~40–50 ₴ GMV · 0,4% «з'їдає» лише ~2% приросту</a:t>
+            </a:r>
+          </a:p>
+        </p:txBody>
+      </p:sp>
+      <p:sp>
+        <p:nvSpPr>
+          <p:cNvPr id="12" name="TextBox 11"/>
           <p:cNvSpPr txBox="1"/>
           <p:nvPr/>
         </p:nvSpPr>
         <p:spPr>
           <a:xfrm>
-            <a:off x="804672" y="3392424"/>
-            <a:ext cx="3566160" cy="1005840"/>
+            <a:off x="457200" y="4736592"/>
+            <a:ext cx="8229600" cy="274320"/>
           </a:xfrm>
           <a:prstGeom prst="rect">
             <a:avLst/>
@@ -3789,157 +3803,13 @@
           <a:lstStyle/>
           <a:p>
             <a:r>
-              <a:rPr sz="1350" b="1">
-                <a:solidFill>
-                  <a:srgbClr val="2F313F"/>
-                </a:solidFill>
-                <a:latin typeface="Arial"/>
-              </a:rPr>
-              <a:t>Прості точки входу в магазини</a:t>
-            </a:r>
-          </a:p>
-          <a:p>
-            <a:r>
-              <a:rPr sz="1050" b="0">
+              <a:rPr sz="850" b="0">
                 <a:solidFill>
                   <a:srgbClr val="6B7080"/>
                 </a:solidFill>
                 <a:latin typeface="Arial"/>
               </a:rPr>
-              <a:t>High-intent вкладки внизу екрану ведуть у ваш магазин.</a:t>
-            </a:r>
-          </a:p>
-        </p:txBody>
-      </p:sp>
-      <p:sp>
-        <p:nvSpPr>
-          <p:cNvPr id="14" name="Rounded Rectangle 13"/>
-          <p:cNvSpPr/>
-          <p:nvPr/>
-        </p:nvSpPr>
-        <p:spPr>
-          <a:xfrm>
-            <a:off x="4663440" y="3246120"/>
-            <a:ext cx="3931920" cy="1234440"/>
-          </a:xfrm>
-          <a:prstGeom prst="roundRect">
-            <a:avLst/>
-          </a:prstGeom>
-          <a:solidFill>
-            <a:srgbClr val="EEF6F1"/>
-          </a:solidFill>
-          <a:ln>
-            <a:noFill/>
-          </a:ln>
-          <a:effectLst/>
-        </p:spPr>
-        <p:style>
-          <a:lnRef idx="1">
-            <a:schemeClr val="accent1"/>
-          </a:lnRef>
-          <a:fillRef idx="3">
-            <a:schemeClr val="accent1"/>
-          </a:fillRef>
-          <a:effectRef idx="2">
-            <a:schemeClr val="accent1"/>
-          </a:effectRef>
-          <a:fontRef idx="minor">
-            <a:schemeClr val="lt1"/>
-          </a:fontRef>
-        </p:style>
-        <p:txBody>
-          <a:bodyPr rtlCol="0" anchor="ctr"/>
-          <a:lstStyle/>
-          <a:p>
-            <a:pPr algn="ctr"/>
-          </a:p>
-        </p:txBody>
-      </p:sp>
-      <p:sp>
-        <p:nvSpPr>
-          <p:cNvPr id="15" name="Rectangle 14"/>
-          <p:cNvSpPr/>
-          <p:nvPr/>
-        </p:nvSpPr>
-        <p:spPr>
-          <a:xfrm>
-            <a:off x="4663440" y="3246120"/>
-            <a:ext cx="82296" cy="1234440"/>
-          </a:xfrm>
-          <a:prstGeom prst="rect">
-            <a:avLst/>
-          </a:prstGeom>
-          <a:solidFill>
-            <a:srgbClr val="34D186"/>
-          </a:solidFill>
-          <a:ln>
-            <a:noFill/>
-          </a:ln>
-          <a:effectLst/>
-        </p:spPr>
-        <p:style>
-          <a:lnRef idx="1">
-            <a:schemeClr val="accent1"/>
-          </a:lnRef>
-          <a:fillRef idx="3">
-            <a:schemeClr val="accent1"/>
-          </a:fillRef>
-          <a:effectRef idx="2">
-            <a:schemeClr val="accent1"/>
-          </a:effectRef>
-          <a:fontRef idx="minor">
-            <a:schemeClr val="lt1"/>
-          </a:fontRef>
-        </p:style>
-        <p:txBody>
-          <a:bodyPr rtlCol="0" anchor="ctr"/>
-          <a:lstStyle/>
-          <a:p>
-            <a:pPr algn="ctr"/>
-          </a:p>
-        </p:txBody>
-      </p:sp>
-      <p:sp>
-        <p:nvSpPr>
-          <p:cNvPr id="16" name="TextBox 15"/>
-          <p:cNvSpPr txBox="1"/>
-          <p:nvPr/>
-        </p:nvSpPr>
-        <p:spPr>
-          <a:xfrm>
-            <a:off x="4919472" y="3392424"/>
-            <a:ext cx="3566160" cy="1005840"/>
-          </a:xfrm>
-          <a:prstGeom prst="rect">
-            <a:avLst/>
-          </a:prstGeom>
-          <a:noFill/>
-        </p:spPr>
-        <p:txBody>
-          <a:bodyPr wrap="square">
-            <a:spAutoFit/>
-          </a:bodyPr>
-          <a:lstStyle/>
-          <a:p>
-            <a:r>
-              <a:rPr sz="1350" b="1">
-                <a:solidFill>
-                  <a:srgbClr val="2F313F"/>
-                </a:solidFill>
-                <a:latin typeface="Arial"/>
-              </a:rPr>
-              <a:t>Bolt Plus для утримання</a:t>
-            </a:r>
-          </a:p>
-          <a:p>
-            <a:r>
-              <a:rPr sz="1050" b="0">
-                <a:solidFill>
-                  <a:srgbClr val="6B7080"/>
-                </a:solidFill>
-                <a:latin typeface="Arial"/>
-              </a:rPr>
-              <a:t>Переваги підписки підвищують частоту та повернення клієнтів.</a:t>
+              <a:t>Розрахунок: AOV 850 ₴, до 3 000 замовлень/міс, ~11,5 млн ₴ GMV за 6 міс. Bolt+ ≈ 20% продажів, +2% на ці замовлення.</a:t>
             </a:r>
           </a:p>
         </p:txBody>
@@ -4067,7 +3937,7 @@
                 </a:solidFill>
                 <a:latin typeface="Arial"/>
               </a:rPr>
-              <a:t>МАРКЕТИНГОВА ПІДТРИМКА</a:t>
+              <a:t>ДОСВІД КОРИСТУВАЧА</a:t>
             </a:r>
           </a:p>
           <a:p>
@@ -4078,7 +3948,7 @@
                 </a:solidFill>
                 <a:latin typeface="Arial"/>
               </a:rPr>
-              <a:t>Маркетинг і реклама, що ростять продажі магазину</a:t>
+              <a:t>Bolt інвестує в Consumer Experience</a:t>
             </a:r>
           </a:p>
         </p:txBody>
@@ -4091,8 +3961,8 @@
         </p:nvSpPr>
         <p:spPr>
           <a:xfrm>
-            <a:off x="548640" y="1920240"/>
-            <a:ext cx="2606040" cy="777240"/>
+            <a:off x="548640" y="1874519"/>
+            <a:ext cx="3931920" cy="1234440"/>
           </a:xfrm>
           <a:prstGeom prst="roundRect">
             <a:avLst/>
@@ -4129,16 +3999,16 @@
       </p:sp>
       <p:sp>
         <p:nvSpPr>
-          <p:cNvPr id="6" name="Rounded Rectangle 5"/>
+          <p:cNvPr id="6" name="Rectangle 5"/>
           <p:cNvSpPr/>
           <p:nvPr/>
         </p:nvSpPr>
         <p:spPr>
           <a:xfrm>
-            <a:off x="713232" y="2121408"/>
-            <a:ext cx="365760" cy="365760"/>
-          </a:xfrm>
-          <a:prstGeom prst="roundRect">
+            <a:off x="548640" y="1874519"/>
+            <a:ext cx="82296" cy="1234440"/>
+          </a:xfrm>
+          <a:prstGeom prst="rect">
             <a:avLst/>
           </a:prstGeom>
           <a:solidFill>
@@ -4179,8 +4049,8 @@
         </p:nvSpPr>
         <p:spPr>
           <a:xfrm>
-            <a:off x="1234440" y="2084832"/>
-            <a:ext cx="1828800" cy="457200"/>
+            <a:off x="804672" y="2020824"/>
+            <a:ext cx="3566160" cy="1005840"/>
           </a:xfrm>
           <a:prstGeom prst="rect">
             <a:avLst/>
@@ -4194,13 +4064,24 @@
           <a:lstStyle/>
           <a:p>
             <a:r>
-              <a:rPr sz="1300" b="1">
+              <a:rPr sz="1350" b="1">
                 <a:solidFill>
                   <a:srgbClr val="2F313F"/>
                 </a:solidFill>
                 <a:latin typeface="Arial"/>
               </a:rPr>
-              <a:t>Bolt Plus</a:t>
+              <a:t>Персоналізований контент</a:t>
+            </a:r>
+          </a:p>
+          <a:p>
+            <a:r>
+              <a:rPr sz="1050" b="0">
+                <a:solidFill>
+                  <a:srgbClr val="6B7080"/>
+                </a:solidFill>
+                <a:latin typeface="Arial"/>
+              </a:rPr>
+              <a:t>Рекомендації на основі історії та вподобань користувача.</a:t>
             </a:r>
           </a:p>
         </p:txBody>
@@ -4213,8 +4094,8 @@
         </p:nvSpPr>
         <p:spPr>
           <a:xfrm>
-            <a:off x="3383280" y="1920240"/>
-            <a:ext cx="2606040" cy="777240"/>
+            <a:off x="4663440" y="1874519"/>
+            <a:ext cx="3931920" cy="1234440"/>
           </a:xfrm>
           <a:prstGeom prst="roundRect">
             <a:avLst/>
@@ -4251,16 +4132,16 @@
       </p:sp>
       <p:sp>
         <p:nvSpPr>
-          <p:cNvPr id="9" name="Rounded Rectangle 8"/>
+          <p:cNvPr id="9" name="Rectangle 8"/>
           <p:cNvSpPr/>
           <p:nvPr/>
         </p:nvSpPr>
         <p:spPr>
           <a:xfrm>
-            <a:off x="3547872" y="2121408"/>
-            <a:ext cx="365760" cy="365760"/>
-          </a:xfrm>
-          <a:prstGeom prst="roundRect">
+            <a:off x="4663440" y="1874519"/>
+            <a:ext cx="82296" cy="1234440"/>
+          </a:xfrm>
+          <a:prstGeom prst="rect">
             <a:avLst/>
           </a:prstGeom>
           <a:solidFill>
@@ -4301,8 +4182,8 @@
         </p:nvSpPr>
         <p:spPr>
           <a:xfrm>
-            <a:off x="4069080" y="2084832"/>
-            <a:ext cx="1828800" cy="457200"/>
+            <a:off x="4919472" y="2020824"/>
+            <a:ext cx="3566160" cy="1005840"/>
           </a:xfrm>
           <a:prstGeom prst="rect">
             <a:avLst/>
@@ -4316,13 +4197,24 @@
           <a:lstStyle/>
           <a:p>
             <a:r>
-              <a:rPr sz="1300" b="1">
+              <a:rPr sz="1350" b="1">
                 <a:solidFill>
                   <a:srgbClr val="2F313F"/>
                 </a:solidFill>
                 <a:latin typeface="Arial"/>
               </a:rPr>
-              <a:t>In-app engagement</a:t>
+              <a:t>Зручний пошук і фільтри</a:t>
+            </a:r>
+          </a:p>
+          <a:p>
+            <a:r>
+              <a:rPr sz="1050" b="0">
+                <a:solidFill>
+                  <a:srgbClr val="6B7080"/>
+                </a:solidFill>
+                <a:latin typeface="Arial"/>
+              </a:rPr>
+              <a:t>Швидка навігація, що показує більше релевантних товарів.</a:t>
             </a:r>
           </a:p>
         </p:txBody>
@@ -4335,8 +4227,8 @@
         </p:nvSpPr>
         <p:spPr>
           <a:xfrm>
-            <a:off x="6217920" y="1920240"/>
-            <a:ext cx="2606040" cy="777240"/>
+            <a:off x="548640" y="3246120"/>
+            <a:ext cx="3931920" cy="1234440"/>
           </a:xfrm>
           <a:prstGeom prst="roundRect">
             <a:avLst/>
@@ -4373,16 +4265,16 @@
       </p:sp>
       <p:sp>
         <p:nvSpPr>
-          <p:cNvPr id="12" name="Rounded Rectangle 11"/>
+          <p:cNvPr id="12" name="Rectangle 11"/>
           <p:cNvSpPr/>
           <p:nvPr/>
         </p:nvSpPr>
         <p:spPr>
           <a:xfrm>
-            <a:off x="6382512" y="2121408"/>
-            <a:ext cx="365760" cy="365760"/>
-          </a:xfrm>
-          <a:prstGeom prst="roundRect">
+            <a:off x="548640" y="3246120"/>
+            <a:ext cx="82296" cy="1234440"/>
+          </a:xfrm>
+          <a:prstGeom prst="rect">
             <a:avLst/>
           </a:prstGeom>
           <a:solidFill>
@@ -4423,8 +4315,8 @@
         </p:nvSpPr>
         <p:spPr>
           <a:xfrm>
-            <a:off x="6903720" y="2084832"/>
-            <a:ext cx="1828800" cy="457200"/>
+            <a:off x="804672" y="3392424"/>
+            <a:ext cx="3566160" cy="1005840"/>
           </a:xfrm>
           <a:prstGeom prst="rect">
             <a:avLst/>
@@ -4438,13 +4330,24 @@
           <a:lstStyle/>
           <a:p>
             <a:r>
-              <a:rPr sz="1300" b="1">
+              <a:rPr sz="1350" b="1">
                 <a:solidFill>
                   <a:srgbClr val="2F313F"/>
                 </a:solidFill>
                 <a:latin typeface="Arial"/>
               </a:rPr>
-              <a:t>Merchant Offers</a:t>
+              <a:t>Прості точки входу в магазини</a:t>
+            </a:r>
+          </a:p>
+          <a:p>
+            <a:r>
+              <a:rPr sz="1050" b="0">
+                <a:solidFill>
+                  <a:srgbClr val="6B7080"/>
+                </a:solidFill>
+                <a:latin typeface="Arial"/>
+              </a:rPr>
+              <a:t>High-intent вкладки внизу екрану ведуть у ваш магазин.</a:t>
             </a:r>
           </a:p>
         </p:txBody>
@@ -4457,8 +4360,8 @@
         </p:nvSpPr>
         <p:spPr>
           <a:xfrm>
-            <a:off x="548640" y="2880360"/>
-            <a:ext cx="2606040" cy="777240"/>
+            <a:off x="4663440" y="3246120"/>
+            <a:ext cx="3931920" cy="1234440"/>
           </a:xfrm>
           <a:prstGeom prst="roundRect">
             <a:avLst/>
@@ -4495,16 +4398,16 @@
       </p:sp>
       <p:sp>
         <p:nvSpPr>
-          <p:cNvPr id="15" name="Rounded Rectangle 14"/>
+          <p:cNvPr id="15" name="Rectangle 14"/>
           <p:cNvSpPr/>
           <p:nvPr/>
         </p:nvSpPr>
         <p:spPr>
           <a:xfrm>
-            <a:off x="713232" y="3081528"/>
-            <a:ext cx="365760" cy="365760"/>
-          </a:xfrm>
-          <a:prstGeom prst="roundRect">
+            <a:off x="4663440" y="3246120"/>
+            <a:ext cx="82296" cy="1234440"/>
+          </a:xfrm>
+          <a:prstGeom prst="rect">
             <a:avLst/>
           </a:prstGeom>
           <a:solidFill>
@@ -4545,8 +4448,8 @@
         </p:nvSpPr>
         <p:spPr>
           <a:xfrm>
-            <a:off x="1234440" y="3044952"/>
-            <a:ext cx="1828800" cy="457200"/>
+            <a:off x="4919472" y="3392424"/>
+            <a:ext cx="3566160" cy="1005840"/>
           </a:xfrm>
           <a:prstGeom prst="rect">
             <a:avLst/>
@@ -4560,291 +4463,24 @@
           <a:lstStyle/>
           <a:p>
             <a:r>
-              <a:rPr sz="1300" b="1">
+              <a:rPr sz="1350" b="1">
                 <a:solidFill>
                   <a:srgbClr val="2F313F"/>
                 </a:solidFill>
                 <a:latin typeface="Arial"/>
               </a:rPr>
-              <a:t>Online Ads</a:t>
-            </a:r>
-          </a:p>
-        </p:txBody>
-      </p:sp>
-      <p:sp>
-        <p:nvSpPr>
-          <p:cNvPr id="17" name="Rounded Rectangle 16"/>
-          <p:cNvSpPr/>
-          <p:nvPr/>
-        </p:nvSpPr>
-        <p:spPr>
-          <a:xfrm>
-            <a:off x="3383280" y="2880360"/>
-            <a:ext cx="2606040" cy="777240"/>
-          </a:xfrm>
-          <a:prstGeom prst="roundRect">
-            <a:avLst/>
-          </a:prstGeom>
-          <a:solidFill>
-            <a:srgbClr val="EEF6F1"/>
-          </a:solidFill>
-          <a:ln>
-            <a:noFill/>
-          </a:ln>
-          <a:effectLst/>
-        </p:spPr>
-        <p:style>
-          <a:lnRef idx="1">
-            <a:schemeClr val="accent1"/>
-          </a:lnRef>
-          <a:fillRef idx="3">
-            <a:schemeClr val="accent1"/>
-          </a:fillRef>
-          <a:effectRef idx="2">
-            <a:schemeClr val="accent1"/>
-          </a:effectRef>
-          <a:fontRef idx="minor">
-            <a:schemeClr val="lt1"/>
-          </a:fontRef>
-        </p:style>
-        <p:txBody>
-          <a:bodyPr rtlCol="0" anchor="ctr"/>
-          <a:lstStyle/>
-          <a:p>
-            <a:pPr algn="ctr"/>
-          </a:p>
-        </p:txBody>
-      </p:sp>
-      <p:sp>
-        <p:nvSpPr>
-          <p:cNvPr id="18" name="Rounded Rectangle 17"/>
-          <p:cNvSpPr/>
-          <p:nvPr/>
-        </p:nvSpPr>
-        <p:spPr>
-          <a:xfrm>
-            <a:off x="3547872" y="3081528"/>
-            <a:ext cx="365760" cy="365760"/>
-          </a:xfrm>
-          <a:prstGeom prst="roundRect">
-            <a:avLst/>
-          </a:prstGeom>
-          <a:solidFill>
-            <a:srgbClr val="34D186"/>
-          </a:solidFill>
-          <a:ln>
-            <a:noFill/>
-          </a:ln>
-          <a:effectLst/>
-        </p:spPr>
-        <p:style>
-          <a:lnRef idx="1">
-            <a:schemeClr val="accent1"/>
-          </a:lnRef>
-          <a:fillRef idx="3">
-            <a:schemeClr val="accent1"/>
-          </a:fillRef>
-          <a:effectRef idx="2">
-            <a:schemeClr val="accent1"/>
-          </a:effectRef>
-          <a:fontRef idx="minor">
-            <a:schemeClr val="lt1"/>
-          </a:fontRef>
-        </p:style>
-        <p:txBody>
-          <a:bodyPr rtlCol="0" anchor="ctr"/>
-          <a:lstStyle/>
-          <a:p>
-            <a:pPr algn="ctr"/>
-          </a:p>
-        </p:txBody>
-      </p:sp>
-      <p:sp>
-        <p:nvSpPr>
-          <p:cNvPr id="19" name="TextBox 18"/>
-          <p:cNvSpPr txBox="1"/>
-          <p:nvPr/>
-        </p:nvSpPr>
-        <p:spPr>
-          <a:xfrm>
-            <a:off x="4069080" y="3044952"/>
-            <a:ext cx="1828800" cy="457200"/>
-          </a:xfrm>
-          <a:prstGeom prst="rect">
-            <a:avLst/>
-          </a:prstGeom>
-          <a:noFill/>
-        </p:spPr>
-        <p:txBody>
-          <a:bodyPr wrap="square">
-            <a:spAutoFit/>
-          </a:bodyPr>
-          <a:lstStyle/>
-          <a:p>
-            <a:r>
-              <a:rPr sz="1300" b="1">
-                <a:solidFill>
-                  <a:srgbClr val="2F313F"/>
-                </a:solidFill>
-                <a:latin typeface="Arial"/>
-              </a:rPr>
-              <a:t>PR / Social Media</a:t>
-            </a:r>
-          </a:p>
-        </p:txBody>
-      </p:sp>
-      <p:sp>
-        <p:nvSpPr>
-          <p:cNvPr id="20" name="Rounded Rectangle 19"/>
-          <p:cNvSpPr/>
-          <p:nvPr/>
-        </p:nvSpPr>
-        <p:spPr>
-          <a:xfrm>
-            <a:off x="6217920" y="2880360"/>
-            <a:ext cx="2606040" cy="777240"/>
-          </a:xfrm>
-          <a:prstGeom prst="roundRect">
-            <a:avLst/>
-          </a:prstGeom>
-          <a:solidFill>
-            <a:srgbClr val="EEF6F1"/>
-          </a:solidFill>
-          <a:ln>
-            <a:noFill/>
-          </a:ln>
-          <a:effectLst/>
-        </p:spPr>
-        <p:style>
-          <a:lnRef idx="1">
-            <a:schemeClr val="accent1"/>
-          </a:lnRef>
-          <a:fillRef idx="3">
-            <a:schemeClr val="accent1"/>
-          </a:fillRef>
-          <a:effectRef idx="2">
-            <a:schemeClr val="accent1"/>
-          </a:effectRef>
-          <a:fontRef idx="minor">
-            <a:schemeClr val="lt1"/>
-          </a:fontRef>
-        </p:style>
-        <p:txBody>
-          <a:bodyPr rtlCol="0" anchor="ctr"/>
-          <a:lstStyle/>
-          <a:p>
-            <a:pPr algn="ctr"/>
-          </a:p>
-        </p:txBody>
-      </p:sp>
-      <p:sp>
-        <p:nvSpPr>
-          <p:cNvPr id="21" name="Rounded Rectangle 20"/>
-          <p:cNvSpPr/>
-          <p:nvPr/>
-        </p:nvSpPr>
-        <p:spPr>
-          <a:xfrm>
-            <a:off x="6382512" y="3081528"/>
-            <a:ext cx="365760" cy="365760"/>
-          </a:xfrm>
-          <a:prstGeom prst="roundRect">
-            <a:avLst/>
-          </a:prstGeom>
-          <a:solidFill>
-            <a:srgbClr val="34D186"/>
-          </a:solidFill>
-          <a:ln>
-            <a:noFill/>
-          </a:ln>
-          <a:effectLst/>
-        </p:spPr>
-        <p:style>
-          <a:lnRef idx="1">
-            <a:schemeClr val="accent1"/>
-          </a:lnRef>
-          <a:fillRef idx="3">
-            <a:schemeClr val="accent1"/>
-          </a:fillRef>
-          <a:effectRef idx="2">
-            <a:schemeClr val="accent1"/>
-          </a:effectRef>
-          <a:fontRef idx="minor">
-            <a:schemeClr val="lt1"/>
-          </a:fontRef>
-        </p:style>
-        <p:txBody>
-          <a:bodyPr rtlCol="0" anchor="ctr"/>
-          <a:lstStyle/>
-          <a:p>
-            <a:pPr algn="ctr"/>
-          </a:p>
-        </p:txBody>
-      </p:sp>
-      <p:sp>
-        <p:nvSpPr>
-          <p:cNvPr id="22" name="TextBox 21"/>
-          <p:cNvSpPr txBox="1"/>
-          <p:nvPr/>
-        </p:nvSpPr>
-        <p:spPr>
-          <a:xfrm>
-            <a:off x="6903720" y="3044952"/>
-            <a:ext cx="1828800" cy="457200"/>
-          </a:xfrm>
-          <a:prstGeom prst="rect">
-            <a:avLst/>
-          </a:prstGeom>
-          <a:noFill/>
-        </p:spPr>
-        <p:txBody>
-          <a:bodyPr wrap="square">
-            <a:spAutoFit/>
-          </a:bodyPr>
-          <a:lstStyle/>
-          <a:p>
-            <a:r>
-              <a:rPr sz="1300" b="1">
-                <a:solidFill>
-                  <a:srgbClr val="2F313F"/>
-                </a:solidFill>
-                <a:latin typeface="Arial"/>
-              </a:rPr>
-              <a:t>Email + Push</a:t>
-            </a:r>
-          </a:p>
-        </p:txBody>
-      </p:sp>
-      <p:sp>
-        <p:nvSpPr>
-          <p:cNvPr id="23" name="TextBox 22"/>
-          <p:cNvSpPr txBox="1"/>
-          <p:nvPr/>
-        </p:nvSpPr>
-        <p:spPr>
-          <a:xfrm>
-            <a:off x="548640" y="3931920"/>
-            <a:ext cx="8046720" cy="548640"/>
-          </a:xfrm>
-          <a:prstGeom prst="rect">
-            <a:avLst/>
-          </a:prstGeom>
-          <a:noFill/>
-        </p:spPr>
-        <p:txBody>
-          <a:bodyPr wrap="square">
-            <a:spAutoFit/>
-          </a:bodyPr>
-          <a:lstStyle/>
-          <a:p>
-            <a:r>
-              <a:rPr sz="1300" b="0">
+              <a:t>Bolt Plus для утримання</a:t>
+            </a:r>
+          </a:p>
+          <a:p>
+            <a:r>
+              <a:rPr sz="1050" b="0">
                 <a:solidFill>
                   <a:srgbClr val="6B7080"/>
                 </a:solidFill>
                 <a:latin typeface="Arial"/>
               </a:rPr>
-              <a:t>Комбінація каналів Bolt Food + Bolt Rides дає охоплення, недоступне поодинці.</a:t>
+              <a:t>Переваги підписки підвищують частоту та повернення клієнтів.</a:t>
             </a:r>
           </a:p>
         </p:txBody>
@@ -4972,7 +4608,7 @@
                 </a:solidFill>
                 <a:latin typeface="Arial"/>
               </a:rPr>
-              <a:t>КАМПАНІЇ</a:t>
+              <a:t>МАРКЕТИНГОВА ПІДТРИМКА</a:t>
             </a:r>
           </a:p>
           <a:p>
@@ -4983,7 +4619,7 @@
                 </a:solidFill>
                 <a:latin typeface="Arial"/>
               </a:rPr>
-              <a:t>Маркетингові кампанії: до 10× охоплення</a:t>
+              <a:t>Маркетинг і реклама, що ростять продажі магазину</a:t>
             </a:r>
           </a:p>
         </p:txBody>
@@ -4996,8 +4632,8 @@
         </p:nvSpPr>
         <p:spPr>
           <a:xfrm>
-            <a:off x="548640" y="1874519"/>
-            <a:ext cx="2606040" cy="2194560"/>
+            <a:off x="548640" y="1920240"/>
+            <a:ext cx="2606040" cy="777240"/>
           </a:xfrm>
           <a:prstGeom prst="roundRect">
             <a:avLst/>
@@ -5034,14 +4670,58 @@
       </p:sp>
       <p:sp>
         <p:nvSpPr>
-          <p:cNvPr id="6" name="TextBox 5"/>
+          <p:cNvPr id="6" name="Rounded Rectangle 5"/>
+          <p:cNvSpPr/>
+          <p:nvPr/>
+        </p:nvSpPr>
+        <p:spPr>
+          <a:xfrm>
+            <a:off x="713232" y="2121408"/>
+            <a:ext cx="365760" cy="365760"/>
+          </a:xfrm>
+          <a:prstGeom prst="roundRect">
+            <a:avLst/>
+          </a:prstGeom>
+          <a:solidFill>
+            <a:srgbClr val="34D186"/>
+          </a:solidFill>
+          <a:ln>
+            <a:noFill/>
+          </a:ln>
+          <a:effectLst/>
+        </p:spPr>
+        <p:style>
+          <a:lnRef idx="1">
+            <a:schemeClr val="accent1"/>
+          </a:lnRef>
+          <a:fillRef idx="3">
+            <a:schemeClr val="accent1"/>
+          </a:fillRef>
+          <a:effectRef idx="2">
+            <a:schemeClr val="accent1"/>
+          </a:effectRef>
+          <a:fontRef idx="minor">
+            <a:schemeClr val="lt1"/>
+          </a:fontRef>
+        </p:style>
+        <p:txBody>
+          <a:bodyPr rtlCol="0" anchor="ctr"/>
+          <a:lstStyle/>
+          <a:p>
+            <a:pPr algn="ctr"/>
+          </a:p>
+        </p:txBody>
+      </p:sp>
+      <p:sp>
+        <p:nvSpPr>
+          <p:cNvPr id="7" name="TextBox 6"/>
           <p:cNvSpPr txBox="1"/>
           <p:nvPr/>
         </p:nvSpPr>
         <p:spPr>
           <a:xfrm>
-            <a:off x="731520" y="2103120"/>
-            <a:ext cx="2240280" cy="1828800"/>
+            <a:off x="1234440" y="2084832"/>
+            <a:ext cx="1828800" cy="457200"/>
           </a:xfrm>
           <a:prstGeom prst="rect">
             <a:avLst/>
@@ -5054,53 +4734,28 @@
           </a:bodyPr>
           <a:lstStyle/>
           <a:p>
-            <a:pPr algn="ctr"/>
-            <a:r>
-              <a:rPr sz="1500" b="1">
+            <a:r>
+              <a:rPr sz="1300" b="1">
                 <a:solidFill>
                   <a:srgbClr val="2F313F"/>
                 </a:solidFill>
                 <a:latin typeface="Arial"/>
               </a:rPr>
-              <a:t>Standard</a:t>
-            </a:r>
-          </a:p>
-          <a:p>
-            <a:pPr algn="ctr"/>
-            <a:r>
-              <a:rPr sz="2400" b="1">
-                <a:solidFill>
-                  <a:srgbClr val="34D186"/>
-                </a:solidFill>
-                <a:latin typeface="Arial"/>
-              </a:rPr>
-              <a:t>1× охоплення</a:t>
-            </a:r>
-          </a:p>
-          <a:p>
-            <a:pPr algn="ctr"/>
-            <a:r>
-              <a:rPr sz="1050" b="0">
-                <a:solidFill>
-                  <a:srgbClr val="6B7080"/>
-                </a:solidFill>
-                <a:latin typeface="Arial"/>
-              </a:rPr>
-              <a:t>Email + push Bolt Food</a:t>
-            </a:r>
-          </a:p>
-        </p:txBody>
-      </p:sp>
-      <p:sp>
-        <p:nvSpPr>
-          <p:cNvPr id="7" name="Rounded Rectangle 6"/>
+              <a:t>Bolt Plus</a:t>
+            </a:r>
+          </a:p>
+        </p:txBody>
+      </p:sp>
+      <p:sp>
+        <p:nvSpPr>
+          <p:cNvPr id="8" name="Rounded Rectangle 7"/>
           <p:cNvSpPr/>
           <p:nvPr/>
         </p:nvSpPr>
         <p:spPr>
           <a:xfrm>
-            <a:off x="3383280" y="1874519"/>
-            <a:ext cx="2606040" cy="2194560"/>
+            <a:off x="3383280" y="1920240"/>
+            <a:ext cx="2606040" cy="777240"/>
           </a:xfrm>
           <a:prstGeom prst="roundRect">
             <a:avLst/>
@@ -5137,73 +4792,14 @@
       </p:sp>
       <p:sp>
         <p:nvSpPr>
-          <p:cNvPr id="8" name="TextBox 7"/>
-          <p:cNvSpPr txBox="1"/>
-          <p:nvPr/>
-        </p:nvSpPr>
-        <p:spPr>
-          <a:xfrm>
-            <a:off x="3566160" y="2103120"/>
-            <a:ext cx="2240280" cy="1828800"/>
-          </a:xfrm>
-          <a:prstGeom prst="rect">
-            <a:avLst/>
-          </a:prstGeom>
-          <a:noFill/>
-        </p:spPr>
-        <p:txBody>
-          <a:bodyPr wrap="square">
-            <a:spAutoFit/>
-          </a:bodyPr>
-          <a:lstStyle/>
-          <a:p>
-            <a:pPr algn="ctr"/>
-            <a:r>
-              <a:rPr sz="1500" b="1">
-                <a:solidFill>
-                  <a:srgbClr val="2F313F"/>
-                </a:solidFill>
-                <a:latin typeface="Arial"/>
-              </a:rPr>
-              <a:t>Small</a:t>
-            </a:r>
-          </a:p>
-          <a:p>
-            <a:pPr algn="ctr"/>
-            <a:r>
-              <a:rPr sz="2400" b="1">
-                <a:solidFill>
-                  <a:srgbClr val="34D186"/>
-                </a:solidFill>
-                <a:latin typeface="Arial"/>
-              </a:rPr>
-              <a:t>2× охоплення</a:t>
-            </a:r>
-          </a:p>
-          <a:p>
-            <a:pPr algn="ctr"/>
-            <a:r>
-              <a:rPr sz="1050" b="0">
-                <a:solidFill>
-                  <a:srgbClr val="6B7080"/>
-                </a:solidFill>
-                <a:latin typeface="Arial"/>
-              </a:rPr>
-              <a:t>+ In-app банер, email/push Food &amp; Rides</a:t>
-            </a:r>
-          </a:p>
-        </p:txBody>
-      </p:sp>
-      <p:sp>
-        <p:nvSpPr>
           <p:cNvPr id="9" name="Rounded Rectangle 8"/>
           <p:cNvSpPr/>
           <p:nvPr/>
         </p:nvSpPr>
         <p:spPr>
           <a:xfrm>
-            <a:off x="6217920" y="1874519"/>
-            <a:ext cx="2606040" cy="2194560"/>
+            <a:off x="3547872" y="2121408"/>
+            <a:ext cx="365760" cy="365760"/>
           </a:xfrm>
           <a:prstGeom prst="roundRect">
             <a:avLst/>
@@ -5246,8 +4842,8 @@
         </p:nvSpPr>
         <p:spPr>
           <a:xfrm>
-            <a:off x="6400800" y="2103120"/>
-            <a:ext cx="2240280" cy="1828800"/>
+            <a:off x="4069080" y="2084832"/>
+            <a:ext cx="1828800" cy="457200"/>
           </a:xfrm>
           <a:prstGeom prst="rect">
             <a:avLst/>
@@ -5260,39 +4856,536 @@
           </a:bodyPr>
           <a:lstStyle/>
           <a:p>
-            <a:pPr algn="ctr"/>
-            <a:r>
-              <a:rPr sz="1500" b="1">
-                <a:solidFill>
-                  <a:srgbClr val="FFFFFF"/>
-                </a:solidFill>
-                <a:latin typeface="Arial"/>
-              </a:rPr>
-              <a:t>Big</a:t>
-            </a:r>
-          </a:p>
-          <a:p>
-            <a:pPr algn="ctr"/>
-            <a:r>
-              <a:rPr sz="2400" b="1">
-                <a:solidFill>
-                  <a:srgbClr val="FFFFFF"/>
-                </a:solidFill>
-                <a:latin typeface="Arial"/>
-              </a:rPr>
-              <a:t>10× охоплення</a:t>
-            </a:r>
-          </a:p>
-          <a:p>
-            <a:pPr algn="ctr"/>
-            <a:r>
-              <a:rPr sz="1050" b="0">
-                <a:solidFill>
-                  <a:srgbClr val="FFFFFF"/>
-                </a:solidFill>
-                <a:latin typeface="Arial"/>
-              </a:rPr>
-              <a:t>+ Спец-категорія, pop-up, соцмережі, paid ads, інфлюенсери</a:t>
+            <a:r>
+              <a:rPr sz="1300" b="1">
+                <a:solidFill>
+                  <a:srgbClr val="2F313F"/>
+                </a:solidFill>
+                <a:latin typeface="Arial"/>
+              </a:rPr>
+              <a:t>In-app engagement</a:t>
+            </a:r>
+          </a:p>
+        </p:txBody>
+      </p:sp>
+      <p:sp>
+        <p:nvSpPr>
+          <p:cNvPr id="11" name="Rounded Rectangle 10"/>
+          <p:cNvSpPr/>
+          <p:nvPr/>
+        </p:nvSpPr>
+        <p:spPr>
+          <a:xfrm>
+            <a:off x="6217920" y="1920240"/>
+            <a:ext cx="2606040" cy="777240"/>
+          </a:xfrm>
+          <a:prstGeom prst="roundRect">
+            <a:avLst/>
+          </a:prstGeom>
+          <a:solidFill>
+            <a:srgbClr val="EEF6F1"/>
+          </a:solidFill>
+          <a:ln>
+            <a:noFill/>
+          </a:ln>
+          <a:effectLst/>
+        </p:spPr>
+        <p:style>
+          <a:lnRef idx="1">
+            <a:schemeClr val="accent1"/>
+          </a:lnRef>
+          <a:fillRef idx="3">
+            <a:schemeClr val="accent1"/>
+          </a:fillRef>
+          <a:effectRef idx="2">
+            <a:schemeClr val="accent1"/>
+          </a:effectRef>
+          <a:fontRef idx="minor">
+            <a:schemeClr val="lt1"/>
+          </a:fontRef>
+        </p:style>
+        <p:txBody>
+          <a:bodyPr rtlCol="0" anchor="ctr"/>
+          <a:lstStyle/>
+          <a:p>
+            <a:pPr algn="ctr"/>
+          </a:p>
+        </p:txBody>
+      </p:sp>
+      <p:sp>
+        <p:nvSpPr>
+          <p:cNvPr id="12" name="Rounded Rectangle 11"/>
+          <p:cNvSpPr/>
+          <p:nvPr/>
+        </p:nvSpPr>
+        <p:spPr>
+          <a:xfrm>
+            <a:off x="6382512" y="2121408"/>
+            <a:ext cx="365760" cy="365760"/>
+          </a:xfrm>
+          <a:prstGeom prst="roundRect">
+            <a:avLst/>
+          </a:prstGeom>
+          <a:solidFill>
+            <a:srgbClr val="34D186"/>
+          </a:solidFill>
+          <a:ln>
+            <a:noFill/>
+          </a:ln>
+          <a:effectLst/>
+        </p:spPr>
+        <p:style>
+          <a:lnRef idx="1">
+            <a:schemeClr val="accent1"/>
+          </a:lnRef>
+          <a:fillRef idx="3">
+            <a:schemeClr val="accent1"/>
+          </a:fillRef>
+          <a:effectRef idx="2">
+            <a:schemeClr val="accent1"/>
+          </a:effectRef>
+          <a:fontRef idx="minor">
+            <a:schemeClr val="lt1"/>
+          </a:fontRef>
+        </p:style>
+        <p:txBody>
+          <a:bodyPr rtlCol="0" anchor="ctr"/>
+          <a:lstStyle/>
+          <a:p>
+            <a:pPr algn="ctr"/>
+          </a:p>
+        </p:txBody>
+      </p:sp>
+      <p:sp>
+        <p:nvSpPr>
+          <p:cNvPr id="13" name="TextBox 12"/>
+          <p:cNvSpPr txBox="1"/>
+          <p:nvPr/>
+        </p:nvSpPr>
+        <p:spPr>
+          <a:xfrm>
+            <a:off x="6903720" y="2084832"/>
+            <a:ext cx="1828800" cy="457200"/>
+          </a:xfrm>
+          <a:prstGeom prst="rect">
+            <a:avLst/>
+          </a:prstGeom>
+          <a:noFill/>
+        </p:spPr>
+        <p:txBody>
+          <a:bodyPr wrap="square">
+            <a:spAutoFit/>
+          </a:bodyPr>
+          <a:lstStyle/>
+          <a:p>
+            <a:r>
+              <a:rPr sz="1300" b="1">
+                <a:solidFill>
+                  <a:srgbClr val="2F313F"/>
+                </a:solidFill>
+                <a:latin typeface="Arial"/>
+              </a:rPr>
+              <a:t>Merchant Offers</a:t>
+            </a:r>
+          </a:p>
+        </p:txBody>
+      </p:sp>
+      <p:sp>
+        <p:nvSpPr>
+          <p:cNvPr id="14" name="Rounded Rectangle 13"/>
+          <p:cNvSpPr/>
+          <p:nvPr/>
+        </p:nvSpPr>
+        <p:spPr>
+          <a:xfrm>
+            <a:off x="548640" y="2880360"/>
+            <a:ext cx="2606040" cy="777240"/>
+          </a:xfrm>
+          <a:prstGeom prst="roundRect">
+            <a:avLst/>
+          </a:prstGeom>
+          <a:solidFill>
+            <a:srgbClr val="EEF6F1"/>
+          </a:solidFill>
+          <a:ln>
+            <a:noFill/>
+          </a:ln>
+          <a:effectLst/>
+        </p:spPr>
+        <p:style>
+          <a:lnRef idx="1">
+            <a:schemeClr val="accent1"/>
+          </a:lnRef>
+          <a:fillRef idx="3">
+            <a:schemeClr val="accent1"/>
+          </a:fillRef>
+          <a:effectRef idx="2">
+            <a:schemeClr val="accent1"/>
+          </a:effectRef>
+          <a:fontRef idx="minor">
+            <a:schemeClr val="lt1"/>
+          </a:fontRef>
+        </p:style>
+        <p:txBody>
+          <a:bodyPr rtlCol="0" anchor="ctr"/>
+          <a:lstStyle/>
+          <a:p>
+            <a:pPr algn="ctr"/>
+          </a:p>
+        </p:txBody>
+      </p:sp>
+      <p:sp>
+        <p:nvSpPr>
+          <p:cNvPr id="15" name="Rounded Rectangle 14"/>
+          <p:cNvSpPr/>
+          <p:nvPr/>
+        </p:nvSpPr>
+        <p:spPr>
+          <a:xfrm>
+            <a:off x="713232" y="3081528"/>
+            <a:ext cx="365760" cy="365760"/>
+          </a:xfrm>
+          <a:prstGeom prst="roundRect">
+            <a:avLst/>
+          </a:prstGeom>
+          <a:solidFill>
+            <a:srgbClr val="34D186"/>
+          </a:solidFill>
+          <a:ln>
+            <a:noFill/>
+          </a:ln>
+          <a:effectLst/>
+        </p:spPr>
+        <p:style>
+          <a:lnRef idx="1">
+            <a:schemeClr val="accent1"/>
+          </a:lnRef>
+          <a:fillRef idx="3">
+            <a:schemeClr val="accent1"/>
+          </a:fillRef>
+          <a:effectRef idx="2">
+            <a:schemeClr val="accent1"/>
+          </a:effectRef>
+          <a:fontRef idx="minor">
+            <a:schemeClr val="lt1"/>
+          </a:fontRef>
+        </p:style>
+        <p:txBody>
+          <a:bodyPr rtlCol="0" anchor="ctr"/>
+          <a:lstStyle/>
+          <a:p>
+            <a:pPr algn="ctr"/>
+          </a:p>
+        </p:txBody>
+      </p:sp>
+      <p:sp>
+        <p:nvSpPr>
+          <p:cNvPr id="16" name="TextBox 15"/>
+          <p:cNvSpPr txBox="1"/>
+          <p:nvPr/>
+        </p:nvSpPr>
+        <p:spPr>
+          <a:xfrm>
+            <a:off x="1234440" y="3044952"/>
+            <a:ext cx="1828800" cy="457200"/>
+          </a:xfrm>
+          <a:prstGeom prst="rect">
+            <a:avLst/>
+          </a:prstGeom>
+          <a:noFill/>
+        </p:spPr>
+        <p:txBody>
+          <a:bodyPr wrap="square">
+            <a:spAutoFit/>
+          </a:bodyPr>
+          <a:lstStyle/>
+          <a:p>
+            <a:r>
+              <a:rPr sz="1300" b="1">
+                <a:solidFill>
+                  <a:srgbClr val="2F313F"/>
+                </a:solidFill>
+                <a:latin typeface="Arial"/>
+              </a:rPr>
+              <a:t>Online Ads</a:t>
+            </a:r>
+          </a:p>
+        </p:txBody>
+      </p:sp>
+      <p:sp>
+        <p:nvSpPr>
+          <p:cNvPr id="17" name="Rounded Rectangle 16"/>
+          <p:cNvSpPr/>
+          <p:nvPr/>
+        </p:nvSpPr>
+        <p:spPr>
+          <a:xfrm>
+            <a:off x="3383280" y="2880360"/>
+            <a:ext cx="2606040" cy="777240"/>
+          </a:xfrm>
+          <a:prstGeom prst="roundRect">
+            <a:avLst/>
+          </a:prstGeom>
+          <a:solidFill>
+            <a:srgbClr val="EEF6F1"/>
+          </a:solidFill>
+          <a:ln>
+            <a:noFill/>
+          </a:ln>
+          <a:effectLst/>
+        </p:spPr>
+        <p:style>
+          <a:lnRef idx="1">
+            <a:schemeClr val="accent1"/>
+          </a:lnRef>
+          <a:fillRef idx="3">
+            <a:schemeClr val="accent1"/>
+          </a:fillRef>
+          <a:effectRef idx="2">
+            <a:schemeClr val="accent1"/>
+          </a:effectRef>
+          <a:fontRef idx="minor">
+            <a:schemeClr val="lt1"/>
+          </a:fontRef>
+        </p:style>
+        <p:txBody>
+          <a:bodyPr rtlCol="0" anchor="ctr"/>
+          <a:lstStyle/>
+          <a:p>
+            <a:pPr algn="ctr"/>
+          </a:p>
+        </p:txBody>
+      </p:sp>
+      <p:sp>
+        <p:nvSpPr>
+          <p:cNvPr id="18" name="Rounded Rectangle 17"/>
+          <p:cNvSpPr/>
+          <p:nvPr/>
+        </p:nvSpPr>
+        <p:spPr>
+          <a:xfrm>
+            <a:off x="3547872" y="3081528"/>
+            <a:ext cx="365760" cy="365760"/>
+          </a:xfrm>
+          <a:prstGeom prst="roundRect">
+            <a:avLst/>
+          </a:prstGeom>
+          <a:solidFill>
+            <a:srgbClr val="34D186"/>
+          </a:solidFill>
+          <a:ln>
+            <a:noFill/>
+          </a:ln>
+          <a:effectLst/>
+        </p:spPr>
+        <p:style>
+          <a:lnRef idx="1">
+            <a:schemeClr val="accent1"/>
+          </a:lnRef>
+          <a:fillRef idx="3">
+            <a:schemeClr val="accent1"/>
+          </a:fillRef>
+          <a:effectRef idx="2">
+            <a:schemeClr val="accent1"/>
+          </a:effectRef>
+          <a:fontRef idx="minor">
+            <a:schemeClr val="lt1"/>
+          </a:fontRef>
+        </p:style>
+        <p:txBody>
+          <a:bodyPr rtlCol="0" anchor="ctr"/>
+          <a:lstStyle/>
+          <a:p>
+            <a:pPr algn="ctr"/>
+          </a:p>
+        </p:txBody>
+      </p:sp>
+      <p:sp>
+        <p:nvSpPr>
+          <p:cNvPr id="19" name="TextBox 18"/>
+          <p:cNvSpPr txBox="1"/>
+          <p:nvPr/>
+        </p:nvSpPr>
+        <p:spPr>
+          <a:xfrm>
+            <a:off x="4069080" y="3044952"/>
+            <a:ext cx="1828800" cy="457200"/>
+          </a:xfrm>
+          <a:prstGeom prst="rect">
+            <a:avLst/>
+          </a:prstGeom>
+          <a:noFill/>
+        </p:spPr>
+        <p:txBody>
+          <a:bodyPr wrap="square">
+            <a:spAutoFit/>
+          </a:bodyPr>
+          <a:lstStyle/>
+          <a:p>
+            <a:r>
+              <a:rPr sz="1300" b="1">
+                <a:solidFill>
+                  <a:srgbClr val="2F313F"/>
+                </a:solidFill>
+                <a:latin typeface="Arial"/>
+              </a:rPr>
+              <a:t>PR / Social Media</a:t>
+            </a:r>
+          </a:p>
+        </p:txBody>
+      </p:sp>
+      <p:sp>
+        <p:nvSpPr>
+          <p:cNvPr id="20" name="Rounded Rectangle 19"/>
+          <p:cNvSpPr/>
+          <p:nvPr/>
+        </p:nvSpPr>
+        <p:spPr>
+          <a:xfrm>
+            <a:off x="6217920" y="2880360"/>
+            <a:ext cx="2606040" cy="777240"/>
+          </a:xfrm>
+          <a:prstGeom prst="roundRect">
+            <a:avLst/>
+          </a:prstGeom>
+          <a:solidFill>
+            <a:srgbClr val="EEF6F1"/>
+          </a:solidFill>
+          <a:ln>
+            <a:noFill/>
+          </a:ln>
+          <a:effectLst/>
+        </p:spPr>
+        <p:style>
+          <a:lnRef idx="1">
+            <a:schemeClr val="accent1"/>
+          </a:lnRef>
+          <a:fillRef idx="3">
+            <a:schemeClr val="accent1"/>
+          </a:fillRef>
+          <a:effectRef idx="2">
+            <a:schemeClr val="accent1"/>
+          </a:effectRef>
+          <a:fontRef idx="minor">
+            <a:schemeClr val="lt1"/>
+          </a:fontRef>
+        </p:style>
+        <p:txBody>
+          <a:bodyPr rtlCol="0" anchor="ctr"/>
+          <a:lstStyle/>
+          <a:p>
+            <a:pPr algn="ctr"/>
+          </a:p>
+        </p:txBody>
+      </p:sp>
+      <p:sp>
+        <p:nvSpPr>
+          <p:cNvPr id="21" name="Rounded Rectangle 20"/>
+          <p:cNvSpPr/>
+          <p:nvPr/>
+        </p:nvSpPr>
+        <p:spPr>
+          <a:xfrm>
+            <a:off x="6382512" y="3081528"/>
+            <a:ext cx="365760" cy="365760"/>
+          </a:xfrm>
+          <a:prstGeom prst="roundRect">
+            <a:avLst/>
+          </a:prstGeom>
+          <a:solidFill>
+            <a:srgbClr val="34D186"/>
+          </a:solidFill>
+          <a:ln>
+            <a:noFill/>
+          </a:ln>
+          <a:effectLst/>
+        </p:spPr>
+        <p:style>
+          <a:lnRef idx="1">
+            <a:schemeClr val="accent1"/>
+          </a:lnRef>
+          <a:fillRef idx="3">
+            <a:schemeClr val="accent1"/>
+          </a:fillRef>
+          <a:effectRef idx="2">
+            <a:schemeClr val="accent1"/>
+          </a:effectRef>
+          <a:fontRef idx="minor">
+            <a:schemeClr val="lt1"/>
+          </a:fontRef>
+        </p:style>
+        <p:txBody>
+          <a:bodyPr rtlCol="0" anchor="ctr"/>
+          <a:lstStyle/>
+          <a:p>
+            <a:pPr algn="ctr"/>
+          </a:p>
+        </p:txBody>
+      </p:sp>
+      <p:sp>
+        <p:nvSpPr>
+          <p:cNvPr id="22" name="TextBox 21"/>
+          <p:cNvSpPr txBox="1"/>
+          <p:nvPr/>
+        </p:nvSpPr>
+        <p:spPr>
+          <a:xfrm>
+            <a:off x="6903720" y="3044952"/>
+            <a:ext cx="1828800" cy="457200"/>
+          </a:xfrm>
+          <a:prstGeom prst="rect">
+            <a:avLst/>
+          </a:prstGeom>
+          <a:noFill/>
+        </p:spPr>
+        <p:txBody>
+          <a:bodyPr wrap="square">
+            <a:spAutoFit/>
+          </a:bodyPr>
+          <a:lstStyle/>
+          <a:p>
+            <a:r>
+              <a:rPr sz="1300" b="1">
+                <a:solidFill>
+                  <a:srgbClr val="2F313F"/>
+                </a:solidFill>
+                <a:latin typeface="Arial"/>
+              </a:rPr>
+              <a:t>Email + Push</a:t>
+            </a:r>
+          </a:p>
+        </p:txBody>
+      </p:sp>
+      <p:sp>
+        <p:nvSpPr>
+          <p:cNvPr id="23" name="TextBox 22"/>
+          <p:cNvSpPr txBox="1"/>
+          <p:nvPr/>
+        </p:nvSpPr>
+        <p:spPr>
+          <a:xfrm>
+            <a:off x="548640" y="3931920"/>
+            <a:ext cx="8046720" cy="548640"/>
+          </a:xfrm>
+          <a:prstGeom prst="rect">
+            <a:avLst/>
+          </a:prstGeom>
+          <a:noFill/>
+        </p:spPr>
+        <p:txBody>
+          <a:bodyPr wrap="square">
+            <a:spAutoFit/>
+          </a:bodyPr>
+          <a:lstStyle/>
+          <a:p>
+            <a:r>
+              <a:rPr sz="1300" b="0">
+                <a:solidFill>
+                  <a:srgbClr val="6B7080"/>
+                </a:solidFill>
+                <a:latin typeface="Arial"/>
+              </a:rPr>
+              <a:t>Комбінація каналів Bolt Food + Bolt Rides дає охоплення, недоступне поодинці.</a:t>
             </a:r>
           </a:p>
         </p:txBody>
@@ -5420,7 +5513,7 @@
                 </a:solidFill>
                 <a:latin typeface="Arial"/>
               </a:rPr>
-              <a:t>IN-STORE BRANDING</a:t>
+              <a:t>КАМПАНІЇ</a:t>
             </a:r>
           </a:p>
           <a:p>
@@ -5431,21 +5524,65 @@
                 </a:solidFill>
                 <a:latin typeface="Arial"/>
               </a:rPr>
-              <a:t>Підтримка офлайн-брендингу</a:t>
-            </a:r>
-          </a:p>
-        </p:txBody>
-      </p:sp>
-      <p:sp>
-        <p:nvSpPr>
-          <p:cNvPr id="5" name="TextBox 4"/>
+              <a:t>Маркетингові кампанії: до 10× охоплення</a:t>
+            </a:r>
+          </a:p>
+        </p:txBody>
+      </p:sp>
+      <p:sp>
+        <p:nvSpPr>
+          <p:cNvPr id="5" name="Rounded Rectangle 4"/>
+          <p:cNvSpPr/>
+          <p:nvPr/>
+        </p:nvSpPr>
+        <p:spPr>
+          <a:xfrm>
+            <a:off x="548640" y="1874519"/>
+            <a:ext cx="2606040" cy="2194560"/>
+          </a:xfrm>
+          <a:prstGeom prst="roundRect">
+            <a:avLst/>
+          </a:prstGeom>
+          <a:solidFill>
+            <a:srgbClr val="EEF6F1"/>
+          </a:solidFill>
+          <a:ln>
+            <a:noFill/>
+          </a:ln>
+          <a:effectLst/>
+        </p:spPr>
+        <p:style>
+          <a:lnRef idx="1">
+            <a:schemeClr val="accent1"/>
+          </a:lnRef>
+          <a:fillRef idx="3">
+            <a:schemeClr val="accent1"/>
+          </a:fillRef>
+          <a:effectRef idx="2">
+            <a:schemeClr val="accent1"/>
+          </a:effectRef>
+          <a:fontRef idx="minor">
+            <a:schemeClr val="lt1"/>
+          </a:fontRef>
+        </p:style>
+        <p:txBody>
+          <a:bodyPr rtlCol="0" anchor="ctr"/>
+          <a:lstStyle/>
+          <a:p>
+            <a:pPr algn="ctr"/>
+          </a:p>
+        </p:txBody>
+      </p:sp>
+      <p:sp>
+        <p:nvSpPr>
+          <p:cNvPr id="6" name="TextBox 5"/>
           <p:cNvSpPr txBox="1"/>
           <p:nvPr/>
         </p:nvSpPr>
         <p:spPr>
           <a:xfrm>
-            <a:off x="685800" y="2011680"/>
-            <a:ext cx="7863840" cy="2743200"/>
+            <a:off x="731520" y="2103120"/>
+            <a:ext cx="2240280" cy="1828800"/>
           </a:xfrm>
           <a:prstGeom prst="rect">
             <a:avLst/>
@@ -5458,105 +5595,245 @@
           </a:bodyPr>
           <a:lstStyle/>
           <a:p>
-            <a:pPr>
-              <a:spcAft>
-                <a:spcPts val="504"/>
-              </a:spcAft>
-            </a:pPr>
-            <a:r>
-              <a:rPr sz="1300" b="1">
+            <a:pPr algn="ctr"/>
+            <a:r>
+              <a:rPr sz="1500" b="1">
+                <a:solidFill>
+                  <a:srgbClr val="2F313F"/>
+                </a:solidFill>
+                <a:latin typeface="Arial"/>
+              </a:rPr>
+              <a:t>Standard</a:t>
+            </a:r>
+          </a:p>
+          <a:p>
+            <a:pPr algn="ctr"/>
+            <a:r>
+              <a:rPr sz="2400" b="1">
                 <a:solidFill>
                   <a:srgbClr val="34D186"/>
                 </a:solidFill>
                 <a:latin typeface="Arial"/>
               </a:rPr>
-              <a:t>•  </a:t>
-            </a:r>
-            <a:r>
-              <a:rPr sz="1300" b="1">
+              <a:t>1× охоплення</a:t>
+            </a:r>
+          </a:p>
+          <a:p>
+            <a:pPr algn="ctr"/>
+            <a:r>
+              <a:rPr sz="1050" b="0">
+                <a:solidFill>
+                  <a:srgbClr val="6B7080"/>
+                </a:solidFill>
+                <a:latin typeface="Arial"/>
+              </a:rPr>
+              <a:t>Email + push Bolt Food</a:t>
+            </a:r>
+          </a:p>
+        </p:txBody>
+      </p:sp>
+      <p:sp>
+        <p:nvSpPr>
+          <p:cNvPr id="7" name="Rounded Rectangle 6"/>
+          <p:cNvSpPr/>
+          <p:nvPr/>
+        </p:nvSpPr>
+        <p:spPr>
+          <a:xfrm>
+            <a:off x="3383280" y="1874519"/>
+            <a:ext cx="2606040" cy="2194560"/>
+          </a:xfrm>
+          <a:prstGeom prst="roundRect">
+            <a:avLst/>
+          </a:prstGeom>
+          <a:solidFill>
+            <a:srgbClr val="EEF6F1"/>
+          </a:solidFill>
+          <a:ln>
+            <a:noFill/>
+          </a:ln>
+          <a:effectLst/>
+        </p:spPr>
+        <p:style>
+          <a:lnRef idx="1">
+            <a:schemeClr val="accent1"/>
+          </a:lnRef>
+          <a:fillRef idx="3">
+            <a:schemeClr val="accent1"/>
+          </a:fillRef>
+          <a:effectRef idx="2">
+            <a:schemeClr val="accent1"/>
+          </a:effectRef>
+          <a:fontRef idx="minor">
+            <a:schemeClr val="lt1"/>
+          </a:fontRef>
+        </p:style>
+        <p:txBody>
+          <a:bodyPr rtlCol="0" anchor="ctr"/>
+          <a:lstStyle/>
+          <a:p>
+            <a:pPr algn="ctr"/>
+          </a:p>
+        </p:txBody>
+      </p:sp>
+      <p:sp>
+        <p:nvSpPr>
+          <p:cNvPr id="8" name="TextBox 7"/>
+          <p:cNvSpPr txBox="1"/>
+          <p:nvPr/>
+        </p:nvSpPr>
+        <p:spPr>
+          <a:xfrm>
+            <a:off x="3566160" y="2103120"/>
+            <a:ext cx="2240280" cy="1828800"/>
+          </a:xfrm>
+          <a:prstGeom prst="rect">
+            <a:avLst/>
+          </a:prstGeom>
+          <a:noFill/>
+        </p:spPr>
+        <p:txBody>
+          <a:bodyPr wrap="square">
+            <a:spAutoFit/>
+          </a:bodyPr>
+          <a:lstStyle/>
+          <a:p>
+            <a:pPr algn="ctr"/>
+            <a:r>
+              <a:rPr sz="1500" b="1">
                 <a:solidFill>
                   <a:srgbClr val="2F313F"/>
                 </a:solidFill>
                 <a:latin typeface="Arial"/>
               </a:rPr>
-              <a:t>Брендинг у точках —</a:t>
-            </a:r>
-            <a:r>
-              <a:rPr sz="1300" b="0">
+              <a:t>Small</a:t>
+            </a:r>
+          </a:p>
+          <a:p>
+            <a:pPr algn="ctr"/>
+            <a:r>
+              <a:rPr sz="2400" b="1">
+                <a:solidFill>
+                  <a:srgbClr val="34D186"/>
+                </a:solidFill>
+                <a:latin typeface="Arial"/>
+              </a:rPr>
+              <a:t>2× охоплення</a:t>
+            </a:r>
+          </a:p>
+          <a:p>
+            <a:pPr algn="ctr"/>
+            <a:r>
+              <a:rPr sz="1050" b="0">
                 <a:solidFill>
                   <a:srgbClr val="6B7080"/>
                 </a:solidFill>
                 <a:latin typeface="Arial"/>
               </a:rPr>
-              <a:t> Bolt підтримує оформлення та видимість бренду на місцях продажу.</a:t>
-            </a:r>
-          </a:p>
-          <a:p>
-            <a:pPr>
-              <a:spcAft>
-                <a:spcPts val="504"/>
-              </a:spcAft>
-            </a:pPr>
-            <a:r>
-              <a:rPr sz="1300" b="1">
-                <a:solidFill>
-                  <a:srgbClr val="34D186"/>
-                </a:solidFill>
-                <a:latin typeface="Arial"/>
-              </a:rPr>
-              <a:t>•  </a:t>
-            </a:r>
-            <a:r>
-              <a:rPr sz="1300" b="1">
-                <a:solidFill>
-                  <a:srgbClr val="2F313F"/>
-                </a:solidFill>
-                <a:latin typeface="Arial"/>
-              </a:rPr>
-              <a:t>Зв'язок онлайн ↔ офлайн —</a:t>
-            </a:r>
-            <a:r>
-              <a:rPr sz="1300" b="0">
-                <a:solidFill>
-                  <a:srgbClr val="6B7080"/>
-                </a:solidFill>
-                <a:latin typeface="Arial"/>
-              </a:rPr>
-              <a:t> офлайн-аудиторія дізнається про вашу присутність на Bolt Food.</a:t>
-            </a:r>
-          </a:p>
-          <a:p>
-            <a:pPr>
-              <a:spcAft>
-                <a:spcPts val="504"/>
-              </a:spcAft>
-            </a:pPr>
-            <a:r>
-              <a:rPr sz="1300" b="1">
-                <a:solidFill>
-                  <a:srgbClr val="34D186"/>
-                </a:solidFill>
-                <a:latin typeface="Arial"/>
-              </a:rPr>
-              <a:t>•  </a:t>
-            </a:r>
-            <a:r>
-              <a:rPr sz="1300" b="1">
-                <a:solidFill>
-                  <a:srgbClr val="2F313F"/>
-                </a:solidFill>
-                <a:latin typeface="Arial"/>
-              </a:rPr>
-              <a:t>Спільні матеріали —</a:t>
-            </a:r>
-            <a:r>
-              <a:rPr sz="1300" b="0">
-                <a:solidFill>
-                  <a:srgbClr val="6B7080"/>
-                </a:solidFill>
-                <a:latin typeface="Arial"/>
-              </a:rPr>
-              <a:t> банери, наліпки, POS-матеріали для промо-періодів.</a:t>
+              <a:t>+ In-app банер, email/push Food &amp; Rides</a:t>
+            </a:r>
+          </a:p>
+        </p:txBody>
+      </p:sp>
+      <p:sp>
+        <p:nvSpPr>
+          <p:cNvPr id="9" name="Rounded Rectangle 8"/>
+          <p:cNvSpPr/>
+          <p:nvPr/>
+        </p:nvSpPr>
+        <p:spPr>
+          <a:xfrm>
+            <a:off x="6217920" y="1874519"/>
+            <a:ext cx="2606040" cy="2194560"/>
+          </a:xfrm>
+          <a:prstGeom prst="roundRect">
+            <a:avLst/>
+          </a:prstGeom>
+          <a:solidFill>
+            <a:srgbClr val="34D186"/>
+          </a:solidFill>
+          <a:ln>
+            <a:noFill/>
+          </a:ln>
+          <a:effectLst/>
+        </p:spPr>
+        <p:style>
+          <a:lnRef idx="1">
+            <a:schemeClr val="accent1"/>
+          </a:lnRef>
+          <a:fillRef idx="3">
+            <a:schemeClr val="accent1"/>
+          </a:fillRef>
+          <a:effectRef idx="2">
+            <a:schemeClr val="accent1"/>
+          </a:effectRef>
+          <a:fontRef idx="minor">
+            <a:schemeClr val="lt1"/>
+          </a:fontRef>
+        </p:style>
+        <p:txBody>
+          <a:bodyPr rtlCol="0" anchor="ctr"/>
+          <a:lstStyle/>
+          <a:p>
+            <a:pPr algn="ctr"/>
+          </a:p>
+        </p:txBody>
+      </p:sp>
+      <p:sp>
+        <p:nvSpPr>
+          <p:cNvPr id="10" name="TextBox 9"/>
+          <p:cNvSpPr txBox="1"/>
+          <p:nvPr/>
+        </p:nvSpPr>
+        <p:spPr>
+          <a:xfrm>
+            <a:off x="6400800" y="2103120"/>
+            <a:ext cx="2240280" cy="1828800"/>
+          </a:xfrm>
+          <a:prstGeom prst="rect">
+            <a:avLst/>
+          </a:prstGeom>
+          <a:noFill/>
+        </p:spPr>
+        <p:txBody>
+          <a:bodyPr wrap="square">
+            <a:spAutoFit/>
+          </a:bodyPr>
+          <a:lstStyle/>
+          <a:p>
+            <a:pPr algn="ctr"/>
+            <a:r>
+              <a:rPr sz="1500" b="1">
+                <a:solidFill>
+                  <a:srgbClr val="FFFFFF"/>
+                </a:solidFill>
+                <a:latin typeface="Arial"/>
+              </a:rPr>
+              <a:t>Big</a:t>
+            </a:r>
+          </a:p>
+          <a:p>
+            <a:pPr algn="ctr"/>
+            <a:r>
+              <a:rPr sz="2400" b="1">
+                <a:solidFill>
+                  <a:srgbClr val="FFFFFF"/>
+                </a:solidFill>
+                <a:latin typeface="Arial"/>
+              </a:rPr>
+              <a:t>10× охоплення</a:t>
+            </a:r>
+          </a:p>
+          <a:p>
+            <a:pPr algn="ctr"/>
+            <a:r>
+              <a:rPr sz="1050" b="0">
+                <a:solidFill>
+                  <a:srgbClr val="FFFFFF"/>
+                </a:solidFill>
+                <a:latin typeface="Arial"/>
+              </a:rPr>
+              <a:t>+ Спец-категорія, pop-up, соцмережі, paid ads, інфлюенсери</a:t>
             </a:r>
           </a:p>
         </p:txBody>
@@ -5570,6 +5847,270 @@
 </file>
 
 <file path=ppt/slides/slide14.xml><?xml version="1.0" encoding="utf-8"?>
+<p:sld xmlns:a="http://schemas.openxmlformats.org/drawingml/2006/main" xmlns:p="http://schemas.openxmlformats.org/presentationml/2006/main" xmlns:r="http://schemas.openxmlformats.org/officeDocument/2006/relationships">
+  <p:cSld>
+    <p:bg>
+      <p:bgPr>
+        <a:solidFill>
+          <a:srgbClr val="FFFFFF"/>
+        </a:solidFill>
+        <a:effectLst/>
+      </p:bgPr>
+    </p:bg>
+    <p:spTree>
+      <p:nvGrpSpPr>
+        <p:cNvPr id="1" name=""/>
+        <p:cNvGrpSpPr/>
+        <p:nvPr/>
+      </p:nvGrpSpPr>
+      <p:grpSpPr/>
+      <p:pic>
+        <p:nvPicPr>
+          <p:cNvPr id="2" name="Picture 1" descr="bolt_food_logo.png"/>
+          <p:cNvPicPr>
+            <a:picLocks noChangeAspect="1"/>
+          </p:cNvPicPr>
+          <p:nvPr/>
+        </p:nvPicPr>
+        <p:blipFill>
+          <a:blip r:embed="rId2"/>
+          <a:stretch>
+            <a:fillRect/>
+          </a:stretch>
+        </p:blipFill>
+        <p:spPr>
+          <a:xfrm>
+            <a:off x="7543800" y="292608"/>
+            <a:ext cx="1280160" cy="508814"/>
+          </a:xfrm>
+          <a:prstGeom prst="rect">
+            <a:avLst/>
+          </a:prstGeom>
+        </p:spPr>
+      </p:pic>
+      <p:sp>
+        <p:nvSpPr>
+          <p:cNvPr id="3" name="Rectangle 2"/>
+          <p:cNvSpPr/>
+          <p:nvPr/>
+        </p:nvSpPr>
+        <p:spPr>
+          <a:xfrm>
+            <a:off x="502920" y="502920"/>
+            <a:ext cx="457200" cy="64008"/>
+          </a:xfrm>
+          <a:prstGeom prst="rect">
+            <a:avLst/>
+          </a:prstGeom>
+          <a:solidFill>
+            <a:srgbClr val="34D186"/>
+          </a:solidFill>
+          <a:ln>
+            <a:noFill/>
+          </a:ln>
+          <a:effectLst/>
+        </p:spPr>
+        <p:style>
+          <a:lnRef idx="1">
+            <a:schemeClr val="accent1"/>
+          </a:lnRef>
+          <a:fillRef idx="3">
+            <a:schemeClr val="accent1"/>
+          </a:fillRef>
+          <a:effectRef idx="2">
+            <a:schemeClr val="accent1"/>
+          </a:effectRef>
+          <a:fontRef idx="minor">
+            <a:schemeClr val="lt1"/>
+          </a:fontRef>
+        </p:style>
+        <p:txBody>
+          <a:bodyPr rtlCol="0" anchor="ctr"/>
+          <a:lstStyle/>
+          <a:p>
+            <a:pPr algn="ctr"/>
+          </a:p>
+        </p:txBody>
+      </p:sp>
+      <p:sp>
+        <p:nvSpPr>
+          <p:cNvPr id="4" name="TextBox 3"/>
+          <p:cNvSpPr txBox="1"/>
+          <p:nvPr/>
+        </p:nvSpPr>
+        <p:spPr>
+          <a:xfrm>
+            <a:off x="457200" y="612648"/>
+            <a:ext cx="8229600" cy="1097280"/>
+          </a:xfrm>
+          <a:prstGeom prst="rect">
+            <a:avLst/>
+          </a:prstGeom>
+          <a:noFill/>
+        </p:spPr>
+        <p:txBody>
+          <a:bodyPr wrap="square">
+            <a:spAutoFit/>
+          </a:bodyPr>
+          <a:lstStyle/>
+          <a:p>
+            <a:r>
+              <a:rPr sz="1200" b="1">
+                <a:solidFill>
+                  <a:srgbClr val="34D186"/>
+                </a:solidFill>
+                <a:latin typeface="Arial"/>
+              </a:rPr>
+              <a:t>IN-STORE BRANDING</a:t>
+            </a:r>
+          </a:p>
+          <a:p>
+            <a:r>
+              <a:rPr sz="2700" b="1">
+                <a:solidFill>
+                  <a:srgbClr val="2F313F"/>
+                </a:solidFill>
+                <a:latin typeface="Arial"/>
+              </a:rPr>
+              <a:t>Підтримка офлайн-брендингу</a:t>
+            </a:r>
+          </a:p>
+        </p:txBody>
+      </p:sp>
+      <p:sp>
+        <p:nvSpPr>
+          <p:cNvPr id="5" name="TextBox 4"/>
+          <p:cNvSpPr txBox="1"/>
+          <p:nvPr/>
+        </p:nvSpPr>
+        <p:spPr>
+          <a:xfrm>
+            <a:off x="685800" y="2011680"/>
+            <a:ext cx="7863840" cy="2743200"/>
+          </a:xfrm>
+          <a:prstGeom prst="rect">
+            <a:avLst/>
+          </a:prstGeom>
+          <a:noFill/>
+        </p:spPr>
+        <p:txBody>
+          <a:bodyPr wrap="square">
+            <a:spAutoFit/>
+          </a:bodyPr>
+          <a:lstStyle/>
+          <a:p>
+            <a:pPr>
+              <a:spcAft>
+                <a:spcPts val="504"/>
+              </a:spcAft>
+            </a:pPr>
+            <a:r>
+              <a:rPr sz="1300" b="1">
+                <a:solidFill>
+                  <a:srgbClr val="34D186"/>
+                </a:solidFill>
+                <a:latin typeface="Arial"/>
+              </a:rPr>
+              <a:t>•  </a:t>
+            </a:r>
+            <a:r>
+              <a:rPr sz="1300" b="1">
+                <a:solidFill>
+                  <a:srgbClr val="2F313F"/>
+                </a:solidFill>
+                <a:latin typeface="Arial"/>
+              </a:rPr>
+              <a:t>Брендинг у точках —</a:t>
+            </a:r>
+            <a:r>
+              <a:rPr sz="1300" b="0">
+                <a:solidFill>
+                  <a:srgbClr val="6B7080"/>
+                </a:solidFill>
+                <a:latin typeface="Arial"/>
+              </a:rPr>
+              <a:t> Bolt підтримує оформлення та видимість бренду на місцях продажу.</a:t>
+            </a:r>
+          </a:p>
+          <a:p>
+            <a:pPr>
+              <a:spcAft>
+                <a:spcPts val="504"/>
+              </a:spcAft>
+            </a:pPr>
+            <a:r>
+              <a:rPr sz="1300" b="1">
+                <a:solidFill>
+                  <a:srgbClr val="34D186"/>
+                </a:solidFill>
+                <a:latin typeface="Arial"/>
+              </a:rPr>
+              <a:t>•  </a:t>
+            </a:r>
+            <a:r>
+              <a:rPr sz="1300" b="1">
+                <a:solidFill>
+                  <a:srgbClr val="2F313F"/>
+                </a:solidFill>
+                <a:latin typeface="Arial"/>
+              </a:rPr>
+              <a:t>Зв'язок онлайн ↔ офлайн —</a:t>
+            </a:r>
+            <a:r>
+              <a:rPr sz="1300" b="0">
+                <a:solidFill>
+                  <a:srgbClr val="6B7080"/>
+                </a:solidFill>
+                <a:latin typeface="Arial"/>
+              </a:rPr>
+              <a:t> офлайн-аудиторія дізнається про вашу присутність на Bolt Food.</a:t>
+            </a:r>
+          </a:p>
+          <a:p>
+            <a:pPr>
+              <a:spcAft>
+                <a:spcPts val="504"/>
+              </a:spcAft>
+            </a:pPr>
+            <a:r>
+              <a:rPr sz="1300" b="1">
+                <a:solidFill>
+                  <a:srgbClr val="34D186"/>
+                </a:solidFill>
+                <a:latin typeface="Arial"/>
+              </a:rPr>
+              <a:t>•  </a:t>
+            </a:r>
+            <a:r>
+              <a:rPr sz="1300" b="1">
+                <a:solidFill>
+                  <a:srgbClr val="2F313F"/>
+                </a:solidFill>
+                <a:latin typeface="Arial"/>
+              </a:rPr>
+              <a:t>Спільні матеріали —</a:t>
+            </a:r>
+            <a:r>
+              <a:rPr sz="1300" b="0">
+                <a:solidFill>
+                  <a:srgbClr val="6B7080"/>
+                </a:solidFill>
+                <a:latin typeface="Arial"/>
+              </a:rPr>
+              <a:t> банери, наліпки, POS-матеріали для промо-періодів.</a:t>
+            </a:r>
+          </a:p>
+        </p:txBody>
+      </p:sp>
+    </p:spTree>
+  </p:cSld>
+  <p:clrMapOvr>
+    <a:masterClrMapping/>
+  </p:clrMapOvr>
+</p:sld>
+</file>
+
+<file path=ppt/slides/slide15.xml><?xml version="1.0" encoding="utf-8"?>
 <p:sld xmlns:a="http://schemas.openxmlformats.org/drawingml/2006/main" xmlns:p="http://schemas.openxmlformats.org/presentationml/2006/main" xmlns:r="http://schemas.openxmlformats.org/officeDocument/2006/relationships">
   <p:cSld>
     <p:bg>
@@ -6360,264 +6901,6 @@
 </p:sld>
 </file>
 
-<file path=ppt/slides/slide15.xml><?xml version="1.0" encoding="utf-8"?>
-<p:sld xmlns:a="http://schemas.openxmlformats.org/drawingml/2006/main" xmlns:p="http://schemas.openxmlformats.org/presentationml/2006/main" xmlns:r="http://schemas.openxmlformats.org/officeDocument/2006/relationships">
-  <p:cSld>
-    <p:bg>
-      <p:bgPr>
-        <a:solidFill>
-          <a:srgbClr val="FFFFFF"/>
-        </a:solidFill>
-        <a:effectLst/>
-      </p:bgPr>
-    </p:bg>
-    <p:spTree>
-      <p:nvGrpSpPr>
-        <p:cNvPr id="1" name=""/>
-        <p:cNvGrpSpPr/>
-        <p:nvPr/>
-      </p:nvGrpSpPr>
-      <p:grpSpPr/>
-      <p:pic>
-        <p:nvPicPr>
-          <p:cNvPr id="2" name="Picture 1" descr="bolt_food_logo.png"/>
-          <p:cNvPicPr>
-            <a:picLocks noChangeAspect="1"/>
-          </p:cNvPicPr>
-          <p:nvPr/>
-        </p:nvPicPr>
-        <p:blipFill>
-          <a:blip r:embed="rId2"/>
-          <a:stretch>
-            <a:fillRect/>
-          </a:stretch>
-        </p:blipFill>
-        <p:spPr>
-          <a:xfrm>
-            <a:off x="7543800" y="292608"/>
-            <a:ext cx="1280160" cy="508814"/>
-          </a:xfrm>
-          <a:prstGeom prst="rect">
-            <a:avLst/>
-          </a:prstGeom>
-        </p:spPr>
-      </p:pic>
-      <p:sp>
-        <p:nvSpPr>
-          <p:cNvPr id="3" name="Rectangle 2"/>
-          <p:cNvSpPr/>
-          <p:nvPr/>
-        </p:nvSpPr>
-        <p:spPr>
-          <a:xfrm>
-            <a:off x="502920" y="502920"/>
-            <a:ext cx="457200" cy="64008"/>
-          </a:xfrm>
-          <a:prstGeom prst="rect">
-            <a:avLst/>
-          </a:prstGeom>
-          <a:solidFill>
-            <a:srgbClr val="34D186"/>
-          </a:solidFill>
-          <a:ln>
-            <a:noFill/>
-          </a:ln>
-          <a:effectLst/>
-        </p:spPr>
-        <p:style>
-          <a:lnRef idx="1">
-            <a:schemeClr val="accent1"/>
-          </a:lnRef>
-          <a:fillRef idx="3">
-            <a:schemeClr val="accent1"/>
-          </a:fillRef>
-          <a:effectRef idx="2">
-            <a:schemeClr val="accent1"/>
-          </a:effectRef>
-          <a:fontRef idx="minor">
-            <a:schemeClr val="lt1"/>
-          </a:fontRef>
-        </p:style>
-        <p:txBody>
-          <a:bodyPr rtlCol="0" anchor="ctr"/>
-          <a:lstStyle/>
-          <a:p>
-            <a:pPr algn="ctr"/>
-          </a:p>
-        </p:txBody>
-      </p:sp>
-      <p:sp>
-        <p:nvSpPr>
-          <p:cNvPr id="4" name="TextBox 3"/>
-          <p:cNvSpPr txBox="1"/>
-          <p:nvPr/>
-        </p:nvSpPr>
-        <p:spPr>
-          <a:xfrm>
-            <a:off x="457200" y="612648"/>
-            <a:ext cx="8229600" cy="1097280"/>
-          </a:xfrm>
-          <a:prstGeom prst="rect">
-            <a:avLst/>
-          </a:prstGeom>
-          <a:noFill/>
-        </p:spPr>
-        <p:txBody>
-          <a:bodyPr wrap="square">
-            <a:spAutoFit/>
-          </a:bodyPr>
-          <a:lstStyle/>
-          <a:p>
-            <a:r>
-              <a:rPr sz="1200" b="1">
-                <a:solidFill>
-                  <a:srgbClr val="34D186"/>
-                </a:solidFill>
-                <a:latin typeface="Arial"/>
-              </a:rPr>
-              <a:t>АМБІЦІЯ · ЗАМОВЛЕННЯ</a:t>
-            </a:r>
-          </a:p>
-          <a:p>
-            <a:r>
-              <a:rPr sz="2700" b="1">
-                <a:solidFill>
-                  <a:srgbClr val="2F313F"/>
-                </a:solidFill>
-                <a:latin typeface="Arial"/>
-              </a:rPr>
-              <a:t>Помісячний план на 12 місяців</a:t>
-            </a:r>
-          </a:p>
-        </p:txBody>
-      </p:sp>
-      <p:pic>
-        <p:nvPicPr>
-          <p:cNvPr id="5" name="Picture 4" descr="orders.png"/>
-          <p:cNvPicPr>
-            <a:picLocks noChangeAspect="1"/>
-          </p:cNvPicPr>
-          <p:nvPr/>
-        </p:nvPicPr>
-        <p:blipFill>
-          <a:blip r:embed="rId3"/>
-          <a:stretch>
-            <a:fillRect/>
-          </a:stretch>
-        </p:blipFill>
-        <p:spPr>
-          <a:xfrm>
-            <a:off x="411480" y="1417320"/>
-            <a:ext cx="7680960" cy="3090762"/>
-          </a:xfrm>
-          <a:prstGeom prst="rect">
-            <a:avLst/>
-          </a:prstGeom>
-        </p:spPr>
-      </p:pic>
-      <p:sp>
-        <p:nvSpPr>
-          <p:cNvPr id="6" name="TextBox 5"/>
-          <p:cNvSpPr txBox="1"/>
-          <p:nvPr/>
-        </p:nvSpPr>
-        <p:spPr>
-          <a:xfrm>
-            <a:off x="548640" y="4572000"/>
-            <a:ext cx="8046720" cy="457200"/>
-          </a:xfrm>
-          <a:prstGeom prst="rect">
-            <a:avLst/>
-          </a:prstGeom>
-          <a:noFill/>
-        </p:spPr>
-        <p:txBody>
-          <a:bodyPr wrap="square">
-            <a:spAutoFit/>
-          </a:bodyPr>
-          <a:lstStyle/>
-          <a:p>
-            <a:r>
-              <a:rPr sz="1200" b="0">
-                <a:solidFill>
-                  <a:srgbClr val="6B7080"/>
-                </a:solidFill>
-                <a:latin typeface="Arial"/>
-              </a:rPr>
-              <a:t>Старт ~80 → </a:t>
-            </a:r>
-            <a:r>
-              <a:rPr sz="1200" b="1">
-                <a:solidFill>
-                  <a:srgbClr val="34D186"/>
-                </a:solidFill>
-                <a:latin typeface="Arial"/>
-              </a:rPr>
-              <a:t>~670 замовлень/міс</a:t>
-            </a:r>
-            <a:r>
-              <a:rPr sz="1200" b="0">
-                <a:solidFill>
-                  <a:srgbClr val="6B7080"/>
-                </a:solidFill>
-                <a:latin typeface="Arial"/>
-              </a:rPr>
-              <a:t> на 12-й місяць · рік 1 разом </a:t>
-            </a:r>
-            <a:r>
-              <a:rPr sz="1200" b="1">
-                <a:solidFill>
-                  <a:srgbClr val="2F313F"/>
-                </a:solidFill>
-                <a:latin typeface="Arial"/>
-              </a:rPr>
-              <a:t>5 329 замовлень</a:t>
-            </a:r>
-          </a:p>
-        </p:txBody>
-      </p:sp>
-      <p:sp>
-        <p:nvSpPr>
-          <p:cNvPr id="7" name="TextBox 6"/>
-          <p:cNvSpPr txBox="1"/>
-          <p:nvPr/>
-        </p:nvSpPr>
-        <p:spPr>
-          <a:xfrm>
-            <a:off x="457200" y="4736592"/>
-            <a:ext cx="8229600" cy="274320"/>
-          </a:xfrm>
-          <a:prstGeom prst="rect">
-            <a:avLst/>
-          </a:prstGeom>
-          <a:noFill/>
-        </p:spPr>
-        <p:txBody>
-          <a:bodyPr wrap="square">
-            <a:spAutoFit/>
-          </a:bodyPr>
-          <a:lstStyle/>
-          <a:p>
-            <a:r>
-              <a:rPr sz="850" b="0">
-                <a:solidFill>
-                  <a:srgbClr val="6B7080"/>
-                </a:solidFill>
-                <a:latin typeface="Arial"/>
-              </a:rPr>
-              <a:t>Базова частка 12% обсягу Glovo (бенчмарк ритейл-мереж на Bolt). Прогноз модельний.</a:t>
-            </a:r>
-          </a:p>
-        </p:txBody>
-      </p:sp>
-    </p:spTree>
-  </p:cSld>
-  <p:clrMapOvr>
-    <a:masterClrMapping/>
-  </p:clrMapOvr>
-</p:sld>
-</file>
-
 <file path=ppt/slides/slide16.xml><?xml version="1.0" encoding="utf-8"?>
 <p:sld xmlns:a="http://schemas.openxmlformats.org/drawingml/2006/main" xmlns:p="http://schemas.openxmlformats.org/presentationml/2006/main" xmlns:r="http://schemas.openxmlformats.org/officeDocument/2006/relationships">
   <p:cSld>
@@ -6733,7 +7016,7 @@
                 </a:solidFill>
                 <a:latin typeface="Arial"/>
               </a:rPr>
-              <a:t>АМБІЦІЯ · GMV</a:t>
+              <a:t>АМБІЦІЯ · ЗАМОВЛЕННЯ</a:t>
             </a:r>
           </a:p>
           <a:p>
@@ -6744,14 +7027,14 @@
                 </a:solidFill>
                 <a:latin typeface="Arial"/>
               </a:rPr>
-              <a:t>GMV-потенціал, AOV €15</a:t>
+              <a:t>Помісячний план на 12 місяців</a:t>
             </a:r>
           </a:p>
         </p:txBody>
       </p:sp>
       <p:pic>
         <p:nvPicPr>
-          <p:cNvPr id="5" name="Picture 4" descr="gmv.png"/>
+          <p:cNvPr id="5" name="Picture 4" descr="orders.png"/>
           <p:cNvPicPr>
             <a:picLocks noChangeAspect="1"/>
           </p:cNvPicPr>
@@ -6765,7 +7048,7 @@
         </p:blipFill>
         <p:spPr>
           <a:xfrm>
-            <a:off x="411480" y="1371600"/>
+            <a:off x="411480" y="1417320"/>
             <a:ext cx="7680960" cy="3090762"/>
           </a:xfrm>
           <a:prstGeom prst="rect">
@@ -6781,8 +7064,8 @@
         </p:nvSpPr>
         <p:spPr>
           <a:xfrm>
-            <a:off x="548640" y="4526280"/>
-            <a:ext cx="8046720" cy="502920"/>
+            <a:off x="548640" y="4572000"/>
+            <a:ext cx="8046720" cy="457200"/>
           </a:xfrm>
           <a:prstGeom prst="rect">
             <a:avLst/>
@@ -6802,16 +7085,16 @@
                 </a:solidFill>
                 <a:latin typeface="Arial"/>
               </a:rPr>
-              <a:t>Рік 1: </a:t>
-            </a:r>
-            <a:r>
-              <a:rPr sz="1300" b="1">
+              <a:t>Старт ~80 → </a:t>
+            </a:r>
+            <a:r>
+              <a:rPr sz="1200" b="1">
                 <a:solidFill>
                   <a:srgbClr val="34D186"/>
                 </a:solidFill>
                 <a:latin typeface="Arial"/>
               </a:rPr>
-              <a:t>€79 935</a:t>
+              <a:t>~670 замовлень/міс</a:t>
             </a:r>
             <a:r>
               <a:rPr sz="1200" b="0">
@@ -6820,16 +7103,16 @@
                 </a:solidFill>
                 <a:latin typeface="Arial"/>
               </a:rPr>
-              <a:t>  ·  річний run-rate на 12-й міс: </a:t>
-            </a:r>
-            <a:r>
-              <a:rPr sz="1300" b="1">
+              <a:t> на 12-й місяць · рік 1 разом </a:t>
+            </a:r>
+            <a:r>
+              <a:rPr sz="1200" b="1">
                 <a:solidFill>
                   <a:srgbClr val="2F313F"/>
                 </a:solidFill>
                 <a:latin typeface="Arial"/>
               </a:rPr>
-              <a:t>€120 960/рік</a:t>
+              <a:t>5 329 замовлень</a:t>
             </a:r>
           </a:p>
         </p:txBody>
@@ -6863,7 +7146,7 @@
                 </a:solidFill>
                 <a:latin typeface="Arial"/>
               </a:rPr>
-              <a:t>GMV = замовлення × €15 AOV. Базовий сценарій.</a:t>
+              <a:t>Базова частка 12% обсягу Glovo (бенчмарк ритейл-мереж на Bolt). Прогноз модельний.</a:t>
             </a:r>
           </a:p>
         </p:txBody>
@@ -6991,7 +7274,7 @@
                 </a:solidFill>
                 <a:latin typeface="Arial"/>
               </a:rPr>
-              <a:t>СЦЕНАРІЇ</a:t>
+              <a:t>АМБІЦІЯ · GMV</a:t>
             </a:r>
           </a:p>
           <a:p>
@@ -7002,55 +7285,35 @@
                 </a:solidFill>
                 <a:latin typeface="Arial"/>
               </a:rPr>
-              <a:t>Три рівні амбіції — рік 1</a:t>
-            </a:r>
-          </a:p>
-        </p:txBody>
-      </p:sp>
-      <p:sp>
-        <p:nvSpPr>
-          <p:cNvPr id="5" name="Rounded Rectangle 4"/>
-          <p:cNvSpPr/>
-          <p:nvPr/>
-        </p:nvSpPr>
-        <p:spPr>
-          <a:xfrm>
-            <a:off x="548640" y="1828800"/>
-            <a:ext cx="2514600" cy="2194560"/>
-          </a:xfrm>
-          <a:prstGeom prst="roundRect">
-            <a:avLst/>
-          </a:prstGeom>
-          <a:solidFill>
-            <a:srgbClr val="EEF6F1"/>
-          </a:solidFill>
-          <a:ln>
-            <a:noFill/>
-          </a:ln>
-          <a:effectLst/>
-        </p:spPr>
-        <p:style>
-          <a:lnRef idx="1">
-            <a:schemeClr val="accent1"/>
-          </a:lnRef>
-          <a:fillRef idx="3">
-            <a:schemeClr val="accent1"/>
-          </a:fillRef>
-          <a:effectRef idx="2">
-            <a:schemeClr val="accent1"/>
-          </a:effectRef>
-          <a:fontRef idx="minor">
-            <a:schemeClr val="lt1"/>
-          </a:fontRef>
-        </p:style>
-        <p:txBody>
-          <a:bodyPr rtlCol="0" anchor="ctr"/>
-          <a:lstStyle/>
-          <a:p>
-            <a:pPr algn="ctr"/>
-          </a:p>
-        </p:txBody>
-      </p:sp>
+              <a:t>GMV-потенціал, AOV €15</a:t>
+            </a:r>
+          </a:p>
+        </p:txBody>
+      </p:sp>
+      <p:pic>
+        <p:nvPicPr>
+          <p:cNvPr id="5" name="Picture 4" descr="gmv.png"/>
+          <p:cNvPicPr>
+            <a:picLocks noChangeAspect="1"/>
+          </p:cNvPicPr>
+          <p:nvPr/>
+        </p:nvPicPr>
+        <p:blipFill>
+          <a:blip r:embed="rId3"/>
+          <a:stretch>
+            <a:fillRect/>
+          </a:stretch>
+        </p:blipFill>
+        <p:spPr>
+          <a:xfrm>
+            <a:off x="411480" y="1371600"/>
+            <a:ext cx="7680960" cy="3090762"/>
+          </a:xfrm>
+          <a:prstGeom prst="rect">
+            <a:avLst/>
+          </a:prstGeom>
+        </p:spPr>
+      </p:pic>
       <p:sp>
         <p:nvSpPr>
           <p:cNvPr id="6" name="TextBox 5"/>
@@ -7059,8 +7322,8 @@
         </p:nvSpPr>
         <p:spPr>
           <a:xfrm>
-            <a:off x="731520" y="2011680"/>
-            <a:ext cx="2148840" cy="1874519"/>
+            <a:off x="548640" y="4526280"/>
+            <a:ext cx="8046720" cy="502920"/>
           </a:xfrm>
           <a:prstGeom prst="rect">
             <a:avLst/>
@@ -7073,121 +7336,55 @@
           </a:bodyPr>
           <a:lstStyle/>
           <a:p>
-            <a:pPr algn="ctr"/>
-            <a:r>
-              <a:rPr sz="1400" b="1">
+            <a:r>
+              <a:rPr sz="1200" b="0">
+                <a:solidFill>
+                  <a:srgbClr val="6B7080"/>
+                </a:solidFill>
+                <a:latin typeface="Arial"/>
+              </a:rPr>
+              <a:t>Рік 1: </a:t>
+            </a:r>
+            <a:r>
+              <a:rPr sz="1300" b="1">
+                <a:solidFill>
+                  <a:srgbClr val="34D186"/>
+                </a:solidFill>
+                <a:latin typeface="Arial"/>
+              </a:rPr>
+              <a:t>€79 935</a:t>
+            </a:r>
+            <a:r>
+              <a:rPr sz="1200" b="0">
+                <a:solidFill>
+                  <a:srgbClr val="6B7080"/>
+                </a:solidFill>
+                <a:latin typeface="Arial"/>
+              </a:rPr>
+              <a:t>  ·  річний run-rate на 12-й міс: </a:t>
+            </a:r>
+            <a:r>
+              <a:rPr sz="1300" b="1">
                 <a:solidFill>
                   <a:srgbClr val="2F313F"/>
                 </a:solidFill>
                 <a:latin typeface="Arial"/>
               </a:rPr>
-              <a:t>Консервативний</a:t>
-            </a:r>
-          </a:p>
-          <a:p>
-            <a:pPr algn="ctr"/>
-            <a:r>
-              <a:rPr sz="1050" b="0">
-                <a:solidFill>
-                  <a:srgbClr val="6B7080"/>
-                </a:solidFill>
-                <a:latin typeface="Arial"/>
-              </a:rPr>
-              <a:t>8% обсягу Glovo</a:t>
-            </a:r>
-          </a:p>
-          <a:p>
-            <a:pPr algn="ctr"/>
-            <a:r>
-              <a:rPr sz="2600" b="1">
-                <a:solidFill>
-                  <a:srgbClr val="34D186"/>
-                </a:solidFill>
-                <a:latin typeface="Arial"/>
-              </a:rPr>
-              <a:t>€53 310</a:t>
-            </a:r>
-          </a:p>
-          <a:p>
-            <a:pPr algn="ctr"/>
-            <a:r>
-              <a:rPr sz="1050" b="0">
-                <a:solidFill>
-                  <a:srgbClr val="6B7080"/>
-                </a:solidFill>
-                <a:latin typeface="Arial"/>
-              </a:rPr>
-              <a:t>GMV рік 1</a:t>
-            </a:r>
-          </a:p>
-          <a:p>
-            <a:pPr algn="ctr"/>
-            <a:r>
-              <a:rPr sz="1200" b="1">
-                <a:solidFill>
-                  <a:srgbClr val="2F313F"/>
-                </a:solidFill>
-                <a:latin typeface="Arial"/>
-              </a:rPr>
-              <a:t>3 554 замовлень</a:t>
-            </a:r>
-          </a:p>
-        </p:txBody>
-      </p:sp>
-      <p:sp>
-        <p:nvSpPr>
-          <p:cNvPr id="7" name="Rounded Rectangle 6"/>
-          <p:cNvSpPr/>
-          <p:nvPr/>
-        </p:nvSpPr>
-        <p:spPr>
-          <a:xfrm>
-            <a:off x="3246120" y="1828800"/>
-            <a:ext cx="2514600" cy="2194560"/>
-          </a:xfrm>
-          <a:prstGeom prst="roundRect">
-            <a:avLst/>
-          </a:prstGeom>
-          <a:solidFill>
-            <a:srgbClr val="34D186"/>
-          </a:solidFill>
-          <a:ln>
-            <a:noFill/>
-          </a:ln>
-          <a:effectLst/>
-        </p:spPr>
-        <p:style>
-          <a:lnRef idx="1">
-            <a:schemeClr val="accent1"/>
-          </a:lnRef>
-          <a:fillRef idx="3">
-            <a:schemeClr val="accent1"/>
-          </a:fillRef>
-          <a:effectRef idx="2">
-            <a:schemeClr val="accent1"/>
-          </a:effectRef>
-          <a:fontRef idx="minor">
-            <a:schemeClr val="lt1"/>
-          </a:fontRef>
-        </p:style>
-        <p:txBody>
-          <a:bodyPr rtlCol="0" anchor="ctr"/>
-          <a:lstStyle/>
-          <a:p>
-            <a:pPr algn="ctr"/>
-          </a:p>
-        </p:txBody>
-      </p:sp>
-      <p:sp>
-        <p:nvSpPr>
-          <p:cNvPr id="8" name="TextBox 7"/>
+              <a:t>€120 960/рік</a:t>
+            </a:r>
+          </a:p>
+        </p:txBody>
+      </p:sp>
+      <p:sp>
+        <p:nvSpPr>
+          <p:cNvPr id="7" name="TextBox 6"/>
           <p:cNvSpPr txBox="1"/>
           <p:nvPr/>
         </p:nvSpPr>
         <p:spPr>
           <a:xfrm>
-            <a:off x="3429000" y="2011680"/>
-            <a:ext cx="2148840" cy="1874519"/>
+            <a:off x="457200" y="4736592"/>
+            <a:ext cx="8229600" cy="274320"/>
           </a:xfrm>
           <a:prstGeom prst="rect">
             <a:avLst/>
@@ -7200,224 +7397,14 @@
           </a:bodyPr>
           <a:lstStyle/>
           <a:p>
-            <a:pPr algn="ctr"/>
-            <a:r>
-              <a:rPr sz="1400" b="1">
-                <a:solidFill>
-                  <a:srgbClr val="FFFFFF"/>
-                </a:solidFill>
-                <a:latin typeface="Arial"/>
-              </a:rPr>
-              <a:t>Базовий</a:t>
-            </a:r>
-          </a:p>
-          <a:p>
-            <a:pPr algn="ctr"/>
-            <a:r>
-              <a:rPr sz="1050" b="0">
-                <a:solidFill>
-                  <a:srgbClr val="FFFFFF"/>
-                </a:solidFill>
-                <a:latin typeface="Arial"/>
-              </a:rPr>
-              <a:t>12% обсягу Glovo</a:t>
-            </a:r>
-          </a:p>
-          <a:p>
-            <a:pPr algn="ctr"/>
-            <a:r>
-              <a:rPr sz="2600" b="1">
-                <a:solidFill>
-                  <a:srgbClr val="FFFFFF"/>
-                </a:solidFill>
-                <a:latin typeface="Arial"/>
-              </a:rPr>
-              <a:t>€79 935</a:t>
-            </a:r>
-          </a:p>
-          <a:p>
-            <a:pPr algn="ctr"/>
-            <a:r>
-              <a:rPr sz="1050" b="0">
-                <a:solidFill>
-                  <a:srgbClr val="FFFFFF"/>
-                </a:solidFill>
-                <a:latin typeface="Arial"/>
-              </a:rPr>
-              <a:t>GMV рік 1</a:t>
-            </a:r>
-          </a:p>
-          <a:p>
-            <a:pPr algn="ctr"/>
-            <a:r>
-              <a:rPr sz="1200" b="1">
-                <a:solidFill>
-                  <a:srgbClr val="FFFFFF"/>
-                </a:solidFill>
-                <a:latin typeface="Arial"/>
-              </a:rPr>
-              <a:t>5 329 замовлень</a:t>
-            </a:r>
-          </a:p>
-        </p:txBody>
-      </p:sp>
-      <p:sp>
-        <p:nvSpPr>
-          <p:cNvPr id="9" name="Rounded Rectangle 8"/>
-          <p:cNvSpPr/>
-          <p:nvPr/>
-        </p:nvSpPr>
-        <p:spPr>
-          <a:xfrm>
-            <a:off x="5943600" y="1828800"/>
-            <a:ext cx="2514600" cy="2194560"/>
-          </a:xfrm>
-          <a:prstGeom prst="roundRect">
-            <a:avLst/>
-          </a:prstGeom>
-          <a:solidFill>
-            <a:srgbClr val="EEF6F1"/>
-          </a:solidFill>
-          <a:ln>
-            <a:noFill/>
-          </a:ln>
-          <a:effectLst/>
-        </p:spPr>
-        <p:style>
-          <a:lnRef idx="1">
-            <a:schemeClr val="accent1"/>
-          </a:lnRef>
-          <a:fillRef idx="3">
-            <a:schemeClr val="accent1"/>
-          </a:fillRef>
-          <a:effectRef idx="2">
-            <a:schemeClr val="accent1"/>
-          </a:effectRef>
-          <a:fontRef idx="minor">
-            <a:schemeClr val="lt1"/>
-          </a:fontRef>
-        </p:style>
-        <p:txBody>
-          <a:bodyPr rtlCol="0" anchor="ctr"/>
-          <a:lstStyle/>
-          <a:p>
-            <a:pPr algn="ctr"/>
-          </a:p>
-        </p:txBody>
-      </p:sp>
-      <p:sp>
-        <p:nvSpPr>
-          <p:cNvPr id="10" name="TextBox 9"/>
-          <p:cNvSpPr txBox="1"/>
-          <p:nvPr/>
-        </p:nvSpPr>
-        <p:spPr>
-          <a:xfrm>
-            <a:off x="6126480" y="2011680"/>
-            <a:ext cx="2148840" cy="1874519"/>
-          </a:xfrm>
-          <a:prstGeom prst="rect">
-            <a:avLst/>
-          </a:prstGeom>
-          <a:noFill/>
-        </p:spPr>
-        <p:txBody>
-          <a:bodyPr wrap="square">
-            <a:spAutoFit/>
-          </a:bodyPr>
-          <a:lstStyle/>
-          <a:p>
-            <a:pPr algn="ctr"/>
-            <a:r>
-              <a:rPr sz="1400" b="1">
-                <a:solidFill>
-                  <a:srgbClr val="2F313F"/>
-                </a:solidFill>
-                <a:latin typeface="Arial"/>
-              </a:rPr>
-              <a:t>Амбітний</a:t>
-            </a:r>
-          </a:p>
-          <a:p>
-            <a:pPr algn="ctr"/>
-            <a:r>
-              <a:rPr sz="1050" b="0">
+            <a:r>
+              <a:rPr sz="850" b="0">
                 <a:solidFill>
                   <a:srgbClr val="6B7080"/>
                 </a:solidFill>
                 <a:latin typeface="Arial"/>
               </a:rPr>
-              <a:t>18% обсягу Glovo</a:t>
-            </a:r>
-          </a:p>
-          <a:p>
-            <a:pPr algn="ctr"/>
-            <a:r>
-              <a:rPr sz="2600" b="1">
-                <a:solidFill>
-                  <a:srgbClr val="34D186"/>
-                </a:solidFill>
-                <a:latin typeface="Arial"/>
-              </a:rPr>
-              <a:t>€119 925</a:t>
-            </a:r>
-          </a:p>
-          <a:p>
-            <a:pPr algn="ctr"/>
-            <a:r>
-              <a:rPr sz="1050" b="0">
-                <a:solidFill>
-                  <a:srgbClr val="6B7080"/>
-                </a:solidFill>
-                <a:latin typeface="Arial"/>
-              </a:rPr>
-              <a:t>GMV рік 1</a:t>
-            </a:r>
-          </a:p>
-          <a:p>
-            <a:pPr algn="ctr"/>
-            <a:r>
-              <a:rPr sz="1200" b="1">
-                <a:solidFill>
-                  <a:srgbClr val="2F313F"/>
-                </a:solidFill>
-                <a:latin typeface="Arial"/>
-              </a:rPr>
-              <a:t>7 995 замовлень</a:t>
-            </a:r>
-          </a:p>
-        </p:txBody>
-      </p:sp>
-      <p:sp>
-        <p:nvSpPr>
-          <p:cNvPr id="11" name="TextBox 10"/>
-          <p:cNvSpPr txBox="1"/>
-          <p:nvPr/>
-        </p:nvSpPr>
-        <p:spPr>
-          <a:xfrm>
-            <a:off x="457200" y="4736592"/>
-            <a:ext cx="8229600" cy="274320"/>
-          </a:xfrm>
-          <a:prstGeom prst="rect">
-            <a:avLst/>
-          </a:prstGeom>
-          <a:noFill/>
-        </p:spPr>
-        <p:txBody>
-          <a:bodyPr wrap="square">
-            <a:spAutoFit/>
-          </a:bodyPr>
-          <a:lstStyle/>
-          <a:p>
-            <a:r>
-              <a:rPr sz="850" b="0">
-                <a:solidFill>
-                  <a:srgbClr val="6B7080"/>
-                </a:solidFill>
-                <a:latin typeface="Arial"/>
-              </a:rPr>
-              <a:t>AOV €15. Базовий сценарій — рекомендований.</a:t>
+              <a:t>GMV = замовлення × €15 AOV. Базовий сценарій.</a:t>
             </a:r>
           </a:p>
         </p:txBody>
@@ -7545,7 +7532,7 @@
                 </a:solidFill>
                 <a:latin typeface="Arial"/>
               </a:rPr>
-              <a:t>ПРОМО · ЯК РОЗГАНЯЄМО ЗАМОВЛЕННЯ</a:t>
+              <a:t>СЦЕНАРІЇ</a:t>
             </a:r>
           </a:p>
           <a:p>
@@ -7556,7 +7543,7 @@
                 </a:solidFill>
                 <a:latin typeface="Arial"/>
               </a:rPr>
-              <a:t>Промо-інструменти Bolt Food</a:t>
+              <a:t>Три рівні амбіції — рік 1</a:t>
             </a:r>
           </a:p>
         </p:txBody>
@@ -7569,8 +7556,8 @@
         </p:nvSpPr>
         <p:spPr>
           <a:xfrm>
-            <a:off x="548640" y="1645920"/>
-            <a:ext cx="1883664" cy="1417320"/>
+            <a:off x="548640" y="1828800"/>
+            <a:ext cx="2514600" cy="2194560"/>
           </a:xfrm>
           <a:prstGeom prst="roundRect">
             <a:avLst/>
@@ -7607,14 +7594,97 @@
       </p:sp>
       <p:sp>
         <p:nvSpPr>
-          <p:cNvPr id="6" name="Rounded Rectangle 5"/>
+          <p:cNvPr id="6" name="TextBox 5"/>
+          <p:cNvSpPr txBox="1"/>
+          <p:nvPr/>
+        </p:nvSpPr>
+        <p:spPr>
+          <a:xfrm>
+            <a:off x="731520" y="2011680"/>
+            <a:ext cx="2148840" cy="1874519"/>
+          </a:xfrm>
+          <a:prstGeom prst="rect">
+            <a:avLst/>
+          </a:prstGeom>
+          <a:noFill/>
+        </p:spPr>
+        <p:txBody>
+          <a:bodyPr wrap="square">
+            <a:spAutoFit/>
+          </a:bodyPr>
+          <a:lstStyle/>
+          <a:p>
+            <a:pPr algn="ctr"/>
+            <a:r>
+              <a:rPr sz="1400" b="1">
+                <a:solidFill>
+                  <a:srgbClr val="2F313F"/>
+                </a:solidFill>
+                <a:latin typeface="Arial"/>
+              </a:rPr>
+              <a:t>Консервативний</a:t>
+            </a:r>
+          </a:p>
+          <a:p>
+            <a:pPr algn="ctr"/>
+            <a:r>
+              <a:rPr sz="1050" b="0">
+                <a:solidFill>
+                  <a:srgbClr val="6B7080"/>
+                </a:solidFill>
+                <a:latin typeface="Arial"/>
+              </a:rPr>
+              <a:t>8% обсягу Glovo</a:t>
+            </a:r>
+          </a:p>
+          <a:p>
+            <a:pPr algn="ctr"/>
+            <a:r>
+              <a:rPr sz="2600" b="1">
+                <a:solidFill>
+                  <a:srgbClr val="34D186"/>
+                </a:solidFill>
+                <a:latin typeface="Arial"/>
+              </a:rPr>
+              <a:t>€53 310</a:t>
+            </a:r>
+          </a:p>
+          <a:p>
+            <a:pPr algn="ctr"/>
+            <a:r>
+              <a:rPr sz="1050" b="0">
+                <a:solidFill>
+                  <a:srgbClr val="6B7080"/>
+                </a:solidFill>
+                <a:latin typeface="Arial"/>
+              </a:rPr>
+              <a:t>GMV рік 1</a:t>
+            </a:r>
+          </a:p>
+          <a:p>
+            <a:pPr algn="ctr"/>
+            <a:r>
+              <a:rPr sz="1200" b="1">
+                <a:solidFill>
+                  <a:srgbClr val="2F313F"/>
+                </a:solidFill>
+                <a:latin typeface="Arial"/>
+              </a:rPr>
+              <a:t>3 554 замовлень</a:t>
+            </a:r>
+          </a:p>
+        </p:txBody>
+      </p:sp>
+      <p:sp>
+        <p:nvSpPr>
+          <p:cNvPr id="7" name="Rounded Rectangle 6"/>
           <p:cNvSpPr/>
           <p:nvPr/>
         </p:nvSpPr>
         <p:spPr>
           <a:xfrm>
-            <a:off x="694944" y="1792224"/>
-            <a:ext cx="365760" cy="365760"/>
+            <a:off x="3246120" y="1828800"/>
+            <a:ext cx="2514600" cy="2194560"/>
           </a:xfrm>
           <a:prstGeom prst="roundRect">
             <a:avLst/>
@@ -7651,14 +7721,14 @@
       </p:sp>
       <p:sp>
         <p:nvSpPr>
-          <p:cNvPr id="7" name="TextBox 6"/>
+          <p:cNvPr id="8" name="TextBox 7"/>
           <p:cNvSpPr txBox="1"/>
           <p:nvPr/>
         </p:nvSpPr>
         <p:spPr>
           <a:xfrm>
-            <a:off x="694944" y="1810512"/>
-            <a:ext cx="365760" cy="329184"/>
+            <a:off x="3429000" y="2011680"/>
+            <a:ext cx="2148840" cy="1874519"/>
           </a:xfrm>
           <a:prstGeom prst="rect">
             <a:avLst/>
@@ -7673,58 +7743,61 @@
           <a:p>
             <a:pPr algn="ctr"/>
             <a:r>
-              <a:rPr sz="1300" b="1">
+              <a:rPr sz="1400" b="1">
                 <a:solidFill>
                   <a:srgbClr val="FFFFFF"/>
                 </a:solidFill>
                 <a:latin typeface="Arial"/>
               </a:rPr>
-              <a:t>1</a:t>
-            </a:r>
-          </a:p>
-        </p:txBody>
-      </p:sp>
-      <p:sp>
-        <p:nvSpPr>
-          <p:cNvPr id="8" name="TextBox 7"/>
-          <p:cNvSpPr txBox="1"/>
-          <p:nvPr/>
-        </p:nvSpPr>
-        <p:spPr>
-          <a:xfrm>
-            <a:off x="676656" y="2212848"/>
-            <a:ext cx="1627632" cy="777240"/>
-          </a:xfrm>
-          <a:prstGeom prst="rect">
-            <a:avLst/>
-          </a:prstGeom>
-          <a:noFill/>
-        </p:spPr>
-        <p:txBody>
-          <a:bodyPr wrap="square">
-            <a:spAutoFit/>
-          </a:bodyPr>
-          <a:lstStyle/>
-          <a:p>
-            <a:r>
-              <a:rPr sz="1250" b="1">
-                <a:solidFill>
-                  <a:srgbClr val="2F313F"/>
-                </a:solidFill>
-                <a:latin typeface="Arial"/>
-              </a:rPr>
-              <a:t>Знижка на доставку</a:t>
-            </a:r>
-          </a:p>
-          <a:p>
-            <a:r>
-              <a:rPr sz="1000" b="0">
-                <a:solidFill>
-                  <a:srgbClr val="6B7080"/>
-                </a:solidFill>
-                <a:latin typeface="Arial"/>
-              </a:rPr>
-              <a:t>Частково або 0 ₴. №1 інструмент для залучення нових клієнтів.</a:t>
+              <a:t>Базовий</a:t>
+            </a:r>
+          </a:p>
+          <a:p>
+            <a:pPr algn="ctr"/>
+            <a:r>
+              <a:rPr sz="1050" b="0">
+                <a:solidFill>
+                  <a:srgbClr val="FFFFFF"/>
+                </a:solidFill>
+                <a:latin typeface="Arial"/>
+              </a:rPr>
+              <a:t>12% обсягу Glovo</a:t>
+            </a:r>
+          </a:p>
+          <a:p>
+            <a:pPr algn="ctr"/>
+            <a:r>
+              <a:rPr sz="2600" b="1">
+                <a:solidFill>
+                  <a:srgbClr val="FFFFFF"/>
+                </a:solidFill>
+                <a:latin typeface="Arial"/>
+              </a:rPr>
+              <a:t>€79 935</a:t>
+            </a:r>
+          </a:p>
+          <a:p>
+            <a:pPr algn="ctr"/>
+            <a:r>
+              <a:rPr sz="1050" b="0">
+                <a:solidFill>
+                  <a:srgbClr val="FFFFFF"/>
+                </a:solidFill>
+                <a:latin typeface="Arial"/>
+              </a:rPr>
+              <a:t>GMV рік 1</a:t>
+            </a:r>
+          </a:p>
+          <a:p>
+            <a:pPr algn="ctr"/>
+            <a:r>
+              <a:rPr sz="1200" b="1">
+                <a:solidFill>
+                  <a:srgbClr val="FFFFFF"/>
+                </a:solidFill>
+                <a:latin typeface="Arial"/>
+              </a:rPr>
+              <a:t>5 329 замовлень</a:t>
             </a:r>
           </a:p>
         </p:txBody>
@@ -7737,8 +7810,8 @@
         </p:nvSpPr>
         <p:spPr>
           <a:xfrm>
-            <a:off x="2596896" y="1645920"/>
-            <a:ext cx="1883664" cy="1417320"/>
+            <a:off x="5943600" y="1828800"/>
+            <a:ext cx="2514600" cy="2194560"/>
           </a:xfrm>
           <a:prstGeom prst="roundRect">
             <a:avLst/>
@@ -7775,58 +7848,14 @@
       </p:sp>
       <p:sp>
         <p:nvSpPr>
-          <p:cNvPr id="10" name="Rounded Rectangle 9"/>
-          <p:cNvSpPr/>
-          <p:nvPr/>
-        </p:nvSpPr>
-        <p:spPr>
-          <a:xfrm>
-            <a:off x="2743200" y="1792224"/>
-            <a:ext cx="365760" cy="365760"/>
-          </a:xfrm>
-          <a:prstGeom prst="roundRect">
-            <a:avLst/>
-          </a:prstGeom>
-          <a:solidFill>
-            <a:srgbClr val="34D186"/>
-          </a:solidFill>
-          <a:ln>
-            <a:noFill/>
-          </a:ln>
-          <a:effectLst/>
-        </p:spPr>
-        <p:style>
-          <a:lnRef idx="1">
-            <a:schemeClr val="accent1"/>
-          </a:lnRef>
-          <a:fillRef idx="3">
-            <a:schemeClr val="accent1"/>
-          </a:fillRef>
-          <a:effectRef idx="2">
-            <a:schemeClr val="accent1"/>
-          </a:effectRef>
-          <a:fontRef idx="minor">
-            <a:schemeClr val="lt1"/>
-          </a:fontRef>
-        </p:style>
-        <p:txBody>
-          <a:bodyPr rtlCol="0" anchor="ctr"/>
-          <a:lstStyle/>
-          <a:p>
-            <a:pPr algn="ctr"/>
-          </a:p>
-        </p:txBody>
-      </p:sp>
-      <p:sp>
-        <p:nvSpPr>
-          <p:cNvPr id="11" name="TextBox 10"/>
+          <p:cNvPr id="10" name="TextBox 9"/>
           <p:cNvSpPr txBox="1"/>
           <p:nvPr/>
         </p:nvSpPr>
         <p:spPr>
           <a:xfrm>
-            <a:off x="2743200" y="1810512"/>
-            <a:ext cx="365760" cy="329184"/>
+            <a:off x="6126480" y="2011680"/>
+            <a:ext cx="2148840" cy="1874519"/>
           </a:xfrm>
           <a:prstGeom prst="rect">
             <a:avLst/>
@@ -7841,27 +7870,75 @@
           <a:p>
             <a:pPr algn="ctr"/>
             <a:r>
-              <a:rPr sz="1300" b="1">
-                <a:solidFill>
-                  <a:srgbClr val="FFFFFF"/>
-                </a:solidFill>
-                <a:latin typeface="Arial"/>
-              </a:rPr>
-              <a:t>2</a:t>
-            </a:r>
-          </a:p>
-        </p:txBody>
-      </p:sp>
-      <p:sp>
-        <p:nvSpPr>
-          <p:cNvPr id="12" name="TextBox 11"/>
+              <a:rPr sz="1400" b="1">
+                <a:solidFill>
+                  <a:srgbClr val="2F313F"/>
+                </a:solidFill>
+                <a:latin typeface="Arial"/>
+              </a:rPr>
+              <a:t>Амбітний</a:t>
+            </a:r>
+          </a:p>
+          <a:p>
+            <a:pPr algn="ctr"/>
+            <a:r>
+              <a:rPr sz="1050" b="0">
+                <a:solidFill>
+                  <a:srgbClr val="6B7080"/>
+                </a:solidFill>
+                <a:latin typeface="Arial"/>
+              </a:rPr>
+              <a:t>18% обсягу Glovo</a:t>
+            </a:r>
+          </a:p>
+          <a:p>
+            <a:pPr algn="ctr"/>
+            <a:r>
+              <a:rPr sz="2600" b="1">
+                <a:solidFill>
+                  <a:srgbClr val="34D186"/>
+                </a:solidFill>
+                <a:latin typeface="Arial"/>
+              </a:rPr>
+              <a:t>€119 925</a:t>
+            </a:r>
+          </a:p>
+          <a:p>
+            <a:pPr algn="ctr"/>
+            <a:r>
+              <a:rPr sz="1050" b="0">
+                <a:solidFill>
+                  <a:srgbClr val="6B7080"/>
+                </a:solidFill>
+                <a:latin typeface="Arial"/>
+              </a:rPr>
+              <a:t>GMV рік 1</a:t>
+            </a:r>
+          </a:p>
+          <a:p>
+            <a:pPr algn="ctr"/>
+            <a:r>
+              <a:rPr sz="1200" b="1">
+                <a:solidFill>
+                  <a:srgbClr val="2F313F"/>
+                </a:solidFill>
+                <a:latin typeface="Arial"/>
+              </a:rPr>
+              <a:t>7 995 замовлень</a:t>
+            </a:r>
+          </a:p>
+        </p:txBody>
+      </p:sp>
+      <p:sp>
+        <p:nvSpPr>
+          <p:cNvPr id="11" name="TextBox 10"/>
           <p:cNvSpPr txBox="1"/>
           <p:nvPr/>
         </p:nvSpPr>
         <p:spPr>
           <a:xfrm>
-            <a:off x="2724912" y="2212848"/>
-            <a:ext cx="1627632" cy="777240"/>
+            <a:off x="457200" y="4736592"/>
+            <a:ext cx="8229600" cy="274320"/>
           </a:xfrm>
           <a:prstGeom prst="rect">
             <a:avLst/>
@@ -7875,660 +7952,13 @@
           <a:lstStyle/>
           <a:p>
             <a:r>
-              <a:rPr sz="1250" b="1">
-                <a:solidFill>
-                  <a:srgbClr val="2F313F"/>
-                </a:solidFill>
-                <a:latin typeface="Arial"/>
-              </a:rPr>
-              <a:t>Знижки на меню</a:t>
-            </a:r>
-          </a:p>
-          <a:p>
-            <a:r>
-              <a:rPr sz="1000" b="0">
+              <a:rPr sz="850" b="0">
                 <a:solidFill>
                   <a:srgbClr val="6B7080"/>
                 </a:solidFill>
                 <a:latin typeface="Arial"/>
               </a:rPr>
-              <a:t>На окремі позиції або весь асортимент — через API або від Bolt.</a:t>
-            </a:r>
-          </a:p>
-        </p:txBody>
-      </p:sp>
-      <p:sp>
-        <p:nvSpPr>
-          <p:cNvPr id="13" name="Rounded Rectangle 12"/>
-          <p:cNvSpPr/>
-          <p:nvPr/>
-        </p:nvSpPr>
-        <p:spPr>
-          <a:xfrm>
-            <a:off x="4645152" y="1645920"/>
-            <a:ext cx="1883664" cy="1417320"/>
-          </a:xfrm>
-          <a:prstGeom prst="roundRect">
-            <a:avLst/>
-          </a:prstGeom>
-          <a:solidFill>
-            <a:srgbClr val="EEF6F1"/>
-          </a:solidFill>
-          <a:ln>
-            <a:noFill/>
-          </a:ln>
-          <a:effectLst/>
-        </p:spPr>
-        <p:style>
-          <a:lnRef idx="1">
-            <a:schemeClr val="accent1"/>
-          </a:lnRef>
-          <a:fillRef idx="3">
-            <a:schemeClr val="accent1"/>
-          </a:fillRef>
-          <a:effectRef idx="2">
-            <a:schemeClr val="accent1"/>
-          </a:effectRef>
-          <a:fontRef idx="minor">
-            <a:schemeClr val="lt1"/>
-          </a:fontRef>
-        </p:style>
-        <p:txBody>
-          <a:bodyPr rtlCol="0" anchor="ctr"/>
-          <a:lstStyle/>
-          <a:p>
-            <a:pPr algn="ctr"/>
-          </a:p>
-        </p:txBody>
-      </p:sp>
-      <p:sp>
-        <p:nvSpPr>
-          <p:cNvPr id="14" name="Rounded Rectangle 13"/>
-          <p:cNvSpPr/>
-          <p:nvPr/>
-        </p:nvSpPr>
-        <p:spPr>
-          <a:xfrm>
-            <a:off x="4791456" y="1792224"/>
-            <a:ext cx="365760" cy="365760"/>
-          </a:xfrm>
-          <a:prstGeom prst="roundRect">
-            <a:avLst/>
-          </a:prstGeom>
-          <a:solidFill>
-            <a:srgbClr val="34D186"/>
-          </a:solidFill>
-          <a:ln>
-            <a:noFill/>
-          </a:ln>
-          <a:effectLst/>
-        </p:spPr>
-        <p:style>
-          <a:lnRef idx="1">
-            <a:schemeClr val="accent1"/>
-          </a:lnRef>
-          <a:fillRef idx="3">
-            <a:schemeClr val="accent1"/>
-          </a:fillRef>
-          <a:effectRef idx="2">
-            <a:schemeClr val="accent1"/>
-          </a:effectRef>
-          <a:fontRef idx="minor">
-            <a:schemeClr val="lt1"/>
-          </a:fontRef>
-        </p:style>
-        <p:txBody>
-          <a:bodyPr rtlCol="0" anchor="ctr"/>
-          <a:lstStyle/>
-          <a:p>
-            <a:pPr algn="ctr"/>
-          </a:p>
-        </p:txBody>
-      </p:sp>
-      <p:sp>
-        <p:nvSpPr>
-          <p:cNvPr id="15" name="TextBox 14"/>
-          <p:cNvSpPr txBox="1"/>
-          <p:nvPr/>
-        </p:nvSpPr>
-        <p:spPr>
-          <a:xfrm>
-            <a:off x="4791456" y="1810512"/>
-            <a:ext cx="365760" cy="329184"/>
-          </a:xfrm>
-          <a:prstGeom prst="rect">
-            <a:avLst/>
-          </a:prstGeom>
-          <a:noFill/>
-        </p:spPr>
-        <p:txBody>
-          <a:bodyPr wrap="square">
-            <a:spAutoFit/>
-          </a:bodyPr>
-          <a:lstStyle/>
-          <a:p>
-            <a:pPr algn="ctr"/>
-            <a:r>
-              <a:rPr sz="1300" b="1">
-                <a:solidFill>
-                  <a:srgbClr val="FFFFFF"/>
-                </a:solidFill>
-                <a:latin typeface="Arial"/>
-              </a:rPr>
-              <a:t>3</a:t>
-            </a:r>
-          </a:p>
-        </p:txBody>
-      </p:sp>
-      <p:sp>
-        <p:nvSpPr>
-          <p:cNvPr id="16" name="TextBox 15"/>
-          <p:cNvSpPr txBox="1"/>
-          <p:nvPr/>
-        </p:nvSpPr>
-        <p:spPr>
-          <a:xfrm>
-            <a:off x="4773168" y="2212848"/>
-            <a:ext cx="1627632" cy="777240"/>
-          </a:xfrm>
-          <a:prstGeom prst="rect">
-            <a:avLst/>
-          </a:prstGeom>
-          <a:noFill/>
-        </p:spPr>
-        <p:txBody>
-          <a:bodyPr wrap="square">
-            <a:spAutoFit/>
-          </a:bodyPr>
-          <a:lstStyle/>
-          <a:p>
-            <a:r>
-              <a:rPr sz="1250" b="1">
-                <a:solidFill>
-                  <a:srgbClr val="2F313F"/>
-                </a:solidFill>
-                <a:latin typeface="Arial"/>
-              </a:rPr>
-              <a:t>Когорти</a:t>
-            </a:r>
-          </a:p>
-          <a:p>
-            <a:r>
-              <a:rPr sz="1000" b="0">
-                <a:solidFill>
-                  <a:srgbClr val="6B7080"/>
-                </a:solidFill>
-                <a:latin typeface="Arial"/>
-              </a:rPr>
-              <a:t>Таргет на Нових / Втрачених / Активних — різний розмір знижки.</a:t>
-            </a:r>
-          </a:p>
-        </p:txBody>
-      </p:sp>
-      <p:sp>
-        <p:nvSpPr>
-          <p:cNvPr id="17" name="Rounded Rectangle 16"/>
-          <p:cNvSpPr/>
-          <p:nvPr/>
-        </p:nvSpPr>
-        <p:spPr>
-          <a:xfrm>
-            <a:off x="6693408" y="1645920"/>
-            <a:ext cx="1883664" cy="1417320"/>
-          </a:xfrm>
-          <a:prstGeom prst="roundRect">
-            <a:avLst/>
-          </a:prstGeom>
-          <a:solidFill>
-            <a:srgbClr val="EEF6F1"/>
-          </a:solidFill>
-          <a:ln>
-            <a:noFill/>
-          </a:ln>
-          <a:effectLst/>
-        </p:spPr>
-        <p:style>
-          <a:lnRef idx="1">
-            <a:schemeClr val="accent1"/>
-          </a:lnRef>
-          <a:fillRef idx="3">
-            <a:schemeClr val="accent1"/>
-          </a:fillRef>
-          <a:effectRef idx="2">
-            <a:schemeClr val="accent1"/>
-          </a:effectRef>
-          <a:fontRef idx="minor">
-            <a:schemeClr val="lt1"/>
-          </a:fontRef>
-        </p:style>
-        <p:txBody>
-          <a:bodyPr rtlCol="0" anchor="ctr"/>
-          <a:lstStyle/>
-          <a:p>
-            <a:pPr algn="ctr"/>
-          </a:p>
-        </p:txBody>
-      </p:sp>
-      <p:sp>
-        <p:nvSpPr>
-          <p:cNvPr id="18" name="Rounded Rectangle 17"/>
-          <p:cNvSpPr/>
-          <p:nvPr/>
-        </p:nvSpPr>
-        <p:spPr>
-          <a:xfrm>
-            <a:off x="6839712" y="1792224"/>
-            <a:ext cx="365760" cy="365760"/>
-          </a:xfrm>
-          <a:prstGeom prst="roundRect">
-            <a:avLst/>
-          </a:prstGeom>
-          <a:solidFill>
-            <a:srgbClr val="34D186"/>
-          </a:solidFill>
-          <a:ln>
-            <a:noFill/>
-          </a:ln>
-          <a:effectLst/>
-        </p:spPr>
-        <p:style>
-          <a:lnRef idx="1">
-            <a:schemeClr val="accent1"/>
-          </a:lnRef>
-          <a:fillRef idx="3">
-            <a:schemeClr val="accent1"/>
-          </a:fillRef>
-          <a:effectRef idx="2">
-            <a:schemeClr val="accent1"/>
-          </a:effectRef>
-          <a:fontRef idx="minor">
-            <a:schemeClr val="lt1"/>
-          </a:fontRef>
-        </p:style>
-        <p:txBody>
-          <a:bodyPr rtlCol="0" anchor="ctr"/>
-          <a:lstStyle/>
-          <a:p>
-            <a:pPr algn="ctr"/>
-          </a:p>
-        </p:txBody>
-      </p:sp>
-      <p:sp>
-        <p:nvSpPr>
-          <p:cNvPr id="19" name="TextBox 18"/>
-          <p:cNvSpPr txBox="1"/>
-          <p:nvPr/>
-        </p:nvSpPr>
-        <p:spPr>
-          <a:xfrm>
-            <a:off x="6839712" y="1810512"/>
-            <a:ext cx="365760" cy="329184"/>
-          </a:xfrm>
-          <a:prstGeom prst="rect">
-            <a:avLst/>
-          </a:prstGeom>
-          <a:noFill/>
-        </p:spPr>
-        <p:txBody>
-          <a:bodyPr wrap="square">
-            <a:spAutoFit/>
-          </a:bodyPr>
-          <a:lstStyle/>
-          <a:p>
-            <a:pPr algn="ctr"/>
-            <a:r>
-              <a:rPr sz="1300" b="1">
-                <a:solidFill>
-                  <a:srgbClr val="FFFFFF"/>
-                </a:solidFill>
-                <a:latin typeface="Arial"/>
-              </a:rPr>
-              <a:t>4</a:t>
-            </a:r>
-          </a:p>
-        </p:txBody>
-      </p:sp>
-      <p:sp>
-        <p:nvSpPr>
-          <p:cNvPr id="20" name="TextBox 19"/>
-          <p:cNvSpPr txBox="1"/>
-          <p:nvPr/>
-        </p:nvSpPr>
-        <p:spPr>
-          <a:xfrm>
-            <a:off x="6821424" y="2212848"/>
-            <a:ext cx="1627632" cy="777240"/>
-          </a:xfrm>
-          <a:prstGeom prst="rect">
-            <a:avLst/>
-          </a:prstGeom>
-          <a:noFill/>
-        </p:spPr>
-        <p:txBody>
-          <a:bodyPr wrap="square">
-            <a:spAutoFit/>
-          </a:bodyPr>
-          <a:lstStyle/>
-          <a:p>
-            <a:r>
-              <a:rPr sz="1250" b="1">
-                <a:solidFill>
-                  <a:srgbClr val="2F313F"/>
-                </a:solidFill>
-                <a:latin typeface="Arial"/>
-              </a:rPr>
-              <a:t>Банерна підтримка</a:t>
-            </a:r>
-          </a:p>
-          <a:p>
-            <a:r>
-              <a:rPr sz="1000" b="0">
-                <a:solidFill>
-                  <a:srgbClr val="6B7080"/>
-                </a:solidFill>
-                <a:latin typeface="Arial"/>
-              </a:rPr>
-              <a:t>Банер у вкладці «Магазини» в періоди активних акцій.</a:t>
-            </a:r>
-          </a:p>
-        </p:txBody>
-      </p:sp>
-      <p:sp>
-        <p:nvSpPr>
-          <p:cNvPr id="21" name="Rounded Rectangle 20"/>
-          <p:cNvSpPr/>
-          <p:nvPr/>
-        </p:nvSpPr>
-        <p:spPr>
-          <a:xfrm>
-            <a:off x="548640" y="3246120"/>
-            <a:ext cx="3886200" cy="1051560"/>
-          </a:xfrm>
-          <a:prstGeom prst="roundRect">
-            <a:avLst/>
-          </a:prstGeom>
-          <a:solidFill>
-            <a:srgbClr val="EEF6F1"/>
-          </a:solidFill>
-          <a:ln>
-            <a:noFill/>
-          </a:ln>
-          <a:effectLst/>
-        </p:spPr>
-        <p:style>
-          <a:lnRef idx="1">
-            <a:schemeClr val="accent1"/>
-          </a:lnRef>
-          <a:fillRef idx="3">
-            <a:schemeClr val="accent1"/>
-          </a:fillRef>
-          <a:effectRef idx="2">
-            <a:schemeClr val="accent1"/>
-          </a:effectRef>
-          <a:fontRef idx="minor">
-            <a:schemeClr val="lt1"/>
-          </a:fontRef>
-        </p:style>
-        <p:txBody>
-          <a:bodyPr rtlCol="0" anchor="ctr"/>
-          <a:lstStyle/>
-          <a:p>
-            <a:pPr algn="ctr"/>
-          </a:p>
-        </p:txBody>
-      </p:sp>
-      <p:sp>
-        <p:nvSpPr>
-          <p:cNvPr id="22" name="Rectangle 21"/>
-          <p:cNvSpPr/>
-          <p:nvPr/>
-        </p:nvSpPr>
-        <p:spPr>
-          <a:xfrm>
-            <a:off x="548640" y="3246120"/>
-            <a:ext cx="82296" cy="1051560"/>
-          </a:xfrm>
-          <a:prstGeom prst="rect">
-            <a:avLst/>
-          </a:prstGeom>
-          <a:solidFill>
-            <a:srgbClr val="34D186"/>
-          </a:solidFill>
-          <a:ln>
-            <a:noFill/>
-          </a:ln>
-          <a:effectLst/>
-        </p:spPr>
-        <p:style>
-          <a:lnRef idx="1">
-            <a:schemeClr val="accent1"/>
-          </a:lnRef>
-          <a:fillRef idx="3">
-            <a:schemeClr val="accent1"/>
-          </a:fillRef>
-          <a:effectRef idx="2">
-            <a:schemeClr val="accent1"/>
-          </a:effectRef>
-          <a:fontRef idx="minor">
-            <a:schemeClr val="lt1"/>
-          </a:fontRef>
-        </p:style>
-        <p:txBody>
-          <a:bodyPr rtlCol="0" anchor="ctr"/>
-          <a:lstStyle/>
-          <a:p>
-            <a:pPr algn="ctr"/>
-          </a:p>
-        </p:txBody>
-      </p:sp>
-      <p:sp>
-        <p:nvSpPr>
-          <p:cNvPr id="23" name="TextBox 22"/>
-          <p:cNvSpPr txBox="1"/>
-          <p:nvPr/>
-        </p:nvSpPr>
-        <p:spPr>
-          <a:xfrm>
-            <a:off x="777240" y="3383280"/>
-            <a:ext cx="3520440" cy="868680"/>
-          </a:xfrm>
-          <a:prstGeom prst="rect">
-            <a:avLst/>
-          </a:prstGeom>
-          <a:noFill/>
-        </p:spPr>
-        <p:txBody>
-          <a:bodyPr wrap="square">
-            <a:spAutoFit/>
-          </a:bodyPr>
-          <a:lstStyle/>
-          <a:p>
-            <a:r>
-              <a:rPr sz="1250" b="1">
-                <a:solidFill>
-                  <a:srgbClr val="2F313F"/>
-                </a:solidFill>
-                <a:latin typeface="Arial"/>
-              </a:rPr>
-              <a:t>Рекомендований старт</a:t>
-            </a:r>
-          </a:p>
-          <a:p>
-            <a:r>
-              <a:rPr sz="1050" b="0">
-                <a:solidFill>
-                  <a:srgbClr val="6B7080"/>
-                </a:solidFill>
-                <a:latin typeface="Arial"/>
-              </a:rPr>
-              <a:t>Безкоштовна доставка для нових клієнтів + MOV трохи вищий за середній чек.</a:t>
-            </a:r>
-          </a:p>
-        </p:txBody>
-      </p:sp>
-      <p:sp>
-        <p:nvSpPr>
-          <p:cNvPr id="24" name="Rounded Rectangle 23"/>
-          <p:cNvSpPr/>
-          <p:nvPr/>
-        </p:nvSpPr>
-        <p:spPr>
-          <a:xfrm>
-            <a:off x="4709160" y="3246120"/>
-            <a:ext cx="3886200" cy="1051560"/>
-          </a:xfrm>
-          <a:prstGeom prst="roundRect">
-            <a:avLst/>
-          </a:prstGeom>
-          <a:solidFill>
-            <a:srgbClr val="EEF6F1"/>
-          </a:solidFill>
-          <a:ln>
-            <a:noFill/>
-          </a:ln>
-          <a:effectLst/>
-        </p:spPr>
-        <p:style>
-          <a:lnRef idx="1">
-            <a:schemeClr val="accent1"/>
-          </a:lnRef>
-          <a:fillRef idx="3">
-            <a:schemeClr val="accent1"/>
-          </a:fillRef>
-          <a:effectRef idx="2">
-            <a:schemeClr val="accent1"/>
-          </a:effectRef>
-          <a:fontRef idx="minor">
-            <a:schemeClr val="lt1"/>
-          </a:fontRef>
-        </p:style>
-        <p:txBody>
-          <a:bodyPr rtlCol="0" anchor="ctr"/>
-          <a:lstStyle/>
-          <a:p>
-            <a:pPr algn="ctr"/>
-          </a:p>
-        </p:txBody>
-      </p:sp>
-      <p:sp>
-        <p:nvSpPr>
-          <p:cNvPr id="25" name="Rectangle 24"/>
-          <p:cNvSpPr/>
-          <p:nvPr/>
-        </p:nvSpPr>
-        <p:spPr>
-          <a:xfrm>
-            <a:off x="4709160" y="3246120"/>
-            <a:ext cx="82296" cy="1051560"/>
-          </a:xfrm>
-          <a:prstGeom prst="rect">
-            <a:avLst/>
-          </a:prstGeom>
-          <a:solidFill>
-            <a:srgbClr val="2F313F"/>
-          </a:solidFill>
-          <a:ln>
-            <a:noFill/>
-          </a:ln>
-          <a:effectLst/>
-        </p:spPr>
-        <p:style>
-          <a:lnRef idx="1">
-            <a:schemeClr val="accent1"/>
-          </a:lnRef>
-          <a:fillRef idx="3">
-            <a:schemeClr val="accent1"/>
-          </a:fillRef>
-          <a:effectRef idx="2">
-            <a:schemeClr val="accent1"/>
-          </a:effectRef>
-          <a:fontRef idx="minor">
-            <a:schemeClr val="lt1"/>
-          </a:fontRef>
-        </p:style>
-        <p:txBody>
-          <a:bodyPr rtlCol="0" anchor="ctr"/>
-          <a:lstStyle/>
-          <a:p>
-            <a:pPr algn="ctr"/>
-          </a:p>
-        </p:txBody>
-      </p:sp>
-      <p:sp>
-        <p:nvSpPr>
-          <p:cNvPr id="26" name="TextBox 25"/>
-          <p:cNvSpPr txBox="1"/>
-          <p:nvPr/>
-        </p:nvSpPr>
-        <p:spPr>
-          <a:xfrm>
-            <a:off x="4937760" y="3383280"/>
-            <a:ext cx="3520440" cy="868680"/>
-          </a:xfrm>
-          <a:prstGeom prst="rect">
-            <a:avLst/>
-          </a:prstGeom>
-          <a:noFill/>
-        </p:spPr>
-        <p:txBody>
-          <a:bodyPr wrap="square">
-            <a:spAutoFit/>
-          </a:bodyPr>
-          <a:lstStyle/>
-          <a:p>
-            <a:r>
-              <a:rPr sz="1250" b="1">
-                <a:solidFill>
-                  <a:srgbClr val="2F313F"/>
-                </a:solidFill>
-                <a:latin typeface="Arial"/>
-              </a:rPr>
-              <a:t>Оподаткування (ПДВ)</a:t>
-            </a:r>
-          </a:p>
-          <a:p>
-            <a:r>
-              <a:rPr sz="1050" b="0">
-                <a:solidFill>
-                  <a:srgbClr val="6B7080"/>
-                </a:solidFill>
-                <a:latin typeface="Arial"/>
-              </a:rPr>
-              <a:t>Знижки через Bolt → +20% ПДВ. Через API (зміна цін партнером) → без ПДВ.</a:t>
-            </a:r>
-          </a:p>
-        </p:txBody>
-      </p:sp>
-      <p:sp>
-        <p:nvSpPr>
-          <p:cNvPr id="27" name="TextBox 26"/>
-          <p:cNvSpPr txBox="1"/>
-          <p:nvPr/>
-        </p:nvSpPr>
-        <p:spPr>
-          <a:xfrm>
-            <a:off x="457200" y="4736592"/>
-            <a:ext cx="8229600" cy="274320"/>
-          </a:xfrm>
-          <a:prstGeom prst="rect">
-            <a:avLst/>
-          </a:prstGeom>
-          <a:noFill/>
-        </p:spPr>
-        <p:txBody>
-          <a:bodyPr wrap="square">
-            <a:spAutoFit/>
-          </a:bodyPr>
-          <a:lstStyle/>
-          <a:p>
-            <a:r>
-              <a:rPr sz="850" b="0">
-                <a:solidFill>
-                  <a:srgbClr val="6B7080"/>
-                </a:solidFill>
-                <a:latin typeface="Arial"/>
-              </a:rPr>
-              <a:t>Джерело: гайд «Промо-активності на Bolt Food» для партнерів (Україна)</a:t>
+              <a:t>AOV €15. Базовий сценарій — рекомендований.</a:t>
             </a:r>
           </a:p>
         </p:txBody>
@@ -8656,7 +8086,7 @@
                 </a:solidFill>
                 <a:latin typeface="Arial"/>
               </a:rPr>
-              <a:t>ЗАПУСК</a:t>
+              <a:t>ПРОМО · ЯК РОЗГАНЯЄМО ЗАМОВЛЕННЯ</a:t>
             </a:r>
           </a:p>
           <a:p>
@@ -8667,55 +8097,21 @@
                 </a:solidFill>
                 <a:latin typeface="Arial"/>
               </a:rPr>
-              <a:t>З чого починаємо</a:t>
-            </a:r>
-          </a:p>
-        </p:txBody>
-      </p:sp>
-      <p:sp>
-        <p:nvSpPr>
-          <p:cNvPr id="5" name="TextBox 4"/>
-          <p:cNvSpPr txBox="1"/>
-          <p:nvPr/>
-        </p:nvSpPr>
-        <p:spPr>
-          <a:xfrm>
-            <a:off x="548640" y="1783080"/>
-            <a:ext cx="3840480" cy="365760"/>
-          </a:xfrm>
-          <a:prstGeom prst="rect">
-            <a:avLst/>
-          </a:prstGeom>
-          <a:noFill/>
-        </p:spPr>
-        <p:txBody>
-          <a:bodyPr wrap="square">
-            <a:spAutoFit/>
-          </a:bodyPr>
-          <a:lstStyle/>
-          <a:p>
-            <a:r>
-              <a:rPr sz="1400" b="1">
-                <a:solidFill>
-                  <a:srgbClr val="2F313F"/>
-                </a:solidFill>
-                <a:latin typeface="Arial"/>
-              </a:rPr>
-              <a:t>Топ-міста для старту</a:t>
-            </a:r>
-          </a:p>
-        </p:txBody>
-      </p:sp>
-      <p:sp>
-        <p:nvSpPr>
-          <p:cNvPr id="6" name="Rounded Rectangle 5"/>
+              <a:t>Промо-інструменти Bolt Food</a:t>
+            </a:r>
+          </a:p>
+        </p:txBody>
+      </p:sp>
+      <p:sp>
+        <p:nvSpPr>
+          <p:cNvPr id="5" name="Rounded Rectangle 4"/>
           <p:cNvSpPr/>
           <p:nvPr/>
         </p:nvSpPr>
         <p:spPr>
           <a:xfrm>
-            <a:off x="548640" y="2240280"/>
-            <a:ext cx="3840480" cy="384048"/>
+            <a:off x="548640" y="1645920"/>
+            <a:ext cx="1883664" cy="1417320"/>
           </a:xfrm>
           <a:prstGeom prst="roundRect">
             <a:avLst/>
@@ -8752,14 +8148,58 @@
       </p:sp>
       <p:sp>
         <p:nvSpPr>
+          <p:cNvPr id="6" name="Rounded Rectangle 5"/>
+          <p:cNvSpPr/>
+          <p:nvPr/>
+        </p:nvSpPr>
+        <p:spPr>
+          <a:xfrm>
+            <a:off x="694944" y="1792224"/>
+            <a:ext cx="365760" cy="365760"/>
+          </a:xfrm>
+          <a:prstGeom prst="roundRect">
+            <a:avLst/>
+          </a:prstGeom>
+          <a:solidFill>
+            <a:srgbClr val="34D186"/>
+          </a:solidFill>
+          <a:ln>
+            <a:noFill/>
+          </a:ln>
+          <a:effectLst/>
+        </p:spPr>
+        <p:style>
+          <a:lnRef idx="1">
+            <a:schemeClr val="accent1"/>
+          </a:lnRef>
+          <a:fillRef idx="3">
+            <a:schemeClr val="accent1"/>
+          </a:fillRef>
+          <a:effectRef idx="2">
+            <a:schemeClr val="accent1"/>
+          </a:effectRef>
+          <a:fontRef idx="minor">
+            <a:schemeClr val="lt1"/>
+          </a:fontRef>
+        </p:style>
+        <p:txBody>
+          <a:bodyPr rtlCol="0" anchor="ctr"/>
+          <a:lstStyle/>
+          <a:p>
+            <a:pPr algn="ctr"/>
+          </a:p>
+        </p:txBody>
+      </p:sp>
+      <p:sp>
+        <p:nvSpPr>
           <p:cNvPr id="7" name="TextBox 6"/>
           <p:cNvSpPr txBox="1"/>
           <p:nvPr/>
         </p:nvSpPr>
         <p:spPr>
           <a:xfrm>
-            <a:off x="713232" y="2276856"/>
-            <a:ext cx="3200400" cy="310896"/>
+            <a:off x="694944" y="1810512"/>
+            <a:ext cx="365760" cy="329184"/>
           </a:xfrm>
           <a:prstGeom prst="rect">
             <a:avLst/>
@@ -8772,14 +8212,15 @@
           </a:bodyPr>
           <a:lstStyle/>
           <a:p>
-            <a:r>
-              <a:rPr sz="1250" b="1">
-                <a:solidFill>
-                  <a:srgbClr val="2F313F"/>
-                </a:solidFill>
-                <a:latin typeface="Arial"/>
-              </a:rPr>
-              <a:t>Київ</a:t>
+            <a:pPr algn="ctr"/>
+            <a:r>
+              <a:rPr sz="1300" b="1">
+                <a:solidFill>
+                  <a:srgbClr val="FFFFFF"/>
+                </a:solidFill>
+                <a:latin typeface="Arial"/>
+              </a:rPr>
+              <a:t>1</a:t>
             </a:r>
           </a:p>
         </p:txBody>
@@ -8792,8 +8233,8 @@
         </p:nvSpPr>
         <p:spPr>
           <a:xfrm>
-            <a:off x="3566160" y="2276856"/>
-            <a:ext cx="731520" cy="310896"/>
+            <a:off x="676656" y="2212848"/>
+            <a:ext cx="1627632" cy="777240"/>
           </a:xfrm>
           <a:prstGeom prst="rect">
             <a:avLst/>
@@ -8806,15 +8247,25 @@
           </a:bodyPr>
           <a:lstStyle/>
           <a:p>
-            <a:pPr algn="r"/>
             <a:r>
               <a:rPr sz="1250" b="1">
                 <a:solidFill>
-                  <a:srgbClr val="34D186"/>
-                </a:solidFill>
-                <a:latin typeface="Arial"/>
-              </a:rPr>
-              <a:t>41%</a:t>
+                  <a:srgbClr val="2F313F"/>
+                </a:solidFill>
+                <a:latin typeface="Arial"/>
+              </a:rPr>
+              <a:t>Знижка на доставку</a:t>
+            </a:r>
+          </a:p>
+          <a:p>
+            <a:r>
+              <a:rPr sz="1000" b="0">
+                <a:solidFill>
+                  <a:srgbClr val="6B7080"/>
+                </a:solidFill>
+                <a:latin typeface="Arial"/>
+              </a:rPr>
+              <a:t>Частково або 0 ₴. №1 інструмент для залучення нових клієнтів.</a:t>
             </a:r>
           </a:p>
         </p:txBody>
@@ -8827,8 +8278,8 @@
         </p:nvSpPr>
         <p:spPr>
           <a:xfrm>
-            <a:off x="548640" y="2697480"/>
-            <a:ext cx="3840480" cy="384048"/>
+            <a:off x="2596896" y="1645920"/>
+            <a:ext cx="1883664" cy="1417320"/>
           </a:xfrm>
           <a:prstGeom prst="roundRect">
             <a:avLst/>
@@ -8865,14 +8316,58 @@
       </p:sp>
       <p:sp>
         <p:nvSpPr>
-          <p:cNvPr id="10" name="TextBox 9"/>
+          <p:cNvPr id="10" name="Rounded Rectangle 9"/>
+          <p:cNvSpPr/>
+          <p:nvPr/>
+        </p:nvSpPr>
+        <p:spPr>
+          <a:xfrm>
+            <a:off x="2743200" y="1792224"/>
+            <a:ext cx="365760" cy="365760"/>
+          </a:xfrm>
+          <a:prstGeom prst="roundRect">
+            <a:avLst/>
+          </a:prstGeom>
+          <a:solidFill>
+            <a:srgbClr val="34D186"/>
+          </a:solidFill>
+          <a:ln>
+            <a:noFill/>
+          </a:ln>
+          <a:effectLst/>
+        </p:spPr>
+        <p:style>
+          <a:lnRef idx="1">
+            <a:schemeClr val="accent1"/>
+          </a:lnRef>
+          <a:fillRef idx="3">
+            <a:schemeClr val="accent1"/>
+          </a:fillRef>
+          <a:effectRef idx="2">
+            <a:schemeClr val="accent1"/>
+          </a:effectRef>
+          <a:fontRef idx="minor">
+            <a:schemeClr val="lt1"/>
+          </a:fontRef>
+        </p:style>
+        <p:txBody>
+          <a:bodyPr rtlCol="0" anchor="ctr"/>
+          <a:lstStyle/>
+          <a:p>
+            <a:pPr algn="ctr"/>
+          </a:p>
+        </p:txBody>
+      </p:sp>
+      <p:sp>
+        <p:nvSpPr>
+          <p:cNvPr id="11" name="TextBox 10"/>
           <p:cNvSpPr txBox="1"/>
           <p:nvPr/>
         </p:nvSpPr>
         <p:spPr>
           <a:xfrm>
-            <a:off x="713232" y="2734056"/>
-            <a:ext cx="3200400" cy="310896"/>
+            <a:off x="2743200" y="1810512"/>
+            <a:ext cx="365760" cy="329184"/>
           </a:xfrm>
           <a:prstGeom prst="rect">
             <a:avLst/>
@@ -8885,28 +8380,29 @@
           </a:bodyPr>
           <a:lstStyle/>
           <a:p>
-            <a:r>
-              <a:rPr sz="1250" b="1">
-                <a:solidFill>
-                  <a:srgbClr val="2F313F"/>
-                </a:solidFill>
-                <a:latin typeface="Arial"/>
-              </a:rPr>
-              <a:t>Львів</a:t>
-            </a:r>
-          </a:p>
-        </p:txBody>
-      </p:sp>
-      <p:sp>
-        <p:nvSpPr>
-          <p:cNvPr id="11" name="TextBox 10"/>
+            <a:pPr algn="ctr"/>
+            <a:r>
+              <a:rPr sz="1300" b="1">
+                <a:solidFill>
+                  <a:srgbClr val="FFFFFF"/>
+                </a:solidFill>
+                <a:latin typeface="Arial"/>
+              </a:rPr>
+              <a:t>2</a:t>
+            </a:r>
+          </a:p>
+        </p:txBody>
+      </p:sp>
+      <p:sp>
+        <p:nvSpPr>
+          <p:cNvPr id="12" name="TextBox 11"/>
           <p:cNvSpPr txBox="1"/>
           <p:nvPr/>
         </p:nvSpPr>
         <p:spPr>
           <a:xfrm>
-            <a:off x="3566160" y="2734056"/>
-            <a:ext cx="731520" cy="310896"/>
+            <a:off x="2724912" y="2212848"/>
+            <a:ext cx="1627632" cy="777240"/>
           </a:xfrm>
           <a:prstGeom prst="rect">
             <a:avLst/>
@@ -8919,29 +8415,39 @@
           </a:bodyPr>
           <a:lstStyle/>
           <a:p>
-            <a:pPr algn="r"/>
             <a:r>
               <a:rPr sz="1250" b="1">
                 <a:solidFill>
-                  <a:srgbClr val="34D186"/>
-                </a:solidFill>
-                <a:latin typeface="Arial"/>
-              </a:rPr>
-              <a:t>13%</a:t>
-            </a:r>
-          </a:p>
-        </p:txBody>
-      </p:sp>
-      <p:sp>
-        <p:nvSpPr>
-          <p:cNvPr id="12" name="Rounded Rectangle 11"/>
+                  <a:srgbClr val="2F313F"/>
+                </a:solidFill>
+                <a:latin typeface="Arial"/>
+              </a:rPr>
+              <a:t>Знижки на меню</a:t>
+            </a:r>
+          </a:p>
+          <a:p>
+            <a:r>
+              <a:rPr sz="1000" b="0">
+                <a:solidFill>
+                  <a:srgbClr val="6B7080"/>
+                </a:solidFill>
+                <a:latin typeface="Arial"/>
+              </a:rPr>
+              <a:t>На окремі позиції або весь асортимент — через API або від Bolt.</a:t>
+            </a:r>
+          </a:p>
+        </p:txBody>
+      </p:sp>
+      <p:sp>
+        <p:nvSpPr>
+          <p:cNvPr id="13" name="Rounded Rectangle 12"/>
           <p:cNvSpPr/>
           <p:nvPr/>
         </p:nvSpPr>
         <p:spPr>
           <a:xfrm>
-            <a:off x="548640" y="3154680"/>
-            <a:ext cx="3840480" cy="384048"/>
+            <a:off x="4645152" y="1645920"/>
+            <a:ext cx="1883664" cy="1417320"/>
           </a:xfrm>
           <a:prstGeom prst="roundRect">
             <a:avLst/>
@@ -8978,14 +8484,58 @@
       </p:sp>
       <p:sp>
         <p:nvSpPr>
-          <p:cNvPr id="13" name="TextBox 12"/>
+          <p:cNvPr id="14" name="Rounded Rectangle 13"/>
+          <p:cNvSpPr/>
+          <p:nvPr/>
+        </p:nvSpPr>
+        <p:spPr>
+          <a:xfrm>
+            <a:off x="4791456" y="1792224"/>
+            <a:ext cx="365760" cy="365760"/>
+          </a:xfrm>
+          <a:prstGeom prst="roundRect">
+            <a:avLst/>
+          </a:prstGeom>
+          <a:solidFill>
+            <a:srgbClr val="34D186"/>
+          </a:solidFill>
+          <a:ln>
+            <a:noFill/>
+          </a:ln>
+          <a:effectLst/>
+        </p:spPr>
+        <p:style>
+          <a:lnRef idx="1">
+            <a:schemeClr val="accent1"/>
+          </a:lnRef>
+          <a:fillRef idx="3">
+            <a:schemeClr val="accent1"/>
+          </a:fillRef>
+          <a:effectRef idx="2">
+            <a:schemeClr val="accent1"/>
+          </a:effectRef>
+          <a:fontRef idx="minor">
+            <a:schemeClr val="lt1"/>
+          </a:fontRef>
+        </p:style>
+        <p:txBody>
+          <a:bodyPr rtlCol="0" anchor="ctr"/>
+          <a:lstStyle/>
+          <a:p>
+            <a:pPr algn="ctr"/>
+          </a:p>
+        </p:txBody>
+      </p:sp>
+      <p:sp>
+        <p:nvSpPr>
+          <p:cNvPr id="15" name="TextBox 14"/>
           <p:cNvSpPr txBox="1"/>
           <p:nvPr/>
         </p:nvSpPr>
         <p:spPr>
           <a:xfrm>
-            <a:off x="713232" y="3191256"/>
-            <a:ext cx="3200400" cy="310896"/>
+            <a:off x="4791456" y="1810512"/>
+            <a:ext cx="365760" cy="329184"/>
           </a:xfrm>
           <a:prstGeom prst="rect">
             <a:avLst/>
@@ -8998,28 +8548,29 @@
           </a:bodyPr>
           <a:lstStyle/>
           <a:p>
-            <a:r>
-              <a:rPr sz="1250" b="1">
-                <a:solidFill>
-                  <a:srgbClr val="2F313F"/>
-                </a:solidFill>
-                <a:latin typeface="Arial"/>
-              </a:rPr>
-              <a:t>Одеса</a:t>
-            </a:r>
-          </a:p>
-        </p:txBody>
-      </p:sp>
-      <p:sp>
-        <p:nvSpPr>
-          <p:cNvPr id="14" name="TextBox 13"/>
+            <a:pPr algn="ctr"/>
+            <a:r>
+              <a:rPr sz="1300" b="1">
+                <a:solidFill>
+                  <a:srgbClr val="FFFFFF"/>
+                </a:solidFill>
+                <a:latin typeface="Arial"/>
+              </a:rPr>
+              <a:t>3</a:t>
+            </a:r>
+          </a:p>
+        </p:txBody>
+      </p:sp>
+      <p:sp>
+        <p:nvSpPr>
+          <p:cNvPr id="16" name="TextBox 15"/>
           <p:cNvSpPr txBox="1"/>
           <p:nvPr/>
         </p:nvSpPr>
         <p:spPr>
           <a:xfrm>
-            <a:off x="3566160" y="3191256"/>
-            <a:ext cx="731520" cy="310896"/>
+            <a:off x="4773168" y="2212848"/>
+            <a:ext cx="1627632" cy="777240"/>
           </a:xfrm>
           <a:prstGeom prst="rect">
             <a:avLst/>
@@ -9032,29 +8583,39 @@
           </a:bodyPr>
           <a:lstStyle/>
           <a:p>
-            <a:pPr algn="r"/>
             <a:r>
               <a:rPr sz="1250" b="1">
                 <a:solidFill>
-                  <a:srgbClr val="34D186"/>
-                </a:solidFill>
-                <a:latin typeface="Arial"/>
-              </a:rPr>
-              <a:t>8%</a:t>
-            </a:r>
-          </a:p>
-        </p:txBody>
-      </p:sp>
-      <p:sp>
-        <p:nvSpPr>
-          <p:cNvPr id="15" name="Rounded Rectangle 14"/>
+                  <a:srgbClr val="2F313F"/>
+                </a:solidFill>
+                <a:latin typeface="Arial"/>
+              </a:rPr>
+              <a:t>Когорти</a:t>
+            </a:r>
+          </a:p>
+          <a:p>
+            <a:r>
+              <a:rPr sz="1000" b="0">
+                <a:solidFill>
+                  <a:srgbClr val="6B7080"/>
+                </a:solidFill>
+                <a:latin typeface="Arial"/>
+              </a:rPr>
+              <a:t>Таргет на Нових / Втрачених / Активних — різний розмір знижки.</a:t>
+            </a:r>
+          </a:p>
+        </p:txBody>
+      </p:sp>
+      <p:sp>
+        <p:nvSpPr>
+          <p:cNvPr id="17" name="Rounded Rectangle 16"/>
           <p:cNvSpPr/>
           <p:nvPr/>
         </p:nvSpPr>
         <p:spPr>
           <a:xfrm>
-            <a:off x="548640" y="3611880"/>
-            <a:ext cx="3840480" cy="384048"/>
+            <a:off x="6693408" y="1645920"/>
+            <a:ext cx="1883664" cy="1417320"/>
           </a:xfrm>
           <a:prstGeom prst="roundRect">
             <a:avLst/>
@@ -9091,14 +8652,58 @@
       </p:sp>
       <p:sp>
         <p:nvSpPr>
-          <p:cNvPr id="16" name="TextBox 15"/>
+          <p:cNvPr id="18" name="Rounded Rectangle 17"/>
+          <p:cNvSpPr/>
+          <p:nvPr/>
+        </p:nvSpPr>
+        <p:spPr>
+          <a:xfrm>
+            <a:off x="6839712" y="1792224"/>
+            <a:ext cx="365760" cy="365760"/>
+          </a:xfrm>
+          <a:prstGeom prst="roundRect">
+            <a:avLst/>
+          </a:prstGeom>
+          <a:solidFill>
+            <a:srgbClr val="34D186"/>
+          </a:solidFill>
+          <a:ln>
+            <a:noFill/>
+          </a:ln>
+          <a:effectLst/>
+        </p:spPr>
+        <p:style>
+          <a:lnRef idx="1">
+            <a:schemeClr val="accent1"/>
+          </a:lnRef>
+          <a:fillRef idx="3">
+            <a:schemeClr val="accent1"/>
+          </a:fillRef>
+          <a:effectRef idx="2">
+            <a:schemeClr val="accent1"/>
+          </a:effectRef>
+          <a:fontRef idx="minor">
+            <a:schemeClr val="lt1"/>
+          </a:fontRef>
+        </p:style>
+        <p:txBody>
+          <a:bodyPr rtlCol="0" anchor="ctr"/>
+          <a:lstStyle/>
+          <a:p>
+            <a:pPr algn="ctr"/>
+          </a:p>
+        </p:txBody>
+      </p:sp>
+      <p:sp>
+        <p:nvSpPr>
+          <p:cNvPr id="19" name="TextBox 18"/>
           <p:cNvSpPr txBox="1"/>
           <p:nvPr/>
         </p:nvSpPr>
         <p:spPr>
           <a:xfrm>
-            <a:off x="713232" y="3648456"/>
-            <a:ext cx="3200400" cy="310896"/>
+            <a:off x="6839712" y="1810512"/>
+            <a:ext cx="365760" cy="329184"/>
           </a:xfrm>
           <a:prstGeom prst="rect">
             <a:avLst/>
@@ -9111,28 +8716,29 @@
           </a:bodyPr>
           <a:lstStyle/>
           <a:p>
-            <a:r>
-              <a:rPr sz="1250" b="1">
-                <a:solidFill>
-                  <a:srgbClr val="2F313F"/>
-                </a:solidFill>
-                <a:latin typeface="Arial"/>
-              </a:rPr>
-              <a:t>Дніпро</a:t>
-            </a:r>
-          </a:p>
-        </p:txBody>
-      </p:sp>
-      <p:sp>
-        <p:nvSpPr>
-          <p:cNvPr id="17" name="TextBox 16"/>
+            <a:pPr algn="ctr"/>
+            <a:r>
+              <a:rPr sz="1300" b="1">
+                <a:solidFill>
+                  <a:srgbClr val="FFFFFF"/>
+                </a:solidFill>
+                <a:latin typeface="Arial"/>
+              </a:rPr>
+              <a:t>4</a:t>
+            </a:r>
+          </a:p>
+        </p:txBody>
+      </p:sp>
+      <p:sp>
+        <p:nvSpPr>
+          <p:cNvPr id="20" name="TextBox 19"/>
           <p:cNvSpPr txBox="1"/>
           <p:nvPr/>
         </p:nvSpPr>
         <p:spPr>
           <a:xfrm>
-            <a:off x="3566160" y="3648456"/>
-            <a:ext cx="731520" cy="310896"/>
+            <a:off x="6821424" y="2212848"/>
+            <a:ext cx="1627632" cy="777240"/>
           </a:xfrm>
           <a:prstGeom prst="rect">
             <a:avLst/>
@@ -9145,29 +8751,39 @@
           </a:bodyPr>
           <a:lstStyle/>
           <a:p>
-            <a:pPr algn="r"/>
             <a:r>
               <a:rPr sz="1250" b="1">
                 <a:solidFill>
-                  <a:srgbClr val="34D186"/>
-                </a:solidFill>
-                <a:latin typeface="Arial"/>
-              </a:rPr>
-              <a:t>4%</a:t>
-            </a:r>
-          </a:p>
-        </p:txBody>
-      </p:sp>
-      <p:sp>
-        <p:nvSpPr>
-          <p:cNvPr id="18" name="Rounded Rectangle 17"/>
+                  <a:srgbClr val="2F313F"/>
+                </a:solidFill>
+                <a:latin typeface="Arial"/>
+              </a:rPr>
+              <a:t>Банерна підтримка</a:t>
+            </a:r>
+          </a:p>
+          <a:p>
+            <a:r>
+              <a:rPr sz="1000" b="0">
+                <a:solidFill>
+                  <a:srgbClr val="6B7080"/>
+                </a:solidFill>
+                <a:latin typeface="Arial"/>
+              </a:rPr>
+              <a:t>Банер у вкладці «Магазини» в періоди активних акцій.</a:t>
+            </a:r>
+          </a:p>
+        </p:txBody>
+      </p:sp>
+      <p:sp>
+        <p:nvSpPr>
+          <p:cNvPr id="21" name="Rounded Rectangle 20"/>
           <p:cNvSpPr/>
           <p:nvPr/>
         </p:nvSpPr>
         <p:spPr>
           <a:xfrm>
-            <a:off x="548640" y="4069080"/>
-            <a:ext cx="3840480" cy="384048"/>
+            <a:off x="548640" y="3246120"/>
+            <a:ext cx="3886200" cy="1051560"/>
           </a:xfrm>
           <a:prstGeom prst="roundRect">
             <a:avLst/>
@@ -9204,119 +8820,16 @@
       </p:sp>
       <p:sp>
         <p:nvSpPr>
-          <p:cNvPr id="19" name="TextBox 18"/>
-          <p:cNvSpPr txBox="1"/>
-          <p:nvPr/>
-        </p:nvSpPr>
-        <p:spPr>
-          <a:xfrm>
-            <a:off x="713232" y="4105656"/>
-            <a:ext cx="3200400" cy="310896"/>
-          </a:xfrm>
-          <a:prstGeom prst="rect">
-            <a:avLst/>
-          </a:prstGeom>
-          <a:noFill/>
-        </p:spPr>
-        <p:txBody>
-          <a:bodyPr wrap="square">
-            <a:spAutoFit/>
-          </a:bodyPr>
-          <a:lstStyle/>
-          <a:p>
-            <a:r>
-              <a:rPr sz="1250" b="1">
-                <a:solidFill>
-                  <a:srgbClr val="2F313F"/>
-                </a:solidFill>
-                <a:latin typeface="Arial"/>
-              </a:rPr>
-              <a:t>Івано-Франківськ</a:t>
-            </a:r>
-          </a:p>
-        </p:txBody>
-      </p:sp>
-      <p:sp>
-        <p:nvSpPr>
-          <p:cNvPr id="20" name="TextBox 19"/>
-          <p:cNvSpPr txBox="1"/>
-          <p:nvPr/>
-        </p:nvSpPr>
-        <p:spPr>
-          <a:xfrm>
-            <a:off x="3566160" y="4105656"/>
-            <a:ext cx="731520" cy="310896"/>
-          </a:xfrm>
-          <a:prstGeom prst="rect">
-            <a:avLst/>
-          </a:prstGeom>
-          <a:noFill/>
-        </p:spPr>
-        <p:txBody>
-          <a:bodyPr wrap="square">
-            <a:spAutoFit/>
-          </a:bodyPr>
-          <a:lstStyle/>
-          <a:p>
-            <a:pPr algn="r"/>
-            <a:r>
-              <a:rPr sz="1250" b="1">
-                <a:solidFill>
-                  <a:srgbClr val="34D186"/>
-                </a:solidFill>
-                <a:latin typeface="Arial"/>
-              </a:rPr>
-              <a:t>3%</a:t>
-            </a:r>
-          </a:p>
-        </p:txBody>
-      </p:sp>
-      <p:sp>
-        <p:nvSpPr>
-          <p:cNvPr id="21" name="TextBox 20"/>
-          <p:cNvSpPr txBox="1"/>
-          <p:nvPr/>
-        </p:nvSpPr>
-        <p:spPr>
-          <a:xfrm>
-            <a:off x="4754880" y="1783080"/>
-            <a:ext cx="3840480" cy="365760"/>
-          </a:xfrm>
-          <a:prstGeom prst="rect">
-            <a:avLst/>
-          </a:prstGeom>
-          <a:noFill/>
-        </p:spPr>
-        <p:txBody>
-          <a:bodyPr wrap="square">
-            <a:spAutoFit/>
-          </a:bodyPr>
-          <a:lstStyle/>
-          <a:p>
-            <a:r>
-              <a:rPr sz="1400" b="1">
-                <a:solidFill>
-                  <a:srgbClr val="2F313F"/>
-                </a:solidFill>
-                <a:latin typeface="Arial"/>
-              </a:rPr>
-              <a:t>Наступні кроки</a:t>
-            </a:r>
-          </a:p>
-        </p:txBody>
-      </p:sp>
-      <p:sp>
-        <p:nvSpPr>
-          <p:cNvPr id="22" name="Rounded Rectangle 21"/>
+          <p:cNvPr id="22" name="Rectangle 21"/>
           <p:cNvSpPr/>
           <p:nvPr/>
         </p:nvSpPr>
         <p:spPr>
           <a:xfrm>
-            <a:off x="4754880" y="2240280"/>
-            <a:ext cx="292608" cy="292608"/>
-          </a:xfrm>
-          <a:prstGeom prst="roundRect">
+            <a:off x="548640" y="3246120"/>
+            <a:ext cx="82296" cy="1051560"/>
+          </a:xfrm>
+          <a:prstGeom prst="rect">
             <a:avLst/>
           </a:prstGeom>
           <a:solidFill>
@@ -9357,8 +8870,8 @@
         </p:nvSpPr>
         <p:spPr>
           <a:xfrm>
-            <a:off x="4754880" y="2221992"/>
-            <a:ext cx="292608" cy="292608"/>
+            <a:off x="777240" y="3383280"/>
+            <a:ext cx="3520440" cy="868680"/>
           </a:xfrm>
           <a:prstGeom prst="rect">
             <a:avLst/>
@@ -9371,69 +8884,45 @@
           </a:bodyPr>
           <a:lstStyle/>
           <a:p>
-            <a:pPr algn="ctr"/>
-            <a:r>
-              <a:rPr sz="1100" b="1">
-                <a:solidFill>
-                  <a:srgbClr val="FFFFFF"/>
-                </a:solidFill>
-                <a:latin typeface="Arial"/>
-              </a:rPr>
-              <a:t>1</a:t>
-            </a:r>
-          </a:p>
-        </p:txBody>
-      </p:sp>
-      <p:sp>
-        <p:nvSpPr>
-          <p:cNvPr id="24" name="TextBox 23"/>
-          <p:cNvSpPr txBox="1"/>
-          <p:nvPr/>
-        </p:nvSpPr>
-        <p:spPr>
-          <a:xfrm>
-            <a:off x="5166360" y="2203704"/>
-            <a:ext cx="3474720" cy="365760"/>
-          </a:xfrm>
-          <a:prstGeom prst="rect">
-            <a:avLst/>
-          </a:prstGeom>
-          <a:noFill/>
-        </p:spPr>
-        <p:txBody>
-          <a:bodyPr wrap="square">
-            <a:spAutoFit/>
-          </a:bodyPr>
-          <a:lstStyle/>
-          <a:p>
-            <a:r>
-              <a:rPr sz="1200" b="0">
+            <a:r>
+              <a:rPr sz="1250" b="1">
                 <a:solidFill>
                   <a:srgbClr val="2F313F"/>
                 </a:solidFill>
                 <a:latin typeface="Arial"/>
               </a:rPr>
-              <a:t>Підтвердити інтерес і scope пілоту</a:t>
-            </a:r>
-          </a:p>
-        </p:txBody>
-      </p:sp>
-      <p:sp>
-        <p:nvSpPr>
-          <p:cNvPr id="25" name="Rounded Rectangle 24"/>
+              <a:t>Рекомендований старт</a:t>
+            </a:r>
+          </a:p>
+          <a:p>
+            <a:r>
+              <a:rPr sz="1050" b="0">
+                <a:solidFill>
+                  <a:srgbClr val="6B7080"/>
+                </a:solidFill>
+                <a:latin typeface="Arial"/>
+              </a:rPr>
+              <a:t>Безкоштовна доставка для нових клієнтів + MOV трохи вищий за середній чек.</a:t>
+            </a:r>
+          </a:p>
+        </p:txBody>
+      </p:sp>
+      <p:sp>
+        <p:nvSpPr>
+          <p:cNvPr id="24" name="Rounded Rectangle 23"/>
           <p:cNvSpPr/>
           <p:nvPr/>
         </p:nvSpPr>
         <p:spPr>
           <a:xfrm>
-            <a:off x="4754880" y="2697480"/>
-            <a:ext cx="292608" cy="292608"/>
+            <a:off x="4709160" y="3246120"/>
+            <a:ext cx="3886200" cy="1051560"/>
           </a:xfrm>
           <a:prstGeom prst="roundRect">
             <a:avLst/>
           </a:prstGeom>
           <a:solidFill>
-            <a:srgbClr val="34D186"/>
+            <a:srgbClr val="EEF6F1"/>
           </a:solidFill>
           <a:ln>
             <a:noFill/>
@@ -9464,89 +8953,20 @@
       </p:sp>
       <p:sp>
         <p:nvSpPr>
-          <p:cNvPr id="26" name="TextBox 25"/>
-          <p:cNvSpPr txBox="1"/>
-          <p:nvPr/>
-        </p:nvSpPr>
-        <p:spPr>
-          <a:xfrm>
-            <a:off x="4754880" y="2679192"/>
-            <a:ext cx="292608" cy="292608"/>
-          </a:xfrm>
-          <a:prstGeom prst="rect">
-            <a:avLst/>
-          </a:prstGeom>
-          <a:noFill/>
-        </p:spPr>
-        <p:txBody>
-          <a:bodyPr wrap="square">
-            <a:spAutoFit/>
-          </a:bodyPr>
-          <a:lstStyle/>
-          <a:p>
-            <a:pPr algn="ctr"/>
-            <a:r>
-              <a:rPr sz="1100" b="1">
-                <a:solidFill>
-                  <a:srgbClr val="FFFFFF"/>
-                </a:solidFill>
-                <a:latin typeface="Arial"/>
-              </a:rPr>
-              <a:t>2</a:t>
-            </a:r>
-          </a:p>
-        </p:txBody>
-      </p:sp>
-      <p:sp>
-        <p:nvSpPr>
-          <p:cNvPr id="27" name="TextBox 26"/>
-          <p:cNvSpPr txBox="1"/>
-          <p:nvPr/>
-        </p:nvSpPr>
-        <p:spPr>
-          <a:xfrm>
-            <a:off x="5166360" y="2660904"/>
-            <a:ext cx="3474720" cy="365760"/>
-          </a:xfrm>
-          <a:prstGeom prst="rect">
-            <a:avLst/>
-          </a:prstGeom>
-          <a:noFill/>
-        </p:spPr>
-        <p:txBody>
-          <a:bodyPr wrap="square">
-            <a:spAutoFit/>
-          </a:bodyPr>
-          <a:lstStyle/>
-          <a:p>
-            <a:r>
-              <a:rPr sz="1200" b="0">
-                <a:solidFill>
-                  <a:srgbClr val="2F313F"/>
-                </a:solidFill>
-                <a:latin typeface="Arial"/>
-              </a:rPr>
-              <a:t>Інтеграція каталогу та цін</a:t>
-            </a:r>
-          </a:p>
-        </p:txBody>
-      </p:sp>
-      <p:sp>
-        <p:nvSpPr>
-          <p:cNvPr id="28" name="Rounded Rectangle 27"/>
+          <p:cNvPr id="25" name="Rectangle 24"/>
           <p:cNvSpPr/>
           <p:nvPr/>
         </p:nvSpPr>
         <p:spPr>
           <a:xfrm>
-            <a:off x="4754880" y="3154680"/>
-            <a:ext cx="292608" cy="292608"/>
-          </a:xfrm>
-          <a:prstGeom prst="roundRect">
+            <a:off x="4709160" y="3246120"/>
+            <a:ext cx="82296" cy="1051560"/>
+          </a:xfrm>
+          <a:prstGeom prst="rect">
             <a:avLst/>
           </a:prstGeom>
           <a:solidFill>
-            <a:srgbClr val="34D186"/>
+            <a:srgbClr val="2F313F"/>
           </a:solidFill>
           <a:ln>
             <a:noFill/>
@@ -9577,14 +8997,14 @@
       </p:sp>
       <p:sp>
         <p:nvSpPr>
-          <p:cNvPr id="29" name="TextBox 28"/>
+          <p:cNvPr id="26" name="TextBox 25"/>
           <p:cNvSpPr txBox="1"/>
           <p:nvPr/>
         </p:nvSpPr>
         <p:spPr>
           <a:xfrm>
-            <a:off x="4754880" y="3136392"/>
-            <a:ext cx="292608" cy="292608"/>
+            <a:off x="4937760" y="3383280"/>
+            <a:ext cx="3520440" cy="868680"/>
           </a:xfrm>
           <a:prstGeom prst="rect">
             <a:avLst/>
@@ -9597,29 +9017,39 @@
           </a:bodyPr>
           <a:lstStyle/>
           <a:p>
-            <a:pPr algn="ctr"/>
-            <a:r>
-              <a:rPr sz="1100" b="1">
-                <a:solidFill>
-                  <a:srgbClr val="FFFFFF"/>
-                </a:solidFill>
-                <a:latin typeface="Arial"/>
-              </a:rPr>
-              <a:t>3</a:t>
-            </a:r>
-          </a:p>
-        </p:txBody>
-      </p:sp>
-      <p:sp>
-        <p:nvSpPr>
-          <p:cNvPr id="30" name="TextBox 29"/>
+            <a:r>
+              <a:rPr sz="1250" b="1">
+                <a:solidFill>
+                  <a:srgbClr val="2F313F"/>
+                </a:solidFill>
+                <a:latin typeface="Arial"/>
+              </a:rPr>
+              <a:t>Оподаткування (ПДВ)</a:t>
+            </a:r>
+          </a:p>
+          <a:p>
+            <a:r>
+              <a:rPr sz="1050" b="0">
+                <a:solidFill>
+                  <a:srgbClr val="6B7080"/>
+                </a:solidFill>
+                <a:latin typeface="Arial"/>
+              </a:rPr>
+              <a:t>Знижки через Bolt → +20% ПДВ. Через API (зміна цін партнером) → без ПДВ.</a:t>
+            </a:r>
+          </a:p>
+        </p:txBody>
+      </p:sp>
+      <p:sp>
+        <p:nvSpPr>
+          <p:cNvPr id="27" name="TextBox 26"/>
           <p:cNvSpPr txBox="1"/>
           <p:nvPr/>
         </p:nvSpPr>
         <p:spPr>
           <a:xfrm>
-            <a:off x="5166360" y="3118104"/>
-            <a:ext cx="3474720" cy="365760"/>
+            <a:off x="457200" y="4736592"/>
+            <a:ext cx="8229600" cy="274320"/>
           </a:xfrm>
           <a:prstGeom prst="rect">
             <a:avLst/>
@@ -9633,239 +9063,13 @@
           <a:lstStyle/>
           <a:p>
             <a:r>
-              <a:rPr sz="1200" b="0">
-                <a:solidFill>
-                  <a:srgbClr val="2F313F"/>
-                </a:solidFill>
-                <a:latin typeface="Arial"/>
-              </a:rPr>
-              <a:t>Запуск у топ-3 містах</a:t>
-            </a:r>
-          </a:p>
-        </p:txBody>
-      </p:sp>
-      <p:sp>
-        <p:nvSpPr>
-          <p:cNvPr id="31" name="Rounded Rectangle 30"/>
-          <p:cNvSpPr/>
-          <p:nvPr/>
-        </p:nvSpPr>
-        <p:spPr>
-          <a:xfrm>
-            <a:off x="4754880" y="3611880"/>
-            <a:ext cx="292608" cy="292608"/>
-          </a:xfrm>
-          <a:prstGeom prst="roundRect">
-            <a:avLst/>
-          </a:prstGeom>
-          <a:solidFill>
-            <a:srgbClr val="34D186"/>
-          </a:solidFill>
-          <a:ln>
-            <a:noFill/>
-          </a:ln>
-          <a:effectLst/>
-        </p:spPr>
-        <p:style>
-          <a:lnRef idx="1">
-            <a:schemeClr val="accent1"/>
-          </a:lnRef>
-          <a:fillRef idx="3">
-            <a:schemeClr val="accent1"/>
-          </a:fillRef>
-          <a:effectRef idx="2">
-            <a:schemeClr val="accent1"/>
-          </a:effectRef>
-          <a:fontRef idx="minor">
-            <a:schemeClr val="lt1"/>
-          </a:fontRef>
-        </p:style>
-        <p:txBody>
-          <a:bodyPr rtlCol="0" anchor="ctr"/>
-          <a:lstStyle/>
-          <a:p>
-            <a:pPr algn="ctr"/>
-          </a:p>
-        </p:txBody>
-      </p:sp>
-      <p:sp>
-        <p:nvSpPr>
-          <p:cNvPr id="32" name="TextBox 31"/>
-          <p:cNvSpPr txBox="1"/>
-          <p:nvPr/>
-        </p:nvSpPr>
-        <p:spPr>
-          <a:xfrm>
-            <a:off x="4754880" y="3593592"/>
-            <a:ext cx="292608" cy="292608"/>
-          </a:xfrm>
-          <a:prstGeom prst="rect">
-            <a:avLst/>
-          </a:prstGeom>
-          <a:noFill/>
-        </p:spPr>
-        <p:txBody>
-          <a:bodyPr wrap="square">
-            <a:spAutoFit/>
-          </a:bodyPr>
-          <a:lstStyle/>
-          <a:p>
-            <a:pPr algn="ctr"/>
-            <a:r>
-              <a:rPr sz="1100" b="1">
-                <a:solidFill>
-                  <a:srgbClr val="FFFFFF"/>
-                </a:solidFill>
-                <a:latin typeface="Arial"/>
-              </a:rPr>
-              <a:t>4</a:t>
-            </a:r>
-          </a:p>
-        </p:txBody>
-      </p:sp>
-      <p:sp>
-        <p:nvSpPr>
-          <p:cNvPr id="33" name="TextBox 32"/>
-          <p:cNvSpPr txBox="1"/>
-          <p:nvPr/>
-        </p:nvSpPr>
-        <p:spPr>
-          <a:xfrm>
-            <a:off x="5166360" y="3575304"/>
-            <a:ext cx="3474720" cy="365760"/>
-          </a:xfrm>
-          <a:prstGeom prst="rect">
-            <a:avLst/>
-          </a:prstGeom>
-          <a:noFill/>
-        </p:spPr>
-        <p:txBody>
-          <a:bodyPr wrap="square">
-            <a:spAutoFit/>
-          </a:bodyPr>
-          <a:lstStyle/>
-          <a:p>
-            <a:r>
-              <a:rPr sz="1200" b="0">
-                <a:solidFill>
-                  <a:srgbClr val="2F313F"/>
-                </a:solidFill>
-                <a:latin typeface="Arial"/>
-              </a:rPr>
-              <a:t>Спільний маркетинг на старті</a:t>
-            </a:r>
-          </a:p>
-        </p:txBody>
-      </p:sp>
-      <p:sp>
-        <p:nvSpPr>
-          <p:cNvPr id="34" name="Rounded Rectangle 33"/>
-          <p:cNvSpPr/>
-          <p:nvPr/>
-        </p:nvSpPr>
-        <p:spPr>
-          <a:xfrm>
-            <a:off x="4754880" y="4069080"/>
-            <a:ext cx="292608" cy="292608"/>
-          </a:xfrm>
-          <a:prstGeom prst="roundRect">
-            <a:avLst/>
-          </a:prstGeom>
-          <a:solidFill>
-            <a:srgbClr val="34D186"/>
-          </a:solidFill>
-          <a:ln>
-            <a:noFill/>
-          </a:ln>
-          <a:effectLst/>
-        </p:spPr>
-        <p:style>
-          <a:lnRef idx="1">
-            <a:schemeClr val="accent1"/>
-          </a:lnRef>
-          <a:fillRef idx="3">
-            <a:schemeClr val="accent1"/>
-          </a:fillRef>
-          <a:effectRef idx="2">
-            <a:schemeClr val="accent1"/>
-          </a:effectRef>
-          <a:fontRef idx="minor">
-            <a:schemeClr val="lt1"/>
-          </a:fontRef>
-        </p:style>
-        <p:txBody>
-          <a:bodyPr rtlCol="0" anchor="ctr"/>
-          <a:lstStyle/>
-          <a:p>
-            <a:pPr algn="ctr"/>
-          </a:p>
-        </p:txBody>
-      </p:sp>
-      <p:sp>
-        <p:nvSpPr>
-          <p:cNvPr id="35" name="TextBox 34"/>
-          <p:cNvSpPr txBox="1"/>
-          <p:nvPr/>
-        </p:nvSpPr>
-        <p:spPr>
-          <a:xfrm>
-            <a:off x="4754880" y="4050792"/>
-            <a:ext cx="292608" cy="292608"/>
-          </a:xfrm>
-          <a:prstGeom prst="rect">
-            <a:avLst/>
-          </a:prstGeom>
-          <a:noFill/>
-        </p:spPr>
-        <p:txBody>
-          <a:bodyPr wrap="square">
-            <a:spAutoFit/>
-          </a:bodyPr>
-          <a:lstStyle/>
-          <a:p>
-            <a:pPr algn="ctr"/>
-            <a:r>
-              <a:rPr sz="1100" b="1">
-                <a:solidFill>
-                  <a:srgbClr val="FFFFFF"/>
-                </a:solidFill>
-                <a:latin typeface="Arial"/>
-              </a:rPr>
-              <a:t>5</a:t>
-            </a:r>
-          </a:p>
-        </p:txBody>
-      </p:sp>
-      <p:sp>
-        <p:nvSpPr>
-          <p:cNvPr id="36" name="TextBox 35"/>
-          <p:cNvSpPr txBox="1"/>
-          <p:nvPr/>
-        </p:nvSpPr>
-        <p:spPr>
-          <a:xfrm>
-            <a:off x="5166360" y="4032504"/>
-            <a:ext cx="3474720" cy="365760"/>
-          </a:xfrm>
-          <a:prstGeom prst="rect">
-            <a:avLst/>
-          </a:prstGeom>
-          <a:noFill/>
-        </p:spPr>
-        <p:txBody>
-          <a:bodyPr wrap="square">
-            <a:spAutoFit/>
-          </a:bodyPr>
-          <a:lstStyle/>
-          <a:p>
-            <a:r>
-              <a:rPr sz="1200" b="0">
-                <a:solidFill>
-                  <a:srgbClr val="2F313F"/>
-                </a:solidFill>
-                <a:latin typeface="Arial"/>
-              </a:rPr>
-              <a:t>Огляд результатів через 4 тижні</a:t>
+              <a:rPr sz="850" b="0">
+                <a:solidFill>
+                  <a:srgbClr val="6B7080"/>
+                </a:solidFill>
+                <a:latin typeface="Arial"/>
+              </a:rPr>
+              <a:t>Джерело: гайд «Промо-активності на Bolt Food» для партнерів (Україна)</a:t>
             </a:r>
           </a:p>
         </p:txBody>
@@ -10638,6 +9842,1343 @@
 </file>
 
 <file path=ppt/slides/slide20.xml><?xml version="1.0" encoding="utf-8"?>
+<p:sld xmlns:a="http://schemas.openxmlformats.org/drawingml/2006/main" xmlns:p="http://schemas.openxmlformats.org/presentationml/2006/main" xmlns:r="http://schemas.openxmlformats.org/officeDocument/2006/relationships">
+  <p:cSld>
+    <p:bg>
+      <p:bgPr>
+        <a:solidFill>
+          <a:srgbClr val="FFFFFF"/>
+        </a:solidFill>
+        <a:effectLst/>
+      </p:bgPr>
+    </p:bg>
+    <p:spTree>
+      <p:nvGrpSpPr>
+        <p:cNvPr id="1" name=""/>
+        <p:cNvGrpSpPr/>
+        <p:nvPr/>
+      </p:nvGrpSpPr>
+      <p:grpSpPr/>
+      <p:pic>
+        <p:nvPicPr>
+          <p:cNvPr id="2" name="Picture 1" descr="bolt_food_logo.png"/>
+          <p:cNvPicPr>
+            <a:picLocks noChangeAspect="1"/>
+          </p:cNvPicPr>
+          <p:nvPr/>
+        </p:nvPicPr>
+        <p:blipFill>
+          <a:blip r:embed="rId2"/>
+          <a:stretch>
+            <a:fillRect/>
+          </a:stretch>
+        </p:blipFill>
+        <p:spPr>
+          <a:xfrm>
+            <a:off x="7543800" y="292608"/>
+            <a:ext cx="1280160" cy="508814"/>
+          </a:xfrm>
+          <a:prstGeom prst="rect">
+            <a:avLst/>
+          </a:prstGeom>
+        </p:spPr>
+      </p:pic>
+      <p:sp>
+        <p:nvSpPr>
+          <p:cNvPr id="3" name="Rectangle 2"/>
+          <p:cNvSpPr/>
+          <p:nvPr/>
+        </p:nvSpPr>
+        <p:spPr>
+          <a:xfrm>
+            <a:off x="502920" y="502920"/>
+            <a:ext cx="457200" cy="64008"/>
+          </a:xfrm>
+          <a:prstGeom prst="rect">
+            <a:avLst/>
+          </a:prstGeom>
+          <a:solidFill>
+            <a:srgbClr val="34D186"/>
+          </a:solidFill>
+          <a:ln>
+            <a:noFill/>
+          </a:ln>
+          <a:effectLst/>
+        </p:spPr>
+        <p:style>
+          <a:lnRef idx="1">
+            <a:schemeClr val="accent1"/>
+          </a:lnRef>
+          <a:fillRef idx="3">
+            <a:schemeClr val="accent1"/>
+          </a:fillRef>
+          <a:effectRef idx="2">
+            <a:schemeClr val="accent1"/>
+          </a:effectRef>
+          <a:fontRef idx="minor">
+            <a:schemeClr val="lt1"/>
+          </a:fontRef>
+        </p:style>
+        <p:txBody>
+          <a:bodyPr rtlCol="0" anchor="ctr"/>
+          <a:lstStyle/>
+          <a:p>
+            <a:pPr algn="ctr"/>
+          </a:p>
+        </p:txBody>
+      </p:sp>
+      <p:sp>
+        <p:nvSpPr>
+          <p:cNvPr id="4" name="TextBox 3"/>
+          <p:cNvSpPr txBox="1"/>
+          <p:nvPr/>
+        </p:nvSpPr>
+        <p:spPr>
+          <a:xfrm>
+            <a:off x="457200" y="612648"/>
+            <a:ext cx="8229600" cy="1097280"/>
+          </a:xfrm>
+          <a:prstGeom prst="rect">
+            <a:avLst/>
+          </a:prstGeom>
+          <a:noFill/>
+        </p:spPr>
+        <p:txBody>
+          <a:bodyPr wrap="square">
+            <a:spAutoFit/>
+          </a:bodyPr>
+          <a:lstStyle/>
+          <a:p>
+            <a:r>
+              <a:rPr sz="1200" b="1">
+                <a:solidFill>
+                  <a:srgbClr val="34D186"/>
+                </a:solidFill>
+                <a:latin typeface="Arial"/>
+              </a:rPr>
+              <a:t>ЗАПУСК</a:t>
+            </a:r>
+          </a:p>
+          <a:p>
+            <a:r>
+              <a:rPr sz="2700" b="1">
+                <a:solidFill>
+                  <a:srgbClr val="2F313F"/>
+                </a:solidFill>
+                <a:latin typeface="Arial"/>
+              </a:rPr>
+              <a:t>З чого починаємо</a:t>
+            </a:r>
+          </a:p>
+        </p:txBody>
+      </p:sp>
+      <p:sp>
+        <p:nvSpPr>
+          <p:cNvPr id="5" name="TextBox 4"/>
+          <p:cNvSpPr txBox="1"/>
+          <p:nvPr/>
+        </p:nvSpPr>
+        <p:spPr>
+          <a:xfrm>
+            <a:off x="548640" y="1783080"/>
+            <a:ext cx="3840480" cy="365760"/>
+          </a:xfrm>
+          <a:prstGeom prst="rect">
+            <a:avLst/>
+          </a:prstGeom>
+          <a:noFill/>
+        </p:spPr>
+        <p:txBody>
+          <a:bodyPr wrap="square">
+            <a:spAutoFit/>
+          </a:bodyPr>
+          <a:lstStyle/>
+          <a:p>
+            <a:r>
+              <a:rPr sz="1400" b="1">
+                <a:solidFill>
+                  <a:srgbClr val="2F313F"/>
+                </a:solidFill>
+                <a:latin typeface="Arial"/>
+              </a:rPr>
+              <a:t>Топ-міста для старту</a:t>
+            </a:r>
+          </a:p>
+        </p:txBody>
+      </p:sp>
+      <p:sp>
+        <p:nvSpPr>
+          <p:cNvPr id="6" name="Rounded Rectangle 5"/>
+          <p:cNvSpPr/>
+          <p:nvPr/>
+        </p:nvSpPr>
+        <p:spPr>
+          <a:xfrm>
+            <a:off x="548640" y="2240280"/>
+            <a:ext cx="3840480" cy="384048"/>
+          </a:xfrm>
+          <a:prstGeom prst="roundRect">
+            <a:avLst/>
+          </a:prstGeom>
+          <a:solidFill>
+            <a:srgbClr val="EEF6F1"/>
+          </a:solidFill>
+          <a:ln>
+            <a:noFill/>
+          </a:ln>
+          <a:effectLst/>
+        </p:spPr>
+        <p:style>
+          <a:lnRef idx="1">
+            <a:schemeClr val="accent1"/>
+          </a:lnRef>
+          <a:fillRef idx="3">
+            <a:schemeClr val="accent1"/>
+          </a:fillRef>
+          <a:effectRef idx="2">
+            <a:schemeClr val="accent1"/>
+          </a:effectRef>
+          <a:fontRef idx="minor">
+            <a:schemeClr val="lt1"/>
+          </a:fontRef>
+        </p:style>
+        <p:txBody>
+          <a:bodyPr rtlCol="0" anchor="ctr"/>
+          <a:lstStyle/>
+          <a:p>
+            <a:pPr algn="ctr"/>
+          </a:p>
+        </p:txBody>
+      </p:sp>
+      <p:sp>
+        <p:nvSpPr>
+          <p:cNvPr id="7" name="TextBox 6"/>
+          <p:cNvSpPr txBox="1"/>
+          <p:nvPr/>
+        </p:nvSpPr>
+        <p:spPr>
+          <a:xfrm>
+            <a:off x="713232" y="2276856"/>
+            <a:ext cx="3200400" cy="310896"/>
+          </a:xfrm>
+          <a:prstGeom prst="rect">
+            <a:avLst/>
+          </a:prstGeom>
+          <a:noFill/>
+        </p:spPr>
+        <p:txBody>
+          <a:bodyPr wrap="square">
+            <a:spAutoFit/>
+          </a:bodyPr>
+          <a:lstStyle/>
+          <a:p>
+            <a:r>
+              <a:rPr sz="1250" b="1">
+                <a:solidFill>
+                  <a:srgbClr val="2F313F"/>
+                </a:solidFill>
+                <a:latin typeface="Arial"/>
+              </a:rPr>
+              <a:t>Київ</a:t>
+            </a:r>
+          </a:p>
+        </p:txBody>
+      </p:sp>
+      <p:sp>
+        <p:nvSpPr>
+          <p:cNvPr id="8" name="TextBox 7"/>
+          <p:cNvSpPr txBox="1"/>
+          <p:nvPr/>
+        </p:nvSpPr>
+        <p:spPr>
+          <a:xfrm>
+            <a:off x="3566160" y="2276856"/>
+            <a:ext cx="731520" cy="310896"/>
+          </a:xfrm>
+          <a:prstGeom prst="rect">
+            <a:avLst/>
+          </a:prstGeom>
+          <a:noFill/>
+        </p:spPr>
+        <p:txBody>
+          <a:bodyPr wrap="square">
+            <a:spAutoFit/>
+          </a:bodyPr>
+          <a:lstStyle/>
+          <a:p>
+            <a:pPr algn="r"/>
+            <a:r>
+              <a:rPr sz="1250" b="1">
+                <a:solidFill>
+                  <a:srgbClr val="34D186"/>
+                </a:solidFill>
+                <a:latin typeface="Arial"/>
+              </a:rPr>
+              <a:t>41%</a:t>
+            </a:r>
+          </a:p>
+        </p:txBody>
+      </p:sp>
+      <p:sp>
+        <p:nvSpPr>
+          <p:cNvPr id="9" name="Rounded Rectangle 8"/>
+          <p:cNvSpPr/>
+          <p:nvPr/>
+        </p:nvSpPr>
+        <p:spPr>
+          <a:xfrm>
+            <a:off x="548640" y="2697480"/>
+            <a:ext cx="3840480" cy="384048"/>
+          </a:xfrm>
+          <a:prstGeom prst="roundRect">
+            <a:avLst/>
+          </a:prstGeom>
+          <a:solidFill>
+            <a:srgbClr val="EEF6F1"/>
+          </a:solidFill>
+          <a:ln>
+            <a:noFill/>
+          </a:ln>
+          <a:effectLst/>
+        </p:spPr>
+        <p:style>
+          <a:lnRef idx="1">
+            <a:schemeClr val="accent1"/>
+          </a:lnRef>
+          <a:fillRef idx="3">
+            <a:schemeClr val="accent1"/>
+          </a:fillRef>
+          <a:effectRef idx="2">
+            <a:schemeClr val="accent1"/>
+          </a:effectRef>
+          <a:fontRef idx="minor">
+            <a:schemeClr val="lt1"/>
+          </a:fontRef>
+        </p:style>
+        <p:txBody>
+          <a:bodyPr rtlCol="0" anchor="ctr"/>
+          <a:lstStyle/>
+          <a:p>
+            <a:pPr algn="ctr"/>
+          </a:p>
+        </p:txBody>
+      </p:sp>
+      <p:sp>
+        <p:nvSpPr>
+          <p:cNvPr id="10" name="TextBox 9"/>
+          <p:cNvSpPr txBox="1"/>
+          <p:nvPr/>
+        </p:nvSpPr>
+        <p:spPr>
+          <a:xfrm>
+            <a:off x="713232" y="2734056"/>
+            <a:ext cx="3200400" cy="310896"/>
+          </a:xfrm>
+          <a:prstGeom prst="rect">
+            <a:avLst/>
+          </a:prstGeom>
+          <a:noFill/>
+        </p:spPr>
+        <p:txBody>
+          <a:bodyPr wrap="square">
+            <a:spAutoFit/>
+          </a:bodyPr>
+          <a:lstStyle/>
+          <a:p>
+            <a:r>
+              <a:rPr sz="1250" b="1">
+                <a:solidFill>
+                  <a:srgbClr val="2F313F"/>
+                </a:solidFill>
+                <a:latin typeface="Arial"/>
+              </a:rPr>
+              <a:t>Львів</a:t>
+            </a:r>
+          </a:p>
+        </p:txBody>
+      </p:sp>
+      <p:sp>
+        <p:nvSpPr>
+          <p:cNvPr id="11" name="TextBox 10"/>
+          <p:cNvSpPr txBox="1"/>
+          <p:nvPr/>
+        </p:nvSpPr>
+        <p:spPr>
+          <a:xfrm>
+            <a:off x="3566160" y="2734056"/>
+            <a:ext cx="731520" cy="310896"/>
+          </a:xfrm>
+          <a:prstGeom prst="rect">
+            <a:avLst/>
+          </a:prstGeom>
+          <a:noFill/>
+        </p:spPr>
+        <p:txBody>
+          <a:bodyPr wrap="square">
+            <a:spAutoFit/>
+          </a:bodyPr>
+          <a:lstStyle/>
+          <a:p>
+            <a:pPr algn="r"/>
+            <a:r>
+              <a:rPr sz="1250" b="1">
+                <a:solidFill>
+                  <a:srgbClr val="34D186"/>
+                </a:solidFill>
+                <a:latin typeface="Arial"/>
+              </a:rPr>
+              <a:t>13%</a:t>
+            </a:r>
+          </a:p>
+        </p:txBody>
+      </p:sp>
+      <p:sp>
+        <p:nvSpPr>
+          <p:cNvPr id="12" name="Rounded Rectangle 11"/>
+          <p:cNvSpPr/>
+          <p:nvPr/>
+        </p:nvSpPr>
+        <p:spPr>
+          <a:xfrm>
+            <a:off x="548640" y="3154680"/>
+            <a:ext cx="3840480" cy="384048"/>
+          </a:xfrm>
+          <a:prstGeom prst="roundRect">
+            <a:avLst/>
+          </a:prstGeom>
+          <a:solidFill>
+            <a:srgbClr val="EEF6F1"/>
+          </a:solidFill>
+          <a:ln>
+            <a:noFill/>
+          </a:ln>
+          <a:effectLst/>
+        </p:spPr>
+        <p:style>
+          <a:lnRef idx="1">
+            <a:schemeClr val="accent1"/>
+          </a:lnRef>
+          <a:fillRef idx="3">
+            <a:schemeClr val="accent1"/>
+          </a:fillRef>
+          <a:effectRef idx="2">
+            <a:schemeClr val="accent1"/>
+          </a:effectRef>
+          <a:fontRef idx="minor">
+            <a:schemeClr val="lt1"/>
+          </a:fontRef>
+        </p:style>
+        <p:txBody>
+          <a:bodyPr rtlCol="0" anchor="ctr"/>
+          <a:lstStyle/>
+          <a:p>
+            <a:pPr algn="ctr"/>
+          </a:p>
+        </p:txBody>
+      </p:sp>
+      <p:sp>
+        <p:nvSpPr>
+          <p:cNvPr id="13" name="TextBox 12"/>
+          <p:cNvSpPr txBox="1"/>
+          <p:nvPr/>
+        </p:nvSpPr>
+        <p:spPr>
+          <a:xfrm>
+            <a:off x="713232" y="3191256"/>
+            <a:ext cx="3200400" cy="310896"/>
+          </a:xfrm>
+          <a:prstGeom prst="rect">
+            <a:avLst/>
+          </a:prstGeom>
+          <a:noFill/>
+        </p:spPr>
+        <p:txBody>
+          <a:bodyPr wrap="square">
+            <a:spAutoFit/>
+          </a:bodyPr>
+          <a:lstStyle/>
+          <a:p>
+            <a:r>
+              <a:rPr sz="1250" b="1">
+                <a:solidFill>
+                  <a:srgbClr val="2F313F"/>
+                </a:solidFill>
+                <a:latin typeface="Arial"/>
+              </a:rPr>
+              <a:t>Одеса</a:t>
+            </a:r>
+          </a:p>
+        </p:txBody>
+      </p:sp>
+      <p:sp>
+        <p:nvSpPr>
+          <p:cNvPr id="14" name="TextBox 13"/>
+          <p:cNvSpPr txBox="1"/>
+          <p:nvPr/>
+        </p:nvSpPr>
+        <p:spPr>
+          <a:xfrm>
+            <a:off x="3566160" y="3191256"/>
+            <a:ext cx="731520" cy="310896"/>
+          </a:xfrm>
+          <a:prstGeom prst="rect">
+            <a:avLst/>
+          </a:prstGeom>
+          <a:noFill/>
+        </p:spPr>
+        <p:txBody>
+          <a:bodyPr wrap="square">
+            <a:spAutoFit/>
+          </a:bodyPr>
+          <a:lstStyle/>
+          <a:p>
+            <a:pPr algn="r"/>
+            <a:r>
+              <a:rPr sz="1250" b="1">
+                <a:solidFill>
+                  <a:srgbClr val="34D186"/>
+                </a:solidFill>
+                <a:latin typeface="Arial"/>
+              </a:rPr>
+              <a:t>8%</a:t>
+            </a:r>
+          </a:p>
+        </p:txBody>
+      </p:sp>
+      <p:sp>
+        <p:nvSpPr>
+          <p:cNvPr id="15" name="Rounded Rectangle 14"/>
+          <p:cNvSpPr/>
+          <p:nvPr/>
+        </p:nvSpPr>
+        <p:spPr>
+          <a:xfrm>
+            <a:off x="548640" y="3611880"/>
+            <a:ext cx="3840480" cy="384048"/>
+          </a:xfrm>
+          <a:prstGeom prst="roundRect">
+            <a:avLst/>
+          </a:prstGeom>
+          <a:solidFill>
+            <a:srgbClr val="EEF6F1"/>
+          </a:solidFill>
+          <a:ln>
+            <a:noFill/>
+          </a:ln>
+          <a:effectLst/>
+        </p:spPr>
+        <p:style>
+          <a:lnRef idx="1">
+            <a:schemeClr val="accent1"/>
+          </a:lnRef>
+          <a:fillRef idx="3">
+            <a:schemeClr val="accent1"/>
+          </a:fillRef>
+          <a:effectRef idx="2">
+            <a:schemeClr val="accent1"/>
+          </a:effectRef>
+          <a:fontRef idx="minor">
+            <a:schemeClr val="lt1"/>
+          </a:fontRef>
+        </p:style>
+        <p:txBody>
+          <a:bodyPr rtlCol="0" anchor="ctr"/>
+          <a:lstStyle/>
+          <a:p>
+            <a:pPr algn="ctr"/>
+          </a:p>
+        </p:txBody>
+      </p:sp>
+      <p:sp>
+        <p:nvSpPr>
+          <p:cNvPr id="16" name="TextBox 15"/>
+          <p:cNvSpPr txBox="1"/>
+          <p:nvPr/>
+        </p:nvSpPr>
+        <p:spPr>
+          <a:xfrm>
+            <a:off x="713232" y="3648456"/>
+            <a:ext cx="3200400" cy="310896"/>
+          </a:xfrm>
+          <a:prstGeom prst="rect">
+            <a:avLst/>
+          </a:prstGeom>
+          <a:noFill/>
+        </p:spPr>
+        <p:txBody>
+          <a:bodyPr wrap="square">
+            <a:spAutoFit/>
+          </a:bodyPr>
+          <a:lstStyle/>
+          <a:p>
+            <a:r>
+              <a:rPr sz="1250" b="1">
+                <a:solidFill>
+                  <a:srgbClr val="2F313F"/>
+                </a:solidFill>
+                <a:latin typeface="Arial"/>
+              </a:rPr>
+              <a:t>Дніпро</a:t>
+            </a:r>
+          </a:p>
+        </p:txBody>
+      </p:sp>
+      <p:sp>
+        <p:nvSpPr>
+          <p:cNvPr id="17" name="TextBox 16"/>
+          <p:cNvSpPr txBox="1"/>
+          <p:nvPr/>
+        </p:nvSpPr>
+        <p:spPr>
+          <a:xfrm>
+            <a:off x="3566160" y="3648456"/>
+            <a:ext cx="731520" cy="310896"/>
+          </a:xfrm>
+          <a:prstGeom prst="rect">
+            <a:avLst/>
+          </a:prstGeom>
+          <a:noFill/>
+        </p:spPr>
+        <p:txBody>
+          <a:bodyPr wrap="square">
+            <a:spAutoFit/>
+          </a:bodyPr>
+          <a:lstStyle/>
+          <a:p>
+            <a:pPr algn="r"/>
+            <a:r>
+              <a:rPr sz="1250" b="1">
+                <a:solidFill>
+                  <a:srgbClr val="34D186"/>
+                </a:solidFill>
+                <a:latin typeface="Arial"/>
+              </a:rPr>
+              <a:t>4%</a:t>
+            </a:r>
+          </a:p>
+        </p:txBody>
+      </p:sp>
+      <p:sp>
+        <p:nvSpPr>
+          <p:cNvPr id="18" name="Rounded Rectangle 17"/>
+          <p:cNvSpPr/>
+          <p:nvPr/>
+        </p:nvSpPr>
+        <p:spPr>
+          <a:xfrm>
+            <a:off x="548640" y="4069080"/>
+            <a:ext cx="3840480" cy="384048"/>
+          </a:xfrm>
+          <a:prstGeom prst="roundRect">
+            <a:avLst/>
+          </a:prstGeom>
+          <a:solidFill>
+            <a:srgbClr val="EEF6F1"/>
+          </a:solidFill>
+          <a:ln>
+            <a:noFill/>
+          </a:ln>
+          <a:effectLst/>
+        </p:spPr>
+        <p:style>
+          <a:lnRef idx="1">
+            <a:schemeClr val="accent1"/>
+          </a:lnRef>
+          <a:fillRef idx="3">
+            <a:schemeClr val="accent1"/>
+          </a:fillRef>
+          <a:effectRef idx="2">
+            <a:schemeClr val="accent1"/>
+          </a:effectRef>
+          <a:fontRef idx="minor">
+            <a:schemeClr val="lt1"/>
+          </a:fontRef>
+        </p:style>
+        <p:txBody>
+          <a:bodyPr rtlCol="0" anchor="ctr"/>
+          <a:lstStyle/>
+          <a:p>
+            <a:pPr algn="ctr"/>
+          </a:p>
+        </p:txBody>
+      </p:sp>
+      <p:sp>
+        <p:nvSpPr>
+          <p:cNvPr id="19" name="TextBox 18"/>
+          <p:cNvSpPr txBox="1"/>
+          <p:nvPr/>
+        </p:nvSpPr>
+        <p:spPr>
+          <a:xfrm>
+            <a:off x="713232" y="4105656"/>
+            <a:ext cx="3200400" cy="310896"/>
+          </a:xfrm>
+          <a:prstGeom prst="rect">
+            <a:avLst/>
+          </a:prstGeom>
+          <a:noFill/>
+        </p:spPr>
+        <p:txBody>
+          <a:bodyPr wrap="square">
+            <a:spAutoFit/>
+          </a:bodyPr>
+          <a:lstStyle/>
+          <a:p>
+            <a:r>
+              <a:rPr sz="1250" b="1">
+                <a:solidFill>
+                  <a:srgbClr val="2F313F"/>
+                </a:solidFill>
+                <a:latin typeface="Arial"/>
+              </a:rPr>
+              <a:t>Івано-Франківськ</a:t>
+            </a:r>
+          </a:p>
+        </p:txBody>
+      </p:sp>
+      <p:sp>
+        <p:nvSpPr>
+          <p:cNvPr id="20" name="TextBox 19"/>
+          <p:cNvSpPr txBox="1"/>
+          <p:nvPr/>
+        </p:nvSpPr>
+        <p:spPr>
+          <a:xfrm>
+            <a:off x="3566160" y="4105656"/>
+            <a:ext cx="731520" cy="310896"/>
+          </a:xfrm>
+          <a:prstGeom prst="rect">
+            <a:avLst/>
+          </a:prstGeom>
+          <a:noFill/>
+        </p:spPr>
+        <p:txBody>
+          <a:bodyPr wrap="square">
+            <a:spAutoFit/>
+          </a:bodyPr>
+          <a:lstStyle/>
+          <a:p>
+            <a:pPr algn="r"/>
+            <a:r>
+              <a:rPr sz="1250" b="1">
+                <a:solidFill>
+                  <a:srgbClr val="34D186"/>
+                </a:solidFill>
+                <a:latin typeface="Arial"/>
+              </a:rPr>
+              <a:t>3%</a:t>
+            </a:r>
+          </a:p>
+        </p:txBody>
+      </p:sp>
+      <p:sp>
+        <p:nvSpPr>
+          <p:cNvPr id="21" name="TextBox 20"/>
+          <p:cNvSpPr txBox="1"/>
+          <p:nvPr/>
+        </p:nvSpPr>
+        <p:spPr>
+          <a:xfrm>
+            <a:off x="4754880" y="1783080"/>
+            <a:ext cx="3840480" cy="365760"/>
+          </a:xfrm>
+          <a:prstGeom prst="rect">
+            <a:avLst/>
+          </a:prstGeom>
+          <a:noFill/>
+        </p:spPr>
+        <p:txBody>
+          <a:bodyPr wrap="square">
+            <a:spAutoFit/>
+          </a:bodyPr>
+          <a:lstStyle/>
+          <a:p>
+            <a:r>
+              <a:rPr sz="1400" b="1">
+                <a:solidFill>
+                  <a:srgbClr val="2F313F"/>
+                </a:solidFill>
+                <a:latin typeface="Arial"/>
+              </a:rPr>
+              <a:t>Наступні кроки</a:t>
+            </a:r>
+          </a:p>
+        </p:txBody>
+      </p:sp>
+      <p:sp>
+        <p:nvSpPr>
+          <p:cNvPr id="22" name="Rounded Rectangle 21"/>
+          <p:cNvSpPr/>
+          <p:nvPr/>
+        </p:nvSpPr>
+        <p:spPr>
+          <a:xfrm>
+            <a:off x="4754880" y="2240280"/>
+            <a:ext cx="292608" cy="292608"/>
+          </a:xfrm>
+          <a:prstGeom prst="roundRect">
+            <a:avLst/>
+          </a:prstGeom>
+          <a:solidFill>
+            <a:srgbClr val="34D186"/>
+          </a:solidFill>
+          <a:ln>
+            <a:noFill/>
+          </a:ln>
+          <a:effectLst/>
+        </p:spPr>
+        <p:style>
+          <a:lnRef idx="1">
+            <a:schemeClr val="accent1"/>
+          </a:lnRef>
+          <a:fillRef idx="3">
+            <a:schemeClr val="accent1"/>
+          </a:fillRef>
+          <a:effectRef idx="2">
+            <a:schemeClr val="accent1"/>
+          </a:effectRef>
+          <a:fontRef idx="minor">
+            <a:schemeClr val="lt1"/>
+          </a:fontRef>
+        </p:style>
+        <p:txBody>
+          <a:bodyPr rtlCol="0" anchor="ctr"/>
+          <a:lstStyle/>
+          <a:p>
+            <a:pPr algn="ctr"/>
+          </a:p>
+        </p:txBody>
+      </p:sp>
+      <p:sp>
+        <p:nvSpPr>
+          <p:cNvPr id="23" name="TextBox 22"/>
+          <p:cNvSpPr txBox="1"/>
+          <p:nvPr/>
+        </p:nvSpPr>
+        <p:spPr>
+          <a:xfrm>
+            <a:off x="4754880" y="2221992"/>
+            <a:ext cx="292608" cy="292608"/>
+          </a:xfrm>
+          <a:prstGeom prst="rect">
+            <a:avLst/>
+          </a:prstGeom>
+          <a:noFill/>
+        </p:spPr>
+        <p:txBody>
+          <a:bodyPr wrap="square">
+            <a:spAutoFit/>
+          </a:bodyPr>
+          <a:lstStyle/>
+          <a:p>
+            <a:pPr algn="ctr"/>
+            <a:r>
+              <a:rPr sz="1100" b="1">
+                <a:solidFill>
+                  <a:srgbClr val="FFFFFF"/>
+                </a:solidFill>
+                <a:latin typeface="Arial"/>
+              </a:rPr>
+              <a:t>1</a:t>
+            </a:r>
+          </a:p>
+        </p:txBody>
+      </p:sp>
+      <p:sp>
+        <p:nvSpPr>
+          <p:cNvPr id="24" name="TextBox 23"/>
+          <p:cNvSpPr txBox="1"/>
+          <p:nvPr/>
+        </p:nvSpPr>
+        <p:spPr>
+          <a:xfrm>
+            <a:off x="5166360" y="2203704"/>
+            <a:ext cx="3474720" cy="365760"/>
+          </a:xfrm>
+          <a:prstGeom prst="rect">
+            <a:avLst/>
+          </a:prstGeom>
+          <a:noFill/>
+        </p:spPr>
+        <p:txBody>
+          <a:bodyPr wrap="square">
+            <a:spAutoFit/>
+          </a:bodyPr>
+          <a:lstStyle/>
+          <a:p>
+            <a:r>
+              <a:rPr sz="1200" b="0">
+                <a:solidFill>
+                  <a:srgbClr val="2F313F"/>
+                </a:solidFill>
+                <a:latin typeface="Arial"/>
+              </a:rPr>
+              <a:t>Підтвердити інтерес і scope пілоту</a:t>
+            </a:r>
+          </a:p>
+        </p:txBody>
+      </p:sp>
+      <p:sp>
+        <p:nvSpPr>
+          <p:cNvPr id="25" name="Rounded Rectangle 24"/>
+          <p:cNvSpPr/>
+          <p:nvPr/>
+        </p:nvSpPr>
+        <p:spPr>
+          <a:xfrm>
+            <a:off x="4754880" y="2697480"/>
+            <a:ext cx="292608" cy="292608"/>
+          </a:xfrm>
+          <a:prstGeom prst="roundRect">
+            <a:avLst/>
+          </a:prstGeom>
+          <a:solidFill>
+            <a:srgbClr val="34D186"/>
+          </a:solidFill>
+          <a:ln>
+            <a:noFill/>
+          </a:ln>
+          <a:effectLst/>
+        </p:spPr>
+        <p:style>
+          <a:lnRef idx="1">
+            <a:schemeClr val="accent1"/>
+          </a:lnRef>
+          <a:fillRef idx="3">
+            <a:schemeClr val="accent1"/>
+          </a:fillRef>
+          <a:effectRef idx="2">
+            <a:schemeClr val="accent1"/>
+          </a:effectRef>
+          <a:fontRef idx="minor">
+            <a:schemeClr val="lt1"/>
+          </a:fontRef>
+        </p:style>
+        <p:txBody>
+          <a:bodyPr rtlCol="0" anchor="ctr"/>
+          <a:lstStyle/>
+          <a:p>
+            <a:pPr algn="ctr"/>
+          </a:p>
+        </p:txBody>
+      </p:sp>
+      <p:sp>
+        <p:nvSpPr>
+          <p:cNvPr id="26" name="TextBox 25"/>
+          <p:cNvSpPr txBox="1"/>
+          <p:nvPr/>
+        </p:nvSpPr>
+        <p:spPr>
+          <a:xfrm>
+            <a:off x="4754880" y="2679192"/>
+            <a:ext cx="292608" cy="292608"/>
+          </a:xfrm>
+          <a:prstGeom prst="rect">
+            <a:avLst/>
+          </a:prstGeom>
+          <a:noFill/>
+        </p:spPr>
+        <p:txBody>
+          <a:bodyPr wrap="square">
+            <a:spAutoFit/>
+          </a:bodyPr>
+          <a:lstStyle/>
+          <a:p>
+            <a:pPr algn="ctr"/>
+            <a:r>
+              <a:rPr sz="1100" b="1">
+                <a:solidFill>
+                  <a:srgbClr val="FFFFFF"/>
+                </a:solidFill>
+                <a:latin typeface="Arial"/>
+              </a:rPr>
+              <a:t>2</a:t>
+            </a:r>
+          </a:p>
+        </p:txBody>
+      </p:sp>
+      <p:sp>
+        <p:nvSpPr>
+          <p:cNvPr id="27" name="TextBox 26"/>
+          <p:cNvSpPr txBox="1"/>
+          <p:nvPr/>
+        </p:nvSpPr>
+        <p:spPr>
+          <a:xfrm>
+            <a:off x="5166360" y="2660904"/>
+            <a:ext cx="3474720" cy="365760"/>
+          </a:xfrm>
+          <a:prstGeom prst="rect">
+            <a:avLst/>
+          </a:prstGeom>
+          <a:noFill/>
+        </p:spPr>
+        <p:txBody>
+          <a:bodyPr wrap="square">
+            <a:spAutoFit/>
+          </a:bodyPr>
+          <a:lstStyle/>
+          <a:p>
+            <a:r>
+              <a:rPr sz="1200" b="0">
+                <a:solidFill>
+                  <a:srgbClr val="2F313F"/>
+                </a:solidFill>
+                <a:latin typeface="Arial"/>
+              </a:rPr>
+              <a:t>Інтеграція каталогу та цін</a:t>
+            </a:r>
+          </a:p>
+        </p:txBody>
+      </p:sp>
+      <p:sp>
+        <p:nvSpPr>
+          <p:cNvPr id="28" name="Rounded Rectangle 27"/>
+          <p:cNvSpPr/>
+          <p:nvPr/>
+        </p:nvSpPr>
+        <p:spPr>
+          <a:xfrm>
+            <a:off x="4754880" y="3154680"/>
+            <a:ext cx="292608" cy="292608"/>
+          </a:xfrm>
+          <a:prstGeom prst="roundRect">
+            <a:avLst/>
+          </a:prstGeom>
+          <a:solidFill>
+            <a:srgbClr val="34D186"/>
+          </a:solidFill>
+          <a:ln>
+            <a:noFill/>
+          </a:ln>
+          <a:effectLst/>
+        </p:spPr>
+        <p:style>
+          <a:lnRef idx="1">
+            <a:schemeClr val="accent1"/>
+          </a:lnRef>
+          <a:fillRef idx="3">
+            <a:schemeClr val="accent1"/>
+          </a:fillRef>
+          <a:effectRef idx="2">
+            <a:schemeClr val="accent1"/>
+          </a:effectRef>
+          <a:fontRef idx="minor">
+            <a:schemeClr val="lt1"/>
+          </a:fontRef>
+        </p:style>
+        <p:txBody>
+          <a:bodyPr rtlCol="0" anchor="ctr"/>
+          <a:lstStyle/>
+          <a:p>
+            <a:pPr algn="ctr"/>
+          </a:p>
+        </p:txBody>
+      </p:sp>
+      <p:sp>
+        <p:nvSpPr>
+          <p:cNvPr id="29" name="TextBox 28"/>
+          <p:cNvSpPr txBox="1"/>
+          <p:nvPr/>
+        </p:nvSpPr>
+        <p:spPr>
+          <a:xfrm>
+            <a:off x="4754880" y="3136392"/>
+            <a:ext cx="292608" cy="292608"/>
+          </a:xfrm>
+          <a:prstGeom prst="rect">
+            <a:avLst/>
+          </a:prstGeom>
+          <a:noFill/>
+        </p:spPr>
+        <p:txBody>
+          <a:bodyPr wrap="square">
+            <a:spAutoFit/>
+          </a:bodyPr>
+          <a:lstStyle/>
+          <a:p>
+            <a:pPr algn="ctr"/>
+            <a:r>
+              <a:rPr sz="1100" b="1">
+                <a:solidFill>
+                  <a:srgbClr val="FFFFFF"/>
+                </a:solidFill>
+                <a:latin typeface="Arial"/>
+              </a:rPr>
+              <a:t>3</a:t>
+            </a:r>
+          </a:p>
+        </p:txBody>
+      </p:sp>
+      <p:sp>
+        <p:nvSpPr>
+          <p:cNvPr id="30" name="TextBox 29"/>
+          <p:cNvSpPr txBox="1"/>
+          <p:nvPr/>
+        </p:nvSpPr>
+        <p:spPr>
+          <a:xfrm>
+            <a:off x="5166360" y="3118104"/>
+            <a:ext cx="3474720" cy="365760"/>
+          </a:xfrm>
+          <a:prstGeom prst="rect">
+            <a:avLst/>
+          </a:prstGeom>
+          <a:noFill/>
+        </p:spPr>
+        <p:txBody>
+          <a:bodyPr wrap="square">
+            <a:spAutoFit/>
+          </a:bodyPr>
+          <a:lstStyle/>
+          <a:p>
+            <a:r>
+              <a:rPr sz="1200" b="0">
+                <a:solidFill>
+                  <a:srgbClr val="2F313F"/>
+                </a:solidFill>
+                <a:latin typeface="Arial"/>
+              </a:rPr>
+              <a:t>Запуск у топ-3 містах</a:t>
+            </a:r>
+          </a:p>
+        </p:txBody>
+      </p:sp>
+      <p:sp>
+        <p:nvSpPr>
+          <p:cNvPr id="31" name="Rounded Rectangle 30"/>
+          <p:cNvSpPr/>
+          <p:nvPr/>
+        </p:nvSpPr>
+        <p:spPr>
+          <a:xfrm>
+            <a:off x="4754880" y="3611880"/>
+            <a:ext cx="292608" cy="292608"/>
+          </a:xfrm>
+          <a:prstGeom prst="roundRect">
+            <a:avLst/>
+          </a:prstGeom>
+          <a:solidFill>
+            <a:srgbClr val="34D186"/>
+          </a:solidFill>
+          <a:ln>
+            <a:noFill/>
+          </a:ln>
+          <a:effectLst/>
+        </p:spPr>
+        <p:style>
+          <a:lnRef idx="1">
+            <a:schemeClr val="accent1"/>
+          </a:lnRef>
+          <a:fillRef idx="3">
+            <a:schemeClr val="accent1"/>
+          </a:fillRef>
+          <a:effectRef idx="2">
+            <a:schemeClr val="accent1"/>
+          </a:effectRef>
+          <a:fontRef idx="minor">
+            <a:schemeClr val="lt1"/>
+          </a:fontRef>
+        </p:style>
+        <p:txBody>
+          <a:bodyPr rtlCol="0" anchor="ctr"/>
+          <a:lstStyle/>
+          <a:p>
+            <a:pPr algn="ctr"/>
+          </a:p>
+        </p:txBody>
+      </p:sp>
+      <p:sp>
+        <p:nvSpPr>
+          <p:cNvPr id="32" name="TextBox 31"/>
+          <p:cNvSpPr txBox="1"/>
+          <p:nvPr/>
+        </p:nvSpPr>
+        <p:spPr>
+          <a:xfrm>
+            <a:off x="4754880" y="3593592"/>
+            <a:ext cx="292608" cy="292608"/>
+          </a:xfrm>
+          <a:prstGeom prst="rect">
+            <a:avLst/>
+          </a:prstGeom>
+          <a:noFill/>
+        </p:spPr>
+        <p:txBody>
+          <a:bodyPr wrap="square">
+            <a:spAutoFit/>
+          </a:bodyPr>
+          <a:lstStyle/>
+          <a:p>
+            <a:pPr algn="ctr"/>
+            <a:r>
+              <a:rPr sz="1100" b="1">
+                <a:solidFill>
+                  <a:srgbClr val="FFFFFF"/>
+                </a:solidFill>
+                <a:latin typeface="Arial"/>
+              </a:rPr>
+              <a:t>4</a:t>
+            </a:r>
+          </a:p>
+        </p:txBody>
+      </p:sp>
+      <p:sp>
+        <p:nvSpPr>
+          <p:cNvPr id="33" name="TextBox 32"/>
+          <p:cNvSpPr txBox="1"/>
+          <p:nvPr/>
+        </p:nvSpPr>
+        <p:spPr>
+          <a:xfrm>
+            <a:off x="5166360" y="3575304"/>
+            <a:ext cx="3474720" cy="365760"/>
+          </a:xfrm>
+          <a:prstGeom prst="rect">
+            <a:avLst/>
+          </a:prstGeom>
+          <a:noFill/>
+        </p:spPr>
+        <p:txBody>
+          <a:bodyPr wrap="square">
+            <a:spAutoFit/>
+          </a:bodyPr>
+          <a:lstStyle/>
+          <a:p>
+            <a:r>
+              <a:rPr sz="1200" b="0">
+                <a:solidFill>
+                  <a:srgbClr val="2F313F"/>
+                </a:solidFill>
+                <a:latin typeface="Arial"/>
+              </a:rPr>
+              <a:t>Спільний маркетинг на старті</a:t>
+            </a:r>
+          </a:p>
+        </p:txBody>
+      </p:sp>
+      <p:sp>
+        <p:nvSpPr>
+          <p:cNvPr id="34" name="Rounded Rectangle 33"/>
+          <p:cNvSpPr/>
+          <p:nvPr/>
+        </p:nvSpPr>
+        <p:spPr>
+          <a:xfrm>
+            <a:off x="4754880" y="4069080"/>
+            <a:ext cx="292608" cy="292608"/>
+          </a:xfrm>
+          <a:prstGeom prst="roundRect">
+            <a:avLst/>
+          </a:prstGeom>
+          <a:solidFill>
+            <a:srgbClr val="34D186"/>
+          </a:solidFill>
+          <a:ln>
+            <a:noFill/>
+          </a:ln>
+          <a:effectLst/>
+        </p:spPr>
+        <p:style>
+          <a:lnRef idx="1">
+            <a:schemeClr val="accent1"/>
+          </a:lnRef>
+          <a:fillRef idx="3">
+            <a:schemeClr val="accent1"/>
+          </a:fillRef>
+          <a:effectRef idx="2">
+            <a:schemeClr val="accent1"/>
+          </a:effectRef>
+          <a:fontRef idx="minor">
+            <a:schemeClr val="lt1"/>
+          </a:fontRef>
+        </p:style>
+        <p:txBody>
+          <a:bodyPr rtlCol="0" anchor="ctr"/>
+          <a:lstStyle/>
+          <a:p>
+            <a:pPr algn="ctr"/>
+          </a:p>
+        </p:txBody>
+      </p:sp>
+      <p:sp>
+        <p:nvSpPr>
+          <p:cNvPr id="35" name="TextBox 34"/>
+          <p:cNvSpPr txBox="1"/>
+          <p:nvPr/>
+        </p:nvSpPr>
+        <p:spPr>
+          <a:xfrm>
+            <a:off x="4754880" y="4050792"/>
+            <a:ext cx="292608" cy="292608"/>
+          </a:xfrm>
+          <a:prstGeom prst="rect">
+            <a:avLst/>
+          </a:prstGeom>
+          <a:noFill/>
+        </p:spPr>
+        <p:txBody>
+          <a:bodyPr wrap="square">
+            <a:spAutoFit/>
+          </a:bodyPr>
+          <a:lstStyle/>
+          <a:p>
+            <a:pPr algn="ctr"/>
+            <a:r>
+              <a:rPr sz="1100" b="1">
+                <a:solidFill>
+                  <a:srgbClr val="FFFFFF"/>
+                </a:solidFill>
+                <a:latin typeface="Arial"/>
+              </a:rPr>
+              <a:t>5</a:t>
+            </a:r>
+          </a:p>
+        </p:txBody>
+      </p:sp>
+      <p:sp>
+        <p:nvSpPr>
+          <p:cNvPr id="36" name="TextBox 35"/>
+          <p:cNvSpPr txBox="1"/>
+          <p:nvPr/>
+        </p:nvSpPr>
+        <p:spPr>
+          <a:xfrm>
+            <a:off x="5166360" y="4032504"/>
+            <a:ext cx="3474720" cy="365760"/>
+          </a:xfrm>
+          <a:prstGeom prst="rect">
+            <a:avLst/>
+          </a:prstGeom>
+          <a:noFill/>
+        </p:spPr>
+        <p:txBody>
+          <a:bodyPr wrap="square">
+            <a:spAutoFit/>
+          </a:bodyPr>
+          <a:lstStyle/>
+          <a:p>
+            <a:r>
+              <a:rPr sz="1200" b="0">
+                <a:solidFill>
+                  <a:srgbClr val="2F313F"/>
+                </a:solidFill>
+                <a:latin typeface="Arial"/>
+              </a:rPr>
+              <a:t>Огляд результатів через 4 тижні</a:t>
+            </a:r>
+          </a:p>
+        </p:txBody>
+      </p:sp>
+    </p:spTree>
+  </p:cSld>
+  <p:clrMapOvr>
+    <a:masterClrMapping/>
+  </p:clrMapOvr>
+</p:sld>
+</file>
+
+<file path=ppt/slides/slide21.xml><?xml version="1.0" encoding="utf-8"?>
 <p:sld xmlns:a="http://schemas.openxmlformats.org/drawingml/2006/main" xmlns:p="http://schemas.openxmlformats.org/presentationml/2006/main" xmlns:r="http://schemas.openxmlformats.org/officeDocument/2006/relationships">
   <p:cSld>
     <p:bg>

--- a/Master-Zoo-Bolt-Food-Partnership.pptx
+++ b/Master-Zoo-Bolt-Food-Partnership.pptx
@@ -3397,7 +3397,7 @@
                 </a:solidFill>
                 <a:latin typeface="Arial"/>
               </a:rPr>
-              <a:t>ПОТЕНЦІАЛ СПІВПРАЦІ · BOLT+</a:t>
+              <a:t>ОРІЄНТОВНІ УМОВИ · BOLT+</a:t>
             </a:r>
           </a:p>
           <a:p>
@@ -3408,7 +3408,7 @@
                 </a:solidFill>
                 <a:latin typeface="Arial"/>
               </a:rPr>
-              <a:t>Bolt+: 0,4% комісії проти +20% GMV</a:t>
+              <a:t>Середньозважена комісія та цінність Bolt+</a:t>
             </a:r>
           </a:p>
         </p:txBody>
@@ -3509,8 +3509,8 @@
         </p:nvSpPr>
         <p:spPr>
           <a:xfrm>
-            <a:off x="777240" y="1993392"/>
-            <a:ext cx="3520440" cy="1645920"/>
+            <a:off x="777240" y="1975104"/>
+            <a:ext cx="3520440" cy="1691640"/>
           </a:xfrm>
           <a:prstGeom prst="rect">
             <a:avLst/>
@@ -3524,24 +3524,24 @@
           <a:lstStyle/>
           <a:p>
             <a:r>
-              <a:rPr sz="1350" b="1">
+              <a:rPr sz="1300" b="1">
                 <a:solidFill>
                   <a:srgbClr val="2F313F"/>
                 </a:solidFill>
                 <a:latin typeface="Arial"/>
               </a:rPr>
-              <a:t>Вартість Bolt+</a:t>
-            </a:r>
-          </a:p>
-          <a:p>
-            <a:r>
-              <a:rPr sz="1000" b="0">
+              <a:t>Сценарій 1 — рекомендований</a:t>
+            </a:r>
+          </a:p>
+          <a:p>
+            <a:r>
+              <a:rPr sz="950" b="0">
                 <a:solidFill>
                   <a:srgbClr val="6B7080"/>
                 </a:solidFill>
                 <a:latin typeface="Arial"/>
               </a:rPr>
-              <a:t>середньозважена надбавка (20% × 2%)</a:t>
+              <a:t>база 10% · передаєте ціни зі знижками</a:t>
             </a:r>
           </a:p>
           <a:p>
@@ -3552,29 +3552,29 @@
                 </a:solidFill>
                 <a:latin typeface="Arial"/>
               </a:rPr>
-              <a:t>+0,4 п.п.</a:t>
-            </a:r>
-          </a:p>
-          <a:p>
-            <a:r>
-              <a:rPr sz="1150" b="0">
+              <a:t>10,3%</a:t>
+            </a:r>
+          </a:p>
+          <a:p>
+            <a:r>
+              <a:rPr sz="1050" b="0">
                 <a:solidFill>
                   <a:srgbClr val="6B7080"/>
                 </a:solidFill>
                 <a:latin typeface="Arial"/>
               </a:rPr>
-              <a:t>≈ 10 200 ₴ / міс (міс 6)</a:t>
-            </a:r>
-          </a:p>
-          <a:p>
-            <a:r>
-              <a:rPr sz="1150" b="0">
+              <a:t>середньозважена</a:t>
+            </a:r>
+          </a:p>
+          <a:p>
+            <a:r>
+              <a:rPr sz="1100" b="0">
                 <a:solidFill>
                   <a:srgbClr val="6B7080"/>
                 </a:solidFill>
                 <a:latin typeface="Arial"/>
               </a:rPr>
-              <a:t>≈ 46 000 ₴ за 6 міс</a:t>
+              <a:t>комісія ≈ 1,18 млн ₴ / 6 міс</a:t>
             </a:r>
           </a:p>
         </p:txBody>
@@ -3631,8 +3631,8 @@
         </p:nvSpPr>
         <p:spPr>
           <a:xfrm>
-            <a:off x="4892040" y="1993392"/>
-            <a:ext cx="3520440" cy="1645920"/>
+            <a:off x="4892040" y="1975104"/>
+            <a:ext cx="3520440" cy="1691640"/>
           </a:xfrm>
           <a:prstGeom prst="rect">
             <a:avLst/>
@@ -3646,24 +3646,24 @@
           <a:lstStyle/>
           <a:p>
             <a:r>
-              <a:rPr sz="1350" b="1">
+              <a:rPr sz="1300" b="1">
                 <a:solidFill>
                   <a:srgbClr val="FFFFFF"/>
                 </a:solidFill>
                 <a:latin typeface="Arial"/>
               </a:rPr>
-              <a:t>Приріст GMV від Bolt+</a:t>
-            </a:r>
-          </a:p>
-          <a:p>
-            <a:r>
-              <a:rPr sz="1000" b="0">
+              <a:t>Сценарій 2 — без передачі знижок</a:t>
+            </a:r>
+          </a:p>
+          <a:p>
+            <a:r>
+              <a:rPr sz="950" b="0">
                 <a:solidFill>
                   <a:srgbClr val="EAFFF4"/>
                 </a:solidFill>
                 <a:latin typeface="Arial"/>
               </a:rPr>
-              <a:t>частіші замовлення преміум-аудиторії</a:t>
+              <a:t>база 12% · ціни без урахування знижок</a:t>
             </a:r>
           </a:p>
           <a:p>
@@ -3674,29 +3674,29 @@
                 </a:solidFill>
                 <a:latin typeface="Arial"/>
               </a:rPr>
-              <a:t>+20%</a:t>
-            </a:r>
-          </a:p>
-          <a:p>
-            <a:r>
-              <a:rPr sz="1150" b="0">
+              <a:t>12,3%</a:t>
+            </a:r>
+          </a:p>
+          <a:p>
+            <a:r>
+              <a:rPr sz="1050" b="0">
+                <a:solidFill>
+                  <a:srgbClr val="EAFFF4"/>
+                </a:solidFill>
+                <a:latin typeface="Arial"/>
+              </a:rPr>
+              <a:t>середньозважена</a:t>
+            </a:r>
+          </a:p>
+          <a:p>
+            <a:r>
+              <a:rPr sz="1100" b="0">
                 <a:solidFill>
                   <a:srgbClr val="FFFFFF"/>
                 </a:solidFill>
                 <a:latin typeface="Arial"/>
               </a:rPr>
-              <a:t>+510 000 ₴ / міс (міс 6)</a:t>
-            </a:r>
-          </a:p>
-          <a:p>
-            <a:r>
-              <a:rPr sz="1150" b="0">
-                <a:solidFill>
-                  <a:srgbClr val="FFFFFF"/>
-                </a:solidFill>
-                <a:latin typeface="Arial"/>
-              </a:rPr>
-              <a:t>+2,3 млн ₴ за 6 міс</a:t>
+              <a:t>комісія ≈ 1,41 млн ₴ / 6 міс</a:t>
             </a:r>
           </a:p>
         </p:txBody>
@@ -3753,8 +3753,8 @@
         </p:nvSpPr>
         <p:spPr>
           <a:xfrm>
-            <a:off x="731520" y="3968496"/>
-            <a:ext cx="7680960" cy="420624"/>
+            <a:off x="731520" y="3941063"/>
+            <a:ext cx="7680960" cy="457200"/>
           </a:xfrm>
           <a:prstGeom prst="rect">
             <a:avLst/>
@@ -3769,13 +3769,13 @@
           <a:p>
             <a:pPr algn="ctr"/>
             <a:r>
-              <a:rPr sz="1250" b="1">
+              <a:rPr sz="1200" b="1">
                 <a:solidFill>
                   <a:srgbClr val="FFFFFF"/>
                 </a:solidFill>
                 <a:latin typeface="Arial"/>
               </a:rPr>
-              <a:t>Кожна 1 ₴ комісії → ~40–50 ₴ GMV · 0,4% «з'їдає» лише ~2% приросту</a:t>
+              <a:t>Без Bolt+ оборот −10% (−1,15 млн ₴) → чистими −~1 млн ₴ · кожна 1 ₴ комісії → ~7 ₴ обороту</a:t>
             </a:r>
           </a:p>
         </p:txBody>
@@ -3809,7 +3809,7 @@
                 </a:solidFill>
                 <a:latin typeface="Arial"/>
               </a:rPr>
-              <a:t>Розрахунок: AOV 850 ₴, до 3 000 замовлень/міс, ~11,5 млн ₴ GMV за 6 міс. Bolt+ ≈ 20% продажів, +2% на ці замовлення.</a:t>
+              <a:t>GMV 11,5 млн ₴ (з Bolt+) · частка Bolt+ 15% × +2% = +0,3 п.п. · +2% лише на замовлення підписників.</a:t>
             </a:r>
           </a:p>
         </p:txBody>

--- a/Master-Zoo-Bolt-Food-Partnership.pptx
+++ b/Master-Zoo-Bolt-Food-Partnership.pptx
@@ -26,6 +26,7 @@
     <p:sldId id="274" r:id="rId25"/>
     <p:sldId id="275" r:id="rId26"/>
     <p:sldId id="276" r:id="rId27"/>
+    <p:sldId id="277" r:id="rId28"/>
   </p:sldIdLst>
   <p:sldSz cx="9144000" cy="5143500" type="screen4x3"/>
   <p:notesSz cx="6858000" cy="9144000"/>
@@ -3408,7 +3409,7 @@
                 </a:solidFill>
                 <a:latin typeface="Arial"/>
               </a:rPr>
-              <a:t>Середньозважена комісія та цінність Bolt+</a:t>
+              <a:t>Середньозважена комісія — 2 сценарії</a:t>
             </a:r>
           </a:p>
         </p:txBody>
@@ -3421,8 +3422,8 @@
         </p:nvSpPr>
         <p:spPr>
           <a:xfrm>
-            <a:off x="548640" y="1828800"/>
-            <a:ext cx="3931920" cy="1874519"/>
+            <a:off x="548640" y="1783080"/>
+            <a:ext cx="2606040" cy="457200"/>
           </a:xfrm>
           <a:prstGeom prst="roundRect">
             <a:avLst/>
@@ -3459,20 +3460,55 @@
       </p:sp>
       <p:sp>
         <p:nvSpPr>
-          <p:cNvPr id="6" name="Rectangle 5"/>
+          <p:cNvPr id="6" name="TextBox 5"/>
+          <p:cNvSpPr txBox="1"/>
+          <p:nvPr/>
+        </p:nvSpPr>
+        <p:spPr>
+          <a:xfrm>
+            <a:off x="594360" y="1819656"/>
+            <a:ext cx="2514600" cy="384048"/>
+          </a:xfrm>
+          <a:prstGeom prst="rect">
+            <a:avLst/>
+          </a:prstGeom>
+          <a:noFill/>
+        </p:spPr>
+        <p:txBody>
+          <a:bodyPr wrap="square">
+            <a:spAutoFit/>
+          </a:bodyPr>
+          <a:lstStyle/>
+          <a:p>
+            <a:pPr algn="ctr"/>
+            <a:r>
+              <a:rPr sz="1100" b="1">
+                <a:solidFill>
+                  <a:srgbClr val="2F313F"/>
+                </a:solidFill>
+                <a:latin typeface="Arial"/>
+              </a:rPr>
+              <a:t>GMV 6 міс (з Bolt+): 11,5 млн ₴</a:t>
+            </a:r>
+          </a:p>
+        </p:txBody>
+      </p:sp>
+      <p:sp>
+        <p:nvSpPr>
+          <p:cNvPr id="7" name="Rounded Rectangle 6"/>
           <p:cNvSpPr/>
           <p:nvPr/>
         </p:nvSpPr>
         <p:spPr>
           <a:xfrm>
-            <a:off x="548640" y="1828800"/>
-            <a:ext cx="3931920" cy="91440"/>
-          </a:xfrm>
-          <a:prstGeom prst="rect">
+            <a:off x="3291840" y="1783080"/>
+            <a:ext cx="2377440" cy="457200"/>
+          </a:xfrm>
+          <a:prstGeom prst="roundRect">
             <a:avLst/>
           </a:prstGeom>
           <a:solidFill>
-            <a:srgbClr val="6B7080"/>
+            <a:srgbClr val="EEF6F1"/>
           </a:solidFill>
           <a:ln>
             <a:noFill/>
@@ -3503,14 +3539,14 @@
       </p:sp>
       <p:sp>
         <p:nvSpPr>
-          <p:cNvPr id="7" name="TextBox 6"/>
+          <p:cNvPr id="8" name="TextBox 7"/>
           <p:cNvSpPr txBox="1"/>
           <p:nvPr/>
         </p:nvSpPr>
         <p:spPr>
           <a:xfrm>
-            <a:off x="777240" y="1975104"/>
-            <a:ext cx="3520440" cy="1691640"/>
+            <a:off x="3337560" y="1819656"/>
+            <a:ext cx="2286000" cy="384048"/>
           </a:xfrm>
           <a:prstGeom prst="rect">
             <a:avLst/>
@@ -3523,78 +3559,35 @@
           </a:bodyPr>
           <a:lstStyle/>
           <a:p>
-            <a:r>
-              <a:rPr sz="1300" b="1">
+            <a:pPr algn="ctr"/>
+            <a:r>
+              <a:rPr sz="1100" b="1">
                 <a:solidFill>
                   <a:srgbClr val="2F313F"/>
                 </a:solidFill>
                 <a:latin typeface="Arial"/>
               </a:rPr>
-              <a:t>Сценарій 1 — рекомендований</a:t>
-            </a:r>
-          </a:p>
-          <a:p>
-            <a:r>
-              <a:rPr sz="950" b="0">
-                <a:solidFill>
-                  <a:srgbClr val="6B7080"/>
-                </a:solidFill>
-                <a:latin typeface="Arial"/>
-              </a:rPr>
-              <a:t>база 10% · передаєте ціни зі знижками</a:t>
-            </a:r>
-          </a:p>
-          <a:p>
-            <a:r>
-              <a:rPr sz="2600" b="1">
-                <a:solidFill>
-                  <a:srgbClr val="2F313F"/>
-                </a:solidFill>
-                <a:latin typeface="Arial"/>
-              </a:rPr>
-              <a:t>10,3%</a:t>
-            </a:r>
-          </a:p>
-          <a:p>
-            <a:r>
-              <a:rPr sz="1050" b="0">
-                <a:solidFill>
-                  <a:srgbClr val="6B7080"/>
-                </a:solidFill>
-                <a:latin typeface="Arial"/>
-              </a:rPr>
-              <a:t>середньозважена</a:t>
-            </a:r>
-          </a:p>
-          <a:p>
-            <a:r>
-              <a:rPr sz="1100" b="0">
-                <a:solidFill>
-                  <a:srgbClr val="6B7080"/>
-                </a:solidFill>
-                <a:latin typeface="Arial"/>
-              </a:rPr>
-              <a:t>комісія ≈ 1,18 млн ₴ / 6 міс</a:t>
-            </a:r>
-          </a:p>
-        </p:txBody>
-      </p:sp>
-      <p:sp>
-        <p:nvSpPr>
-          <p:cNvPr id="8" name="Rounded Rectangle 7"/>
+              <a:t>Частка Bolt+: 15%</a:t>
+            </a:r>
+          </a:p>
+        </p:txBody>
+      </p:sp>
+      <p:sp>
+        <p:nvSpPr>
+          <p:cNvPr id="9" name="Rounded Rectangle 8"/>
           <p:cNvSpPr/>
           <p:nvPr/>
         </p:nvSpPr>
         <p:spPr>
           <a:xfrm>
-            <a:off x="4663440" y="1828800"/>
-            <a:ext cx="3931920" cy="1874519"/>
+            <a:off x="5806440" y="1783080"/>
+            <a:ext cx="2788920" cy="457200"/>
           </a:xfrm>
           <a:prstGeom prst="roundRect">
             <a:avLst/>
           </a:prstGeom>
           <a:solidFill>
-            <a:srgbClr val="34D186"/>
+            <a:srgbClr val="EEF6F1"/>
           </a:solidFill>
           <a:ln>
             <a:noFill/>
@@ -3625,14 +3618,14 @@
       </p:sp>
       <p:sp>
         <p:nvSpPr>
-          <p:cNvPr id="9" name="TextBox 8"/>
+          <p:cNvPr id="10" name="TextBox 9"/>
           <p:cNvSpPr txBox="1"/>
           <p:nvPr/>
         </p:nvSpPr>
         <p:spPr>
           <a:xfrm>
-            <a:off x="4892040" y="1975104"/>
-            <a:ext cx="3520440" cy="1691640"/>
+            <a:off x="5852159" y="1819656"/>
+            <a:ext cx="2697479" cy="384048"/>
           </a:xfrm>
           <a:prstGeom prst="rect">
             <a:avLst/>
@@ -3645,103 +3638,16 @@
           </a:bodyPr>
           <a:lstStyle/>
           <a:p>
-            <a:r>
-              <a:rPr sz="1300" b="1">
-                <a:solidFill>
-                  <a:srgbClr val="FFFFFF"/>
-                </a:solidFill>
-                <a:latin typeface="Arial"/>
-              </a:rPr>
-              <a:t>Сценарій 2 — без передачі знижок</a:t>
-            </a:r>
-          </a:p>
-          <a:p>
-            <a:r>
-              <a:rPr sz="950" b="0">
-                <a:solidFill>
-                  <a:srgbClr val="EAFFF4"/>
-                </a:solidFill>
-                <a:latin typeface="Arial"/>
-              </a:rPr>
-              <a:t>база 12% · ціни без урахування знижок</a:t>
-            </a:r>
-          </a:p>
-          <a:p>
-            <a:r>
-              <a:rPr sz="2600" b="1">
-                <a:solidFill>
-                  <a:srgbClr val="FFFFFF"/>
-                </a:solidFill>
-                <a:latin typeface="Arial"/>
-              </a:rPr>
-              <a:t>12,3%</a:t>
-            </a:r>
-          </a:p>
-          <a:p>
-            <a:r>
-              <a:rPr sz="1050" b="0">
-                <a:solidFill>
-                  <a:srgbClr val="EAFFF4"/>
-                </a:solidFill>
-                <a:latin typeface="Arial"/>
-              </a:rPr>
-              <a:t>середньозважена</a:t>
-            </a:r>
-          </a:p>
-          <a:p>
-            <a:r>
-              <a:rPr sz="1100" b="0">
-                <a:solidFill>
-                  <a:srgbClr val="FFFFFF"/>
-                </a:solidFill>
-                <a:latin typeface="Arial"/>
-              </a:rPr>
-              <a:t>комісія ≈ 1,41 млн ₴ / 6 міс</a:t>
-            </a:r>
-          </a:p>
-        </p:txBody>
-      </p:sp>
-      <p:sp>
-        <p:nvSpPr>
-          <p:cNvPr id="10" name="Rounded Rectangle 9"/>
-          <p:cNvSpPr/>
-          <p:nvPr/>
-        </p:nvSpPr>
-        <p:spPr>
-          <a:xfrm>
-            <a:off x="548640" y="3886200"/>
-            <a:ext cx="8046720" cy="566928"/>
-          </a:xfrm>
-          <a:prstGeom prst="roundRect">
-            <a:avLst/>
-          </a:prstGeom>
-          <a:solidFill>
-            <a:srgbClr val="2F313F"/>
-          </a:solidFill>
-          <a:ln>
-            <a:noFill/>
-          </a:ln>
-          <a:effectLst/>
-        </p:spPr>
-        <p:style>
-          <a:lnRef idx="1">
-            <a:schemeClr val="accent1"/>
-          </a:lnRef>
-          <a:fillRef idx="3">
-            <a:schemeClr val="accent1"/>
-          </a:fillRef>
-          <a:effectRef idx="2">
-            <a:schemeClr val="accent1"/>
-          </a:effectRef>
-          <a:fontRef idx="minor">
-            <a:schemeClr val="lt1"/>
-          </a:fontRef>
-        </p:style>
-        <p:txBody>
-          <a:bodyPr rtlCol="0" anchor="ctr"/>
-          <a:lstStyle/>
-          <a:p>
-            <a:pPr algn="ctr"/>
+            <a:pPr algn="ctr"/>
+            <a:r>
+              <a:rPr sz="1100" b="1">
+                <a:solidFill>
+                  <a:srgbClr val="2F313F"/>
+                </a:solidFill>
+                <a:latin typeface="Arial"/>
+              </a:rPr>
+              <a:t>+2% лише на замовлення Bolt+</a:t>
+            </a:r>
           </a:p>
         </p:txBody>
       </p:sp>
@@ -3753,8 +3659,8 @@
         </p:nvSpPr>
         <p:spPr>
           <a:xfrm>
-            <a:off x="731520" y="3941063"/>
-            <a:ext cx="7680960" cy="457200"/>
+            <a:off x="548640" y="2377440"/>
+            <a:ext cx="8046720" cy="365760"/>
           </a:xfrm>
           <a:prstGeom prst="rect">
             <a:avLst/>
@@ -3767,29 +3673,469 @@
           </a:bodyPr>
           <a:lstStyle/>
           <a:p>
-            <a:pPr algn="ctr"/>
-            <a:r>
-              <a:rPr sz="1200" b="1">
-                <a:solidFill>
-                  <a:srgbClr val="FFFFFF"/>
-                </a:solidFill>
-                <a:latin typeface="Arial"/>
-              </a:rPr>
-              <a:t>Без Bolt+ оборот −10% (−1,15 млн ₴) → чистими −~1 млн ₴ · кожна 1 ₴ комісії → ~7 ₴ обороту</a:t>
-            </a:r>
-          </a:p>
-        </p:txBody>
-      </p:sp>
-      <p:sp>
-        <p:nvSpPr>
-          <p:cNvPr id="12" name="TextBox 11"/>
+            <a:r>
+              <a:rPr sz="1150" b="1">
+                <a:solidFill>
+                  <a:srgbClr val="2F313F"/>
+                </a:solidFill>
+                <a:latin typeface="Arial"/>
+              </a:rPr>
+              <a:t>Формула: </a:t>
+            </a:r>
+            <a:r>
+              <a:rPr sz="1150" b="0">
+                <a:solidFill>
+                  <a:srgbClr val="6B7080"/>
+                </a:solidFill>
+                <a:latin typeface="Arial"/>
+              </a:rPr>
+              <a:t>середньозважена = база + (15% × 2%) = база + 0,3 п.п.</a:t>
+            </a:r>
+          </a:p>
+        </p:txBody>
+      </p:sp>
+      <p:graphicFrame>
+        <p:nvGraphicFramePr>
+          <p:cNvPr id="12" name="Table 11"/>
+          <p:cNvGraphicFramePr>
+            <a:graphicFrameLocks noGrp="1"/>
+          </p:cNvGraphicFramePr>
+          <p:nvPr/>
+        </p:nvGraphicFramePr>
+        <p:xfrm>
+          <a:off x="548640" y="2834640"/>
+          <a:ext cx="8046720" cy="1234440"/>
+        </p:xfrm>
+        <a:graphic>
+          <a:graphicData uri="http://schemas.openxmlformats.org/drawingml/2006/table">
+            <a:tbl>
+              <a:tblPr firstRow="1" bandRow="1">
+                <a:tableStyleId>{5C22544A-7EE6-4342-B048-85BDC9FD1C3A}</a:tableStyleId>
+              </a:tblPr>
+              <a:tblGrid>
+                <a:gridCol w="2103120"/>
+                <a:gridCol w="1143000"/>
+                <a:gridCol w="868680"/>
+                <a:gridCol w="1371600"/>
+                <a:gridCol w="1463040"/>
+                <a:gridCol w="1097280"/>
+              </a:tblGrid>
+              <a:tr h="411480">
+                <a:tc>
+                  <a:txBody>
+                    <a:bodyPr/>
+                    <a:lstStyle/>
+                    <a:p>
+                      <a:r>
+                        <a:rPr sz="1000" b="1">
+                          <a:solidFill>
+                            <a:srgbClr val="FFFFFF"/>
+                          </a:solidFill>
+                          <a:latin typeface="Arial"/>
+                        </a:rPr>
+                        <a:t>Сценарій</a:t>
+                      </a:r>
+                    </a:p>
+                  </a:txBody>
+                  <a:tcPr>
+                    <a:solidFill>
+                      <a:srgbClr val="2F313F"/>
+                    </a:solidFill>
+                  </a:tcPr>
+                </a:tc>
+                <a:tc>
+                  <a:txBody>
+                    <a:bodyPr/>
+                    <a:lstStyle/>
+                    <a:p>
+                      <a:r>
+                        <a:rPr sz="1000" b="1">
+                          <a:solidFill>
+                            <a:srgbClr val="FFFFFF"/>
+                          </a:solidFill>
+                          <a:latin typeface="Arial"/>
+                        </a:rPr>
+                        <a:t>GMV 6 міс</a:t>
+                      </a:r>
+                    </a:p>
+                  </a:txBody>
+                  <a:tcPr>
+                    <a:solidFill>
+                      <a:srgbClr val="2F313F"/>
+                    </a:solidFill>
+                  </a:tcPr>
+                </a:tc>
+                <a:tc>
+                  <a:txBody>
+                    <a:bodyPr/>
+                    <a:lstStyle/>
+                    <a:p>
+                      <a:r>
+                        <a:rPr sz="1000" b="1">
+                          <a:solidFill>
+                            <a:srgbClr val="FFFFFF"/>
+                          </a:solidFill>
+                          <a:latin typeface="Arial"/>
+                        </a:rPr>
+                        <a:t>База</a:t>
+                      </a:r>
+                    </a:p>
+                  </a:txBody>
+                  <a:tcPr>
+                    <a:solidFill>
+                      <a:srgbClr val="2F313F"/>
+                    </a:solidFill>
+                  </a:tcPr>
+                </a:tc>
+                <a:tc>
+                  <a:txBody>
+                    <a:bodyPr/>
+                    <a:lstStyle/>
+                    <a:p>
+                      <a:r>
+                        <a:rPr sz="1000" b="1">
+                          <a:solidFill>
+                            <a:srgbClr val="FFFFFF"/>
+                          </a:solidFill>
+                          <a:latin typeface="Arial"/>
+                        </a:rPr>
+                        <a:t>Bolt+ (15%×2%)</a:t>
+                      </a:r>
+                    </a:p>
+                  </a:txBody>
+                  <a:tcPr>
+                    <a:solidFill>
+                      <a:srgbClr val="2F313F"/>
+                    </a:solidFill>
+                  </a:tcPr>
+                </a:tc>
+                <a:tc>
+                  <a:txBody>
+                    <a:bodyPr/>
+                    <a:lstStyle/>
+                    <a:p>
+                      <a:r>
+                        <a:rPr sz="1000" b="1">
+                          <a:solidFill>
+                            <a:srgbClr val="FFFFFF"/>
+                          </a:solidFill>
+                          <a:latin typeface="Arial"/>
+                        </a:rPr>
+                        <a:t>Середньозважена</a:t>
+                      </a:r>
+                    </a:p>
+                  </a:txBody>
+                  <a:tcPr>
+                    <a:solidFill>
+                      <a:srgbClr val="2F313F"/>
+                    </a:solidFill>
+                  </a:tcPr>
+                </a:tc>
+                <a:tc>
+                  <a:txBody>
+                    <a:bodyPr/>
+                    <a:lstStyle/>
+                    <a:p>
+                      <a:r>
+                        <a:rPr sz="1000" b="1">
+                          <a:solidFill>
+                            <a:srgbClr val="FFFFFF"/>
+                          </a:solidFill>
+                          <a:latin typeface="Arial"/>
+                        </a:rPr>
+                        <a:t>Комісія, ₴</a:t>
+                      </a:r>
+                    </a:p>
+                  </a:txBody>
+                  <a:tcPr>
+                    <a:solidFill>
+                      <a:srgbClr val="2F313F"/>
+                    </a:solidFill>
+                  </a:tcPr>
+                </a:tc>
+              </a:tr>
+              <a:tr h="411480">
+                <a:tc>
+                  <a:txBody>
+                    <a:bodyPr/>
+                    <a:lstStyle/>
+                    <a:p>
+                      <a:r>
+                        <a:rPr sz="1000" b="1">
+                          <a:solidFill>
+                            <a:srgbClr val="2F313F"/>
+                          </a:solidFill>
+                          <a:latin typeface="Arial"/>
+                        </a:rPr>
+                        <a:t>Сценарій 1 — рекоменд.</a:t>
+                      </a:r>
+                    </a:p>
+                  </a:txBody>
+                  <a:tcPr>
+                    <a:solidFill>
+                      <a:srgbClr val="EEF6F1"/>
+                    </a:solidFill>
+                  </a:tcPr>
+                </a:tc>
+                <a:tc>
+                  <a:txBody>
+                    <a:bodyPr/>
+                    <a:lstStyle/>
+                    <a:p>
+                      <a:r>
+                        <a:rPr sz="1000" b="0">
+                          <a:solidFill>
+                            <a:srgbClr val="6B7080"/>
+                          </a:solidFill>
+                          <a:latin typeface="Arial"/>
+                        </a:rPr>
+                        <a:t>11,5 млн</a:t>
+                      </a:r>
+                    </a:p>
+                  </a:txBody>
+                  <a:tcPr>
+                    <a:solidFill>
+                      <a:srgbClr val="EEF6F1"/>
+                    </a:solidFill>
+                  </a:tcPr>
+                </a:tc>
+                <a:tc>
+                  <a:txBody>
+                    <a:bodyPr/>
+                    <a:lstStyle/>
+                    <a:p>
+                      <a:r>
+                        <a:rPr sz="1000" b="0">
+                          <a:solidFill>
+                            <a:srgbClr val="6B7080"/>
+                          </a:solidFill>
+                          <a:latin typeface="Arial"/>
+                        </a:rPr>
+                        <a:t>10%</a:t>
+                      </a:r>
+                    </a:p>
+                  </a:txBody>
+                  <a:tcPr>
+                    <a:solidFill>
+                      <a:srgbClr val="EEF6F1"/>
+                    </a:solidFill>
+                  </a:tcPr>
+                </a:tc>
+                <a:tc>
+                  <a:txBody>
+                    <a:bodyPr/>
+                    <a:lstStyle/>
+                    <a:p>
+                      <a:r>
+                        <a:rPr sz="1000" b="0">
+                          <a:solidFill>
+                            <a:srgbClr val="6B7080"/>
+                          </a:solidFill>
+                          <a:latin typeface="Arial"/>
+                        </a:rPr>
+                        <a:t>+0,3 п.п.</a:t>
+                      </a:r>
+                    </a:p>
+                  </a:txBody>
+                  <a:tcPr>
+                    <a:solidFill>
+                      <a:srgbClr val="EEF6F1"/>
+                    </a:solidFill>
+                  </a:tcPr>
+                </a:tc>
+                <a:tc>
+                  <a:txBody>
+                    <a:bodyPr/>
+                    <a:lstStyle/>
+                    <a:p>
+                      <a:r>
+                        <a:rPr sz="1000" b="1">
+                          <a:solidFill>
+                            <a:srgbClr val="34D186"/>
+                          </a:solidFill>
+                          <a:latin typeface="Arial"/>
+                        </a:rPr>
+                        <a:t>10,3%</a:t>
+                      </a:r>
+                    </a:p>
+                  </a:txBody>
+                  <a:tcPr>
+                    <a:solidFill>
+                      <a:srgbClr val="EEF6F1"/>
+                    </a:solidFill>
+                  </a:tcPr>
+                </a:tc>
+                <a:tc>
+                  <a:txBody>
+                    <a:bodyPr/>
+                    <a:lstStyle/>
+                    <a:p>
+                      <a:r>
+                        <a:rPr sz="1000" b="0">
+                          <a:solidFill>
+                            <a:srgbClr val="6B7080"/>
+                          </a:solidFill>
+                          <a:latin typeface="Arial"/>
+                        </a:rPr>
+                        <a:t>≈ 1 184 500</a:t>
+                      </a:r>
+                    </a:p>
+                  </a:txBody>
+                  <a:tcPr>
+                    <a:solidFill>
+                      <a:srgbClr val="EEF6F1"/>
+                    </a:solidFill>
+                  </a:tcPr>
+                </a:tc>
+              </a:tr>
+              <a:tr h="411480">
+                <a:tc>
+                  <a:txBody>
+                    <a:bodyPr/>
+                    <a:lstStyle/>
+                    <a:p>
+                      <a:r>
+                        <a:rPr sz="1000" b="1">
+                          <a:solidFill>
+                            <a:srgbClr val="2F313F"/>
+                          </a:solidFill>
+                          <a:latin typeface="Arial"/>
+                        </a:rPr>
+                        <a:t>Сценарій 2 — без знижок</a:t>
+                      </a:r>
+                    </a:p>
+                  </a:txBody>
+                  <a:tcPr>
+                    <a:solidFill>
+                      <a:srgbClr val="FFFFFF"/>
+                    </a:solidFill>
+                  </a:tcPr>
+                </a:tc>
+                <a:tc>
+                  <a:txBody>
+                    <a:bodyPr/>
+                    <a:lstStyle/>
+                    <a:p>
+                      <a:r>
+                        <a:rPr sz="1000" b="0">
+                          <a:solidFill>
+                            <a:srgbClr val="6B7080"/>
+                          </a:solidFill>
+                          <a:latin typeface="Arial"/>
+                        </a:rPr>
+                        <a:t>11,5 млн</a:t>
+                      </a:r>
+                    </a:p>
+                  </a:txBody>
+                  <a:tcPr>
+                    <a:solidFill>
+                      <a:srgbClr val="FFFFFF"/>
+                    </a:solidFill>
+                  </a:tcPr>
+                </a:tc>
+                <a:tc>
+                  <a:txBody>
+                    <a:bodyPr/>
+                    <a:lstStyle/>
+                    <a:p>
+                      <a:r>
+                        <a:rPr sz="1000" b="0">
+                          <a:solidFill>
+                            <a:srgbClr val="6B7080"/>
+                          </a:solidFill>
+                          <a:latin typeface="Arial"/>
+                        </a:rPr>
+                        <a:t>12%</a:t>
+                      </a:r>
+                    </a:p>
+                  </a:txBody>
+                  <a:tcPr>
+                    <a:solidFill>
+                      <a:srgbClr val="FFFFFF"/>
+                    </a:solidFill>
+                  </a:tcPr>
+                </a:tc>
+                <a:tc>
+                  <a:txBody>
+                    <a:bodyPr/>
+                    <a:lstStyle/>
+                    <a:p>
+                      <a:r>
+                        <a:rPr sz="1000" b="0">
+                          <a:solidFill>
+                            <a:srgbClr val="6B7080"/>
+                          </a:solidFill>
+                          <a:latin typeface="Arial"/>
+                        </a:rPr>
+                        <a:t>+0,3 п.п.</a:t>
+                      </a:r>
+                    </a:p>
+                  </a:txBody>
+                  <a:tcPr>
+                    <a:solidFill>
+                      <a:srgbClr val="FFFFFF"/>
+                    </a:solidFill>
+                  </a:tcPr>
+                </a:tc>
+                <a:tc>
+                  <a:txBody>
+                    <a:bodyPr/>
+                    <a:lstStyle/>
+                    <a:p>
+                      <a:r>
+                        <a:rPr sz="1000" b="1">
+                          <a:solidFill>
+                            <a:srgbClr val="34D186"/>
+                          </a:solidFill>
+                          <a:latin typeface="Arial"/>
+                        </a:rPr>
+                        <a:t>12,3%</a:t>
+                      </a:r>
+                    </a:p>
+                  </a:txBody>
+                  <a:tcPr>
+                    <a:solidFill>
+                      <a:srgbClr val="FFFFFF"/>
+                    </a:solidFill>
+                  </a:tcPr>
+                </a:tc>
+                <a:tc>
+                  <a:txBody>
+                    <a:bodyPr/>
+                    <a:lstStyle/>
+                    <a:p>
+                      <a:r>
+                        <a:rPr sz="1000" b="0">
+                          <a:solidFill>
+                            <a:srgbClr val="6B7080"/>
+                          </a:solidFill>
+                          <a:latin typeface="Arial"/>
+                        </a:rPr>
+                        <a:t>≈ 1 414 500</a:t>
+                      </a:r>
+                    </a:p>
+                  </a:txBody>
+                  <a:tcPr>
+                    <a:solidFill>
+                      <a:srgbClr val="FFFFFF"/>
+                    </a:solidFill>
+                  </a:tcPr>
+                </a:tc>
+              </a:tr>
+            </a:tbl>
+          </a:graphicData>
+        </a:graphic>
+      </p:graphicFrame>
+      <p:sp>
+        <p:nvSpPr>
+          <p:cNvPr id="13" name="TextBox 12"/>
           <p:cNvSpPr txBox="1"/>
           <p:nvPr/>
         </p:nvSpPr>
         <p:spPr>
           <a:xfrm>
-            <a:off x="457200" y="4736592"/>
-            <a:ext cx="8229600" cy="274320"/>
+            <a:off x="548640" y="4297680"/>
+            <a:ext cx="8046720" cy="365760"/>
           </a:xfrm>
           <a:prstGeom prst="rect">
             <a:avLst/>
@@ -3803,13 +4149,47 @@
           <a:lstStyle/>
           <a:p>
             <a:r>
+              <a:rPr sz="1050" b="0">
+                <a:solidFill>
+                  <a:srgbClr val="6B7080"/>
+                </a:solidFill>
+                <a:latin typeface="Arial"/>
+              </a:rPr>
+              <a:t>Якщо частка Bolt+ = 20% → +0,4 п.п.: сценарій 1 = 10,4%, сценарій 2 = 12,4%.</a:t>
+            </a:r>
+          </a:p>
+        </p:txBody>
+      </p:sp>
+      <p:sp>
+        <p:nvSpPr>
+          <p:cNvPr id="14" name="TextBox 13"/>
+          <p:cNvSpPr txBox="1"/>
+          <p:nvPr/>
+        </p:nvSpPr>
+        <p:spPr>
+          <a:xfrm>
+            <a:off x="457200" y="4736592"/>
+            <a:ext cx="8229600" cy="274320"/>
+          </a:xfrm>
+          <a:prstGeom prst="rect">
+            <a:avLst/>
+          </a:prstGeom>
+          <a:noFill/>
+        </p:spPr>
+        <p:txBody>
+          <a:bodyPr wrap="square">
+            <a:spAutoFit/>
+          </a:bodyPr>
+          <a:lstStyle/>
+          <a:p>
+            <a:r>
               <a:rPr sz="850" b="0">
                 <a:solidFill>
                   <a:srgbClr val="6B7080"/>
                 </a:solidFill>
                 <a:latin typeface="Arial"/>
               </a:rPr>
-              <a:t>GMV 11,5 млн ₴ (з Bolt+) · частка Bolt+ 15% × +2% = +0,3 п.п. · +2% лише на замовлення підписників.</a:t>
+              <a:t>+2% Bolt+ застосовується лише до замовлень підписників; решта — за базовою ставкою.</a:t>
             </a:r>
           </a:p>
         </p:txBody>
@@ -3937,7 +4317,7 @@
                 </a:solidFill>
                 <a:latin typeface="Arial"/>
               </a:rPr>
-              <a:t>ДОСВІД КОРИСТУВАЧА</a:t>
+              <a:t>ОРІЄНТОВНІ УМОВИ · BOLT+</a:t>
             </a:r>
           </a:p>
           <a:p>
@@ -3948,67 +4328,553 @@
                 </a:solidFill>
                 <a:latin typeface="Arial"/>
               </a:rPr>
-              <a:t>Bolt інвестує в Consumer Experience</a:t>
-            </a:r>
-          </a:p>
-        </p:txBody>
-      </p:sp>
-      <p:sp>
-        <p:nvSpPr>
-          <p:cNvPr id="5" name="Rounded Rectangle 4"/>
+              <a:t>Чи варте того? З Bolt+ проти без Bolt+</a:t>
+            </a:r>
+          </a:p>
+        </p:txBody>
+      </p:sp>
+      <p:sp>
+        <p:nvSpPr>
+          <p:cNvPr id="5" name="TextBox 4"/>
+          <p:cNvSpPr txBox="1"/>
+          <p:nvPr/>
+        </p:nvSpPr>
+        <p:spPr>
+          <a:xfrm>
+            <a:off x="548640" y="1737360"/>
+            <a:ext cx="8046720" cy="502920"/>
+          </a:xfrm>
+          <a:prstGeom prst="rect">
+            <a:avLst/>
+          </a:prstGeom>
+          <a:noFill/>
+        </p:spPr>
+        <p:txBody>
+          <a:bodyPr wrap="square">
+            <a:spAutoFit/>
+          </a:bodyPr>
+          <a:lstStyle/>
+          <a:p>
+            <a:r>
+              <a:rPr sz="1150" b="0">
+                <a:solidFill>
+                  <a:srgbClr val="6B7080"/>
+                </a:solidFill>
+                <a:latin typeface="Arial"/>
+              </a:rPr>
+              <a:t>11,5 млн ₴ — оборот </a:t>
+            </a:r>
+            <a:r>
+              <a:rPr sz="1150" b="1">
+                <a:solidFill>
+                  <a:srgbClr val="2F313F"/>
+                </a:solidFill>
+                <a:latin typeface="Arial"/>
+              </a:rPr>
+              <a:t>із Bolt+</a:t>
+            </a:r>
+            <a:r>
+              <a:rPr sz="1150" b="0">
+                <a:solidFill>
+                  <a:srgbClr val="6B7080"/>
+                </a:solidFill>
+                <a:latin typeface="Arial"/>
+              </a:rPr>
+              <a:t>. Без програми оборот −10% = 10,35 млн ₴ (усе за базовою ставкою). Дивимось на чисте = GMV − комісія.</a:t>
+            </a:r>
+          </a:p>
+        </p:txBody>
+      </p:sp>
+      <p:graphicFrame>
+        <p:nvGraphicFramePr>
+          <p:cNvPr id="6" name="Table 5"/>
+          <p:cNvGraphicFramePr>
+            <a:graphicFrameLocks noGrp="1"/>
+          </p:cNvGraphicFramePr>
+          <p:nvPr/>
+        </p:nvGraphicFramePr>
+        <p:xfrm>
+          <a:off x="548640" y="2286000"/>
+          <a:ext cx="8046720" cy="1554480"/>
+        </p:xfrm>
+        <a:graphic>
+          <a:graphicData uri="http://schemas.openxmlformats.org/drawingml/2006/table">
+            <a:tbl>
+              <a:tblPr firstRow="1" bandRow="1">
+                <a:tableStyleId>{5C22544A-7EE6-4342-B048-85BDC9FD1C3A}</a:tableStyleId>
+              </a:tblPr>
+              <a:tblGrid>
+                <a:gridCol w="2743200"/>
+                <a:gridCol w="1828800"/>
+                <a:gridCol w="1828800"/>
+                <a:gridCol w="1645920"/>
+              </a:tblGrid>
+              <a:tr h="310896">
+                <a:tc>
+                  <a:txBody>
+                    <a:bodyPr/>
+                    <a:lstStyle/>
+                    <a:p>
+                      <a:r>
+                        <a:rPr sz="1000" b="1">
+                          <a:solidFill>
+                            <a:srgbClr val="FFFFFF"/>
+                          </a:solidFill>
+                          <a:latin typeface="Arial"/>
+                        </a:rPr>
+                        <a:t>Сценарій · показник</a:t>
+                      </a:r>
+                    </a:p>
+                  </a:txBody>
+                  <a:tcPr>
+                    <a:solidFill>
+                      <a:srgbClr val="2F313F"/>
+                    </a:solidFill>
+                  </a:tcPr>
+                </a:tc>
+                <a:tc>
+                  <a:txBody>
+                    <a:bodyPr/>
+                    <a:lstStyle/>
+                    <a:p>
+                      <a:r>
+                        <a:rPr sz="1000" b="1">
+                          <a:solidFill>
+                            <a:srgbClr val="FFFFFF"/>
+                          </a:solidFill>
+                          <a:latin typeface="Arial"/>
+                        </a:rPr>
+                        <a:t>Без Bolt+ (10,35 млн)</a:t>
+                      </a:r>
+                    </a:p>
+                  </a:txBody>
+                  <a:tcPr>
+                    <a:solidFill>
+                      <a:srgbClr val="2F313F"/>
+                    </a:solidFill>
+                  </a:tcPr>
+                </a:tc>
+                <a:tc>
+                  <a:txBody>
+                    <a:bodyPr/>
+                    <a:lstStyle/>
+                    <a:p>
+                      <a:r>
+                        <a:rPr sz="1000" b="1">
+                          <a:solidFill>
+                            <a:srgbClr val="FFFFFF"/>
+                          </a:solidFill>
+                          <a:latin typeface="Arial"/>
+                        </a:rPr>
+                        <a:t>З Bolt+ (11,5 млн)</a:t>
+                      </a:r>
+                    </a:p>
+                  </a:txBody>
+                  <a:tcPr>
+                    <a:solidFill>
+                      <a:srgbClr val="2F313F"/>
+                    </a:solidFill>
+                  </a:tcPr>
+                </a:tc>
+                <a:tc>
+                  <a:txBody>
+                    <a:bodyPr/>
+                    <a:lstStyle/>
+                    <a:p>
+                      <a:r>
+                        <a:rPr sz="1000" b="1">
+                          <a:solidFill>
+                            <a:srgbClr val="FFFFFF"/>
+                          </a:solidFill>
+                          <a:latin typeface="Arial"/>
+                        </a:rPr>
+                        <a:t>Різниця</a:t>
+                      </a:r>
+                    </a:p>
+                  </a:txBody>
+                  <a:tcPr>
+                    <a:solidFill>
+                      <a:srgbClr val="2F313F"/>
+                    </a:solidFill>
+                  </a:tcPr>
+                </a:tc>
+              </a:tr>
+              <a:tr h="310896">
+                <a:tc>
+                  <a:txBody>
+                    <a:bodyPr/>
+                    <a:lstStyle/>
+                    <a:p>
+                      <a:r>
+                        <a:rPr sz="1000" b="1">
+                          <a:solidFill>
+                            <a:srgbClr val="2F313F"/>
+                          </a:solidFill>
+                          <a:latin typeface="Arial"/>
+                        </a:rPr>
+                        <a:t>Сц. 1 (10%) · комісія</a:t>
+                      </a:r>
+                    </a:p>
+                  </a:txBody>
+                  <a:tcPr>
+                    <a:solidFill>
+                      <a:srgbClr val="EEF6F1"/>
+                    </a:solidFill>
+                  </a:tcPr>
+                </a:tc>
+                <a:tc>
+                  <a:txBody>
+                    <a:bodyPr/>
+                    <a:lstStyle/>
+                    <a:p>
+                      <a:r>
+                        <a:rPr sz="1000" b="0">
+                          <a:solidFill>
+                            <a:srgbClr val="6B7080"/>
+                          </a:solidFill>
+                          <a:latin typeface="Arial"/>
+                        </a:rPr>
+                        <a:t>1 035 000 ₴</a:t>
+                      </a:r>
+                    </a:p>
+                  </a:txBody>
+                  <a:tcPr>
+                    <a:solidFill>
+                      <a:srgbClr val="EEF6F1"/>
+                    </a:solidFill>
+                  </a:tcPr>
+                </a:tc>
+                <a:tc>
+                  <a:txBody>
+                    <a:bodyPr/>
+                    <a:lstStyle/>
+                    <a:p>
+                      <a:r>
+                        <a:rPr sz="1000" b="0">
+                          <a:solidFill>
+                            <a:srgbClr val="6B7080"/>
+                          </a:solidFill>
+                          <a:latin typeface="Arial"/>
+                        </a:rPr>
+                        <a:t>1 184 500 ₴</a:t>
+                      </a:r>
+                    </a:p>
+                  </a:txBody>
+                  <a:tcPr>
+                    <a:solidFill>
+                      <a:srgbClr val="EEF6F1"/>
+                    </a:solidFill>
+                  </a:tcPr>
+                </a:tc>
+                <a:tc>
+                  <a:txBody>
+                    <a:bodyPr/>
+                    <a:lstStyle/>
+                    <a:p>
+                      <a:r>
+                        <a:rPr sz="1000" b="1">
+                          <a:solidFill>
+                            <a:srgbClr val="34D186"/>
+                          </a:solidFill>
+                          <a:latin typeface="Arial"/>
+                        </a:rPr>
+                        <a:t>+149 500 ₴</a:t>
+                      </a:r>
+                    </a:p>
+                  </a:txBody>
+                  <a:tcPr>
+                    <a:solidFill>
+                      <a:srgbClr val="EEF6F1"/>
+                    </a:solidFill>
+                  </a:tcPr>
+                </a:tc>
+              </a:tr>
+              <a:tr h="310896">
+                <a:tc>
+                  <a:txBody>
+                    <a:bodyPr/>
+                    <a:lstStyle/>
+                    <a:p>
+                      <a:r>
+                        <a:rPr sz="1000" b="1">
+                          <a:solidFill>
+                            <a:srgbClr val="2F313F"/>
+                          </a:solidFill>
+                          <a:latin typeface="Arial"/>
+                        </a:rPr>
+                        <a:t>Сц. 1 (10%) · чисте</a:t>
+                      </a:r>
+                    </a:p>
+                  </a:txBody>
+                  <a:tcPr>
+                    <a:solidFill>
+                      <a:srgbClr val="FFFFFF"/>
+                    </a:solidFill>
+                  </a:tcPr>
+                </a:tc>
+                <a:tc>
+                  <a:txBody>
+                    <a:bodyPr/>
+                    <a:lstStyle/>
+                    <a:p>
+                      <a:r>
+                        <a:rPr sz="1000" b="0">
+                          <a:solidFill>
+                            <a:srgbClr val="6B7080"/>
+                          </a:solidFill>
+                          <a:latin typeface="Arial"/>
+                        </a:rPr>
+                        <a:t>9 315 000 ₴</a:t>
+                      </a:r>
+                    </a:p>
+                  </a:txBody>
+                  <a:tcPr>
+                    <a:solidFill>
+                      <a:srgbClr val="FFFFFF"/>
+                    </a:solidFill>
+                  </a:tcPr>
+                </a:tc>
+                <a:tc>
+                  <a:txBody>
+                    <a:bodyPr/>
+                    <a:lstStyle/>
+                    <a:p>
+                      <a:r>
+                        <a:rPr sz="1000" b="0">
+                          <a:solidFill>
+                            <a:srgbClr val="6B7080"/>
+                          </a:solidFill>
+                          <a:latin typeface="Arial"/>
+                        </a:rPr>
+                        <a:t>10 315 500 ₴</a:t>
+                      </a:r>
+                    </a:p>
+                  </a:txBody>
+                  <a:tcPr>
+                    <a:solidFill>
+                      <a:srgbClr val="FFFFFF"/>
+                    </a:solidFill>
+                  </a:tcPr>
+                </a:tc>
+                <a:tc>
+                  <a:txBody>
+                    <a:bodyPr/>
+                    <a:lstStyle/>
+                    <a:p>
+                      <a:r>
+                        <a:rPr sz="1000" b="1">
+                          <a:solidFill>
+                            <a:srgbClr val="34D186"/>
+                          </a:solidFill>
+                          <a:latin typeface="Arial"/>
+                        </a:rPr>
+                        <a:t>+1 000 500 ₴</a:t>
+                      </a:r>
+                    </a:p>
+                  </a:txBody>
+                  <a:tcPr>
+                    <a:solidFill>
+                      <a:srgbClr val="FFFFFF"/>
+                    </a:solidFill>
+                  </a:tcPr>
+                </a:tc>
+              </a:tr>
+              <a:tr h="310896">
+                <a:tc>
+                  <a:txBody>
+                    <a:bodyPr/>
+                    <a:lstStyle/>
+                    <a:p>
+                      <a:r>
+                        <a:rPr sz="1000" b="1">
+                          <a:solidFill>
+                            <a:srgbClr val="2F313F"/>
+                          </a:solidFill>
+                          <a:latin typeface="Arial"/>
+                        </a:rPr>
+                        <a:t>Сц. 2 (12%) · комісія</a:t>
+                      </a:r>
+                    </a:p>
+                  </a:txBody>
+                  <a:tcPr>
+                    <a:solidFill>
+                      <a:srgbClr val="EEF6F1"/>
+                    </a:solidFill>
+                  </a:tcPr>
+                </a:tc>
+                <a:tc>
+                  <a:txBody>
+                    <a:bodyPr/>
+                    <a:lstStyle/>
+                    <a:p>
+                      <a:r>
+                        <a:rPr sz="1000" b="0">
+                          <a:solidFill>
+                            <a:srgbClr val="6B7080"/>
+                          </a:solidFill>
+                          <a:latin typeface="Arial"/>
+                        </a:rPr>
+                        <a:t>1 242 000 ₴</a:t>
+                      </a:r>
+                    </a:p>
+                  </a:txBody>
+                  <a:tcPr>
+                    <a:solidFill>
+                      <a:srgbClr val="EEF6F1"/>
+                    </a:solidFill>
+                  </a:tcPr>
+                </a:tc>
+                <a:tc>
+                  <a:txBody>
+                    <a:bodyPr/>
+                    <a:lstStyle/>
+                    <a:p>
+                      <a:r>
+                        <a:rPr sz="1000" b="0">
+                          <a:solidFill>
+                            <a:srgbClr val="6B7080"/>
+                          </a:solidFill>
+                          <a:latin typeface="Arial"/>
+                        </a:rPr>
+                        <a:t>1 414 500 ₴</a:t>
+                      </a:r>
+                    </a:p>
+                  </a:txBody>
+                  <a:tcPr>
+                    <a:solidFill>
+                      <a:srgbClr val="EEF6F1"/>
+                    </a:solidFill>
+                  </a:tcPr>
+                </a:tc>
+                <a:tc>
+                  <a:txBody>
+                    <a:bodyPr/>
+                    <a:lstStyle/>
+                    <a:p>
+                      <a:r>
+                        <a:rPr sz="1000" b="1">
+                          <a:solidFill>
+                            <a:srgbClr val="34D186"/>
+                          </a:solidFill>
+                          <a:latin typeface="Arial"/>
+                        </a:rPr>
+                        <a:t>+172 500 ₴</a:t>
+                      </a:r>
+                    </a:p>
+                  </a:txBody>
+                  <a:tcPr>
+                    <a:solidFill>
+                      <a:srgbClr val="EEF6F1"/>
+                    </a:solidFill>
+                  </a:tcPr>
+                </a:tc>
+              </a:tr>
+              <a:tr h="310896">
+                <a:tc>
+                  <a:txBody>
+                    <a:bodyPr/>
+                    <a:lstStyle/>
+                    <a:p>
+                      <a:r>
+                        <a:rPr sz="1000" b="1">
+                          <a:solidFill>
+                            <a:srgbClr val="2F313F"/>
+                          </a:solidFill>
+                          <a:latin typeface="Arial"/>
+                        </a:rPr>
+                        <a:t>Сц. 2 (12%) · чисте</a:t>
+                      </a:r>
+                    </a:p>
+                  </a:txBody>
+                  <a:tcPr>
+                    <a:solidFill>
+                      <a:srgbClr val="FFFFFF"/>
+                    </a:solidFill>
+                  </a:tcPr>
+                </a:tc>
+                <a:tc>
+                  <a:txBody>
+                    <a:bodyPr/>
+                    <a:lstStyle/>
+                    <a:p>
+                      <a:r>
+                        <a:rPr sz="1000" b="0">
+                          <a:solidFill>
+                            <a:srgbClr val="6B7080"/>
+                          </a:solidFill>
+                          <a:latin typeface="Arial"/>
+                        </a:rPr>
+                        <a:t>9 108 000 ₴</a:t>
+                      </a:r>
+                    </a:p>
+                  </a:txBody>
+                  <a:tcPr>
+                    <a:solidFill>
+                      <a:srgbClr val="FFFFFF"/>
+                    </a:solidFill>
+                  </a:tcPr>
+                </a:tc>
+                <a:tc>
+                  <a:txBody>
+                    <a:bodyPr/>
+                    <a:lstStyle/>
+                    <a:p>
+                      <a:r>
+                        <a:rPr sz="1000" b="0">
+                          <a:solidFill>
+                            <a:srgbClr val="6B7080"/>
+                          </a:solidFill>
+                          <a:latin typeface="Arial"/>
+                        </a:rPr>
+                        <a:t>10 085 500 ₴</a:t>
+                      </a:r>
+                    </a:p>
+                  </a:txBody>
+                  <a:tcPr>
+                    <a:solidFill>
+                      <a:srgbClr val="FFFFFF"/>
+                    </a:solidFill>
+                  </a:tcPr>
+                </a:tc>
+                <a:tc>
+                  <a:txBody>
+                    <a:bodyPr/>
+                    <a:lstStyle/>
+                    <a:p>
+                      <a:r>
+                        <a:rPr sz="1000" b="1">
+                          <a:solidFill>
+                            <a:srgbClr val="34D186"/>
+                          </a:solidFill>
+                          <a:latin typeface="Arial"/>
+                        </a:rPr>
+                        <a:t>+977 500 ₴</a:t>
+                      </a:r>
+                    </a:p>
+                  </a:txBody>
+                  <a:tcPr>
+                    <a:solidFill>
+                      <a:srgbClr val="FFFFFF"/>
+                    </a:solidFill>
+                  </a:tcPr>
+                </a:tc>
+              </a:tr>
+            </a:tbl>
+          </a:graphicData>
+        </a:graphic>
+      </p:graphicFrame>
+      <p:sp>
+        <p:nvSpPr>
+          <p:cNvPr id="7" name="Rounded Rectangle 6"/>
           <p:cNvSpPr/>
           <p:nvPr/>
         </p:nvSpPr>
         <p:spPr>
           <a:xfrm>
-            <a:off x="548640" y="1874519"/>
-            <a:ext cx="3931920" cy="1234440"/>
+            <a:off x="548640" y="4069080"/>
+            <a:ext cx="8046720" cy="566928"/>
           </a:xfrm>
           <a:prstGeom prst="roundRect">
-            <a:avLst/>
-          </a:prstGeom>
-          <a:solidFill>
-            <a:srgbClr val="EEF6F1"/>
-          </a:solidFill>
-          <a:ln>
-            <a:noFill/>
-          </a:ln>
-          <a:effectLst/>
-        </p:spPr>
-        <p:style>
-          <a:lnRef idx="1">
-            <a:schemeClr val="accent1"/>
-          </a:lnRef>
-          <a:fillRef idx="3">
-            <a:schemeClr val="accent1"/>
-          </a:fillRef>
-          <a:effectRef idx="2">
-            <a:schemeClr val="accent1"/>
-          </a:effectRef>
-          <a:fontRef idx="minor">
-            <a:schemeClr val="lt1"/>
-          </a:fontRef>
-        </p:style>
-        <p:txBody>
-          <a:bodyPr rtlCol="0" anchor="ctr"/>
-          <a:lstStyle/>
-          <a:p>
-            <a:pPr algn="ctr"/>
-          </a:p>
-        </p:txBody>
-      </p:sp>
-      <p:sp>
-        <p:nvSpPr>
-          <p:cNvPr id="6" name="Rectangle 5"/>
-          <p:cNvSpPr/>
-          <p:nvPr/>
-        </p:nvSpPr>
-        <p:spPr>
-          <a:xfrm>
-            <a:off x="548640" y="1874519"/>
-            <a:ext cx="82296" cy="1234440"/>
-          </a:xfrm>
-          <a:prstGeom prst="rect">
             <a:avLst/>
           </a:prstGeom>
           <a:solidFill>
@@ -4043,14 +4909,14 @@
       </p:sp>
       <p:sp>
         <p:nvSpPr>
-          <p:cNvPr id="7" name="TextBox 6"/>
+          <p:cNvPr id="8" name="TextBox 7"/>
           <p:cNvSpPr txBox="1"/>
           <p:nvPr/>
         </p:nvSpPr>
         <p:spPr>
           <a:xfrm>
-            <a:off x="804672" y="2020824"/>
-            <a:ext cx="3566160" cy="1005840"/>
+            <a:off x="731520" y="4123944"/>
+            <a:ext cx="7680960" cy="457200"/>
           </a:xfrm>
           <a:prstGeom prst="rect">
             <a:avLst/>
@@ -4063,127 +4929,29 @@
           </a:bodyPr>
           <a:lstStyle/>
           <a:p>
-            <a:r>
-              <a:rPr sz="1350" b="1">
-                <a:solidFill>
-                  <a:srgbClr val="2F313F"/>
-                </a:solidFill>
-                <a:latin typeface="Arial"/>
-              </a:rPr>
-              <a:t>Персоналізований контент</a:t>
-            </a:r>
-          </a:p>
-          <a:p>
-            <a:r>
-              <a:rPr sz="1050" b="0">
-                <a:solidFill>
-                  <a:srgbClr val="6B7080"/>
-                </a:solidFill>
-                <a:latin typeface="Arial"/>
-              </a:rPr>
-              <a:t>Рекомендації на основі історії та вподобань користувача.</a:t>
-            </a:r>
-          </a:p>
-        </p:txBody>
-      </p:sp>
-      <p:sp>
-        <p:nvSpPr>
-          <p:cNvPr id="8" name="Rounded Rectangle 7"/>
-          <p:cNvSpPr/>
-          <p:nvPr/>
-        </p:nvSpPr>
-        <p:spPr>
-          <a:xfrm>
-            <a:off x="4663440" y="1874519"/>
-            <a:ext cx="3931920" cy="1234440"/>
-          </a:xfrm>
-          <a:prstGeom prst="roundRect">
-            <a:avLst/>
-          </a:prstGeom>
-          <a:solidFill>
-            <a:srgbClr val="EEF6F1"/>
-          </a:solidFill>
-          <a:ln>
-            <a:noFill/>
-          </a:ln>
-          <a:effectLst/>
-        </p:spPr>
-        <p:style>
-          <a:lnRef idx="1">
-            <a:schemeClr val="accent1"/>
-          </a:lnRef>
-          <a:fillRef idx="3">
-            <a:schemeClr val="accent1"/>
-          </a:fillRef>
-          <a:effectRef idx="2">
-            <a:schemeClr val="accent1"/>
-          </a:effectRef>
-          <a:fontRef idx="minor">
-            <a:schemeClr val="lt1"/>
-          </a:fontRef>
-        </p:style>
-        <p:txBody>
-          <a:bodyPr rtlCol="0" anchor="ctr"/>
-          <a:lstStyle/>
-          <a:p>
-            <a:pPr algn="ctr"/>
-          </a:p>
-        </p:txBody>
-      </p:sp>
-      <p:sp>
-        <p:nvSpPr>
-          <p:cNvPr id="9" name="Rectangle 8"/>
-          <p:cNvSpPr/>
-          <p:nvPr/>
-        </p:nvSpPr>
-        <p:spPr>
-          <a:xfrm>
-            <a:off x="4663440" y="1874519"/>
-            <a:ext cx="82296" cy="1234440"/>
-          </a:xfrm>
-          <a:prstGeom prst="rect">
-            <a:avLst/>
-          </a:prstGeom>
-          <a:solidFill>
-            <a:srgbClr val="34D186"/>
-          </a:solidFill>
-          <a:ln>
-            <a:noFill/>
-          </a:ln>
-          <a:effectLst/>
-        </p:spPr>
-        <p:style>
-          <a:lnRef idx="1">
-            <a:schemeClr val="accent1"/>
-          </a:lnRef>
-          <a:fillRef idx="3">
-            <a:schemeClr val="accent1"/>
-          </a:fillRef>
-          <a:effectRef idx="2">
-            <a:schemeClr val="accent1"/>
-          </a:effectRef>
-          <a:fontRef idx="minor">
-            <a:schemeClr val="lt1"/>
-          </a:fontRef>
-        </p:style>
-        <p:txBody>
-          <a:bodyPr rtlCol="0" anchor="ctr"/>
-          <a:lstStyle/>
-          <a:p>
-            <a:pPr algn="ctr"/>
-          </a:p>
-        </p:txBody>
-      </p:sp>
-      <p:sp>
-        <p:nvSpPr>
-          <p:cNvPr id="10" name="TextBox 9"/>
+            <a:pPr algn="ctr"/>
+            <a:r>
+              <a:rPr sz="1100" b="1">
+                <a:solidFill>
+                  <a:srgbClr val="FFFFFF"/>
+                </a:solidFill>
+                <a:latin typeface="Arial"/>
+              </a:rPr>
+              <a:t>Без Bolt+ економимо ~150–173 тис ₴ комісії, але чистими втрачаємо ~1 млн ₴ · кожна 1 ₴ комісії → ~7 ₴ обороту → варте того</a:t>
+            </a:r>
+          </a:p>
+        </p:txBody>
+      </p:sp>
+      <p:sp>
+        <p:nvSpPr>
+          <p:cNvPr id="9" name="TextBox 8"/>
           <p:cNvSpPr txBox="1"/>
           <p:nvPr/>
         </p:nvSpPr>
         <p:spPr>
           <a:xfrm>
-            <a:off x="4919472" y="2020824"/>
-            <a:ext cx="3566160" cy="1005840"/>
+            <a:off x="457200" y="4736592"/>
+            <a:ext cx="8229600" cy="274320"/>
           </a:xfrm>
           <a:prstGeom prst="rect">
             <a:avLst/>
@@ -4197,290 +4965,13 @@
           <a:lstStyle/>
           <a:p>
             <a:r>
-              <a:rPr sz="1350" b="1">
-                <a:solidFill>
-                  <a:srgbClr val="2F313F"/>
-                </a:solidFill>
-                <a:latin typeface="Arial"/>
-              </a:rPr>
-              <a:t>Зручний пошук і фільтри</a:t>
-            </a:r>
-          </a:p>
-          <a:p>
-            <a:r>
-              <a:rPr sz="1050" b="0">
+              <a:rPr sz="850" b="0">
                 <a:solidFill>
                   <a:srgbClr val="6B7080"/>
                 </a:solidFill>
                 <a:latin typeface="Arial"/>
               </a:rPr>
-              <a:t>Швидка навігація, що показує більше релевантних товарів.</a:t>
-            </a:r>
-          </a:p>
-        </p:txBody>
-      </p:sp>
-      <p:sp>
-        <p:nvSpPr>
-          <p:cNvPr id="11" name="Rounded Rectangle 10"/>
-          <p:cNvSpPr/>
-          <p:nvPr/>
-        </p:nvSpPr>
-        <p:spPr>
-          <a:xfrm>
-            <a:off x="548640" y="3246120"/>
-            <a:ext cx="3931920" cy="1234440"/>
-          </a:xfrm>
-          <a:prstGeom prst="roundRect">
-            <a:avLst/>
-          </a:prstGeom>
-          <a:solidFill>
-            <a:srgbClr val="EEF6F1"/>
-          </a:solidFill>
-          <a:ln>
-            <a:noFill/>
-          </a:ln>
-          <a:effectLst/>
-        </p:spPr>
-        <p:style>
-          <a:lnRef idx="1">
-            <a:schemeClr val="accent1"/>
-          </a:lnRef>
-          <a:fillRef idx="3">
-            <a:schemeClr val="accent1"/>
-          </a:fillRef>
-          <a:effectRef idx="2">
-            <a:schemeClr val="accent1"/>
-          </a:effectRef>
-          <a:fontRef idx="minor">
-            <a:schemeClr val="lt1"/>
-          </a:fontRef>
-        </p:style>
-        <p:txBody>
-          <a:bodyPr rtlCol="0" anchor="ctr"/>
-          <a:lstStyle/>
-          <a:p>
-            <a:pPr algn="ctr"/>
-          </a:p>
-        </p:txBody>
-      </p:sp>
-      <p:sp>
-        <p:nvSpPr>
-          <p:cNvPr id="12" name="Rectangle 11"/>
-          <p:cNvSpPr/>
-          <p:nvPr/>
-        </p:nvSpPr>
-        <p:spPr>
-          <a:xfrm>
-            <a:off x="548640" y="3246120"/>
-            <a:ext cx="82296" cy="1234440"/>
-          </a:xfrm>
-          <a:prstGeom prst="rect">
-            <a:avLst/>
-          </a:prstGeom>
-          <a:solidFill>
-            <a:srgbClr val="34D186"/>
-          </a:solidFill>
-          <a:ln>
-            <a:noFill/>
-          </a:ln>
-          <a:effectLst/>
-        </p:spPr>
-        <p:style>
-          <a:lnRef idx="1">
-            <a:schemeClr val="accent1"/>
-          </a:lnRef>
-          <a:fillRef idx="3">
-            <a:schemeClr val="accent1"/>
-          </a:fillRef>
-          <a:effectRef idx="2">
-            <a:schemeClr val="accent1"/>
-          </a:effectRef>
-          <a:fontRef idx="minor">
-            <a:schemeClr val="lt1"/>
-          </a:fontRef>
-        </p:style>
-        <p:txBody>
-          <a:bodyPr rtlCol="0" anchor="ctr"/>
-          <a:lstStyle/>
-          <a:p>
-            <a:pPr algn="ctr"/>
-          </a:p>
-        </p:txBody>
-      </p:sp>
-      <p:sp>
-        <p:nvSpPr>
-          <p:cNvPr id="13" name="TextBox 12"/>
-          <p:cNvSpPr txBox="1"/>
-          <p:nvPr/>
-        </p:nvSpPr>
-        <p:spPr>
-          <a:xfrm>
-            <a:off x="804672" y="3392424"/>
-            <a:ext cx="3566160" cy="1005840"/>
-          </a:xfrm>
-          <a:prstGeom prst="rect">
-            <a:avLst/>
-          </a:prstGeom>
-          <a:noFill/>
-        </p:spPr>
-        <p:txBody>
-          <a:bodyPr wrap="square">
-            <a:spAutoFit/>
-          </a:bodyPr>
-          <a:lstStyle/>
-          <a:p>
-            <a:r>
-              <a:rPr sz="1350" b="1">
-                <a:solidFill>
-                  <a:srgbClr val="2F313F"/>
-                </a:solidFill>
-                <a:latin typeface="Arial"/>
-              </a:rPr>
-              <a:t>Прості точки входу в магазини</a:t>
-            </a:r>
-          </a:p>
-          <a:p>
-            <a:r>
-              <a:rPr sz="1050" b="0">
-                <a:solidFill>
-                  <a:srgbClr val="6B7080"/>
-                </a:solidFill>
-                <a:latin typeface="Arial"/>
-              </a:rPr>
-              <a:t>High-intent вкладки внизу екрану ведуть у ваш магазин.</a:t>
-            </a:r>
-          </a:p>
-        </p:txBody>
-      </p:sp>
-      <p:sp>
-        <p:nvSpPr>
-          <p:cNvPr id="14" name="Rounded Rectangle 13"/>
-          <p:cNvSpPr/>
-          <p:nvPr/>
-        </p:nvSpPr>
-        <p:spPr>
-          <a:xfrm>
-            <a:off x="4663440" y="3246120"/>
-            <a:ext cx="3931920" cy="1234440"/>
-          </a:xfrm>
-          <a:prstGeom prst="roundRect">
-            <a:avLst/>
-          </a:prstGeom>
-          <a:solidFill>
-            <a:srgbClr val="EEF6F1"/>
-          </a:solidFill>
-          <a:ln>
-            <a:noFill/>
-          </a:ln>
-          <a:effectLst/>
-        </p:spPr>
-        <p:style>
-          <a:lnRef idx="1">
-            <a:schemeClr val="accent1"/>
-          </a:lnRef>
-          <a:fillRef idx="3">
-            <a:schemeClr val="accent1"/>
-          </a:fillRef>
-          <a:effectRef idx="2">
-            <a:schemeClr val="accent1"/>
-          </a:effectRef>
-          <a:fontRef idx="minor">
-            <a:schemeClr val="lt1"/>
-          </a:fontRef>
-        </p:style>
-        <p:txBody>
-          <a:bodyPr rtlCol="0" anchor="ctr"/>
-          <a:lstStyle/>
-          <a:p>
-            <a:pPr algn="ctr"/>
-          </a:p>
-        </p:txBody>
-      </p:sp>
-      <p:sp>
-        <p:nvSpPr>
-          <p:cNvPr id="15" name="Rectangle 14"/>
-          <p:cNvSpPr/>
-          <p:nvPr/>
-        </p:nvSpPr>
-        <p:spPr>
-          <a:xfrm>
-            <a:off x="4663440" y="3246120"/>
-            <a:ext cx="82296" cy="1234440"/>
-          </a:xfrm>
-          <a:prstGeom prst="rect">
-            <a:avLst/>
-          </a:prstGeom>
-          <a:solidFill>
-            <a:srgbClr val="34D186"/>
-          </a:solidFill>
-          <a:ln>
-            <a:noFill/>
-          </a:ln>
-          <a:effectLst/>
-        </p:spPr>
-        <p:style>
-          <a:lnRef idx="1">
-            <a:schemeClr val="accent1"/>
-          </a:lnRef>
-          <a:fillRef idx="3">
-            <a:schemeClr val="accent1"/>
-          </a:fillRef>
-          <a:effectRef idx="2">
-            <a:schemeClr val="accent1"/>
-          </a:effectRef>
-          <a:fontRef idx="minor">
-            <a:schemeClr val="lt1"/>
-          </a:fontRef>
-        </p:style>
-        <p:txBody>
-          <a:bodyPr rtlCol="0" anchor="ctr"/>
-          <a:lstStyle/>
-          <a:p>
-            <a:pPr algn="ctr"/>
-          </a:p>
-        </p:txBody>
-      </p:sp>
-      <p:sp>
-        <p:nvSpPr>
-          <p:cNvPr id="16" name="TextBox 15"/>
-          <p:cNvSpPr txBox="1"/>
-          <p:nvPr/>
-        </p:nvSpPr>
-        <p:spPr>
-          <a:xfrm>
-            <a:off x="4919472" y="3392424"/>
-            <a:ext cx="3566160" cy="1005840"/>
-          </a:xfrm>
-          <a:prstGeom prst="rect">
-            <a:avLst/>
-          </a:prstGeom>
-          <a:noFill/>
-        </p:spPr>
-        <p:txBody>
-          <a:bodyPr wrap="square">
-            <a:spAutoFit/>
-          </a:bodyPr>
-          <a:lstStyle/>
-          <a:p>
-            <a:r>
-              <a:rPr sz="1350" b="1">
-                <a:solidFill>
-                  <a:srgbClr val="2F313F"/>
-                </a:solidFill>
-                <a:latin typeface="Arial"/>
-              </a:rPr>
-              <a:t>Bolt Plus для утримання</a:t>
-            </a:r>
-          </a:p>
-          <a:p>
-            <a:r>
-              <a:rPr sz="1050" b="0">
-                <a:solidFill>
-                  <a:srgbClr val="6B7080"/>
-                </a:solidFill>
-                <a:latin typeface="Arial"/>
-              </a:rPr>
-              <a:t>Переваги підписки підвищують частоту та повернення клієнтів.</a:t>
+              <a:t>Розрахунок: GMV 11,5 млн ₴ (з Bolt+), без Bolt+ −10%; частка Bolt+ 15%, +2% на ці замовлення.</a:t>
             </a:r>
           </a:p>
         </p:txBody>
@@ -4608,7 +5099,7 @@
                 </a:solidFill>
                 <a:latin typeface="Arial"/>
               </a:rPr>
-              <a:t>МАРКЕТИНГОВА ПІДТРИМКА</a:t>
+              <a:t>ДОСВІД КОРИСТУВАЧА</a:t>
             </a:r>
           </a:p>
           <a:p>
@@ -4619,7 +5110,7 @@
                 </a:solidFill>
                 <a:latin typeface="Arial"/>
               </a:rPr>
-              <a:t>Маркетинг і реклама, що ростять продажі магазину</a:t>
+              <a:t>Bolt інвестує в Consumer Experience</a:t>
             </a:r>
           </a:p>
         </p:txBody>
@@ -4632,8 +5123,8 @@
         </p:nvSpPr>
         <p:spPr>
           <a:xfrm>
-            <a:off x="548640" y="1920240"/>
-            <a:ext cx="2606040" cy="777240"/>
+            <a:off x="548640" y="1874519"/>
+            <a:ext cx="3931920" cy="1234440"/>
           </a:xfrm>
           <a:prstGeom prst="roundRect">
             <a:avLst/>
@@ -4670,16 +5161,16 @@
       </p:sp>
       <p:sp>
         <p:nvSpPr>
-          <p:cNvPr id="6" name="Rounded Rectangle 5"/>
+          <p:cNvPr id="6" name="Rectangle 5"/>
           <p:cNvSpPr/>
           <p:nvPr/>
         </p:nvSpPr>
         <p:spPr>
           <a:xfrm>
-            <a:off x="713232" y="2121408"/>
-            <a:ext cx="365760" cy="365760"/>
-          </a:xfrm>
-          <a:prstGeom prst="roundRect">
+            <a:off x="548640" y="1874519"/>
+            <a:ext cx="82296" cy="1234440"/>
+          </a:xfrm>
+          <a:prstGeom prst="rect">
             <a:avLst/>
           </a:prstGeom>
           <a:solidFill>
@@ -4720,8 +5211,8 @@
         </p:nvSpPr>
         <p:spPr>
           <a:xfrm>
-            <a:off x="1234440" y="2084832"/>
-            <a:ext cx="1828800" cy="457200"/>
+            <a:off x="804672" y="2020824"/>
+            <a:ext cx="3566160" cy="1005840"/>
           </a:xfrm>
           <a:prstGeom prst="rect">
             <a:avLst/>
@@ -4735,13 +5226,24 @@
           <a:lstStyle/>
           <a:p>
             <a:r>
-              <a:rPr sz="1300" b="1">
+              <a:rPr sz="1350" b="1">
                 <a:solidFill>
                   <a:srgbClr val="2F313F"/>
                 </a:solidFill>
                 <a:latin typeface="Arial"/>
               </a:rPr>
-              <a:t>Bolt Plus</a:t>
+              <a:t>Персоналізований контент</a:t>
+            </a:r>
+          </a:p>
+          <a:p>
+            <a:r>
+              <a:rPr sz="1050" b="0">
+                <a:solidFill>
+                  <a:srgbClr val="6B7080"/>
+                </a:solidFill>
+                <a:latin typeface="Arial"/>
+              </a:rPr>
+              <a:t>Рекомендації на основі історії та вподобань користувача.</a:t>
             </a:r>
           </a:p>
         </p:txBody>
@@ -4754,8 +5256,8 @@
         </p:nvSpPr>
         <p:spPr>
           <a:xfrm>
-            <a:off x="3383280" y="1920240"/>
-            <a:ext cx="2606040" cy="777240"/>
+            <a:off x="4663440" y="1874519"/>
+            <a:ext cx="3931920" cy="1234440"/>
           </a:xfrm>
           <a:prstGeom prst="roundRect">
             <a:avLst/>
@@ -4792,16 +5294,16 @@
       </p:sp>
       <p:sp>
         <p:nvSpPr>
-          <p:cNvPr id="9" name="Rounded Rectangle 8"/>
+          <p:cNvPr id="9" name="Rectangle 8"/>
           <p:cNvSpPr/>
           <p:nvPr/>
         </p:nvSpPr>
         <p:spPr>
           <a:xfrm>
-            <a:off x="3547872" y="2121408"/>
-            <a:ext cx="365760" cy="365760"/>
-          </a:xfrm>
-          <a:prstGeom prst="roundRect">
+            <a:off x="4663440" y="1874519"/>
+            <a:ext cx="82296" cy="1234440"/>
+          </a:xfrm>
+          <a:prstGeom prst="rect">
             <a:avLst/>
           </a:prstGeom>
           <a:solidFill>
@@ -4842,8 +5344,8 @@
         </p:nvSpPr>
         <p:spPr>
           <a:xfrm>
-            <a:off x="4069080" y="2084832"/>
-            <a:ext cx="1828800" cy="457200"/>
+            <a:off x="4919472" y="2020824"/>
+            <a:ext cx="3566160" cy="1005840"/>
           </a:xfrm>
           <a:prstGeom prst="rect">
             <a:avLst/>
@@ -4857,13 +5359,24 @@
           <a:lstStyle/>
           <a:p>
             <a:r>
-              <a:rPr sz="1300" b="1">
+              <a:rPr sz="1350" b="1">
                 <a:solidFill>
                   <a:srgbClr val="2F313F"/>
                 </a:solidFill>
                 <a:latin typeface="Arial"/>
               </a:rPr>
-              <a:t>In-app engagement</a:t>
+              <a:t>Зручний пошук і фільтри</a:t>
+            </a:r>
+          </a:p>
+          <a:p>
+            <a:r>
+              <a:rPr sz="1050" b="0">
+                <a:solidFill>
+                  <a:srgbClr val="6B7080"/>
+                </a:solidFill>
+                <a:latin typeface="Arial"/>
+              </a:rPr>
+              <a:t>Швидка навігація, що показує більше релевантних товарів.</a:t>
             </a:r>
           </a:p>
         </p:txBody>
@@ -4876,8 +5389,8 @@
         </p:nvSpPr>
         <p:spPr>
           <a:xfrm>
-            <a:off x="6217920" y="1920240"/>
-            <a:ext cx="2606040" cy="777240"/>
+            <a:off x="548640" y="3246120"/>
+            <a:ext cx="3931920" cy="1234440"/>
           </a:xfrm>
           <a:prstGeom prst="roundRect">
             <a:avLst/>
@@ -4914,16 +5427,16 @@
       </p:sp>
       <p:sp>
         <p:nvSpPr>
-          <p:cNvPr id="12" name="Rounded Rectangle 11"/>
+          <p:cNvPr id="12" name="Rectangle 11"/>
           <p:cNvSpPr/>
           <p:nvPr/>
         </p:nvSpPr>
         <p:spPr>
           <a:xfrm>
-            <a:off x="6382512" y="2121408"/>
-            <a:ext cx="365760" cy="365760"/>
-          </a:xfrm>
-          <a:prstGeom prst="roundRect">
+            <a:off x="548640" y="3246120"/>
+            <a:ext cx="82296" cy="1234440"/>
+          </a:xfrm>
+          <a:prstGeom prst="rect">
             <a:avLst/>
           </a:prstGeom>
           <a:solidFill>
@@ -4964,8 +5477,8 @@
         </p:nvSpPr>
         <p:spPr>
           <a:xfrm>
-            <a:off x="6903720" y="2084832"/>
-            <a:ext cx="1828800" cy="457200"/>
+            <a:off x="804672" y="3392424"/>
+            <a:ext cx="3566160" cy="1005840"/>
           </a:xfrm>
           <a:prstGeom prst="rect">
             <a:avLst/>
@@ -4979,13 +5492,24 @@
           <a:lstStyle/>
           <a:p>
             <a:r>
-              <a:rPr sz="1300" b="1">
+              <a:rPr sz="1350" b="1">
                 <a:solidFill>
                   <a:srgbClr val="2F313F"/>
                 </a:solidFill>
                 <a:latin typeface="Arial"/>
               </a:rPr>
-              <a:t>Merchant Offers</a:t>
+              <a:t>Прості точки входу в магазини</a:t>
+            </a:r>
+          </a:p>
+          <a:p>
+            <a:r>
+              <a:rPr sz="1050" b="0">
+                <a:solidFill>
+                  <a:srgbClr val="6B7080"/>
+                </a:solidFill>
+                <a:latin typeface="Arial"/>
+              </a:rPr>
+              <a:t>High-intent вкладки внизу екрану ведуть у ваш магазин.</a:t>
             </a:r>
           </a:p>
         </p:txBody>
@@ -4998,8 +5522,8 @@
         </p:nvSpPr>
         <p:spPr>
           <a:xfrm>
-            <a:off x="548640" y="2880360"/>
-            <a:ext cx="2606040" cy="777240"/>
+            <a:off x="4663440" y="3246120"/>
+            <a:ext cx="3931920" cy="1234440"/>
           </a:xfrm>
           <a:prstGeom prst="roundRect">
             <a:avLst/>
@@ -5036,16 +5560,16 @@
       </p:sp>
       <p:sp>
         <p:nvSpPr>
-          <p:cNvPr id="15" name="Rounded Rectangle 14"/>
+          <p:cNvPr id="15" name="Rectangle 14"/>
           <p:cNvSpPr/>
           <p:nvPr/>
         </p:nvSpPr>
         <p:spPr>
           <a:xfrm>
-            <a:off x="713232" y="3081528"/>
-            <a:ext cx="365760" cy="365760"/>
-          </a:xfrm>
-          <a:prstGeom prst="roundRect">
+            <a:off x="4663440" y="3246120"/>
+            <a:ext cx="82296" cy="1234440"/>
+          </a:xfrm>
+          <a:prstGeom prst="rect">
             <a:avLst/>
           </a:prstGeom>
           <a:solidFill>
@@ -5086,8 +5610,8 @@
         </p:nvSpPr>
         <p:spPr>
           <a:xfrm>
-            <a:off x="1234440" y="3044952"/>
-            <a:ext cx="1828800" cy="457200"/>
+            <a:off x="4919472" y="3392424"/>
+            <a:ext cx="3566160" cy="1005840"/>
           </a:xfrm>
           <a:prstGeom prst="rect">
             <a:avLst/>
@@ -5101,291 +5625,24 @@
           <a:lstStyle/>
           <a:p>
             <a:r>
-              <a:rPr sz="1300" b="1">
+              <a:rPr sz="1350" b="1">
                 <a:solidFill>
                   <a:srgbClr val="2F313F"/>
                 </a:solidFill>
                 <a:latin typeface="Arial"/>
               </a:rPr>
-              <a:t>Online Ads</a:t>
-            </a:r>
-          </a:p>
-        </p:txBody>
-      </p:sp>
-      <p:sp>
-        <p:nvSpPr>
-          <p:cNvPr id="17" name="Rounded Rectangle 16"/>
-          <p:cNvSpPr/>
-          <p:nvPr/>
-        </p:nvSpPr>
-        <p:spPr>
-          <a:xfrm>
-            <a:off x="3383280" y="2880360"/>
-            <a:ext cx="2606040" cy="777240"/>
-          </a:xfrm>
-          <a:prstGeom prst="roundRect">
-            <a:avLst/>
-          </a:prstGeom>
-          <a:solidFill>
-            <a:srgbClr val="EEF6F1"/>
-          </a:solidFill>
-          <a:ln>
-            <a:noFill/>
-          </a:ln>
-          <a:effectLst/>
-        </p:spPr>
-        <p:style>
-          <a:lnRef idx="1">
-            <a:schemeClr val="accent1"/>
-          </a:lnRef>
-          <a:fillRef idx="3">
-            <a:schemeClr val="accent1"/>
-          </a:fillRef>
-          <a:effectRef idx="2">
-            <a:schemeClr val="accent1"/>
-          </a:effectRef>
-          <a:fontRef idx="minor">
-            <a:schemeClr val="lt1"/>
-          </a:fontRef>
-        </p:style>
-        <p:txBody>
-          <a:bodyPr rtlCol="0" anchor="ctr"/>
-          <a:lstStyle/>
-          <a:p>
-            <a:pPr algn="ctr"/>
-          </a:p>
-        </p:txBody>
-      </p:sp>
-      <p:sp>
-        <p:nvSpPr>
-          <p:cNvPr id="18" name="Rounded Rectangle 17"/>
-          <p:cNvSpPr/>
-          <p:nvPr/>
-        </p:nvSpPr>
-        <p:spPr>
-          <a:xfrm>
-            <a:off x="3547872" y="3081528"/>
-            <a:ext cx="365760" cy="365760"/>
-          </a:xfrm>
-          <a:prstGeom prst="roundRect">
-            <a:avLst/>
-          </a:prstGeom>
-          <a:solidFill>
-            <a:srgbClr val="34D186"/>
-          </a:solidFill>
-          <a:ln>
-            <a:noFill/>
-          </a:ln>
-          <a:effectLst/>
-        </p:spPr>
-        <p:style>
-          <a:lnRef idx="1">
-            <a:schemeClr val="accent1"/>
-          </a:lnRef>
-          <a:fillRef idx="3">
-            <a:schemeClr val="accent1"/>
-          </a:fillRef>
-          <a:effectRef idx="2">
-            <a:schemeClr val="accent1"/>
-          </a:effectRef>
-          <a:fontRef idx="minor">
-            <a:schemeClr val="lt1"/>
-          </a:fontRef>
-        </p:style>
-        <p:txBody>
-          <a:bodyPr rtlCol="0" anchor="ctr"/>
-          <a:lstStyle/>
-          <a:p>
-            <a:pPr algn="ctr"/>
-          </a:p>
-        </p:txBody>
-      </p:sp>
-      <p:sp>
-        <p:nvSpPr>
-          <p:cNvPr id="19" name="TextBox 18"/>
-          <p:cNvSpPr txBox="1"/>
-          <p:nvPr/>
-        </p:nvSpPr>
-        <p:spPr>
-          <a:xfrm>
-            <a:off x="4069080" y="3044952"/>
-            <a:ext cx="1828800" cy="457200"/>
-          </a:xfrm>
-          <a:prstGeom prst="rect">
-            <a:avLst/>
-          </a:prstGeom>
-          <a:noFill/>
-        </p:spPr>
-        <p:txBody>
-          <a:bodyPr wrap="square">
-            <a:spAutoFit/>
-          </a:bodyPr>
-          <a:lstStyle/>
-          <a:p>
-            <a:r>
-              <a:rPr sz="1300" b="1">
-                <a:solidFill>
-                  <a:srgbClr val="2F313F"/>
-                </a:solidFill>
-                <a:latin typeface="Arial"/>
-              </a:rPr>
-              <a:t>PR / Social Media</a:t>
-            </a:r>
-          </a:p>
-        </p:txBody>
-      </p:sp>
-      <p:sp>
-        <p:nvSpPr>
-          <p:cNvPr id="20" name="Rounded Rectangle 19"/>
-          <p:cNvSpPr/>
-          <p:nvPr/>
-        </p:nvSpPr>
-        <p:spPr>
-          <a:xfrm>
-            <a:off x="6217920" y="2880360"/>
-            <a:ext cx="2606040" cy="777240"/>
-          </a:xfrm>
-          <a:prstGeom prst="roundRect">
-            <a:avLst/>
-          </a:prstGeom>
-          <a:solidFill>
-            <a:srgbClr val="EEF6F1"/>
-          </a:solidFill>
-          <a:ln>
-            <a:noFill/>
-          </a:ln>
-          <a:effectLst/>
-        </p:spPr>
-        <p:style>
-          <a:lnRef idx="1">
-            <a:schemeClr val="accent1"/>
-          </a:lnRef>
-          <a:fillRef idx="3">
-            <a:schemeClr val="accent1"/>
-          </a:fillRef>
-          <a:effectRef idx="2">
-            <a:schemeClr val="accent1"/>
-          </a:effectRef>
-          <a:fontRef idx="minor">
-            <a:schemeClr val="lt1"/>
-          </a:fontRef>
-        </p:style>
-        <p:txBody>
-          <a:bodyPr rtlCol="0" anchor="ctr"/>
-          <a:lstStyle/>
-          <a:p>
-            <a:pPr algn="ctr"/>
-          </a:p>
-        </p:txBody>
-      </p:sp>
-      <p:sp>
-        <p:nvSpPr>
-          <p:cNvPr id="21" name="Rounded Rectangle 20"/>
-          <p:cNvSpPr/>
-          <p:nvPr/>
-        </p:nvSpPr>
-        <p:spPr>
-          <a:xfrm>
-            <a:off x="6382512" y="3081528"/>
-            <a:ext cx="365760" cy="365760"/>
-          </a:xfrm>
-          <a:prstGeom prst="roundRect">
-            <a:avLst/>
-          </a:prstGeom>
-          <a:solidFill>
-            <a:srgbClr val="34D186"/>
-          </a:solidFill>
-          <a:ln>
-            <a:noFill/>
-          </a:ln>
-          <a:effectLst/>
-        </p:spPr>
-        <p:style>
-          <a:lnRef idx="1">
-            <a:schemeClr val="accent1"/>
-          </a:lnRef>
-          <a:fillRef idx="3">
-            <a:schemeClr val="accent1"/>
-          </a:fillRef>
-          <a:effectRef idx="2">
-            <a:schemeClr val="accent1"/>
-          </a:effectRef>
-          <a:fontRef idx="minor">
-            <a:schemeClr val="lt1"/>
-          </a:fontRef>
-        </p:style>
-        <p:txBody>
-          <a:bodyPr rtlCol="0" anchor="ctr"/>
-          <a:lstStyle/>
-          <a:p>
-            <a:pPr algn="ctr"/>
-          </a:p>
-        </p:txBody>
-      </p:sp>
-      <p:sp>
-        <p:nvSpPr>
-          <p:cNvPr id="22" name="TextBox 21"/>
-          <p:cNvSpPr txBox="1"/>
-          <p:nvPr/>
-        </p:nvSpPr>
-        <p:spPr>
-          <a:xfrm>
-            <a:off x="6903720" y="3044952"/>
-            <a:ext cx="1828800" cy="457200"/>
-          </a:xfrm>
-          <a:prstGeom prst="rect">
-            <a:avLst/>
-          </a:prstGeom>
-          <a:noFill/>
-        </p:spPr>
-        <p:txBody>
-          <a:bodyPr wrap="square">
-            <a:spAutoFit/>
-          </a:bodyPr>
-          <a:lstStyle/>
-          <a:p>
-            <a:r>
-              <a:rPr sz="1300" b="1">
-                <a:solidFill>
-                  <a:srgbClr val="2F313F"/>
-                </a:solidFill>
-                <a:latin typeface="Arial"/>
-              </a:rPr>
-              <a:t>Email + Push</a:t>
-            </a:r>
-          </a:p>
-        </p:txBody>
-      </p:sp>
-      <p:sp>
-        <p:nvSpPr>
-          <p:cNvPr id="23" name="TextBox 22"/>
-          <p:cNvSpPr txBox="1"/>
-          <p:nvPr/>
-        </p:nvSpPr>
-        <p:spPr>
-          <a:xfrm>
-            <a:off x="548640" y="3931920"/>
-            <a:ext cx="8046720" cy="548640"/>
-          </a:xfrm>
-          <a:prstGeom prst="rect">
-            <a:avLst/>
-          </a:prstGeom>
-          <a:noFill/>
-        </p:spPr>
-        <p:txBody>
-          <a:bodyPr wrap="square">
-            <a:spAutoFit/>
-          </a:bodyPr>
-          <a:lstStyle/>
-          <a:p>
-            <a:r>
-              <a:rPr sz="1300" b="0">
+              <a:t>Bolt Plus для утримання</a:t>
+            </a:r>
+          </a:p>
+          <a:p>
+            <a:r>
+              <a:rPr sz="1050" b="0">
                 <a:solidFill>
                   <a:srgbClr val="6B7080"/>
                 </a:solidFill>
                 <a:latin typeface="Arial"/>
               </a:rPr>
-              <a:t>Комбінація каналів Bolt Food + Bolt Rides дає охоплення, недоступне поодинці.</a:t>
+              <a:t>Переваги підписки підвищують частоту та повернення клієнтів.</a:t>
             </a:r>
           </a:p>
         </p:txBody>
@@ -5513,7 +5770,7 @@
                 </a:solidFill>
                 <a:latin typeface="Arial"/>
               </a:rPr>
-              <a:t>КАМПАНІЇ</a:t>
+              <a:t>МАРКЕТИНГОВА ПІДТРИМКА</a:t>
             </a:r>
           </a:p>
           <a:p>
@@ -5524,7 +5781,7 @@
                 </a:solidFill>
                 <a:latin typeface="Arial"/>
               </a:rPr>
-              <a:t>Маркетингові кампанії: до 10× охоплення</a:t>
+              <a:t>Маркетинг і реклама, що ростять продажі магазину</a:t>
             </a:r>
           </a:p>
         </p:txBody>
@@ -5537,8 +5794,8 @@
         </p:nvSpPr>
         <p:spPr>
           <a:xfrm>
-            <a:off x="548640" y="1874519"/>
-            <a:ext cx="2606040" cy="2194560"/>
+            <a:off x="548640" y="1920240"/>
+            <a:ext cx="2606040" cy="777240"/>
           </a:xfrm>
           <a:prstGeom prst="roundRect">
             <a:avLst/>
@@ -5575,14 +5832,58 @@
       </p:sp>
       <p:sp>
         <p:nvSpPr>
-          <p:cNvPr id="6" name="TextBox 5"/>
+          <p:cNvPr id="6" name="Rounded Rectangle 5"/>
+          <p:cNvSpPr/>
+          <p:nvPr/>
+        </p:nvSpPr>
+        <p:spPr>
+          <a:xfrm>
+            <a:off x="713232" y="2121408"/>
+            <a:ext cx="365760" cy="365760"/>
+          </a:xfrm>
+          <a:prstGeom prst="roundRect">
+            <a:avLst/>
+          </a:prstGeom>
+          <a:solidFill>
+            <a:srgbClr val="34D186"/>
+          </a:solidFill>
+          <a:ln>
+            <a:noFill/>
+          </a:ln>
+          <a:effectLst/>
+        </p:spPr>
+        <p:style>
+          <a:lnRef idx="1">
+            <a:schemeClr val="accent1"/>
+          </a:lnRef>
+          <a:fillRef idx="3">
+            <a:schemeClr val="accent1"/>
+          </a:fillRef>
+          <a:effectRef idx="2">
+            <a:schemeClr val="accent1"/>
+          </a:effectRef>
+          <a:fontRef idx="minor">
+            <a:schemeClr val="lt1"/>
+          </a:fontRef>
+        </p:style>
+        <p:txBody>
+          <a:bodyPr rtlCol="0" anchor="ctr"/>
+          <a:lstStyle/>
+          <a:p>
+            <a:pPr algn="ctr"/>
+          </a:p>
+        </p:txBody>
+      </p:sp>
+      <p:sp>
+        <p:nvSpPr>
+          <p:cNvPr id="7" name="TextBox 6"/>
           <p:cNvSpPr txBox="1"/>
           <p:nvPr/>
         </p:nvSpPr>
         <p:spPr>
           <a:xfrm>
-            <a:off x="731520" y="2103120"/>
-            <a:ext cx="2240280" cy="1828800"/>
+            <a:off x="1234440" y="2084832"/>
+            <a:ext cx="1828800" cy="457200"/>
           </a:xfrm>
           <a:prstGeom prst="rect">
             <a:avLst/>
@@ -5595,53 +5896,28 @@
           </a:bodyPr>
           <a:lstStyle/>
           <a:p>
-            <a:pPr algn="ctr"/>
-            <a:r>
-              <a:rPr sz="1500" b="1">
+            <a:r>
+              <a:rPr sz="1300" b="1">
                 <a:solidFill>
                   <a:srgbClr val="2F313F"/>
                 </a:solidFill>
                 <a:latin typeface="Arial"/>
               </a:rPr>
-              <a:t>Standard</a:t>
-            </a:r>
-          </a:p>
-          <a:p>
-            <a:pPr algn="ctr"/>
-            <a:r>
-              <a:rPr sz="2400" b="1">
-                <a:solidFill>
-                  <a:srgbClr val="34D186"/>
-                </a:solidFill>
-                <a:latin typeface="Arial"/>
-              </a:rPr>
-              <a:t>1× охоплення</a:t>
-            </a:r>
-          </a:p>
-          <a:p>
-            <a:pPr algn="ctr"/>
-            <a:r>
-              <a:rPr sz="1050" b="0">
-                <a:solidFill>
-                  <a:srgbClr val="6B7080"/>
-                </a:solidFill>
-                <a:latin typeface="Arial"/>
-              </a:rPr>
-              <a:t>Email + push Bolt Food</a:t>
-            </a:r>
-          </a:p>
-        </p:txBody>
-      </p:sp>
-      <p:sp>
-        <p:nvSpPr>
-          <p:cNvPr id="7" name="Rounded Rectangle 6"/>
+              <a:t>Bolt Plus</a:t>
+            </a:r>
+          </a:p>
+        </p:txBody>
+      </p:sp>
+      <p:sp>
+        <p:nvSpPr>
+          <p:cNvPr id="8" name="Rounded Rectangle 7"/>
           <p:cNvSpPr/>
           <p:nvPr/>
         </p:nvSpPr>
         <p:spPr>
           <a:xfrm>
-            <a:off x="3383280" y="1874519"/>
-            <a:ext cx="2606040" cy="2194560"/>
+            <a:off x="3383280" y="1920240"/>
+            <a:ext cx="2606040" cy="777240"/>
           </a:xfrm>
           <a:prstGeom prst="roundRect">
             <a:avLst/>
@@ -5678,73 +5954,14 @@
       </p:sp>
       <p:sp>
         <p:nvSpPr>
-          <p:cNvPr id="8" name="TextBox 7"/>
-          <p:cNvSpPr txBox="1"/>
-          <p:nvPr/>
-        </p:nvSpPr>
-        <p:spPr>
-          <a:xfrm>
-            <a:off x="3566160" y="2103120"/>
-            <a:ext cx="2240280" cy="1828800"/>
-          </a:xfrm>
-          <a:prstGeom prst="rect">
-            <a:avLst/>
-          </a:prstGeom>
-          <a:noFill/>
-        </p:spPr>
-        <p:txBody>
-          <a:bodyPr wrap="square">
-            <a:spAutoFit/>
-          </a:bodyPr>
-          <a:lstStyle/>
-          <a:p>
-            <a:pPr algn="ctr"/>
-            <a:r>
-              <a:rPr sz="1500" b="1">
-                <a:solidFill>
-                  <a:srgbClr val="2F313F"/>
-                </a:solidFill>
-                <a:latin typeface="Arial"/>
-              </a:rPr>
-              <a:t>Small</a:t>
-            </a:r>
-          </a:p>
-          <a:p>
-            <a:pPr algn="ctr"/>
-            <a:r>
-              <a:rPr sz="2400" b="1">
-                <a:solidFill>
-                  <a:srgbClr val="34D186"/>
-                </a:solidFill>
-                <a:latin typeface="Arial"/>
-              </a:rPr>
-              <a:t>2× охоплення</a:t>
-            </a:r>
-          </a:p>
-          <a:p>
-            <a:pPr algn="ctr"/>
-            <a:r>
-              <a:rPr sz="1050" b="0">
-                <a:solidFill>
-                  <a:srgbClr val="6B7080"/>
-                </a:solidFill>
-                <a:latin typeface="Arial"/>
-              </a:rPr>
-              <a:t>+ In-app банер, email/push Food &amp; Rides</a:t>
-            </a:r>
-          </a:p>
-        </p:txBody>
-      </p:sp>
-      <p:sp>
-        <p:nvSpPr>
           <p:cNvPr id="9" name="Rounded Rectangle 8"/>
           <p:cNvSpPr/>
           <p:nvPr/>
         </p:nvSpPr>
         <p:spPr>
           <a:xfrm>
-            <a:off x="6217920" y="1874519"/>
-            <a:ext cx="2606040" cy="2194560"/>
+            <a:off x="3547872" y="2121408"/>
+            <a:ext cx="365760" cy="365760"/>
           </a:xfrm>
           <a:prstGeom prst="roundRect">
             <a:avLst/>
@@ -5787,8 +6004,8 @@
         </p:nvSpPr>
         <p:spPr>
           <a:xfrm>
-            <a:off x="6400800" y="2103120"/>
-            <a:ext cx="2240280" cy="1828800"/>
+            <a:off x="4069080" y="2084832"/>
+            <a:ext cx="1828800" cy="457200"/>
           </a:xfrm>
           <a:prstGeom prst="rect">
             <a:avLst/>
@@ -5801,39 +6018,536 @@
           </a:bodyPr>
           <a:lstStyle/>
           <a:p>
-            <a:pPr algn="ctr"/>
-            <a:r>
-              <a:rPr sz="1500" b="1">
-                <a:solidFill>
-                  <a:srgbClr val="FFFFFF"/>
-                </a:solidFill>
-                <a:latin typeface="Arial"/>
-              </a:rPr>
-              <a:t>Big</a:t>
-            </a:r>
-          </a:p>
-          <a:p>
-            <a:pPr algn="ctr"/>
-            <a:r>
-              <a:rPr sz="2400" b="1">
-                <a:solidFill>
-                  <a:srgbClr val="FFFFFF"/>
-                </a:solidFill>
-                <a:latin typeface="Arial"/>
-              </a:rPr>
-              <a:t>10× охоплення</a:t>
-            </a:r>
-          </a:p>
-          <a:p>
-            <a:pPr algn="ctr"/>
-            <a:r>
-              <a:rPr sz="1050" b="0">
-                <a:solidFill>
-                  <a:srgbClr val="FFFFFF"/>
-                </a:solidFill>
-                <a:latin typeface="Arial"/>
-              </a:rPr>
-              <a:t>+ Спец-категорія, pop-up, соцмережі, paid ads, інфлюенсери</a:t>
+            <a:r>
+              <a:rPr sz="1300" b="1">
+                <a:solidFill>
+                  <a:srgbClr val="2F313F"/>
+                </a:solidFill>
+                <a:latin typeface="Arial"/>
+              </a:rPr>
+              <a:t>In-app engagement</a:t>
+            </a:r>
+          </a:p>
+        </p:txBody>
+      </p:sp>
+      <p:sp>
+        <p:nvSpPr>
+          <p:cNvPr id="11" name="Rounded Rectangle 10"/>
+          <p:cNvSpPr/>
+          <p:nvPr/>
+        </p:nvSpPr>
+        <p:spPr>
+          <a:xfrm>
+            <a:off x="6217920" y="1920240"/>
+            <a:ext cx="2606040" cy="777240"/>
+          </a:xfrm>
+          <a:prstGeom prst="roundRect">
+            <a:avLst/>
+          </a:prstGeom>
+          <a:solidFill>
+            <a:srgbClr val="EEF6F1"/>
+          </a:solidFill>
+          <a:ln>
+            <a:noFill/>
+          </a:ln>
+          <a:effectLst/>
+        </p:spPr>
+        <p:style>
+          <a:lnRef idx="1">
+            <a:schemeClr val="accent1"/>
+          </a:lnRef>
+          <a:fillRef idx="3">
+            <a:schemeClr val="accent1"/>
+          </a:fillRef>
+          <a:effectRef idx="2">
+            <a:schemeClr val="accent1"/>
+          </a:effectRef>
+          <a:fontRef idx="minor">
+            <a:schemeClr val="lt1"/>
+          </a:fontRef>
+        </p:style>
+        <p:txBody>
+          <a:bodyPr rtlCol="0" anchor="ctr"/>
+          <a:lstStyle/>
+          <a:p>
+            <a:pPr algn="ctr"/>
+          </a:p>
+        </p:txBody>
+      </p:sp>
+      <p:sp>
+        <p:nvSpPr>
+          <p:cNvPr id="12" name="Rounded Rectangle 11"/>
+          <p:cNvSpPr/>
+          <p:nvPr/>
+        </p:nvSpPr>
+        <p:spPr>
+          <a:xfrm>
+            <a:off x="6382512" y="2121408"/>
+            <a:ext cx="365760" cy="365760"/>
+          </a:xfrm>
+          <a:prstGeom prst="roundRect">
+            <a:avLst/>
+          </a:prstGeom>
+          <a:solidFill>
+            <a:srgbClr val="34D186"/>
+          </a:solidFill>
+          <a:ln>
+            <a:noFill/>
+          </a:ln>
+          <a:effectLst/>
+        </p:spPr>
+        <p:style>
+          <a:lnRef idx="1">
+            <a:schemeClr val="accent1"/>
+          </a:lnRef>
+          <a:fillRef idx="3">
+            <a:schemeClr val="accent1"/>
+          </a:fillRef>
+          <a:effectRef idx="2">
+            <a:schemeClr val="accent1"/>
+          </a:effectRef>
+          <a:fontRef idx="minor">
+            <a:schemeClr val="lt1"/>
+          </a:fontRef>
+        </p:style>
+        <p:txBody>
+          <a:bodyPr rtlCol="0" anchor="ctr"/>
+          <a:lstStyle/>
+          <a:p>
+            <a:pPr algn="ctr"/>
+          </a:p>
+        </p:txBody>
+      </p:sp>
+      <p:sp>
+        <p:nvSpPr>
+          <p:cNvPr id="13" name="TextBox 12"/>
+          <p:cNvSpPr txBox="1"/>
+          <p:nvPr/>
+        </p:nvSpPr>
+        <p:spPr>
+          <a:xfrm>
+            <a:off x="6903720" y="2084832"/>
+            <a:ext cx="1828800" cy="457200"/>
+          </a:xfrm>
+          <a:prstGeom prst="rect">
+            <a:avLst/>
+          </a:prstGeom>
+          <a:noFill/>
+        </p:spPr>
+        <p:txBody>
+          <a:bodyPr wrap="square">
+            <a:spAutoFit/>
+          </a:bodyPr>
+          <a:lstStyle/>
+          <a:p>
+            <a:r>
+              <a:rPr sz="1300" b="1">
+                <a:solidFill>
+                  <a:srgbClr val="2F313F"/>
+                </a:solidFill>
+                <a:latin typeface="Arial"/>
+              </a:rPr>
+              <a:t>Merchant Offers</a:t>
+            </a:r>
+          </a:p>
+        </p:txBody>
+      </p:sp>
+      <p:sp>
+        <p:nvSpPr>
+          <p:cNvPr id="14" name="Rounded Rectangle 13"/>
+          <p:cNvSpPr/>
+          <p:nvPr/>
+        </p:nvSpPr>
+        <p:spPr>
+          <a:xfrm>
+            <a:off x="548640" y="2880360"/>
+            <a:ext cx="2606040" cy="777240"/>
+          </a:xfrm>
+          <a:prstGeom prst="roundRect">
+            <a:avLst/>
+          </a:prstGeom>
+          <a:solidFill>
+            <a:srgbClr val="EEF6F1"/>
+          </a:solidFill>
+          <a:ln>
+            <a:noFill/>
+          </a:ln>
+          <a:effectLst/>
+        </p:spPr>
+        <p:style>
+          <a:lnRef idx="1">
+            <a:schemeClr val="accent1"/>
+          </a:lnRef>
+          <a:fillRef idx="3">
+            <a:schemeClr val="accent1"/>
+          </a:fillRef>
+          <a:effectRef idx="2">
+            <a:schemeClr val="accent1"/>
+          </a:effectRef>
+          <a:fontRef idx="minor">
+            <a:schemeClr val="lt1"/>
+          </a:fontRef>
+        </p:style>
+        <p:txBody>
+          <a:bodyPr rtlCol="0" anchor="ctr"/>
+          <a:lstStyle/>
+          <a:p>
+            <a:pPr algn="ctr"/>
+          </a:p>
+        </p:txBody>
+      </p:sp>
+      <p:sp>
+        <p:nvSpPr>
+          <p:cNvPr id="15" name="Rounded Rectangle 14"/>
+          <p:cNvSpPr/>
+          <p:nvPr/>
+        </p:nvSpPr>
+        <p:spPr>
+          <a:xfrm>
+            <a:off x="713232" y="3081528"/>
+            <a:ext cx="365760" cy="365760"/>
+          </a:xfrm>
+          <a:prstGeom prst="roundRect">
+            <a:avLst/>
+          </a:prstGeom>
+          <a:solidFill>
+            <a:srgbClr val="34D186"/>
+          </a:solidFill>
+          <a:ln>
+            <a:noFill/>
+          </a:ln>
+          <a:effectLst/>
+        </p:spPr>
+        <p:style>
+          <a:lnRef idx="1">
+            <a:schemeClr val="accent1"/>
+          </a:lnRef>
+          <a:fillRef idx="3">
+            <a:schemeClr val="accent1"/>
+          </a:fillRef>
+          <a:effectRef idx="2">
+            <a:schemeClr val="accent1"/>
+          </a:effectRef>
+          <a:fontRef idx="minor">
+            <a:schemeClr val="lt1"/>
+          </a:fontRef>
+        </p:style>
+        <p:txBody>
+          <a:bodyPr rtlCol="0" anchor="ctr"/>
+          <a:lstStyle/>
+          <a:p>
+            <a:pPr algn="ctr"/>
+          </a:p>
+        </p:txBody>
+      </p:sp>
+      <p:sp>
+        <p:nvSpPr>
+          <p:cNvPr id="16" name="TextBox 15"/>
+          <p:cNvSpPr txBox="1"/>
+          <p:nvPr/>
+        </p:nvSpPr>
+        <p:spPr>
+          <a:xfrm>
+            <a:off x="1234440" y="3044952"/>
+            <a:ext cx="1828800" cy="457200"/>
+          </a:xfrm>
+          <a:prstGeom prst="rect">
+            <a:avLst/>
+          </a:prstGeom>
+          <a:noFill/>
+        </p:spPr>
+        <p:txBody>
+          <a:bodyPr wrap="square">
+            <a:spAutoFit/>
+          </a:bodyPr>
+          <a:lstStyle/>
+          <a:p>
+            <a:r>
+              <a:rPr sz="1300" b="1">
+                <a:solidFill>
+                  <a:srgbClr val="2F313F"/>
+                </a:solidFill>
+                <a:latin typeface="Arial"/>
+              </a:rPr>
+              <a:t>Online Ads</a:t>
+            </a:r>
+          </a:p>
+        </p:txBody>
+      </p:sp>
+      <p:sp>
+        <p:nvSpPr>
+          <p:cNvPr id="17" name="Rounded Rectangle 16"/>
+          <p:cNvSpPr/>
+          <p:nvPr/>
+        </p:nvSpPr>
+        <p:spPr>
+          <a:xfrm>
+            <a:off x="3383280" y="2880360"/>
+            <a:ext cx="2606040" cy="777240"/>
+          </a:xfrm>
+          <a:prstGeom prst="roundRect">
+            <a:avLst/>
+          </a:prstGeom>
+          <a:solidFill>
+            <a:srgbClr val="EEF6F1"/>
+          </a:solidFill>
+          <a:ln>
+            <a:noFill/>
+          </a:ln>
+          <a:effectLst/>
+        </p:spPr>
+        <p:style>
+          <a:lnRef idx="1">
+            <a:schemeClr val="accent1"/>
+          </a:lnRef>
+          <a:fillRef idx="3">
+            <a:schemeClr val="accent1"/>
+          </a:fillRef>
+          <a:effectRef idx="2">
+            <a:schemeClr val="accent1"/>
+          </a:effectRef>
+          <a:fontRef idx="minor">
+            <a:schemeClr val="lt1"/>
+          </a:fontRef>
+        </p:style>
+        <p:txBody>
+          <a:bodyPr rtlCol="0" anchor="ctr"/>
+          <a:lstStyle/>
+          <a:p>
+            <a:pPr algn="ctr"/>
+          </a:p>
+        </p:txBody>
+      </p:sp>
+      <p:sp>
+        <p:nvSpPr>
+          <p:cNvPr id="18" name="Rounded Rectangle 17"/>
+          <p:cNvSpPr/>
+          <p:nvPr/>
+        </p:nvSpPr>
+        <p:spPr>
+          <a:xfrm>
+            <a:off x="3547872" y="3081528"/>
+            <a:ext cx="365760" cy="365760"/>
+          </a:xfrm>
+          <a:prstGeom prst="roundRect">
+            <a:avLst/>
+          </a:prstGeom>
+          <a:solidFill>
+            <a:srgbClr val="34D186"/>
+          </a:solidFill>
+          <a:ln>
+            <a:noFill/>
+          </a:ln>
+          <a:effectLst/>
+        </p:spPr>
+        <p:style>
+          <a:lnRef idx="1">
+            <a:schemeClr val="accent1"/>
+          </a:lnRef>
+          <a:fillRef idx="3">
+            <a:schemeClr val="accent1"/>
+          </a:fillRef>
+          <a:effectRef idx="2">
+            <a:schemeClr val="accent1"/>
+          </a:effectRef>
+          <a:fontRef idx="minor">
+            <a:schemeClr val="lt1"/>
+          </a:fontRef>
+        </p:style>
+        <p:txBody>
+          <a:bodyPr rtlCol="0" anchor="ctr"/>
+          <a:lstStyle/>
+          <a:p>
+            <a:pPr algn="ctr"/>
+          </a:p>
+        </p:txBody>
+      </p:sp>
+      <p:sp>
+        <p:nvSpPr>
+          <p:cNvPr id="19" name="TextBox 18"/>
+          <p:cNvSpPr txBox="1"/>
+          <p:nvPr/>
+        </p:nvSpPr>
+        <p:spPr>
+          <a:xfrm>
+            <a:off x="4069080" y="3044952"/>
+            <a:ext cx="1828800" cy="457200"/>
+          </a:xfrm>
+          <a:prstGeom prst="rect">
+            <a:avLst/>
+          </a:prstGeom>
+          <a:noFill/>
+        </p:spPr>
+        <p:txBody>
+          <a:bodyPr wrap="square">
+            <a:spAutoFit/>
+          </a:bodyPr>
+          <a:lstStyle/>
+          <a:p>
+            <a:r>
+              <a:rPr sz="1300" b="1">
+                <a:solidFill>
+                  <a:srgbClr val="2F313F"/>
+                </a:solidFill>
+                <a:latin typeface="Arial"/>
+              </a:rPr>
+              <a:t>PR / Social Media</a:t>
+            </a:r>
+          </a:p>
+        </p:txBody>
+      </p:sp>
+      <p:sp>
+        <p:nvSpPr>
+          <p:cNvPr id="20" name="Rounded Rectangle 19"/>
+          <p:cNvSpPr/>
+          <p:nvPr/>
+        </p:nvSpPr>
+        <p:spPr>
+          <a:xfrm>
+            <a:off x="6217920" y="2880360"/>
+            <a:ext cx="2606040" cy="777240"/>
+          </a:xfrm>
+          <a:prstGeom prst="roundRect">
+            <a:avLst/>
+          </a:prstGeom>
+          <a:solidFill>
+            <a:srgbClr val="EEF6F1"/>
+          </a:solidFill>
+          <a:ln>
+            <a:noFill/>
+          </a:ln>
+          <a:effectLst/>
+        </p:spPr>
+        <p:style>
+          <a:lnRef idx="1">
+            <a:schemeClr val="accent1"/>
+          </a:lnRef>
+          <a:fillRef idx="3">
+            <a:schemeClr val="accent1"/>
+          </a:fillRef>
+          <a:effectRef idx="2">
+            <a:schemeClr val="accent1"/>
+          </a:effectRef>
+          <a:fontRef idx="minor">
+            <a:schemeClr val="lt1"/>
+          </a:fontRef>
+        </p:style>
+        <p:txBody>
+          <a:bodyPr rtlCol="0" anchor="ctr"/>
+          <a:lstStyle/>
+          <a:p>
+            <a:pPr algn="ctr"/>
+          </a:p>
+        </p:txBody>
+      </p:sp>
+      <p:sp>
+        <p:nvSpPr>
+          <p:cNvPr id="21" name="Rounded Rectangle 20"/>
+          <p:cNvSpPr/>
+          <p:nvPr/>
+        </p:nvSpPr>
+        <p:spPr>
+          <a:xfrm>
+            <a:off x="6382512" y="3081528"/>
+            <a:ext cx="365760" cy="365760"/>
+          </a:xfrm>
+          <a:prstGeom prst="roundRect">
+            <a:avLst/>
+          </a:prstGeom>
+          <a:solidFill>
+            <a:srgbClr val="34D186"/>
+          </a:solidFill>
+          <a:ln>
+            <a:noFill/>
+          </a:ln>
+          <a:effectLst/>
+        </p:spPr>
+        <p:style>
+          <a:lnRef idx="1">
+            <a:schemeClr val="accent1"/>
+          </a:lnRef>
+          <a:fillRef idx="3">
+            <a:schemeClr val="accent1"/>
+          </a:fillRef>
+          <a:effectRef idx="2">
+            <a:schemeClr val="accent1"/>
+          </a:effectRef>
+          <a:fontRef idx="minor">
+            <a:schemeClr val="lt1"/>
+          </a:fontRef>
+        </p:style>
+        <p:txBody>
+          <a:bodyPr rtlCol="0" anchor="ctr"/>
+          <a:lstStyle/>
+          <a:p>
+            <a:pPr algn="ctr"/>
+          </a:p>
+        </p:txBody>
+      </p:sp>
+      <p:sp>
+        <p:nvSpPr>
+          <p:cNvPr id="22" name="TextBox 21"/>
+          <p:cNvSpPr txBox="1"/>
+          <p:nvPr/>
+        </p:nvSpPr>
+        <p:spPr>
+          <a:xfrm>
+            <a:off x="6903720" y="3044952"/>
+            <a:ext cx="1828800" cy="457200"/>
+          </a:xfrm>
+          <a:prstGeom prst="rect">
+            <a:avLst/>
+          </a:prstGeom>
+          <a:noFill/>
+        </p:spPr>
+        <p:txBody>
+          <a:bodyPr wrap="square">
+            <a:spAutoFit/>
+          </a:bodyPr>
+          <a:lstStyle/>
+          <a:p>
+            <a:r>
+              <a:rPr sz="1300" b="1">
+                <a:solidFill>
+                  <a:srgbClr val="2F313F"/>
+                </a:solidFill>
+                <a:latin typeface="Arial"/>
+              </a:rPr>
+              <a:t>Email + Push</a:t>
+            </a:r>
+          </a:p>
+        </p:txBody>
+      </p:sp>
+      <p:sp>
+        <p:nvSpPr>
+          <p:cNvPr id="23" name="TextBox 22"/>
+          <p:cNvSpPr txBox="1"/>
+          <p:nvPr/>
+        </p:nvSpPr>
+        <p:spPr>
+          <a:xfrm>
+            <a:off x="548640" y="3931920"/>
+            <a:ext cx="8046720" cy="548640"/>
+          </a:xfrm>
+          <a:prstGeom prst="rect">
+            <a:avLst/>
+          </a:prstGeom>
+          <a:noFill/>
+        </p:spPr>
+        <p:txBody>
+          <a:bodyPr wrap="square">
+            <a:spAutoFit/>
+          </a:bodyPr>
+          <a:lstStyle/>
+          <a:p>
+            <a:r>
+              <a:rPr sz="1300" b="0">
+                <a:solidFill>
+                  <a:srgbClr val="6B7080"/>
+                </a:solidFill>
+                <a:latin typeface="Arial"/>
+              </a:rPr>
+              <a:t>Комбінація каналів Bolt Food + Bolt Rides дає охоплення, недоступне поодинці.</a:t>
             </a:r>
           </a:p>
         </p:txBody>
@@ -5961,7 +6675,7 @@
                 </a:solidFill>
                 <a:latin typeface="Arial"/>
               </a:rPr>
-              <a:t>IN-STORE BRANDING</a:t>
+              <a:t>КАМПАНІЇ</a:t>
             </a:r>
           </a:p>
           <a:p>
@@ -5972,21 +6686,65 @@
                 </a:solidFill>
                 <a:latin typeface="Arial"/>
               </a:rPr>
-              <a:t>Підтримка офлайн-брендингу</a:t>
-            </a:r>
-          </a:p>
-        </p:txBody>
-      </p:sp>
-      <p:sp>
-        <p:nvSpPr>
-          <p:cNvPr id="5" name="TextBox 4"/>
+              <a:t>Маркетингові кампанії: до 10× охоплення</a:t>
+            </a:r>
+          </a:p>
+        </p:txBody>
+      </p:sp>
+      <p:sp>
+        <p:nvSpPr>
+          <p:cNvPr id="5" name="Rounded Rectangle 4"/>
+          <p:cNvSpPr/>
+          <p:nvPr/>
+        </p:nvSpPr>
+        <p:spPr>
+          <a:xfrm>
+            <a:off x="548640" y="1874519"/>
+            <a:ext cx="2606040" cy="2194560"/>
+          </a:xfrm>
+          <a:prstGeom prst="roundRect">
+            <a:avLst/>
+          </a:prstGeom>
+          <a:solidFill>
+            <a:srgbClr val="EEF6F1"/>
+          </a:solidFill>
+          <a:ln>
+            <a:noFill/>
+          </a:ln>
+          <a:effectLst/>
+        </p:spPr>
+        <p:style>
+          <a:lnRef idx="1">
+            <a:schemeClr val="accent1"/>
+          </a:lnRef>
+          <a:fillRef idx="3">
+            <a:schemeClr val="accent1"/>
+          </a:fillRef>
+          <a:effectRef idx="2">
+            <a:schemeClr val="accent1"/>
+          </a:effectRef>
+          <a:fontRef idx="minor">
+            <a:schemeClr val="lt1"/>
+          </a:fontRef>
+        </p:style>
+        <p:txBody>
+          <a:bodyPr rtlCol="0" anchor="ctr"/>
+          <a:lstStyle/>
+          <a:p>
+            <a:pPr algn="ctr"/>
+          </a:p>
+        </p:txBody>
+      </p:sp>
+      <p:sp>
+        <p:nvSpPr>
+          <p:cNvPr id="6" name="TextBox 5"/>
           <p:cNvSpPr txBox="1"/>
           <p:nvPr/>
         </p:nvSpPr>
         <p:spPr>
           <a:xfrm>
-            <a:off x="685800" y="2011680"/>
-            <a:ext cx="7863840" cy="2743200"/>
+            <a:off x="731520" y="2103120"/>
+            <a:ext cx="2240280" cy="1828800"/>
           </a:xfrm>
           <a:prstGeom prst="rect">
             <a:avLst/>
@@ -5999,105 +6757,245 @@
           </a:bodyPr>
           <a:lstStyle/>
           <a:p>
-            <a:pPr>
-              <a:spcAft>
-                <a:spcPts val="504"/>
-              </a:spcAft>
-            </a:pPr>
-            <a:r>
-              <a:rPr sz="1300" b="1">
+            <a:pPr algn="ctr"/>
+            <a:r>
+              <a:rPr sz="1500" b="1">
+                <a:solidFill>
+                  <a:srgbClr val="2F313F"/>
+                </a:solidFill>
+                <a:latin typeface="Arial"/>
+              </a:rPr>
+              <a:t>Standard</a:t>
+            </a:r>
+          </a:p>
+          <a:p>
+            <a:pPr algn="ctr"/>
+            <a:r>
+              <a:rPr sz="2400" b="1">
                 <a:solidFill>
                   <a:srgbClr val="34D186"/>
                 </a:solidFill>
                 <a:latin typeface="Arial"/>
               </a:rPr>
-              <a:t>•  </a:t>
-            </a:r>
-            <a:r>
-              <a:rPr sz="1300" b="1">
+              <a:t>1× охоплення</a:t>
+            </a:r>
+          </a:p>
+          <a:p>
+            <a:pPr algn="ctr"/>
+            <a:r>
+              <a:rPr sz="1050" b="0">
+                <a:solidFill>
+                  <a:srgbClr val="6B7080"/>
+                </a:solidFill>
+                <a:latin typeface="Arial"/>
+              </a:rPr>
+              <a:t>Email + push Bolt Food</a:t>
+            </a:r>
+          </a:p>
+        </p:txBody>
+      </p:sp>
+      <p:sp>
+        <p:nvSpPr>
+          <p:cNvPr id="7" name="Rounded Rectangle 6"/>
+          <p:cNvSpPr/>
+          <p:nvPr/>
+        </p:nvSpPr>
+        <p:spPr>
+          <a:xfrm>
+            <a:off x="3383280" y="1874519"/>
+            <a:ext cx="2606040" cy="2194560"/>
+          </a:xfrm>
+          <a:prstGeom prst="roundRect">
+            <a:avLst/>
+          </a:prstGeom>
+          <a:solidFill>
+            <a:srgbClr val="EEF6F1"/>
+          </a:solidFill>
+          <a:ln>
+            <a:noFill/>
+          </a:ln>
+          <a:effectLst/>
+        </p:spPr>
+        <p:style>
+          <a:lnRef idx="1">
+            <a:schemeClr val="accent1"/>
+          </a:lnRef>
+          <a:fillRef idx="3">
+            <a:schemeClr val="accent1"/>
+          </a:fillRef>
+          <a:effectRef idx="2">
+            <a:schemeClr val="accent1"/>
+          </a:effectRef>
+          <a:fontRef idx="minor">
+            <a:schemeClr val="lt1"/>
+          </a:fontRef>
+        </p:style>
+        <p:txBody>
+          <a:bodyPr rtlCol="0" anchor="ctr"/>
+          <a:lstStyle/>
+          <a:p>
+            <a:pPr algn="ctr"/>
+          </a:p>
+        </p:txBody>
+      </p:sp>
+      <p:sp>
+        <p:nvSpPr>
+          <p:cNvPr id="8" name="TextBox 7"/>
+          <p:cNvSpPr txBox="1"/>
+          <p:nvPr/>
+        </p:nvSpPr>
+        <p:spPr>
+          <a:xfrm>
+            <a:off x="3566160" y="2103120"/>
+            <a:ext cx="2240280" cy="1828800"/>
+          </a:xfrm>
+          <a:prstGeom prst="rect">
+            <a:avLst/>
+          </a:prstGeom>
+          <a:noFill/>
+        </p:spPr>
+        <p:txBody>
+          <a:bodyPr wrap="square">
+            <a:spAutoFit/>
+          </a:bodyPr>
+          <a:lstStyle/>
+          <a:p>
+            <a:pPr algn="ctr"/>
+            <a:r>
+              <a:rPr sz="1500" b="1">
                 <a:solidFill>
                   <a:srgbClr val="2F313F"/>
                 </a:solidFill>
                 <a:latin typeface="Arial"/>
               </a:rPr>
-              <a:t>Брендинг у точках —</a:t>
-            </a:r>
-            <a:r>
-              <a:rPr sz="1300" b="0">
+              <a:t>Small</a:t>
+            </a:r>
+          </a:p>
+          <a:p>
+            <a:pPr algn="ctr"/>
+            <a:r>
+              <a:rPr sz="2400" b="1">
+                <a:solidFill>
+                  <a:srgbClr val="34D186"/>
+                </a:solidFill>
+                <a:latin typeface="Arial"/>
+              </a:rPr>
+              <a:t>2× охоплення</a:t>
+            </a:r>
+          </a:p>
+          <a:p>
+            <a:pPr algn="ctr"/>
+            <a:r>
+              <a:rPr sz="1050" b="0">
                 <a:solidFill>
                   <a:srgbClr val="6B7080"/>
                 </a:solidFill>
                 <a:latin typeface="Arial"/>
               </a:rPr>
-              <a:t> Bolt підтримує оформлення та видимість бренду на місцях продажу.</a:t>
-            </a:r>
-          </a:p>
-          <a:p>
-            <a:pPr>
-              <a:spcAft>
-                <a:spcPts val="504"/>
-              </a:spcAft>
-            </a:pPr>
-            <a:r>
-              <a:rPr sz="1300" b="1">
-                <a:solidFill>
-                  <a:srgbClr val="34D186"/>
-                </a:solidFill>
-                <a:latin typeface="Arial"/>
-              </a:rPr>
-              <a:t>•  </a:t>
-            </a:r>
-            <a:r>
-              <a:rPr sz="1300" b="1">
-                <a:solidFill>
-                  <a:srgbClr val="2F313F"/>
-                </a:solidFill>
-                <a:latin typeface="Arial"/>
-              </a:rPr>
-              <a:t>Зв'язок онлайн ↔ офлайн —</a:t>
-            </a:r>
-            <a:r>
-              <a:rPr sz="1300" b="0">
-                <a:solidFill>
-                  <a:srgbClr val="6B7080"/>
-                </a:solidFill>
-                <a:latin typeface="Arial"/>
-              </a:rPr>
-              <a:t> офлайн-аудиторія дізнається про вашу присутність на Bolt Food.</a:t>
-            </a:r>
-          </a:p>
-          <a:p>
-            <a:pPr>
-              <a:spcAft>
-                <a:spcPts val="504"/>
-              </a:spcAft>
-            </a:pPr>
-            <a:r>
-              <a:rPr sz="1300" b="1">
-                <a:solidFill>
-                  <a:srgbClr val="34D186"/>
-                </a:solidFill>
-                <a:latin typeface="Arial"/>
-              </a:rPr>
-              <a:t>•  </a:t>
-            </a:r>
-            <a:r>
-              <a:rPr sz="1300" b="1">
-                <a:solidFill>
-                  <a:srgbClr val="2F313F"/>
-                </a:solidFill>
-                <a:latin typeface="Arial"/>
-              </a:rPr>
-              <a:t>Спільні матеріали —</a:t>
-            </a:r>
-            <a:r>
-              <a:rPr sz="1300" b="0">
-                <a:solidFill>
-                  <a:srgbClr val="6B7080"/>
-                </a:solidFill>
-                <a:latin typeface="Arial"/>
-              </a:rPr>
-              <a:t> банери, наліпки, POS-матеріали для промо-періодів.</a:t>
+              <a:t>+ In-app банер, email/push Food &amp; Rides</a:t>
+            </a:r>
+          </a:p>
+        </p:txBody>
+      </p:sp>
+      <p:sp>
+        <p:nvSpPr>
+          <p:cNvPr id="9" name="Rounded Rectangle 8"/>
+          <p:cNvSpPr/>
+          <p:nvPr/>
+        </p:nvSpPr>
+        <p:spPr>
+          <a:xfrm>
+            <a:off x="6217920" y="1874519"/>
+            <a:ext cx="2606040" cy="2194560"/>
+          </a:xfrm>
+          <a:prstGeom prst="roundRect">
+            <a:avLst/>
+          </a:prstGeom>
+          <a:solidFill>
+            <a:srgbClr val="34D186"/>
+          </a:solidFill>
+          <a:ln>
+            <a:noFill/>
+          </a:ln>
+          <a:effectLst/>
+        </p:spPr>
+        <p:style>
+          <a:lnRef idx="1">
+            <a:schemeClr val="accent1"/>
+          </a:lnRef>
+          <a:fillRef idx="3">
+            <a:schemeClr val="accent1"/>
+          </a:fillRef>
+          <a:effectRef idx="2">
+            <a:schemeClr val="accent1"/>
+          </a:effectRef>
+          <a:fontRef idx="minor">
+            <a:schemeClr val="lt1"/>
+          </a:fontRef>
+        </p:style>
+        <p:txBody>
+          <a:bodyPr rtlCol="0" anchor="ctr"/>
+          <a:lstStyle/>
+          <a:p>
+            <a:pPr algn="ctr"/>
+          </a:p>
+        </p:txBody>
+      </p:sp>
+      <p:sp>
+        <p:nvSpPr>
+          <p:cNvPr id="10" name="TextBox 9"/>
+          <p:cNvSpPr txBox="1"/>
+          <p:nvPr/>
+        </p:nvSpPr>
+        <p:spPr>
+          <a:xfrm>
+            <a:off x="6400800" y="2103120"/>
+            <a:ext cx="2240280" cy="1828800"/>
+          </a:xfrm>
+          <a:prstGeom prst="rect">
+            <a:avLst/>
+          </a:prstGeom>
+          <a:noFill/>
+        </p:spPr>
+        <p:txBody>
+          <a:bodyPr wrap="square">
+            <a:spAutoFit/>
+          </a:bodyPr>
+          <a:lstStyle/>
+          <a:p>
+            <a:pPr algn="ctr"/>
+            <a:r>
+              <a:rPr sz="1500" b="1">
+                <a:solidFill>
+                  <a:srgbClr val="FFFFFF"/>
+                </a:solidFill>
+                <a:latin typeface="Arial"/>
+              </a:rPr>
+              <a:t>Big</a:t>
+            </a:r>
+          </a:p>
+          <a:p>
+            <a:pPr algn="ctr"/>
+            <a:r>
+              <a:rPr sz="2400" b="1">
+                <a:solidFill>
+                  <a:srgbClr val="FFFFFF"/>
+                </a:solidFill>
+                <a:latin typeface="Arial"/>
+              </a:rPr>
+              <a:t>10× охоплення</a:t>
+            </a:r>
+          </a:p>
+          <a:p>
+            <a:pPr algn="ctr"/>
+            <a:r>
+              <a:rPr sz="1050" b="0">
+                <a:solidFill>
+                  <a:srgbClr val="FFFFFF"/>
+                </a:solidFill>
+                <a:latin typeface="Arial"/>
+              </a:rPr>
+              <a:t>+ Спец-категорія, pop-up, соцмережі, paid ads, інфлюенсери</a:t>
             </a:r>
           </a:p>
         </p:txBody>
@@ -6111,6 +7009,270 @@
 </file>
 
 <file path=ppt/slides/slide15.xml><?xml version="1.0" encoding="utf-8"?>
+<p:sld xmlns:a="http://schemas.openxmlformats.org/drawingml/2006/main" xmlns:p="http://schemas.openxmlformats.org/presentationml/2006/main" xmlns:r="http://schemas.openxmlformats.org/officeDocument/2006/relationships">
+  <p:cSld>
+    <p:bg>
+      <p:bgPr>
+        <a:solidFill>
+          <a:srgbClr val="FFFFFF"/>
+        </a:solidFill>
+        <a:effectLst/>
+      </p:bgPr>
+    </p:bg>
+    <p:spTree>
+      <p:nvGrpSpPr>
+        <p:cNvPr id="1" name=""/>
+        <p:cNvGrpSpPr/>
+        <p:nvPr/>
+      </p:nvGrpSpPr>
+      <p:grpSpPr/>
+      <p:pic>
+        <p:nvPicPr>
+          <p:cNvPr id="2" name="Picture 1" descr="bolt_food_logo.png"/>
+          <p:cNvPicPr>
+            <a:picLocks noChangeAspect="1"/>
+          </p:cNvPicPr>
+          <p:nvPr/>
+        </p:nvPicPr>
+        <p:blipFill>
+          <a:blip r:embed="rId2"/>
+          <a:stretch>
+            <a:fillRect/>
+          </a:stretch>
+        </p:blipFill>
+        <p:spPr>
+          <a:xfrm>
+            <a:off x="7543800" y="292608"/>
+            <a:ext cx="1280160" cy="508814"/>
+          </a:xfrm>
+          <a:prstGeom prst="rect">
+            <a:avLst/>
+          </a:prstGeom>
+        </p:spPr>
+      </p:pic>
+      <p:sp>
+        <p:nvSpPr>
+          <p:cNvPr id="3" name="Rectangle 2"/>
+          <p:cNvSpPr/>
+          <p:nvPr/>
+        </p:nvSpPr>
+        <p:spPr>
+          <a:xfrm>
+            <a:off x="502920" y="502920"/>
+            <a:ext cx="457200" cy="64008"/>
+          </a:xfrm>
+          <a:prstGeom prst="rect">
+            <a:avLst/>
+          </a:prstGeom>
+          <a:solidFill>
+            <a:srgbClr val="34D186"/>
+          </a:solidFill>
+          <a:ln>
+            <a:noFill/>
+          </a:ln>
+          <a:effectLst/>
+        </p:spPr>
+        <p:style>
+          <a:lnRef idx="1">
+            <a:schemeClr val="accent1"/>
+          </a:lnRef>
+          <a:fillRef idx="3">
+            <a:schemeClr val="accent1"/>
+          </a:fillRef>
+          <a:effectRef idx="2">
+            <a:schemeClr val="accent1"/>
+          </a:effectRef>
+          <a:fontRef idx="minor">
+            <a:schemeClr val="lt1"/>
+          </a:fontRef>
+        </p:style>
+        <p:txBody>
+          <a:bodyPr rtlCol="0" anchor="ctr"/>
+          <a:lstStyle/>
+          <a:p>
+            <a:pPr algn="ctr"/>
+          </a:p>
+        </p:txBody>
+      </p:sp>
+      <p:sp>
+        <p:nvSpPr>
+          <p:cNvPr id="4" name="TextBox 3"/>
+          <p:cNvSpPr txBox="1"/>
+          <p:nvPr/>
+        </p:nvSpPr>
+        <p:spPr>
+          <a:xfrm>
+            <a:off x="457200" y="612648"/>
+            <a:ext cx="8229600" cy="1097280"/>
+          </a:xfrm>
+          <a:prstGeom prst="rect">
+            <a:avLst/>
+          </a:prstGeom>
+          <a:noFill/>
+        </p:spPr>
+        <p:txBody>
+          <a:bodyPr wrap="square">
+            <a:spAutoFit/>
+          </a:bodyPr>
+          <a:lstStyle/>
+          <a:p>
+            <a:r>
+              <a:rPr sz="1200" b="1">
+                <a:solidFill>
+                  <a:srgbClr val="34D186"/>
+                </a:solidFill>
+                <a:latin typeface="Arial"/>
+              </a:rPr>
+              <a:t>IN-STORE BRANDING</a:t>
+            </a:r>
+          </a:p>
+          <a:p>
+            <a:r>
+              <a:rPr sz="2700" b="1">
+                <a:solidFill>
+                  <a:srgbClr val="2F313F"/>
+                </a:solidFill>
+                <a:latin typeface="Arial"/>
+              </a:rPr>
+              <a:t>Підтримка офлайн-брендингу</a:t>
+            </a:r>
+          </a:p>
+        </p:txBody>
+      </p:sp>
+      <p:sp>
+        <p:nvSpPr>
+          <p:cNvPr id="5" name="TextBox 4"/>
+          <p:cNvSpPr txBox="1"/>
+          <p:nvPr/>
+        </p:nvSpPr>
+        <p:spPr>
+          <a:xfrm>
+            <a:off x="685800" y="2011680"/>
+            <a:ext cx="7863840" cy="2743200"/>
+          </a:xfrm>
+          <a:prstGeom prst="rect">
+            <a:avLst/>
+          </a:prstGeom>
+          <a:noFill/>
+        </p:spPr>
+        <p:txBody>
+          <a:bodyPr wrap="square">
+            <a:spAutoFit/>
+          </a:bodyPr>
+          <a:lstStyle/>
+          <a:p>
+            <a:pPr>
+              <a:spcAft>
+                <a:spcPts val="504"/>
+              </a:spcAft>
+            </a:pPr>
+            <a:r>
+              <a:rPr sz="1300" b="1">
+                <a:solidFill>
+                  <a:srgbClr val="34D186"/>
+                </a:solidFill>
+                <a:latin typeface="Arial"/>
+              </a:rPr>
+              <a:t>•  </a:t>
+            </a:r>
+            <a:r>
+              <a:rPr sz="1300" b="1">
+                <a:solidFill>
+                  <a:srgbClr val="2F313F"/>
+                </a:solidFill>
+                <a:latin typeface="Arial"/>
+              </a:rPr>
+              <a:t>Брендинг у точках —</a:t>
+            </a:r>
+            <a:r>
+              <a:rPr sz="1300" b="0">
+                <a:solidFill>
+                  <a:srgbClr val="6B7080"/>
+                </a:solidFill>
+                <a:latin typeface="Arial"/>
+              </a:rPr>
+              <a:t> Bolt підтримує оформлення та видимість бренду на місцях продажу.</a:t>
+            </a:r>
+          </a:p>
+          <a:p>
+            <a:pPr>
+              <a:spcAft>
+                <a:spcPts val="504"/>
+              </a:spcAft>
+            </a:pPr>
+            <a:r>
+              <a:rPr sz="1300" b="1">
+                <a:solidFill>
+                  <a:srgbClr val="34D186"/>
+                </a:solidFill>
+                <a:latin typeface="Arial"/>
+              </a:rPr>
+              <a:t>•  </a:t>
+            </a:r>
+            <a:r>
+              <a:rPr sz="1300" b="1">
+                <a:solidFill>
+                  <a:srgbClr val="2F313F"/>
+                </a:solidFill>
+                <a:latin typeface="Arial"/>
+              </a:rPr>
+              <a:t>Зв'язок онлайн ↔ офлайн —</a:t>
+            </a:r>
+            <a:r>
+              <a:rPr sz="1300" b="0">
+                <a:solidFill>
+                  <a:srgbClr val="6B7080"/>
+                </a:solidFill>
+                <a:latin typeface="Arial"/>
+              </a:rPr>
+              <a:t> офлайн-аудиторія дізнається про вашу присутність на Bolt Food.</a:t>
+            </a:r>
+          </a:p>
+          <a:p>
+            <a:pPr>
+              <a:spcAft>
+                <a:spcPts val="504"/>
+              </a:spcAft>
+            </a:pPr>
+            <a:r>
+              <a:rPr sz="1300" b="1">
+                <a:solidFill>
+                  <a:srgbClr val="34D186"/>
+                </a:solidFill>
+                <a:latin typeface="Arial"/>
+              </a:rPr>
+              <a:t>•  </a:t>
+            </a:r>
+            <a:r>
+              <a:rPr sz="1300" b="1">
+                <a:solidFill>
+                  <a:srgbClr val="2F313F"/>
+                </a:solidFill>
+                <a:latin typeface="Arial"/>
+              </a:rPr>
+              <a:t>Спільні матеріали —</a:t>
+            </a:r>
+            <a:r>
+              <a:rPr sz="1300" b="0">
+                <a:solidFill>
+                  <a:srgbClr val="6B7080"/>
+                </a:solidFill>
+                <a:latin typeface="Arial"/>
+              </a:rPr>
+              <a:t> банери, наліпки, POS-матеріали для промо-періодів.</a:t>
+            </a:r>
+          </a:p>
+        </p:txBody>
+      </p:sp>
+    </p:spTree>
+  </p:cSld>
+  <p:clrMapOvr>
+    <a:masterClrMapping/>
+  </p:clrMapOvr>
+</p:sld>
+</file>
+
+<file path=ppt/slides/slide16.xml><?xml version="1.0" encoding="utf-8"?>
 <p:sld xmlns:a="http://schemas.openxmlformats.org/drawingml/2006/main" xmlns:p="http://schemas.openxmlformats.org/presentationml/2006/main" xmlns:r="http://schemas.openxmlformats.org/officeDocument/2006/relationships">
   <p:cSld>
     <p:bg>
@@ -6901,264 +8063,6 @@
 </p:sld>
 </file>
 
-<file path=ppt/slides/slide16.xml><?xml version="1.0" encoding="utf-8"?>
-<p:sld xmlns:a="http://schemas.openxmlformats.org/drawingml/2006/main" xmlns:p="http://schemas.openxmlformats.org/presentationml/2006/main" xmlns:r="http://schemas.openxmlformats.org/officeDocument/2006/relationships">
-  <p:cSld>
-    <p:bg>
-      <p:bgPr>
-        <a:solidFill>
-          <a:srgbClr val="FFFFFF"/>
-        </a:solidFill>
-        <a:effectLst/>
-      </p:bgPr>
-    </p:bg>
-    <p:spTree>
-      <p:nvGrpSpPr>
-        <p:cNvPr id="1" name=""/>
-        <p:cNvGrpSpPr/>
-        <p:nvPr/>
-      </p:nvGrpSpPr>
-      <p:grpSpPr/>
-      <p:pic>
-        <p:nvPicPr>
-          <p:cNvPr id="2" name="Picture 1" descr="bolt_food_logo.png"/>
-          <p:cNvPicPr>
-            <a:picLocks noChangeAspect="1"/>
-          </p:cNvPicPr>
-          <p:nvPr/>
-        </p:nvPicPr>
-        <p:blipFill>
-          <a:blip r:embed="rId2"/>
-          <a:stretch>
-            <a:fillRect/>
-          </a:stretch>
-        </p:blipFill>
-        <p:spPr>
-          <a:xfrm>
-            <a:off x="7543800" y="292608"/>
-            <a:ext cx="1280160" cy="508814"/>
-          </a:xfrm>
-          <a:prstGeom prst="rect">
-            <a:avLst/>
-          </a:prstGeom>
-        </p:spPr>
-      </p:pic>
-      <p:sp>
-        <p:nvSpPr>
-          <p:cNvPr id="3" name="Rectangle 2"/>
-          <p:cNvSpPr/>
-          <p:nvPr/>
-        </p:nvSpPr>
-        <p:spPr>
-          <a:xfrm>
-            <a:off x="502920" y="502920"/>
-            <a:ext cx="457200" cy="64008"/>
-          </a:xfrm>
-          <a:prstGeom prst="rect">
-            <a:avLst/>
-          </a:prstGeom>
-          <a:solidFill>
-            <a:srgbClr val="34D186"/>
-          </a:solidFill>
-          <a:ln>
-            <a:noFill/>
-          </a:ln>
-          <a:effectLst/>
-        </p:spPr>
-        <p:style>
-          <a:lnRef idx="1">
-            <a:schemeClr val="accent1"/>
-          </a:lnRef>
-          <a:fillRef idx="3">
-            <a:schemeClr val="accent1"/>
-          </a:fillRef>
-          <a:effectRef idx="2">
-            <a:schemeClr val="accent1"/>
-          </a:effectRef>
-          <a:fontRef idx="minor">
-            <a:schemeClr val="lt1"/>
-          </a:fontRef>
-        </p:style>
-        <p:txBody>
-          <a:bodyPr rtlCol="0" anchor="ctr"/>
-          <a:lstStyle/>
-          <a:p>
-            <a:pPr algn="ctr"/>
-          </a:p>
-        </p:txBody>
-      </p:sp>
-      <p:sp>
-        <p:nvSpPr>
-          <p:cNvPr id="4" name="TextBox 3"/>
-          <p:cNvSpPr txBox="1"/>
-          <p:nvPr/>
-        </p:nvSpPr>
-        <p:spPr>
-          <a:xfrm>
-            <a:off x="457200" y="612648"/>
-            <a:ext cx="8229600" cy="1097280"/>
-          </a:xfrm>
-          <a:prstGeom prst="rect">
-            <a:avLst/>
-          </a:prstGeom>
-          <a:noFill/>
-        </p:spPr>
-        <p:txBody>
-          <a:bodyPr wrap="square">
-            <a:spAutoFit/>
-          </a:bodyPr>
-          <a:lstStyle/>
-          <a:p>
-            <a:r>
-              <a:rPr sz="1200" b="1">
-                <a:solidFill>
-                  <a:srgbClr val="34D186"/>
-                </a:solidFill>
-                <a:latin typeface="Arial"/>
-              </a:rPr>
-              <a:t>АМБІЦІЯ · ЗАМОВЛЕННЯ</a:t>
-            </a:r>
-          </a:p>
-          <a:p>
-            <a:r>
-              <a:rPr sz="2700" b="1">
-                <a:solidFill>
-                  <a:srgbClr val="2F313F"/>
-                </a:solidFill>
-                <a:latin typeface="Arial"/>
-              </a:rPr>
-              <a:t>Помісячний план на 12 місяців</a:t>
-            </a:r>
-          </a:p>
-        </p:txBody>
-      </p:sp>
-      <p:pic>
-        <p:nvPicPr>
-          <p:cNvPr id="5" name="Picture 4" descr="orders.png"/>
-          <p:cNvPicPr>
-            <a:picLocks noChangeAspect="1"/>
-          </p:cNvPicPr>
-          <p:nvPr/>
-        </p:nvPicPr>
-        <p:blipFill>
-          <a:blip r:embed="rId3"/>
-          <a:stretch>
-            <a:fillRect/>
-          </a:stretch>
-        </p:blipFill>
-        <p:spPr>
-          <a:xfrm>
-            <a:off x="411480" y="1417320"/>
-            <a:ext cx="7680960" cy="3090762"/>
-          </a:xfrm>
-          <a:prstGeom prst="rect">
-            <a:avLst/>
-          </a:prstGeom>
-        </p:spPr>
-      </p:pic>
-      <p:sp>
-        <p:nvSpPr>
-          <p:cNvPr id="6" name="TextBox 5"/>
-          <p:cNvSpPr txBox="1"/>
-          <p:nvPr/>
-        </p:nvSpPr>
-        <p:spPr>
-          <a:xfrm>
-            <a:off x="548640" y="4572000"/>
-            <a:ext cx="8046720" cy="457200"/>
-          </a:xfrm>
-          <a:prstGeom prst="rect">
-            <a:avLst/>
-          </a:prstGeom>
-          <a:noFill/>
-        </p:spPr>
-        <p:txBody>
-          <a:bodyPr wrap="square">
-            <a:spAutoFit/>
-          </a:bodyPr>
-          <a:lstStyle/>
-          <a:p>
-            <a:r>
-              <a:rPr sz="1200" b="0">
-                <a:solidFill>
-                  <a:srgbClr val="6B7080"/>
-                </a:solidFill>
-                <a:latin typeface="Arial"/>
-              </a:rPr>
-              <a:t>Старт ~80 → </a:t>
-            </a:r>
-            <a:r>
-              <a:rPr sz="1200" b="1">
-                <a:solidFill>
-                  <a:srgbClr val="34D186"/>
-                </a:solidFill>
-                <a:latin typeface="Arial"/>
-              </a:rPr>
-              <a:t>~670 замовлень/міс</a:t>
-            </a:r>
-            <a:r>
-              <a:rPr sz="1200" b="0">
-                <a:solidFill>
-                  <a:srgbClr val="6B7080"/>
-                </a:solidFill>
-                <a:latin typeface="Arial"/>
-              </a:rPr>
-              <a:t> на 12-й місяць · рік 1 разом </a:t>
-            </a:r>
-            <a:r>
-              <a:rPr sz="1200" b="1">
-                <a:solidFill>
-                  <a:srgbClr val="2F313F"/>
-                </a:solidFill>
-                <a:latin typeface="Arial"/>
-              </a:rPr>
-              <a:t>5 329 замовлень</a:t>
-            </a:r>
-          </a:p>
-        </p:txBody>
-      </p:sp>
-      <p:sp>
-        <p:nvSpPr>
-          <p:cNvPr id="7" name="TextBox 6"/>
-          <p:cNvSpPr txBox="1"/>
-          <p:nvPr/>
-        </p:nvSpPr>
-        <p:spPr>
-          <a:xfrm>
-            <a:off x="457200" y="4736592"/>
-            <a:ext cx="8229600" cy="274320"/>
-          </a:xfrm>
-          <a:prstGeom prst="rect">
-            <a:avLst/>
-          </a:prstGeom>
-          <a:noFill/>
-        </p:spPr>
-        <p:txBody>
-          <a:bodyPr wrap="square">
-            <a:spAutoFit/>
-          </a:bodyPr>
-          <a:lstStyle/>
-          <a:p>
-            <a:r>
-              <a:rPr sz="850" b="0">
-                <a:solidFill>
-                  <a:srgbClr val="6B7080"/>
-                </a:solidFill>
-                <a:latin typeface="Arial"/>
-              </a:rPr>
-              <a:t>Базова частка 12% обсягу Glovo (бенчмарк ритейл-мереж на Bolt). Прогноз модельний.</a:t>
-            </a:r>
-          </a:p>
-        </p:txBody>
-      </p:sp>
-    </p:spTree>
-  </p:cSld>
-  <p:clrMapOvr>
-    <a:masterClrMapping/>
-  </p:clrMapOvr>
-</p:sld>
-</file>
-
 <file path=ppt/slides/slide17.xml><?xml version="1.0" encoding="utf-8"?>
 <p:sld xmlns:a="http://schemas.openxmlformats.org/drawingml/2006/main" xmlns:p="http://schemas.openxmlformats.org/presentationml/2006/main" xmlns:r="http://schemas.openxmlformats.org/officeDocument/2006/relationships">
   <p:cSld>
@@ -7274,7 +8178,7 @@
                 </a:solidFill>
                 <a:latin typeface="Arial"/>
               </a:rPr>
-              <a:t>АМБІЦІЯ · GMV</a:t>
+              <a:t>АМБІЦІЯ · ЗАМОВЛЕННЯ</a:t>
             </a:r>
           </a:p>
           <a:p>
@@ -7285,14 +8189,14 @@
                 </a:solidFill>
                 <a:latin typeface="Arial"/>
               </a:rPr>
-              <a:t>GMV-потенціал, AOV €15</a:t>
+              <a:t>Помісячний план на 12 місяців</a:t>
             </a:r>
           </a:p>
         </p:txBody>
       </p:sp>
       <p:pic>
         <p:nvPicPr>
-          <p:cNvPr id="5" name="Picture 4" descr="gmv.png"/>
+          <p:cNvPr id="5" name="Picture 4" descr="orders.png"/>
           <p:cNvPicPr>
             <a:picLocks noChangeAspect="1"/>
           </p:cNvPicPr>
@@ -7306,7 +8210,7 @@
         </p:blipFill>
         <p:spPr>
           <a:xfrm>
-            <a:off x="411480" y="1371600"/>
+            <a:off x="411480" y="1417320"/>
             <a:ext cx="7680960" cy="3090762"/>
           </a:xfrm>
           <a:prstGeom prst="rect">
@@ -7322,8 +8226,8 @@
         </p:nvSpPr>
         <p:spPr>
           <a:xfrm>
-            <a:off x="548640" y="4526280"/>
-            <a:ext cx="8046720" cy="502920"/>
+            <a:off x="548640" y="4572000"/>
+            <a:ext cx="8046720" cy="457200"/>
           </a:xfrm>
           <a:prstGeom prst="rect">
             <a:avLst/>
@@ -7343,16 +8247,16 @@
                 </a:solidFill>
                 <a:latin typeface="Arial"/>
               </a:rPr>
-              <a:t>Рік 1: </a:t>
-            </a:r>
-            <a:r>
-              <a:rPr sz="1300" b="1">
+              <a:t>Старт ~80 → </a:t>
+            </a:r>
+            <a:r>
+              <a:rPr sz="1200" b="1">
                 <a:solidFill>
                   <a:srgbClr val="34D186"/>
                 </a:solidFill>
                 <a:latin typeface="Arial"/>
               </a:rPr>
-              <a:t>€79 935</a:t>
+              <a:t>~670 замовлень/міс</a:t>
             </a:r>
             <a:r>
               <a:rPr sz="1200" b="0">
@@ -7361,16 +8265,16 @@
                 </a:solidFill>
                 <a:latin typeface="Arial"/>
               </a:rPr>
-              <a:t>  ·  річний run-rate на 12-й міс: </a:t>
-            </a:r>
-            <a:r>
-              <a:rPr sz="1300" b="1">
+              <a:t> на 12-й місяць · рік 1 разом </a:t>
+            </a:r>
+            <a:r>
+              <a:rPr sz="1200" b="1">
                 <a:solidFill>
                   <a:srgbClr val="2F313F"/>
                 </a:solidFill>
                 <a:latin typeface="Arial"/>
               </a:rPr>
-              <a:t>€120 960/рік</a:t>
+              <a:t>5 329 замовлень</a:t>
             </a:r>
           </a:p>
         </p:txBody>
@@ -7404,7 +8308,7 @@
                 </a:solidFill>
                 <a:latin typeface="Arial"/>
               </a:rPr>
-              <a:t>GMV = замовлення × €15 AOV. Базовий сценарій.</a:t>
+              <a:t>Базова частка 12% обсягу Glovo (бенчмарк ритейл-мереж на Bolt). Прогноз модельний.</a:t>
             </a:r>
           </a:p>
         </p:txBody>
@@ -7532,7 +8436,7 @@
                 </a:solidFill>
                 <a:latin typeface="Arial"/>
               </a:rPr>
-              <a:t>СЦЕНАРІЇ</a:t>
+              <a:t>АМБІЦІЯ · GMV</a:t>
             </a:r>
           </a:p>
           <a:p>
@@ -7543,55 +8447,35 @@
                 </a:solidFill>
                 <a:latin typeface="Arial"/>
               </a:rPr>
-              <a:t>Три рівні амбіції — рік 1</a:t>
-            </a:r>
-          </a:p>
-        </p:txBody>
-      </p:sp>
-      <p:sp>
-        <p:nvSpPr>
-          <p:cNvPr id="5" name="Rounded Rectangle 4"/>
-          <p:cNvSpPr/>
-          <p:nvPr/>
-        </p:nvSpPr>
-        <p:spPr>
-          <a:xfrm>
-            <a:off x="548640" y="1828800"/>
-            <a:ext cx="2514600" cy="2194560"/>
-          </a:xfrm>
-          <a:prstGeom prst="roundRect">
-            <a:avLst/>
-          </a:prstGeom>
-          <a:solidFill>
-            <a:srgbClr val="EEF6F1"/>
-          </a:solidFill>
-          <a:ln>
-            <a:noFill/>
-          </a:ln>
-          <a:effectLst/>
-        </p:spPr>
-        <p:style>
-          <a:lnRef idx="1">
-            <a:schemeClr val="accent1"/>
-          </a:lnRef>
-          <a:fillRef idx="3">
-            <a:schemeClr val="accent1"/>
-          </a:fillRef>
-          <a:effectRef idx="2">
-            <a:schemeClr val="accent1"/>
-          </a:effectRef>
-          <a:fontRef idx="minor">
-            <a:schemeClr val="lt1"/>
-          </a:fontRef>
-        </p:style>
-        <p:txBody>
-          <a:bodyPr rtlCol="0" anchor="ctr"/>
-          <a:lstStyle/>
-          <a:p>
-            <a:pPr algn="ctr"/>
-          </a:p>
-        </p:txBody>
-      </p:sp>
+              <a:t>GMV-потенціал, AOV €15</a:t>
+            </a:r>
+          </a:p>
+        </p:txBody>
+      </p:sp>
+      <p:pic>
+        <p:nvPicPr>
+          <p:cNvPr id="5" name="Picture 4" descr="gmv.png"/>
+          <p:cNvPicPr>
+            <a:picLocks noChangeAspect="1"/>
+          </p:cNvPicPr>
+          <p:nvPr/>
+        </p:nvPicPr>
+        <p:blipFill>
+          <a:blip r:embed="rId3"/>
+          <a:stretch>
+            <a:fillRect/>
+          </a:stretch>
+        </p:blipFill>
+        <p:spPr>
+          <a:xfrm>
+            <a:off x="411480" y="1371600"/>
+            <a:ext cx="7680960" cy="3090762"/>
+          </a:xfrm>
+          <a:prstGeom prst="rect">
+            <a:avLst/>
+          </a:prstGeom>
+        </p:spPr>
+      </p:pic>
       <p:sp>
         <p:nvSpPr>
           <p:cNvPr id="6" name="TextBox 5"/>
@@ -7600,8 +8484,8 @@
         </p:nvSpPr>
         <p:spPr>
           <a:xfrm>
-            <a:off x="731520" y="2011680"/>
-            <a:ext cx="2148840" cy="1874519"/>
+            <a:off x="548640" y="4526280"/>
+            <a:ext cx="8046720" cy="502920"/>
           </a:xfrm>
           <a:prstGeom prst="rect">
             <a:avLst/>
@@ -7614,121 +8498,55 @@
           </a:bodyPr>
           <a:lstStyle/>
           <a:p>
-            <a:pPr algn="ctr"/>
-            <a:r>
-              <a:rPr sz="1400" b="1">
+            <a:r>
+              <a:rPr sz="1200" b="0">
+                <a:solidFill>
+                  <a:srgbClr val="6B7080"/>
+                </a:solidFill>
+                <a:latin typeface="Arial"/>
+              </a:rPr>
+              <a:t>Рік 1: </a:t>
+            </a:r>
+            <a:r>
+              <a:rPr sz="1300" b="1">
+                <a:solidFill>
+                  <a:srgbClr val="34D186"/>
+                </a:solidFill>
+                <a:latin typeface="Arial"/>
+              </a:rPr>
+              <a:t>€79 935</a:t>
+            </a:r>
+            <a:r>
+              <a:rPr sz="1200" b="0">
+                <a:solidFill>
+                  <a:srgbClr val="6B7080"/>
+                </a:solidFill>
+                <a:latin typeface="Arial"/>
+              </a:rPr>
+              <a:t>  ·  річний run-rate на 12-й міс: </a:t>
+            </a:r>
+            <a:r>
+              <a:rPr sz="1300" b="1">
                 <a:solidFill>
                   <a:srgbClr val="2F313F"/>
                 </a:solidFill>
                 <a:latin typeface="Arial"/>
               </a:rPr>
-              <a:t>Консервативний</a:t>
-            </a:r>
-          </a:p>
-          <a:p>
-            <a:pPr algn="ctr"/>
-            <a:r>
-              <a:rPr sz="1050" b="0">
-                <a:solidFill>
-                  <a:srgbClr val="6B7080"/>
-                </a:solidFill>
-                <a:latin typeface="Arial"/>
-              </a:rPr>
-              <a:t>8% обсягу Glovo</a:t>
-            </a:r>
-          </a:p>
-          <a:p>
-            <a:pPr algn="ctr"/>
-            <a:r>
-              <a:rPr sz="2600" b="1">
-                <a:solidFill>
-                  <a:srgbClr val="34D186"/>
-                </a:solidFill>
-                <a:latin typeface="Arial"/>
-              </a:rPr>
-              <a:t>€53 310</a:t>
-            </a:r>
-          </a:p>
-          <a:p>
-            <a:pPr algn="ctr"/>
-            <a:r>
-              <a:rPr sz="1050" b="0">
-                <a:solidFill>
-                  <a:srgbClr val="6B7080"/>
-                </a:solidFill>
-                <a:latin typeface="Arial"/>
-              </a:rPr>
-              <a:t>GMV рік 1</a:t>
-            </a:r>
-          </a:p>
-          <a:p>
-            <a:pPr algn="ctr"/>
-            <a:r>
-              <a:rPr sz="1200" b="1">
-                <a:solidFill>
-                  <a:srgbClr val="2F313F"/>
-                </a:solidFill>
-                <a:latin typeface="Arial"/>
-              </a:rPr>
-              <a:t>3 554 замовлень</a:t>
-            </a:r>
-          </a:p>
-        </p:txBody>
-      </p:sp>
-      <p:sp>
-        <p:nvSpPr>
-          <p:cNvPr id="7" name="Rounded Rectangle 6"/>
-          <p:cNvSpPr/>
-          <p:nvPr/>
-        </p:nvSpPr>
-        <p:spPr>
-          <a:xfrm>
-            <a:off x="3246120" y="1828800"/>
-            <a:ext cx="2514600" cy="2194560"/>
-          </a:xfrm>
-          <a:prstGeom prst="roundRect">
-            <a:avLst/>
-          </a:prstGeom>
-          <a:solidFill>
-            <a:srgbClr val="34D186"/>
-          </a:solidFill>
-          <a:ln>
-            <a:noFill/>
-          </a:ln>
-          <a:effectLst/>
-        </p:spPr>
-        <p:style>
-          <a:lnRef idx="1">
-            <a:schemeClr val="accent1"/>
-          </a:lnRef>
-          <a:fillRef idx="3">
-            <a:schemeClr val="accent1"/>
-          </a:fillRef>
-          <a:effectRef idx="2">
-            <a:schemeClr val="accent1"/>
-          </a:effectRef>
-          <a:fontRef idx="minor">
-            <a:schemeClr val="lt1"/>
-          </a:fontRef>
-        </p:style>
-        <p:txBody>
-          <a:bodyPr rtlCol="0" anchor="ctr"/>
-          <a:lstStyle/>
-          <a:p>
-            <a:pPr algn="ctr"/>
-          </a:p>
-        </p:txBody>
-      </p:sp>
-      <p:sp>
-        <p:nvSpPr>
-          <p:cNvPr id="8" name="TextBox 7"/>
+              <a:t>€120 960/рік</a:t>
+            </a:r>
+          </a:p>
+        </p:txBody>
+      </p:sp>
+      <p:sp>
+        <p:nvSpPr>
+          <p:cNvPr id="7" name="TextBox 6"/>
           <p:cNvSpPr txBox="1"/>
           <p:nvPr/>
         </p:nvSpPr>
         <p:spPr>
           <a:xfrm>
-            <a:off x="3429000" y="2011680"/>
-            <a:ext cx="2148840" cy="1874519"/>
+            <a:off x="457200" y="4736592"/>
+            <a:ext cx="8229600" cy="274320"/>
           </a:xfrm>
           <a:prstGeom prst="rect">
             <a:avLst/>
@@ -7741,224 +8559,14 @@
           </a:bodyPr>
           <a:lstStyle/>
           <a:p>
-            <a:pPr algn="ctr"/>
-            <a:r>
-              <a:rPr sz="1400" b="1">
-                <a:solidFill>
-                  <a:srgbClr val="FFFFFF"/>
-                </a:solidFill>
-                <a:latin typeface="Arial"/>
-              </a:rPr>
-              <a:t>Базовий</a:t>
-            </a:r>
-          </a:p>
-          <a:p>
-            <a:pPr algn="ctr"/>
-            <a:r>
-              <a:rPr sz="1050" b="0">
-                <a:solidFill>
-                  <a:srgbClr val="FFFFFF"/>
-                </a:solidFill>
-                <a:latin typeface="Arial"/>
-              </a:rPr>
-              <a:t>12% обсягу Glovo</a:t>
-            </a:r>
-          </a:p>
-          <a:p>
-            <a:pPr algn="ctr"/>
-            <a:r>
-              <a:rPr sz="2600" b="1">
-                <a:solidFill>
-                  <a:srgbClr val="FFFFFF"/>
-                </a:solidFill>
-                <a:latin typeface="Arial"/>
-              </a:rPr>
-              <a:t>€79 935</a:t>
-            </a:r>
-          </a:p>
-          <a:p>
-            <a:pPr algn="ctr"/>
-            <a:r>
-              <a:rPr sz="1050" b="0">
-                <a:solidFill>
-                  <a:srgbClr val="FFFFFF"/>
-                </a:solidFill>
-                <a:latin typeface="Arial"/>
-              </a:rPr>
-              <a:t>GMV рік 1</a:t>
-            </a:r>
-          </a:p>
-          <a:p>
-            <a:pPr algn="ctr"/>
-            <a:r>
-              <a:rPr sz="1200" b="1">
-                <a:solidFill>
-                  <a:srgbClr val="FFFFFF"/>
-                </a:solidFill>
-                <a:latin typeface="Arial"/>
-              </a:rPr>
-              <a:t>5 329 замовлень</a:t>
-            </a:r>
-          </a:p>
-        </p:txBody>
-      </p:sp>
-      <p:sp>
-        <p:nvSpPr>
-          <p:cNvPr id="9" name="Rounded Rectangle 8"/>
-          <p:cNvSpPr/>
-          <p:nvPr/>
-        </p:nvSpPr>
-        <p:spPr>
-          <a:xfrm>
-            <a:off x="5943600" y="1828800"/>
-            <a:ext cx="2514600" cy="2194560"/>
-          </a:xfrm>
-          <a:prstGeom prst="roundRect">
-            <a:avLst/>
-          </a:prstGeom>
-          <a:solidFill>
-            <a:srgbClr val="EEF6F1"/>
-          </a:solidFill>
-          <a:ln>
-            <a:noFill/>
-          </a:ln>
-          <a:effectLst/>
-        </p:spPr>
-        <p:style>
-          <a:lnRef idx="1">
-            <a:schemeClr val="accent1"/>
-          </a:lnRef>
-          <a:fillRef idx="3">
-            <a:schemeClr val="accent1"/>
-          </a:fillRef>
-          <a:effectRef idx="2">
-            <a:schemeClr val="accent1"/>
-          </a:effectRef>
-          <a:fontRef idx="minor">
-            <a:schemeClr val="lt1"/>
-          </a:fontRef>
-        </p:style>
-        <p:txBody>
-          <a:bodyPr rtlCol="0" anchor="ctr"/>
-          <a:lstStyle/>
-          <a:p>
-            <a:pPr algn="ctr"/>
-          </a:p>
-        </p:txBody>
-      </p:sp>
-      <p:sp>
-        <p:nvSpPr>
-          <p:cNvPr id="10" name="TextBox 9"/>
-          <p:cNvSpPr txBox="1"/>
-          <p:nvPr/>
-        </p:nvSpPr>
-        <p:spPr>
-          <a:xfrm>
-            <a:off x="6126480" y="2011680"/>
-            <a:ext cx="2148840" cy="1874519"/>
-          </a:xfrm>
-          <a:prstGeom prst="rect">
-            <a:avLst/>
-          </a:prstGeom>
-          <a:noFill/>
-        </p:spPr>
-        <p:txBody>
-          <a:bodyPr wrap="square">
-            <a:spAutoFit/>
-          </a:bodyPr>
-          <a:lstStyle/>
-          <a:p>
-            <a:pPr algn="ctr"/>
-            <a:r>
-              <a:rPr sz="1400" b="1">
-                <a:solidFill>
-                  <a:srgbClr val="2F313F"/>
-                </a:solidFill>
-                <a:latin typeface="Arial"/>
-              </a:rPr>
-              <a:t>Амбітний</a:t>
-            </a:r>
-          </a:p>
-          <a:p>
-            <a:pPr algn="ctr"/>
-            <a:r>
-              <a:rPr sz="1050" b="0">
+            <a:r>
+              <a:rPr sz="850" b="0">
                 <a:solidFill>
                   <a:srgbClr val="6B7080"/>
                 </a:solidFill>
                 <a:latin typeface="Arial"/>
               </a:rPr>
-              <a:t>18% обсягу Glovo</a:t>
-            </a:r>
-          </a:p>
-          <a:p>
-            <a:pPr algn="ctr"/>
-            <a:r>
-              <a:rPr sz="2600" b="1">
-                <a:solidFill>
-                  <a:srgbClr val="34D186"/>
-                </a:solidFill>
-                <a:latin typeface="Arial"/>
-              </a:rPr>
-              <a:t>€119 925</a:t>
-            </a:r>
-          </a:p>
-          <a:p>
-            <a:pPr algn="ctr"/>
-            <a:r>
-              <a:rPr sz="1050" b="0">
-                <a:solidFill>
-                  <a:srgbClr val="6B7080"/>
-                </a:solidFill>
-                <a:latin typeface="Arial"/>
-              </a:rPr>
-              <a:t>GMV рік 1</a:t>
-            </a:r>
-          </a:p>
-          <a:p>
-            <a:pPr algn="ctr"/>
-            <a:r>
-              <a:rPr sz="1200" b="1">
-                <a:solidFill>
-                  <a:srgbClr val="2F313F"/>
-                </a:solidFill>
-                <a:latin typeface="Arial"/>
-              </a:rPr>
-              <a:t>7 995 замовлень</a:t>
-            </a:r>
-          </a:p>
-        </p:txBody>
-      </p:sp>
-      <p:sp>
-        <p:nvSpPr>
-          <p:cNvPr id="11" name="TextBox 10"/>
-          <p:cNvSpPr txBox="1"/>
-          <p:nvPr/>
-        </p:nvSpPr>
-        <p:spPr>
-          <a:xfrm>
-            <a:off x="457200" y="4736592"/>
-            <a:ext cx="8229600" cy="274320"/>
-          </a:xfrm>
-          <a:prstGeom prst="rect">
-            <a:avLst/>
-          </a:prstGeom>
-          <a:noFill/>
-        </p:spPr>
-        <p:txBody>
-          <a:bodyPr wrap="square">
-            <a:spAutoFit/>
-          </a:bodyPr>
-          <a:lstStyle/>
-          <a:p>
-            <a:r>
-              <a:rPr sz="850" b="0">
-                <a:solidFill>
-                  <a:srgbClr val="6B7080"/>
-                </a:solidFill>
-                <a:latin typeface="Arial"/>
-              </a:rPr>
-              <a:t>AOV €15. Базовий сценарій — рекомендований.</a:t>
+              <a:t>GMV = замовлення × €15 AOV. Базовий сценарій.</a:t>
             </a:r>
           </a:p>
         </p:txBody>
@@ -8086,7 +8694,7 @@
                 </a:solidFill>
                 <a:latin typeface="Arial"/>
               </a:rPr>
-              <a:t>ПРОМО · ЯК РОЗГАНЯЄМО ЗАМОВЛЕННЯ</a:t>
+              <a:t>СЦЕНАРІЇ</a:t>
             </a:r>
           </a:p>
           <a:p>
@@ -8097,7 +8705,7 @@
                 </a:solidFill>
                 <a:latin typeface="Arial"/>
               </a:rPr>
-              <a:t>Промо-інструменти Bolt Food</a:t>
+              <a:t>Три рівні амбіції — рік 1</a:t>
             </a:r>
           </a:p>
         </p:txBody>
@@ -8110,8 +8718,8 @@
         </p:nvSpPr>
         <p:spPr>
           <a:xfrm>
-            <a:off x="548640" y="1645920"/>
-            <a:ext cx="1883664" cy="1417320"/>
+            <a:off x="548640" y="1828800"/>
+            <a:ext cx="2514600" cy="2194560"/>
           </a:xfrm>
           <a:prstGeom prst="roundRect">
             <a:avLst/>
@@ -8148,14 +8756,97 @@
       </p:sp>
       <p:sp>
         <p:nvSpPr>
-          <p:cNvPr id="6" name="Rounded Rectangle 5"/>
+          <p:cNvPr id="6" name="TextBox 5"/>
+          <p:cNvSpPr txBox="1"/>
+          <p:nvPr/>
+        </p:nvSpPr>
+        <p:spPr>
+          <a:xfrm>
+            <a:off x="731520" y="2011680"/>
+            <a:ext cx="2148840" cy="1874519"/>
+          </a:xfrm>
+          <a:prstGeom prst="rect">
+            <a:avLst/>
+          </a:prstGeom>
+          <a:noFill/>
+        </p:spPr>
+        <p:txBody>
+          <a:bodyPr wrap="square">
+            <a:spAutoFit/>
+          </a:bodyPr>
+          <a:lstStyle/>
+          <a:p>
+            <a:pPr algn="ctr"/>
+            <a:r>
+              <a:rPr sz="1400" b="1">
+                <a:solidFill>
+                  <a:srgbClr val="2F313F"/>
+                </a:solidFill>
+                <a:latin typeface="Arial"/>
+              </a:rPr>
+              <a:t>Консервативний</a:t>
+            </a:r>
+          </a:p>
+          <a:p>
+            <a:pPr algn="ctr"/>
+            <a:r>
+              <a:rPr sz="1050" b="0">
+                <a:solidFill>
+                  <a:srgbClr val="6B7080"/>
+                </a:solidFill>
+                <a:latin typeface="Arial"/>
+              </a:rPr>
+              <a:t>8% обсягу Glovo</a:t>
+            </a:r>
+          </a:p>
+          <a:p>
+            <a:pPr algn="ctr"/>
+            <a:r>
+              <a:rPr sz="2600" b="1">
+                <a:solidFill>
+                  <a:srgbClr val="34D186"/>
+                </a:solidFill>
+                <a:latin typeface="Arial"/>
+              </a:rPr>
+              <a:t>€53 310</a:t>
+            </a:r>
+          </a:p>
+          <a:p>
+            <a:pPr algn="ctr"/>
+            <a:r>
+              <a:rPr sz="1050" b="0">
+                <a:solidFill>
+                  <a:srgbClr val="6B7080"/>
+                </a:solidFill>
+                <a:latin typeface="Arial"/>
+              </a:rPr>
+              <a:t>GMV рік 1</a:t>
+            </a:r>
+          </a:p>
+          <a:p>
+            <a:pPr algn="ctr"/>
+            <a:r>
+              <a:rPr sz="1200" b="1">
+                <a:solidFill>
+                  <a:srgbClr val="2F313F"/>
+                </a:solidFill>
+                <a:latin typeface="Arial"/>
+              </a:rPr>
+              <a:t>3 554 замовлень</a:t>
+            </a:r>
+          </a:p>
+        </p:txBody>
+      </p:sp>
+      <p:sp>
+        <p:nvSpPr>
+          <p:cNvPr id="7" name="Rounded Rectangle 6"/>
           <p:cNvSpPr/>
           <p:nvPr/>
         </p:nvSpPr>
         <p:spPr>
           <a:xfrm>
-            <a:off x="694944" y="1792224"/>
-            <a:ext cx="365760" cy="365760"/>
+            <a:off x="3246120" y="1828800"/>
+            <a:ext cx="2514600" cy="2194560"/>
           </a:xfrm>
           <a:prstGeom prst="roundRect">
             <a:avLst/>
@@ -8192,14 +8883,14 @@
       </p:sp>
       <p:sp>
         <p:nvSpPr>
-          <p:cNvPr id="7" name="TextBox 6"/>
+          <p:cNvPr id="8" name="TextBox 7"/>
           <p:cNvSpPr txBox="1"/>
           <p:nvPr/>
         </p:nvSpPr>
         <p:spPr>
           <a:xfrm>
-            <a:off x="694944" y="1810512"/>
-            <a:ext cx="365760" cy="329184"/>
+            <a:off x="3429000" y="2011680"/>
+            <a:ext cx="2148840" cy="1874519"/>
           </a:xfrm>
           <a:prstGeom prst="rect">
             <a:avLst/>
@@ -8214,58 +8905,61 @@
           <a:p>
             <a:pPr algn="ctr"/>
             <a:r>
-              <a:rPr sz="1300" b="1">
+              <a:rPr sz="1400" b="1">
                 <a:solidFill>
                   <a:srgbClr val="FFFFFF"/>
                 </a:solidFill>
                 <a:latin typeface="Arial"/>
               </a:rPr>
-              <a:t>1</a:t>
-            </a:r>
-          </a:p>
-        </p:txBody>
-      </p:sp>
-      <p:sp>
-        <p:nvSpPr>
-          <p:cNvPr id="8" name="TextBox 7"/>
-          <p:cNvSpPr txBox="1"/>
-          <p:nvPr/>
-        </p:nvSpPr>
-        <p:spPr>
-          <a:xfrm>
-            <a:off x="676656" y="2212848"/>
-            <a:ext cx="1627632" cy="777240"/>
-          </a:xfrm>
-          <a:prstGeom prst="rect">
-            <a:avLst/>
-          </a:prstGeom>
-          <a:noFill/>
-        </p:spPr>
-        <p:txBody>
-          <a:bodyPr wrap="square">
-            <a:spAutoFit/>
-          </a:bodyPr>
-          <a:lstStyle/>
-          <a:p>
-            <a:r>
-              <a:rPr sz="1250" b="1">
-                <a:solidFill>
-                  <a:srgbClr val="2F313F"/>
-                </a:solidFill>
-                <a:latin typeface="Arial"/>
-              </a:rPr>
-              <a:t>Знижка на доставку</a:t>
-            </a:r>
-          </a:p>
-          <a:p>
-            <a:r>
-              <a:rPr sz="1000" b="0">
-                <a:solidFill>
-                  <a:srgbClr val="6B7080"/>
-                </a:solidFill>
-                <a:latin typeface="Arial"/>
-              </a:rPr>
-              <a:t>Частково або 0 ₴. №1 інструмент для залучення нових клієнтів.</a:t>
+              <a:t>Базовий</a:t>
+            </a:r>
+          </a:p>
+          <a:p>
+            <a:pPr algn="ctr"/>
+            <a:r>
+              <a:rPr sz="1050" b="0">
+                <a:solidFill>
+                  <a:srgbClr val="FFFFFF"/>
+                </a:solidFill>
+                <a:latin typeface="Arial"/>
+              </a:rPr>
+              <a:t>12% обсягу Glovo</a:t>
+            </a:r>
+          </a:p>
+          <a:p>
+            <a:pPr algn="ctr"/>
+            <a:r>
+              <a:rPr sz="2600" b="1">
+                <a:solidFill>
+                  <a:srgbClr val="FFFFFF"/>
+                </a:solidFill>
+                <a:latin typeface="Arial"/>
+              </a:rPr>
+              <a:t>€79 935</a:t>
+            </a:r>
+          </a:p>
+          <a:p>
+            <a:pPr algn="ctr"/>
+            <a:r>
+              <a:rPr sz="1050" b="0">
+                <a:solidFill>
+                  <a:srgbClr val="FFFFFF"/>
+                </a:solidFill>
+                <a:latin typeface="Arial"/>
+              </a:rPr>
+              <a:t>GMV рік 1</a:t>
+            </a:r>
+          </a:p>
+          <a:p>
+            <a:pPr algn="ctr"/>
+            <a:r>
+              <a:rPr sz="1200" b="1">
+                <a:solidFill>
+                  <a:srgbClr val="FFFFFF"/>
+                </a:solidFill>
+                <a:latin typeface="Arial"/>
+              </a:rPr>
+              <a:t>5 329 замовлень</a:t>
             </a:r>
           </a:p>
         </p:txBody>
@@ -8278,8 +8972,8 @@
         </p:nvSpPr>
         <p:spPr>
           <a:xfrm>
-            <a:off x="2596896" y="1645920"/>
-            <a:ext cx="1883664" cy="1417320"/>
+            <a:off x="5943600" y="1828800"/>
+            <a:ext cx="2514600" cy="2194560"/>
           </a:xfrm>
           <a:prstGeom prst="roundRect">
             <a:avLst/>
@@ -8316,58 +9010,14 @@
       </p:sp>
       <p:sp>
         <p:nvSpPr>
-          <p:cNvPr id="10" name="Rounded Rectangle 9"/>
-          <p:cNvSpPr/>
-          <p:nvPr/>
-        </p:nvSpPr>
-        <p:spPr>
-          <a:xfrm>
-            <a:off x="2743200" y="1792224"/>
-            <a:ext cx="365760" cy="365760"/>
-          </a:xfrm>
-          <a:prstGeom prst="roundRect">
-            <a:avLst/>
-          </a:prstGeom>
-          <a:solidFill>
-            <a:srgbClr val="34D186"/>
-          </a:solidFill>
-          <a:ln>
-            <a:noFill/>
-          </a:ln>
-          <a:effectLst/>
-        </p:spPr>
-        <p:style>
-          <a:lnRef idx="1">
-            <a:schemeClr val="accent1"/>
-          </a:lnRef>
-          <a:fillRef idx="3">
-            <a:schemeClr val="accent1"/>
-          </a:fillRef>
-          <a:effectRef idx="2">
-            <a:schemeClr val="accent1"/>
-          </a:effectRef>
-          <a:fontRef idx="minor">
-            <a:schemeClr val="lt1"/>
-          </a:fontRef>
-        </p:style>
-        <p:txBody>
-          <a:bodyPr rtlCol="0" anchor="ctr"/>
-          <a:lstStyle/>
-          <a:p>
-            <a:pPr algn="ctr"/>
-          </a:p>
-        </p:txBody>
-      </p:sp>
-      <p:sp>
-        <p:nvSpPr>
-          <p:cNvPr id="11" name="TextBox 10"/>
+          <p:cNvPr id="10" name="TextBox 9"/>
           <p:cNvSpPr txBox="1"/>
           <p:nvPr/>
         </p:nvSpPr>
         <p:spPr>
           <a:xfrm>
-            <a:off x="2743200" y="1810512"/>
-            <a:ext cx="365760" cy="329184"/>
+            <a:off x="6126480" y="2011680"/>
+            <a:ext cx="2148840" cy="1874519"/>
           </a:xfrm>
           <a:prstGeom prst="rect">
             <a:avLst/>
@@ -8382,27 +9032,75 @@
           <a:p>
             <a:pPr algn="ctr"/>
             <a:r>
-              <a:rPr sz="1300" b="1">
-                <a:solidFill>
-                  <a:srgbClr val="FFFFFF"/>
-                </a:solidFill>
-                <a:latin typeface="Arial"/>
-              </a:rPr>
-              <a:t>2</a:t>
-            </a:r>
-          </a:p>
-        </p:txBody>
-      </p:sp>
-      <p:sp>
-        <p:nvSpPr>
-          <p:cNvPr id="12" name="TextBox 11"/>
+              <a:rPr sz="1400" b="1">
+                <a:solidFill>
+                  <a:srgbClr val="2F313F"/>
+                </a:solidFill>
+                <a:latin typeface="Arial"/>
+              </a:rPr>
+              <a:t>Амбітний</a:t>
+            </a:r>
+          </a:p>
+          <a:p>
+            <a:pPr algn="ctr"/>
+            <a:r>
+              <a:rPr sz="1050" b="0">
+                <a:solidFill>
+                  <a:srgbClr val="6B7080"/>
+                </a:solidFill>
+                <a:latin typeface="Arial"/>
+              </a:rPr>
+              <a:t>18% обсягу Glovo</a:t>
+            </a:r>
+          </a:p>
+          <a:p>
+            <a:pPr algn="ctr"/>
+            <a:r>
+              <a:rPr sz="2600" b="1">
+                <a:solidFill>
+                  <a:srgbClr val="34D186"/>
+                </a:solidFill>
+                <a:latin typeface="Arial"/>
+              </a:rPr>
+              <a:t>€119 925</a:t>
+            </a:r>
+          </a:p>
+          <a:p>
+            <a:pPr algn="ctr"/>
+            <a:r>
+              <a:rPr sz="1050" b="0">
+                <a:solidFill>
+                  <a:srgbClr val="6B7080"/>
+                </a:solidFill>
+                <a:latin typeface="Arial"/>
+              </a:rPr>
+              <a:t>GMV рік 1</a:t>
+            </a:r>
+          </a:p>
+          <a:p>
+            <a:pPr algn="ctr"/>
+            <a:r>
+              <a:rPr sz="1200" b="1">
+                <a:solidFill>
+                  <a:srgbClr val="2F313F"/>
+                </a:solidFill>
+                <a:latin typeface="Arial"/>
+              </a:rPr>
+              <a:t>7 995 замовлень</a:t>
+            </a:r>
+          </a:p>
+        </p:txBody>
+      </p:sp>
+      <p:sp>
+        <p:nvSpPr>
+          <p:cNvPr id="11" name="TextBox 10"/>
           <p:cNvSpPr txBox="1"/>
           <p:nvPr/>
         </p:nvSpPr>
         <p:spPr>
           <a:xfrm>
-            <a:off x="2724912" y="2212848"/>
-            <a:ext cx="1627632" cy="777240"/>
+            <a:off x="457200" y="4736592"/>
+            <a:ext cx="8229600" cy="274320"/>
           </a:xfrm>
           <a:prstGeom prst="rect">
             <a:avLst/>
@@ -8416,660 +9114,13 @@
           <a:lstStyle/>
           <a:p>
             <a:r>
-              <a:rPr sz="1250" b="1">
-                <a:solidFill>
-                  <a:srgbClr val="2F313F"/>
-                </a:solidFill>
-                <a:latin typeface="Arial"/>
-              </a:rPr>
-              <a:t>Знижки на меню</a:t>
-            </a:r>
-          </a:p>
-          <a:p>
-            <a:r>
-              <a:rPr sz="1000" b="0">
+              <a:rPr sz="850" b="0">
                 <a:solidFill>
                   <a:srgbClr val="6B7080"/>
                 </a:solidFill>
                 <a:latin typeface="Arial"/>
               </a:rPr>
-              <a:t>На окремі позиції або весь асортимент — через API або від Bolt.</a:t>
-            </a:r>
-          </a:p>
-        </p:txBody>
-      </p:sp>
-      <p:sp>
-        <p:nvSpPr>
-          <p:cNvPr id="13" name="Rounded Rectangle 12"/>
-          <p:cNvSpPr/>
-          <p:nvPr/>
-        </p:nvSpPr>
-        <p:spPr>
-          <a:xfrm>
-            <a:off x="4645152" y="1645920"/>
-            <a:ext cx="1883664" cy="1417320"/>
-          </a:xfrm>
-          <a:prstGeom prst="roundRect">
-            <a:avLst/>
-          </a:prstGeom>
-          <a:solidFill>
-            <a:srgbClr val="EEF6F1"/>
-          </a:solidFill>
-          <a:ln>
-            <a:noFill/>
-          </a:ln>
-          <a:effectLst/>
-        </p:spPr>
-        <p:style>
-          <a:lnRef idx="1">
-            <a:schemeClr val="accent1"/>
-          </a:lnRef>
-          <a:fillRef idx="3">
-            <a:schemeClr val="accent1"/>
-          </a:fillRef>
-          <a:effectRef idx="2">
-            <a:schemeClr val="accent1"/>
-          </a:effectRef>
-          <a:fontRef idx="minor">
-            <a:schemeClr val="lt1"/>
-          </a:fontRef>
-        </p:style>
-        <p:txBody>
-          <a:bodyPr rtlCol="0" anchor="ctr"/>
-          <a:lstStyle/>
-          <a:p>
-            <a:pPr algn="ctr"/>
-          </a:p>
-        </p:txBody>
-      </p:sp>
-      <p:sp>
-        <p:nvSpPr>
-          <p:cNvPr id="14" name="Rounded Rectangle 13"/>
-          <p:cNvSpPr/>
-          <p:nvPr/>
-        </p:nvSpPr>
-        <p:spPr>
-          <a:xfrm>
-            <a:off x="4791456" y="1792224"/>
-            <a:ext cx="365760" cy="365760"/>
-          </a:xfrm>
-          <a:prstGeom prst="roundRect">
-            <a:avLst/>
-          </a:prstGeom>
-          <a:solidFill>
-            <a:srgbClr val="34D186"/>
-          </a:solidFill>
-          <a:ln>
-            <a:noFill/>
-          </a:ln>
-          <a:effectLst/>
-        </p:spPr>
-        <p:style>
-          <a:lnRef idx="1">
-            <a:schemeClr val="accent1"/>
-          </a:lnRef>
-          <a:fillRef idx="3">
-            <a:schemeClr val="accent1"/>
-          </a:fillRef>
-          <a:effectRef idx="2">
-            <a:schemeClr val="accent1"/>
-          </a:effectRef>
-          <a:fontRef idx="minor">
-            <a:schemeClr val="lt1"/>
-          </a:fontRef>
-        </p:style>
-        <p:txBody>
-          <a:bodyPr rtlCol="0" anchor="ctr"/>
-          <a:lstStyle/>
-          <a:p>
-            <a:pPr algn="ctr"/>
-          </a:p>
-        </p:txBody>
-      </p:sp>
-      <p:sp>
-        <p:nvSpPr>
-          <p:cNvPr id="15" name="TextBox 14"/>
-          <p:cNvSpPr txBox="1"/>
-          <p:nvPr/>
-        </p:nvSpPr>
-        <p:spPr>
-          <a:xfrm>
-            <a:off x="4791456" y="1810512"/>
-            <a:ext cx="365760" cy="329184"/>
-          </a:xfrm>
-          <a:prstGeom prst="rect">
-            <a:avLst/>
-          </a:prstGeom>
-          <a:noFill/>
-        </p:spPr>
-        <p:txBody>
-          <a:bodyPr wrap="square">
-            <a:spAutoFit/>
-          </a:bodyPr>
-          <a:lstStyle/>
-          <a:p>
-            <a:pPr algn="ctr"/>
-            <a:r>
-              <a:rPr sz="1300" b="1">
-                <a:solidFill>
-                  <a:srgbClr val="FFFFFF"/>
-                </a:solidFill>
-                <a:latin typeface="Arial"/>
-              </a:rPr>
-              <a:t>3</a:t>
-            </a:r>
-          </a:p>
-        </p:txBody>
-      </p:sp>
-      <p:sp>
-        <p:nvSpPr>
-          <p:cNvPr id="16" name="TextBox 15"/>
-          <p:cNvSpPr txBox="1"/>
-          <p:nvPr/>
-        </p:nvSpPr>
-        <p:spPr>
-          <a:xfrm>
-            <a:off x="4773168" y="2212848"/>
-            <a:ext cx="1627632" cy="777240"/>
-          </a:xfrm>
-          <a:prstGeom prst="rect">
-            <a:avLst/>
-          </a:prstGeom>
-          <a:noFill/>
-        </p:spPr>
-        <p:txBody>
-          <a:bodyPr wrap="square">
-            <a:spAutoFit/>
-          </a:bodyPr>
-          <a:lstStyle/>
-          <a:p>
-            <a:r>
-              <a:rPr sz="1250" b="1">
-                <a:solidFill>
-                  <a:srgbClr val="2F313F"/>
-                </a:solidFill>
-                <a:latin typeface="Arial"/>
-              </a:rPr>
-              <a:t>Когорти</a:t>
-            </a:r>
-          </a:p>
-          <a:p>
-            <a:r>
-              <a:rPr sz="1000" b="0">
-                <a:solidFill>
-                  <a:srgbClr val="6B7080"/>
-                </a:solidFill>
-                <a:latin typeface="Arial"/>
-              </a:rPr>
-              <a:t>Таргет на Нових / Втрачених / Активних — різний розмір знижки.</a:t>
-            </a:r>
-          </a:p>
-        </p:txBody>
-      </p:sp>
-      <p:sp>
-        <p:nvSpPr>
-          <p:cNvPr id="17" name="Rounded Rectangle 16"/>
-          <p:cNvSpPr/>
-          <p:nvPr/>
-        </p:nvSpPr>
-        <p:spPr>
-          <a:xfrm>
-            <a:off x="6693408" y="1645920"/>
-            <a:ext cx="1883664" cy="1417320"/>
-          </a:xfrm>
-          <a:prstGeom prst="roundRect">
-            <a:avLst/>
-          </a:prstGeom>
-          <a:solidFill>
-            <a:srgbClr val="EEF6F1"/>
-          </a:solidFill>
-          <a:ln>
-            <a:noFill/>
-          </a:ln>
-          <a:effectLst/>
-        </p:spPr>
-        <p:style>
-          <a:lnRef idx="1">
-            <a:schemeClr val="accent1"/>
-          </a:lnRef>
-          <a:fillRef idx="3">
-            <a:schemeClr val="accent1"/>
-          </a:fillRef>
-          <a:effectRef idx="2">
-            <a:schemeClr val="accent1"/>
-          </a:effectRef>
-          <a:fontRef idx="minor">
-            <a:schemeClr val="lt1"/>
-          </a:fontRef>
-        </p:style>
-        <p:txBody>
-          <a:bodyPr rtlCol="0" anchor="ctr"/>
-          <a:lstStyle/>
-          <a:p>
-            <a:pPr algn="ctr"/>
-          </a:p>
-        </p:txBody>
-      </p:sp>
-      <p:sp>
-        <p:nvSpPr>
-          <p:cNvPr id="18" name="Rounded Rectangle 17"/>
-          <p:cNvSpPr/>
-          <p:nvPr/>
-        </p:nvSpPr>
-        <p:spPr>
-          <a:xfrm>
-            <a:off x="6839712" y="1792224"/>
-            <a:ext cx="365760" cy="365760"/>
-          </a:xfrm>
-          <a:prstGeom prst="roundRect">
-            <a:avLst/>
-          </a:prstGeom>
-          <a:solidFill>
-            <a:srgbClr val="34D186"/>
-          </a:solidFill>
-          <a:ln>
-            <a:noFill/>
-          </a:ln>
-          <a:effectLst/>
-        </p:spPr>
-        <p:style>
-          <a:lnRef idx="1">
-            <a:schemeClr val="accent1"/>
-          </a:lnRef>
-          <a:fillRef idx="3">
-            <a:schemeClr val="accent1"/>
-          </a:fillRef>
-          <a:effectRef idx="2">
-            <a:schemeClr val="accent1"/>
-          </a:effectRef>
-          <a:fontRef idx="minor">
-            <a:schemeClr val="lt1"/>
-          </a:fontRef>
-        </p:style>
-        <p:txBody>
-          <a:bodyPr rtlCol="0" anchor="ctr"/>
-          <a:lstStyle/>
-          <a:p>
-            <a:pPr algn="ctr"/>
-          </a:p>
-        </p:txBody>
-      </p:sp>
-      <p:sp>
-        <p:nvSpPr>
-          <p:cNvPr id="19" name="TextBox 18"/>
-          <p:cNvSpPr txBox="1"/>
-          <p:nvPr/>
-        </p:nvSpPr>
-        <p:spPr>
-          <a:xfrm>
-            <a:off x="6839712" y="1810512"/>
-            <a:ext cx="365760" cy="329184"/>
-          </a:xfrm>
-          <a:prstGeom prst="rect">
-            <a:avLst/>
-          </a:prstGeom>
-          <a:noFill/>
-        </p:spPr>
-        <p:txBody>
-          <a:bodyPr wrap="square">
-            <a:spAutoFit/>
-          </a:bodyPr>
-          <a:lstStyle/>
-          <a:p>
-            <a:pPr algn="ctr"/>
-            <a:r>
-              <a:rPr sz="1300" b="1">
-                <a:solidFill>
-                  <a:srgbClr val="FFFFFF"/>
-                </a:solidFill>
-                <a:latin typeface="Arial"/>
-              </a:rPr>
-              <a:t>4</a:t>
-            </a:r>
-          </a:p>
-        </p:txBody>
-      </p:sp>
-      <p:sp>
-        <p:nvSpPr>
-          <p:cNvPr id="20" name="TextBox 19"/>
-          <p:cNvSpPr txBox="1"/>
-          <p:nvPr/>
-        </p:nvSpPr>
-        <p:spPr>
-          <a:xfrm>
-            <a:off x="6821424" y="2212848"/>
-            <a:ext cx="1627632" cy="777240"/>
-          </a:xfrm>
-          <a:prstGeom prst="rect">
-            <a:avLst/>
-          </a:prstGeom>
-          <a:noFill/>
-        </p:spPr>
-        <p:txBody>
-          <a:bodyPr wrap="square">
-            <a:spAutoFit/>
-          </a:bodyPr>
-          <a:lstStyle/>
-          <a:p>
-            <a:r>
-              <a:rPr sz="1250" b="1">
-                <a:solidFill>
-                  <a:srgbClr val="2F313F"/>
-                </a:solidFill>
-                <a:latin typeface="Arial"/>
-              </a:rPr>
-              <a:t>Банерна підтримка</a:t>
-            </a:r>
-          </a:p>
-          <a:p>
-            <a:r>
-              <a:rPr sz="1000" b="0">
-                <a:solidFill>
-                  <a:srgbClr val="6B7080"/>
-                </a:solidFill>
-                <a:latin typeface="Arial"/>
-              </a:rPr>
-              <a:t>Банер у вкладці «Магазини» в періоди активних акцій.</a:t>
-            </a:r>
-          </a:p>
-        </p:txBody>
-      </p:sp>
-      <p:sp>
-        <p:nvSpPr>
-          <p:cNvPr id="21" name="Rounded Rectangle 20"/>
-          <p:cNvSpPr/>
-          <p:nvPr/>
-        </p:nvSpPr>
-        <p:spPr>
-          <a:xfrm>
-            <a:off x="548640" y="3246120"/>
-            <a:ext cx="3886200" cy="1051560"/>
-          </a:xfrm>
-          <a:prstGeom prst="roundRect">
-            <a:avLst/>
-          </a:prstGeom>
-          <a:solidFill>
-            <a:srgbClr val="EEF6F1"/>
-          </a:solidFill>
-          <a:ln>
-            <a:noFill/>
-          </a:ln>
-          <a:effectLst/>
-        </p:spPr>
-        <p:style>
-          <a:lnRef idx="1">
-            <a:schemeClr val="accent1"/>
-          </a:lnRef>
-          <a:fillRef idx="3">
-            <a:schemeClr val="accent1"/>
-          </a:fillRef>
-          <a:effectRef idx="2">
-            <a:schemeClr val="accent1"/>
-          </a:effectRef>
-          <a:fontRef idx="minor">
-            <a:schemeClr val="lt1"/>
-          </a:fontRef>
-        </p:style>
-        <p:txBody>
-          <a:bodyPr rtlCol="0" anchor="ctr"/>
-          <a:lstStyle/>
-          <a:p>
-            <a:pPr algn="ctr"/>
-          </a:p>
-        </p:txBody>
-      </p:sp>
-      <p:sp>
-        <p:nvSpPr>
-          <p:cNvPr id="22" name="Rectangle 21"/>
-          <p:cNvSpPr/>
-          <p:nvPr/>
-        </p:nvSpPr>
-        <p:spPr>
-          <a:xfrm>
-            <a:off x="548640" y="3246120"/>
-            <a:ext cx="82296" cy="1051560"/>
-          </a:xfrm>
-          <a:prstGeom prst="rect">
-            <a:avLst/>
-          </a:prstGeom>
-          <a:solidFill>
-            <a:srgbClr val="34D186"/>
-          </a:solidFill>
-          <a:ln>
-            <a:noFill/>
-          </a:ln>
-          <a:effectLst/>
-        </p:spPr>
-        <p:style>
-          <a:lnRef idx="1">
-            <a:schemeClr val="accent1"/>
-          </a:lnRef>
-          <a:fillRef idx="3">
-            <a:schemeClr val="accent1"/>
-          </a:fillRef>
-          <a:effectRef idx="2">
-            <a:schemeClr val="accent1"/>
-          </a:effectRef>
-          <a:fontRef idx="minor">
-            <a:schemeClr val="lt1"/>
-          </a:fontRef>
-        </p:style>
-        <p:txBody>
-          <a:bodyPr rtlCol="0" anchor="ctr"/>
-          <a:lstStyle/>
-          <a:p>
-            <a:pPr algn="ctr"/>
-          </a:p>
-        </p:txBody>
-      </p:sp>
-      <p:sp>
-        <p:nvSpPr>
-          <p:cNvPr id="23" name="TextBox 22"/>
-          <p:cNvSpPr txBox="1"/>
-          <p:nvPr/>
-        </p:nvSpPr>
-        <p:spPr>
-          <a:xfrm>
-            <a:off x="777240" y="3383280"/>
-            <a:ext cx="3520440" cy="868680"/>
-          </a:xfrm>
-          <a:prstGeom prst="rect">
-            <a:avLst/>
-          </a:prstGeom>
-          <a:noFill/>
-        </p:spPr>
-        <p:txBody>
-          <a:bodyPr wrap="square">
-            <a:spAutoFit/>
-          </a:bodyPr>
-          <a:lstStyle/>
-          <a:p>
-            <a:r>
-              <a:rPr sz="1250" b="1">
-                <a:solidFill>
-                  <a:srgbClr val="2F313F"/>
-                </a:solidFill>
-                <a:latin typeface="Arial"/>
-              </a:rPr>
-              <a:t>Рекомендований старт</a:t>
-            </a:r>
-          </a:p>
-          <a:p>
-            <a:r>
-              <a:rPr sz="1050" b="0">
-                <a:solidFill>
-                  <a:srgbClr val="6B7080"/>
-                </a:solidFill>
-                <a:latin typeface="Arial"/>
-              </a:rPr>
-              <a:t>Безкоштовна доставка для нових клієнтів + MOV трохи вищий за середній чек.</a:t>
-            </a:r>
-          </a:p>
-        </p:txBody>
-      </p:sp>
-      <p:sp>
-        <p:nvSpPr>
-          <p:cNvPr id="24" name="Rounded Rectangle 23"/>
-          <p:cNvSpPr/>
-          <p:nvPr/>
-        </p:nvSpPr>
-        <p:spPr>
-          <a:xfrm>
-            <a:off x="4709160" y="3246120"/>
-            <a:ext cx="3886200" cy="1051560"/>
-          </a:xfrm>
-          <a:prstGeom prst="roundRect">
-            <a:avLst/>
-          </a:prstGeom>
-          <a:solidFill>
-            <a:srgbClr val="EEF6F1"/>
-          </a:solidFill>
-          <a:ln>
-            <a:noFill/>
-          </a:ln>
-          <a:effectLst/>
-        </p:spPr>
-        <p:style>
-          <a:lnRef idx="1">
-            <a:schemeClr val="accent1"/>
-          </a:lnRef>
-          <a:fillRef idx="3">
-            <a:schemeClr val="accent1"/>
-          </a:fillRef>
-          <a:effectRef idx="2">
-            <a:schemeClr val="accent1"/>
-          </a:effectRef>
-          <a:fontRef idx="minor">
-            <a:schemeClr val="lt1"/>
-          </a:fontRef>
-        </p:style>
-        <p:txBody>
-          <a:bodyPr rtlCol="0" anchor="ctr"/>
-          <a:lstStyle/>
-          <a:p>
-            <a:pPr algn="ctr"/>
-          </a:p>
-        </p:txBody>
-      </p:sp>
-      <p:sp>
-        <p:nvSpPr>
-          <p:cNvPr id="25" name="Rectangle 24"/>
-          <p:cNvSpPr/>
-          <p:nvPr/>
-        </p:nvSpPr>
-        <p:spPr>
-          <a:xfrm>
-            <a:off x="4709160" y="3246120"/>
-            <a:ext cx="82296" cy="1051560"/>
-          </a:xfrm>
-          <a:prstGeom prst="rect">
-            <a:avLst/>
-          </a:prstGeom>
-          <a:solidFill>
-            <a:srgbClr val="2F313F"/>
-          </a:solidFill>
-          <a:ln>
-            <a:noFill/>
-          </a:ln>
-          <a:effectLst/>
-        </p:spPr>
-        <p:style>
-          <a:lnRef idx="1">
-            <a:schemeClr val="accent1"/>
-          </a:lnRef>
-          <a:fillRef idx="3">
-            <a:schemeClr val="accent1"/>
-          </a:fillRef>
-          <a:effectRef idx="2">
-            <a:schemeClr val="accent1"/>
-          </a:effectRef>
-          <a:fontRef idx="minor">
-            <a:schemeClr val="lt1"/>
-          </a:fontRef>
-        </p:style>
-        <p:txBody>
-          <a:bodyPr rtlCol="0" anchor="ctr"/>
-          <a:lstStyle/>
-          <a:p>
-            <a:pPr algn="ctr"/>
-          </a:p>
-        </p:txBody>
-      </p:sp>
-      <p:sp>
-        <p:nvSpPr>
-          <p:cNvPr id="26" name="TextBox 25"/>
-          <p:cNvSpPr txBox="1"/>
-          <p:nvPr/>
-        </p:nvSpPr>
-        <p:spPr>
-          <a:xfrm>
-            <a:off x="4937760" y="3383280"/>
-            <a:ext cx="3520440" cy="868680"/>
-          </a:xfrm>
-          <a:prstGeom prst="rect">
-            <a:avLst/>
-          </a:prstGeom>
-          <a:noFill/>
-        </p:spPr>
-        <p:txBody>
-          <a:bodyPr wrap="square">
-            <a:spAutoFit/>
-          </a:bodyPr>
-          <a:lstStyle/>
-          <a:p>
-            <a:r>
-              <a:rPr sz="1250" b="1">
-                <a:solidFill>
-                  <a:srgbClr val="2F313F"/>
-                </a:solidFill>
-                <a:latin typeface="Arial"/>
-              </a:rPr>
-              <a:t>Оподаткування (ПДВ)</a:t>
-            </a:r>
-          </a:p>
-          <a:p>
-            <a:r>
-              <a:rPr sz="1050" b="0">
-                <a:solidFill>
-                  <a:srgbClr val="6B7080"/>
-                </a:solidFill>
-                <a:latin typeface="Arial"/>
-              </a:rPr>
-              <a:t>Знижки через Bolt → +20% ПДВ. Через API (зміна цін партнером) → без ПДВ.</a:t>
-            </a:r>
-          </a:p>
-        </p:txBody>
-      </p:sp>
-      <p:sp>
-        <p:nvSpPr>
-          <p:cNvPr id="27" name="TextBox 26"/>
-          <p:cNvSpPr txBox="1"/>
-          <p:nvPr/>
-        </p:nvSpPr>
-        <p:spPr>
-          <a:xfrm>
-            <a:off x="457200" y="4736592"/>
-            <a:ext cx="8229600" cy="274320"/>
-          </a:xfrm>
-          <a:prstGeom prst="rect">
-            <a:avLst/>
-          </a:prstGeom>
-          <a:noFill/>
-        </p:spPr>
-        <p:txBody>
-          <a:bodyPr wrap="square">
-            <a:spAutoFit/>
-          </a:bodyPr>
-          <a:lstStyle/>
-          <a:p>
-            <a:r>
-              <a:rPr sz="850" b="0">
-                <a:solidFill>
-                  <a:srgbClr val="6B7080"/>
-                </a:solidFill>
-                <a:latin typeface="Arial"/>
-              </a:rPr>
-              <a:t>Джерело: гайд «Промо-активності на Bolt Food» для партнерів (Україна)</a:t>
+              <a:t>AOV €15. Базовий сценарій — рекомендований.</a:t>
             </a:r>
           </a:p>
         </p:txBody>
@@ -9956,7 +10007,7 @@
                 </a:solidFill>
                 <a:latin typeface="Arial"/>
               </a:rPr>
-              <a:t>ЗАПУСК</a:t>
+              <a:t>ПРОМО · ЯК РОЗГАНЯЄМО ЗАМОВЛЕННЯ</a:t>
             </a:r>
           </a:p>
           <a:p>
@@ -9967,55 +10018,21 @@
                 </a:solidFill>
                 <a:latin typeface="Arial"/>
               </a:rPr>
-              <a:t>З чого починаємо</a:t>
-            </a:r>
-          </a:p>
-        </p:txBody>
-      </p:sp>
-      <p:sp>
-        <p:nvSpPr>
-          <p:cNvPr id="5" name="TextBox 4"/>
-          <p:cNvSpPr txBox="1"/>
-          <p:nvPr/>
-        </p:nvSpPr>
-        <p:spPr>
-          <a:xfrm>
-            <a:off x="548640" y="1783080"/>
-            <a:ext cx="3840480" cy="365760"/>
-          </a:xfrm>
-          <a:prstGeom prst="rect">
-            <a:avLst/>
-          </a:prstGeom>
-          <a:noFill/>
-        </p:spPr>
-        <p:txBody>
-          <a:bodyPr wrap="square">
-            <a:spAutoFit/>
-          </a:bodyPr>
-          <a:lstStyle/>
-          <a:p>
-            <a:r>
-              <a:rPr sz="1400" b="1">
-                <a:solidFill>
-                  <a:srgbClr val="2F313F"/>
-                </a:solidFill>
-                <a:latin typeface="Arial"/>
-              </a:rPr>
-              <a:t>Топ-міста для старту</a:t>
-            </a:r>
-          </a:p>
-        </p:txBody>
-      </p:sp>
-      <p:sp>
-        <p:nvSpPr>
-          <p:cNvPr id="6" name="Rounded Rectangle 5"/>
+              <a:t>Промо-інструменти Bolt Food</a:t>
+            </a:r>
+          </a:p>
+        </p:txBody>
+      </p:sp>
+      <p:sp>
+        <p:nvSpPr>
+          <p:cNvPr id="5" name="Rounded Rectangle 4"/>
           <p:cNvSpPr/>
           <p:nvPr/>
         </p:nvSpPr>
         <p:spPr>
           <a:xfrm>
-            <a:off x="548640" y="2240280"/>
-            <a:ext cx="3840480" cy="384048"/>
+            <a:off x="548640" y="1645920"/>
+            <a:ext cx="1883664" cy="1417320"/>
           </a:xfrm>
           <a:prstGeom prst="roundRect">
             <a:avLst/>
@@ -10052,14 +10069,58 @@
       </p:sp>
       <p:sp>
         <p:nvSpPr>
+          <p:cNvPr id="6" name="Rounded Rectangle 5"/>
+          <p:cNvSpPr/>
+          <p:nvPr/>
+        </p:nvSpPr>
+        <p:spPr>
+          <a:xfrm>
+            <a:off x="694944" y="1792224"/>
+            <a:ext cx="365760" cy="365760"/>
+          </a:xfrm>
+          <a:prstGeom prst="roundRect">
+            <a:avLst/>
+          </a:prstGeom>
+          <a:solidFill>
+            <a:srgbClr val="34D186"/>
+          </a:solidFill>
+          <a:ln>
+            <a:noFill/>
+          </a:ln>
+          <a:effectLst/>
+        </p:spPr>
+        <p:style>
+          <a:lnRef idx="1">
+            <a:schemeClr val="accent1"/>
+          </a:lnRef>
+          <a:fillRef idx="3">
+            <a:schemeClr val="accent1"/>
+          </a:fillRef>
+          <a:effectRef idx="2">
+            <a:schemeClr val="accent1"/>
+          </a:effectRef>
+          <a:fontRef idx="minor">
+            <a:schemeClr val="lt1"/>
+          </a:fontRef>
+        </p:style>
+        <p:txBody>
+          <a:bodyPr rtlCol="0" anchor="ctr"/>
+          <a:lstStyle/>
+          <a:p>
+            <a:pPr algn="ctr"/>
+          </a:p>
+        </p:txBody>
+      </p:sp>
+      <p:sp>
+        <p:nvSpPr>
           <p:cNvPr id="7" name="TextBox 6"/>
           <p:cNvSpPr txBox="1"/>
           <p:nvPr/>
         </p:nvSpPr>
         <p:spPr>
           <a:xfrm>
-            <a:off x="713232" y="2276856"/>
-            <a:ext cx="3200400" cy="310896"/>
+            <a:off x="694944" y="1810512"/>
+            <a:ext cx="365760" cy="329184"/>
           </a:xfrm>
           <a:prstGeom prst="rect">
             <a:avLst/>
@@ -10072,14 +10133,15 @@
           </a:bodyPr>
           <a:lstStyle/>
           <a:p>
-            <a:r>
-              <a:rPr sz="1250" b="1">
-                <a:solidFill>
-                  <a:srgbClr val="2F313F"/>
-                </a:solidFill>
-                <a:latin typeface="Arial"/>
-              </a:rPr>
-              <a:t>Київ</a:t>
+            <a:pPr algn="ctr"/>
+            <a:r>
+              <a:rPr sz="1300" b="1">
+                <a:solidFill>
+                  <a:srgbClr val="FFFFFF"/>
+                </a:solidFill>
+                <a:latin typeface="Arial"/>
+              </a:rPr>
+              <a:t>1</a:t>
             </a:r>
           </a:p>
         </p:txBody>
@@ -10092,8 +10154,8 @@
         </p:nvSpPr>
         <p:spPr>
           <a:xfrm>
-            <a:off x="3566160" y="2276856"/>
-            <a:ext cx="731520" cy="310896"/>
+            <a:off x="676656" y="2212848"/>
+            <a:ext cx="1627632" cy="777240"/>
           </a:xfrm>
           <a:prstGeom prst="rect">
             <a:avLst/>
@@ -10106,15 +10168,25 @@
           </a:bodyPr>
           <a:lstStyle/>
           <a:p>
-            <a:pPr algn="r"/>
             <a:r>
               <a:rPr sz="1250" b="1">
                 <a:solidFill>
-                  <a:srgbClr val="34D186"/>
-                </a:solidFill>
-                <a:latin typeface="Arial"/>
-              </a:rPr>
-              <a:t>41%</a:t>
+                  <a:srgbClr val="2F313F"/>
+                </a:solidFill>
+                <a:latin typeface="Arial"/>
+              </a:rPr>
+              <a:t>Знижка на доставку</a:t>
+            </a:r>
+          </a:p>
+          <a:p>
+            <a:r>
+              <a:rPr sz="1000" b="0">
+                <a:solidFill>
+                  <a:srgbClr val="6B7080"/>
+                </a:solidFill>
+                <a:latin typeface="Arial"/>
+              </a:rPr>
+              <a:t>Частково або 0 ₴. №1 інструмент для залучення нових клієнтів.</a:t>
             </a:r>
           </a:p>
         </p:txBody>
@@ -10127,8 +10199,8 @@
         </p:nvSpPr>
         <p:spPr>
           <a:xfrm>
-            <a:off x="548640" y="2697480"/>
-            <a:ext cx="3840480" cy="384048"/>
+            <a:off x="2596896" y="1645920"/>
+            <a:ext cx="1883664" cy="1417320"/>
           </a:xfrm>
           <a:prstGeom prst="roundRect">
             <a:avLst/>
@@ -10165,14 +10237,58 @@
       </p:sp>
       <p:sp>
         <p:nvSpPr>
-          <p:cNvPr id="10" name="TextBox 9"/>
+          <p:cNvPr id="10" name="Rounded Rectangle 9"/>
+          <p:cNvSpPr/>
+          <p:nvPr/>
+        </p:nvSpPr>
+        <p:spPr>
+          <a:xfrm>
+            <a:off x="2743200" y="1792224"/>
+            <a:ext cx="365760" cy="365760"/>
+          </a:xfrm>
+          <a:prstGeom prst="roundRect">
+            <a:avLst/>
+          </a:prstGeom>
+          <a:solidFill>
+            <a:srgbClr val="34D186"/>
+          </a:solidFill>
+          <a:ln>
+            <a:noFill/>
+          </a:ln>
+          <a:effectLst/>
+        </p:spPr>
+        <p:style>
+          <a:lnRef idx="1">
+            <a:schemeClr val="accent1"/>
+          </a:lnRef>
+          <a:fillRef idx="3">
+            <a:schemeClr val="accent1"/>
+          </a:fillRef>
+          <a:effectRef idx="2">
+            <a:schemeClr val="accent1"/>
+          </a:effectRef>
+          <a:fontRef idx="minor">
+            <a:schemeClr val="lt1"/>
+          </a:fontRef>
+        </p:style>
+        <p:txBody>
+          <a:bodyPr rtlCol="0" anchor="ctr"/>
+          <a:lstStyle/>
+          <a:p>
+            <a:pPr algn="ctr"/>
+          </a:p>
+        </p:txBody>
+      </p:sp>
+      <p:sp>
+        <p:nvSpPr>
+          <p:cNvPr id="11" name="TextBox 10"/>
           <p:cNvSpPr txBox="1"/>
           <p:nvPr/>
         </p:nvSpPr>
         <p:spPr>
           <a:xfrm>
-            <a:off x="713232" y="2734056"/>
-            <a:ext cx="3200400" cy="310896"/>
+            <a:off x="2743200" y="1810512"/>
+            <a:ext cx="365760" cy="329184"/>
           </a:xfrm>
           <a:prstGeom prst="rect">
             <a:avLst/>
@@ -10185,28 +10301,29 @@
           </a:bodyPr>
           <a:lstStyle/>
           <a:p>
-            <a:r>
-              <a:rPr sz="1250" b="1">
-                <a:solidFill>
-                  <a:srgbClr val="2F313F"/>
-                </a:solidFill>
-                <a:latin typeface="Arial"/>
-              </a:rPr>
-              <a:t>Львів</a:t>
-            </a:r>
-          </a:p>
-        </p:txBody>
-      </p:sp>
-      <p:sp>
-        <p:nvSpPr>
-          <p:cNvPr id="11" name="TextBox 10"/>
+            <a:pPr algn="ctr"/>
+            <a:r>
+              <a:rPr sz="1300" b="1">
+                <a:solidFill>
+                  <a:srgbClr val="FFFFFF"/>
+                </a:solidFill>
+                <a:latin typeface="Arial"/>
+              </a:rPr>
+              <a:t>2</a:t>
+            </a:r>
+          </a:p>
+        </p:txBody>
+      </p:sp>
+      <p:sp>
+        <p:nvSpPr>
+          <p:cNvPr id="12" name="TextBox 11"/>
           <p:cNvSpPr txBox="1"/>
           <p:nvPr/>
         </p:nvSpPr>
         <p:spPr>
           <a:xfrm>
-            <a:off x="3566160" y="2734056"/>
-            <a:ext cx="731520" cy="310896"/>
+            <a:off x="2724912" y="2212848"/>
+            <a:ext cx="1627632" cy="777240"/>
           </a:xfrm>
           <a:prstGeom prst="rect">
             <a:avLst/>
@@ -10219,29 +10336,39 @@
           </a:bodyPr>
           <a:lstStyle/>
           <a:p>
-            <a:pPr algn="r"/>
             <a:r>
               <a:rPr sz="1250" b="1">
                 <a:solidFill>
-                  <a:srgbClr val="34D186"/>
-                </a:solidFill>
-                <a:latin typeface="Arial"/>
-              </a:rPr>
-              <a:t>13%</a:t>
-            </a:r>
-          </a:p>
-        </p:txBody>
-      </p:sp>
-      <p:sp>
-        <p:nvSpPr>
-          <p:cNvPr id="12" name="Rounded Rectangle 11"/>
+                  <a:srgbClr val="2F313F"/>
+                </a:solidFill>
+                <a:latin typeface="Arial"/>
+              </a:rPr>
+              <a:t>Знижки на меню</a:t>
+            </a:r>
+          </a:p>
+          <a:p>
+            <a:r>
+              <a:rPr sz="1000" b="0">
+                <a:solidFill>
+                  <a:srgbClr val="6B7080"/>
+                </a:solidFill>
+                <a:latin typeface="Arial"/>
+              </a:rPr>
+              <a:t>На окремі позиції або весь асортимент — через API або від Bolt.</a:t>
+            </a:r>
+          </a:p>
+        </p:txBody>
+      </p:sp>
+      <p:sp>
+        <p:nvSpPr>
+          <p:cNvPr id="13" name="Rounded Rectangle 12"/>
           <p:cNvSpPr/>
           <p:nvPr/>
         </p:nvSpPr>
         <p:spPr>
           <a:xfrm>
-            <a:off x="548640" y="3154680"/>
-            <a:ext cx="3840480" cy="384048"/>
+            <a:off x="4645152" y="1645920"/>
+            <a:ext cx="1883664" cy="1417320"/>
           </a:xfrm>
           <a:prstGeom prst="roundRect">
             <a:avLst/>
@@ -10278,14 +10405,58 @@
       </p:sp>
       <p:sp>
         <p:nvSpPr>
-          <p:cNvPr id="13" name="TextBox 12"/>
+          <p:cNvPr id="14" name="Rounded Rectangle 13"/>
+          <p:cNvSpPr/>
+          <p:nvPr/>
+        </p:nvSpPr>
+        <p:spPr>
+          <a:xfrm>
+            <a:off x="4791456" y="1792224"/>
+            <a:ext cx="365760" cy="365760"/>
+          </a:xfrm>
+          <a:prstGeom prst="roundRect">
+            <a:avLst/>
+          </a:prstGeom>
+          <a:solidFill>
+            <a:srgbClr val="34D186"/>
+          </a:solidFill>
+          <a:ln>
+            <a:noFill/>
+          </a:ln>
+          <a:effectLst/>
+        </p:spPr>
+        <p:style>
+          <a:lnRef idx="1">
+            <a:schemeClr val="accent1"/>
+          </a:lnRef>
+          <a:fillRef idx="3">
+            <a:schemeClr val="accent1"/>
+          </a:fillRef>
+          <a:effectRef idx="2">
+            <a:schemeClr val="accent1"/>
+          </a:effectRef>
+          <a:fontRef idx="minor">
+            <a:schemeClr val="lt1"/>
+          </a:fontRef>
+        </p:style>
+        <p:txBody>
+          <a:bodyPr rtlCol="0" anchor="ctr"/>
+          <a:lstStyle/>
+          <a:p>
+            <a:pPr algn="ctr"/>
+          </a:p>
+        </p:txBody>
+      </p:sp>
+      <p:sp>
+        <p:nvSpPr>
+          <p:cNvPr id="15" name="TextBox 14"/>
           <p:cNvSpPr txBox="1"/>
           <p:nvPr/>
         </p:nvSpPr>
         <p:spPr>
           <a:xfrm>
-            <a:off x="713232" y="3191256"/>
-            <a:ext cx="3200400" cy="310896"/>
+            <a:off x="4791456" y="1810512"/>
+            <a:ext cx="365760" cy="329184"/>
           </a:xfrm>
           <a:prstGeom prst="rect">
             <a:avLst/>
@@ -10298,28 +10469,29 @@
           </a:bodyPr>
           <a:lstStyle/>
           <a:p>
-            <a:r>
-              <a:rPr sz="1250" b="1">
-                <a:solidFill>
-                  <a:srgbClr val="2F313F"/>
-                </a:solidFill>
-                <a:latin typeface="Arial"/>
-              </a:rPr>
-              <a:t>Одеса</a:t>
-            </a:r>
-          </a:p>
-        </p:txBody>
-      </p:sp>
-      <p:sp>
-        <p:nvSpPr>
-          <p:cNvPr id="14" name="TextBox 13"/>
+            <a:pPr algn="ctr"/>
+            <a:r>
+              <a:rPr sz="1300" b="1">
+                <a:solidFill>
+                  <a:srgbClr val="FFFFFF"/>
+                </a:solidFill>
+                <a:latin typeface="Arial"/>
+              </a:rPr>
+              <a:t>3</a:t>
+            </a:r>
+          </a:p>
+        </p:txBody>
+      </p:sp>
+      <p:sp>
+        <p:nvSpPr>
+          <p:cNvPr id="16" name="TextBox 15"/>
           <p:cNvSpPr txBox="1"/>
           <p:nvPr/>
         </p:nvSpPr>
         <p:spPr>
           <a:xfrm>
-            <a:off x="3566160" y="3191256"/>
-            <a:ext cx="731520" cy="310896"/>
+            <a:off x="4773168" y="2212848"/>
+            <a:ext cx="1627632" cy="777240"/>
           </a:xfrm>
           <a:prstGeom prst="rect">
             <a:avLst/>
@@ -10332,29 +10504,39 @@
           </a:bodyPr>
           <a:lstStyle/>
           <a:p>
-            <a:pPr algn="r"/>
             <a:r>
               <a:rPr sz="1250" b="1">
                 <a:solidFill>
-                  <a:srgbClr val="34D186"/>
-                </a:solidFill>
-                <a:latin typeface="Arial"/>
-              </a:rPr>
-              <a:t>8%</a:t>
-            </a:r>
-          </a:p>
-        </p:txBody>
-      </p:sp>
-      <p:sp>
-        <p:nvSpPr>
-          <p:cNvPr id="15" name="Rounded Rectangle 14"/>
+                  <a:srgbClr val="2F313F"/>
+                </a:solidFill>
+                <a:latin typeface="Arial"/>
+              </a:rPr>
+              <a:t>Когорти</a:t>
+            </a:r>
+          </a:p>
+          <a:p>
+            <a:r>
+              <a:rPr sz="1000" b="0">
+                <a:solidFill>
+                  <a:srgbClr val="6B7080"/>
+                </a:solidFill>
+                <a:latin typeface="Arial"/>
+              </a:rPr>
+              <a:t>Таргет на Нових / Втрачених / Активних — різний розмір знижки.</a:t>
+            </a:r>
+          </a:p>
+        </p:txBody>
+      </p:sp>
+      <p:sp>
+        <p:nvSpPr>
+          <p:cNvPr id="17" name="Rounded Rectangle 16"/>
           <p:cNvSpPr/>
           <p:nvPr/>
         </p:nvSpPr>
         <p:spPr>
           <a:xfrm>
-            <a:off x="548640" y="3611880"/>
-            <a:ext cx="3840480" cy="384048"/>
+            <a:off x="6693408" y="1645920"/>
+            <a:ext cx="1883664" cy="1417320"/>
           </a:xfrm>
           <a:prstGeom prst="roundRect">
             <a:avLst/>
@@ -10391,14 +10573,58 @@
       </p:sp>
       <p:sp>
         <p:nvSpPr>
-          <p:cNvPr id="16" name="TextBox 15"/>
+          <p:cNvPr id="18" name="Rounded Rectangle 17"/>
+          <p:cNvSpPr/>
+          <p:nvPr/>
+        </p:nvSpPr>
+        <p:spPr>
+          <a:xfrm>
+            <a:off x="6839712" y="1792224"/>
+            <a:ext cx="365760" cy="365760"/>
+          </a:xfrm>
+          <a:prstGeom prst="roundRect">
+            <a:avLst/>
+          </a:prstGeom>
+          <a:solidFill>
+            <a:srgbClr val="34D186"/>
+          </a:solidFill>
+          <a:ln>
+            <a:noFill/>
+          </a:ln>
+          <a:effectLst/>
+        </p:spPr>
+        <p:style>
+          <a:lnRef idx="1">
+            <a:schemeClr val="accent1"/>
+          </a:lnRef>
+          <a:fillRef idx="3">
+            <a:schemeClr val="accent1"/>
+          </a:fillRef>
+          <a:effectRef idx="2">
+            <a:schemeClr val="accent1"/>
+          </a:effectRef>
+          <a:fontRef idx="minor">
+            <a:schemeClr val="lt1"/>
+          </a:fontRef>
+        </p:style>
+        <p:txBody>
+          <a:bodyPr rtlCol="0" anchor="ctr"/>
+          <a:lstStyle/>
+          <a:p>
+            <a:pPr algn="ctr"/>
+          </a:p>
+        </p:txBody>
+      </p:sp>
+      <p:sp>
+        <p:nvSpPr>
+          <p:cNvPr id="19" name="TextBox 18"/>
           <p:cNvSpPr txBox="1"/>
           <p:nvPr/>
         </p:nvSpPr>
         <p:spPr>
           <a:xfrm>
-            <a:off x="713232" y="3648456"/>
-            <a:ext cx="3200400" cy="310896"/>
+            <a:off x="6839712" y="1810512"/>
+            <a:ext cx="365760" cy="329184"/>
           </a:xfrm>
           <a:prstGeom prst="rect">
             <a:avLst/>
@@ -10411,28 +10637,29 @@
           </a:bodyPr>
           <a:lstStyle/>
           <a:p>
-            <a:r>
-              <a:rPr sz="1250" b="1">
-                <a:solidFill>
-                  <a:srgbClr val="2F313F"/>
-                </a:solidFill>
-                <a:latin typeface="Arial"/>
-              </a:rPr>
-              <a:t>Дніпро</a:t>
-            </a:r>
-          </a:p>
-        </p:txBody>
-      </p:sp>
-      <p:sp>
-        <p:nvSpPr>
-          <p:cNvPr id="17" name="TextBox 16"/>
+            <a:pPr algn="ctr"/>
+            <a:r>
+              <a:rPr sz="1300" b="1">
+                <a:solidFill>
+                  <a:srgbClr val="FFFFFF"/>
+                </a:solidFill>
+                <a:latin typeface="Arial"/>
+              </a:rPr>
+              <a:t>4</a:t>
+            </a:r>
+          </a:p>
+        </p:txBody>
+      </p:sp>
+      <p:sp>
+        <p:nvSpPr>
+          <p:cNvPr id="20" name="TextBox 19"/>
           <p:cNvSpPr txBox="1"/>
           <p:nvPr/>
         </p:nvSpPr>
         <p:spPr>
           <a:xfrm>
-            <a:off x="3566160" y="3648456"/>
-            <a:ext cx="731520" cy="310896"/>
+            <a:off x="6821424" y="2212848"/>
+            <a:ext cx="1627632" cy="777240"/>
           </a:xfrm>
           <a:prstGeom prst="rect">
             <a:avLst/>
@@ -10445,29 +10672,39 @@
           </a:bodyPr>
           <a:lstStyle/>
           <a:p>
-            <a:pPr algn="r"/>
             <a:r>
               <a:rPr sz="1250" b="1">
                 <a:solidFill>
-                  <a:srgbClr val="34D186"/>
-                </a:solidFill>
-                <a:latin typeface="Arial"/>
-              </a:rPr>
-              <a:t>4%</a:t>
-            </a:r>
-          </a:p>
-        </p:txBody>
-      </p:sp>
-      <p:sp>
-        <p:nvSpPr>
-          <p:cNvPr id="18" name="Rounded Rectangle 17"/>
+                  <a:srgbClr val="2F313F"/>
+                </a:solidFill>
+                <a:latin typeface="Arial"/>
+              </a:rPr>
+              <a:t>Банерна підтримка</a:t>
+            </a:r>
+          </a:p>
+          <a:p>
+            <a:r>
+              <a:rPr sz="1000" b="0">
+                <a:solidFill>
+                  <a:srgbClr val="6B7080"/>
+                </a:solidFill>
+                <a:latin typeface="Arial"/>
+              </a:rPr>
+              <a:t>Банер у вкладці «Магазини» в періоди активних акцій.</a:t>
+            </a:r>
+          </a:p>
+        </p:txBody>
+      </p:sp>
+      <p:sp>
+        <p:nvSpPr>
+          <p:cNvPr id="21" name="Rounded Rectangle 20"/>
           <p:cNvSpPr/>
           <p:nvPr/>
         </p:nvSpPr>
         <p:spPr>
           <a:xfrm>
-            <a:off x="548640" y="4069080"/>
-            <a:ext cx="3840480" cy="384048"/>
+            <a:off x="548640" y="3246120"/>
+            <a:ext cx="3886200" cy="1051560"/>
           </a:xfrm>
           <a:prstGeom prst="roundRect">
             <a:avLst/>
@@ -10504,119 +10741,16 @@
       </p:sp>
       <p:sp>
         <p:nvSpPr>
-          <p:cNvPr id="19" name="TextBox 18"/>
-          <p:cNvSpPr txBox="1"/>
-          <p:nvPr/>
-        </p:nvSpPr>
-        <p:spPr>
-          <a:xfrm>
-            <a:off x="713232" y="4105656"/>
-            <a:ext cx="3200400" cy="310896"/>
-          </a:xfrm>
-          <a:prstGeom prst="rect">
-            <a:avLst/>
-          </a:prstGeom>
-          <a:noFill/>
-        </p:spPr>
-        <p:txBody>
-          <a:bodyPr wrap="square">
-            <a:spAutoFit/>
-          </a:bodyPr>
-          <a:lstStyle/>
-          <a:p>
-            <a:r>
-              <a:rPr sz="1250" b="1">
-                <a:solidFill>
-                  <a:srgbClr val="2F313F"/>
-                </a:solidFill>
-                <a:latin typeface="Arial"/>
-              </a:rPr>
-              <a:t>Івано-Франківськ</a:t>
-            </a:r>
-          </a:p>
-        </p:txBody>
-      </p:sp>
-      <p:sp>
-        <p:nvSpPr>
-          <p:cNvPr id="20" name="TextBox 19"/>
-          <p:cNvSpPr txBox="1"/>
-          <p:nvPr/>
-        </p:nvSpPr>
-        <p:spPr>
-          <a:xfrm>
-            <a:off x="3566160" y="4105656"/>
-            <a:ext cx="731520" cy="310896"/>
-          </a:xfrm>
-          <a:prstGeom prst="rect">
-            <a:avLst/>
-          </a:prstGeom>
-          <a:noFill/>
-        </p:spPr>
-        <p:txBody>
-          <a:bodyPr wrap="square">
-            <a:spAutoFit/>
-          </a:bodyPr>
-          <a:lstStyle/>
-          <a:p>
-            <a:pPr algn="r"/>
-            <a:r>
-              <a:rPr sz="1250" b="1">
-                <a:solidFill>
-                  <a:srgbClr val="34D186"/>
-                </a:solidFill>
-                <a:latin typeface="Arial"/>
-              </a:rPr>
-              <a:t>3%</a:t>
-            </a:r>
-          </a:p>
-        </p:txBody>
-      </p:sp>
-      <p:sp>
-        <p:nvSpPr>
-          <p:cNvPr id="21" name="TextBox 20"/>
-          <p:cNvSpPr txBox="1"/>
-          <p:nvPr/>
-        </p:nvSpPr>
-        <p:spPr>
-          <a:xfrm>
-            <a:off x="4754880" y="1783080"/>
-            <a:ext cx="3840480" cy="365760"/>
-          </a:xfrm>
-          <a:prstGeom prst="rect">
-            <a:avLst/>
-          </a:prstGeom>
-          <a:noFill/>
-        </p:spPr>
-        <p:txBody>
-          <a:bodyPr wrap="square">
-            <a:spAutoFit/>
-          </a:bodyPr>
-          <a:lstStyle/>
-          <a:p>
-            <a:r>
-              <a:rPr sz="1400" b="1">
-                <a:solidFill>
-                  <a:srgbClr val="2F313F"/>
-                </a:solidFill>
-                <a:latin typeface="Arial"/>
-              </a:rPr>
-              <a:t>Наступні кроки</a:t>
-            </a:r>
-          </a:p>
-        </p:txBody>
-      </p:sp>
-      <p:sp>
-        <p:nvSpPr>
-          <p:cNvPr id="22" name="Rounded Rectangle 21"/>
+          <p:cNvPr id="22" name="Rectangle 21"/>
           <p:cNvSpPr/>
           <p:nvPr/>
         </p:nvSpPr>
         <p:spPr>
           <a:xfrm>
-            <a:off x="4754880" y="2240280"/>
-            <a:ext cx="292608" cy="292608"/>
-          </a:xfrm>
-          <a:prstGeom prst="roundRect">
+            <a:off x="548640" y="3246120"/>
+            <a:ext cx="82296" cy="1051560"/>
+          </a:xfrm>
+          <a:prstGeom prst="rect">
             <a:avLst/>
           </a:prstGeom>
           <a:solidFill>
@@ -10657,8 +10791,8 @@
         </p:nvSpPr>
         <p:spPr>
           <a:xfrm>
-            <a:off x="4754880" y="2221992"/>
-            <a:ext cx="292608" cy="292608"/>
+            <a:off x="777240" y="3383280"/>
+            <a:ext cx="3520440" cy="868680"/>
           </a:xfrm>
           <a:prstGeom prst="rect">
             <a:avLst/>
@@ -10671,69 +10805,45 @@
           </a:bodyPr>
           <a:lstStyle/>
           <a:p>
-            <a:pPr algn="ctr"/>
-            <a:r>
-              <a:rPr sz="1100" b="1">
-                <a:solidFill>
-                  <a:srgbClr val="FFFFFF"/>
-                </a:solidFill>
-                <a:latin typeface="Arial"/>
-              </a:rPr>
-              <a:t>1</a:t>
-            </a:r>
-          </a:p>
-        </p:txBody>
-      </p:sp>
-      <p:sp>
-        <p:nvSpPr>
-          <p:cNvPr id="24" name="TextBox 23"/>
-          <p:cNvSpPr txBox="1"/>
-          <p:nvPr/>
-        </p:nvSpPr>
-        <p:spPr>
-          <a:xfrm>
-            <a:off x="5166360" y="2203704"/>
-            <a:ext cx="3474720" cy="365760"/>
-          </a:xfrm>
-          <a:prstGeom prst="rect">
-            <a:avLst/>
-          </a:prstGeom>
-          <a:noFill/>
-        </p:spPr>
-        <p:txBody>
-          <a:bodyPr wrap="square">
-            <a:spAutoFit/>
-          </a:bodyPr>
-          <a:lstStyle/>
-          <a:p>
-            <a:r>
-              <a:rPr sz="1200" b="0">
+            <a:r>
+              <a:rPr sz="1250" b="1">
                 <a:solidFill>
                   <a:srgbClr val="2F313F"/>
                 </a:solidFill>
                 <a:latin typeface="Arial"/>
               </a:rPr>
-              <a:t>Підтвердити інтерес і scope пілоту</a:t>
-            </a:r>
-          </a:p>
-        </p:txBody>
-      </p:sp>
-      <p:sp>
-        <p:nvSpPr>
-          <p:cNvPr id="25" name="Rounded Rectangle 24"/>
+              <a:t>Рекомендований старт</a:t>
+            </a:r>
+          </a:p>
+          <a:p>
+            <a:r>
+              <a:rPr sz="1050" b="0">
+                <a:solidFill>
+                  <a:srgbClr val="6B7080"/>
+                </a:solidFill>
+                <a:latin typeface="Arial"/>
+              </a:rPr>
+              <a:t>Безкоштовна доставка для нових клієнтів + MOV трохи вищий за середній чек.</a:t>
+            </a:r>
+          </a:p>
+        </p:txBody>
+      </p:sp>
+      <p:sp>
+        <p:nvSpPr>
+          <p:cNvPr id="24" name="Rounded Rectangle 23"/>
           <p:cNvSpPr/>
           <p:nvPr/>
         </p:nvSpPr>
         <p:spPr>
           <a:xfrm>
-            <a:off x="4754880" y="2697480"/>
-            <a:ext cx="292608" cy="292608"/>
+            <a:off x="4709160" y="3246120"/>
+            <a:ext cx="3886200" cy="1051560"/>
           </a:xfrm>
           <a:prstGeom prst="roundRect">
             <a:avLst/>
           </a:prstGeom>
           <a:solidFill>
-            <a:srgbClr val="34D186"/>
+            <a:srgbClr val="EEF6F1"/>
           </a:solidFill>
           <a:ln>
             <a:noFill/>
@@ -10764,89 +10874,20 @@
       </p:sp>
       <p:sp>
         <p:nvSpPr>
-          <p:cNvPr id="26" name="TextBox 25"/>
-          <p:cNvSpPr txBox="1"/>
-          <p:nvPr/>
-        </p:nvSpPr>
-        <p:spPr>
-          <a:xfrm>
-            <a:off x="4754880" y="2679192"/>
-            <a:ext cx="292608" cy="292608"/>
-          </a:xfrm>
-          <a:prstGeom prst="rect">
-            <a:avLst/>
-          </a:prstGeom>
-          <a:noFill/>
-        </p:spPr>
-        <p:txBody>
-          <a:bodyPr wrap="square">
-            <a:spAutoFit/>
-          </a:bodyPr>
-          <a:lstStyle/>
-          <a:p>
-            <a:pPr algn="ctr"/>
-            <a:r>
-              <a:rPr sz="1100" b="1">
-                <a:solidFill>
-                  <a:srgbClr val="FFFFFF"/>
-                </a:solidFill>
-                <a:latin typeface="Arial"/>
-              </a:rPr>
-              <a:t>2</a:t>
-            </a:r>
-          </a:p>
-        </p:txBody>
-      </p:sp>
-      <p:sp>
-        <p:nvSpPr>
-          <p:cNvPr id="27" name="TextBox 26"/>
-          <p:cNvSpPr txBox="1"/>
-          <p:nvPr/>
-        </p:nvSpPr>
-        <p:spPr>
-          <a:xfrm>
-            <a:off x="5166360" y="2660904"/>
-            <a:ext cx="3474720" cy="365760"/>
-          </a:xfrm>
-          <a:prstGeom prst="rect">
-            <a:avLst/>
-          </a:prstGeom>
-          <a:noFill/>
-        </p:spPr>
-        <p:txBody>
-          <a:bodyPr wrap="square">
-            <a:spAutoFit/>
-          </a:bodyPr>
-          <a:lstStyle/>
-          <a:p>
-            <a:r>
-              <a:rPr sz="1200" b="0">
-                <a:solidFill>
-                  <a:srgbClr val="2F313F"/>
-                </a:solidFill>
-                <a:latin typeface="Arial"/>
-              </a:rPr>
-              <a:t>Інтеграція каталогу та цін</a:t>
-            </a:r>
-          </a:p>
-        </p:txBody>
-      </p:sp>
-      <p:sp>
-        <p:nvSpPr>
-          <p:cNvPr id="28" name="Rounded Rectangle 27"/>
+          <p:cNvPr id="25" name="Rectangle 24"/>
           <p:cNvSpPr/>
           <p:nvPr/>
         </p:nvSpPr>
         <p:spPr>
           <a:xfrm>
-            <a:off x="4754880" y="3154680"/>
-            <a:ext cx="292608" cy="292608"/>
-          </a:xfrm>
-          <a:prstGeom prst="roundRect">
+            <a:off x="4709160" y="3246120"/>
+            <a:ext cx="82296" cy="1051560"/>
+          </a:xfrm>
+          <a:prstGeom prst="rect">
             <a:avLst/>
           </a:prstGeom>
           <a:solidFill>
-            <a:srgbClr val="34D186"/>
+            <a:srgbClr val="2F313F"/>
           </a:solidFill>
           <a:ln>
             <a:noFill/>
@@ -10877,14 +10918,14 @@
       </p:sp>
       <p:sp>
         <p:nvSpPr>
-          <p:cNvPr id="29" name="TextBox 28"/>
+          <p:cNvPr id="26" name="TextBox 25"/>
           <p:cNvSpPr txBox="1"/>
           <p:nvPr/>
         </p:nvSpPr>
         <p:spPr>
           <a:xfrm>
-            <a:off x="4754880" y="3136392"/>
-            <a:ext cx="292608" cy="292608"/>
+            <a:off x="4937760" y="3383280"/>
+            <a:ext cx="3520440" cy="868680"/>
           </a:xfrm>
           <a:prstGeom prst="rect">
             <a:avLst/>
@@ -10897,29 +10938,39 @@
           </a:bodyPr>
           <a:lstStyle/>
           <a:p>
-            <a:pPr algn="ctr"/>
-            <a:r>
-              <a:rPr sz="1100" b="1">
-                <a:solidFill>
-                  <a:srgbClr val="FFFFFF"/>
-                </a:solidFill>
-                <a:latin typeface="Arial"/>
-              </a:rPr>
-              <a:t>3</a:t>
-            </a:r>
-          </a:p>
-        </p:txBody>
-      </p:sp>
-      <p:sp>
-        <p:nvSpPr>
-          <p:cNvPr id="30" name="TextBox 29"/>
+            <a:r>
+              <a:rPr sz="1250" b="1">
+                <a:solidFill>
+                  <a:srgbClr val="2F313F"/>
+                </a:solidFill>
+                <a:latin typeface="Arial"/>
+              </a:rPr>
+              <a:t>Оподаткування (ПДВ)</a:t>
+            </a:r>
+          </a:p>
+          <a:p>
+            <a:r>
+              <a:rPr sz="1050" b="0">
+                <a:solidFill>
+                  <a:srgbClr val="6B7080"/>
+                </a:solidFill>
+                <a:latin typeface="Arial"/>
+              </a:rPr>
+              <a:t>Знижки через Bolt → +20% ПДВ. Через API (зміна цін партнером) → без ПДВ.</a:t>
+            </a:r>
+          </a:p>
+        </p:txBody>
+      </p:sp>
+      <p:sp>
+        <p:nvSpPr>
+          <p:cNvPr id="27" name="TextBox 26"/>
           <p:cNvSpPr txBox="1"/>
           <p:nvPr/>
         </p:nvSpPr>
         <p:spPr>
           <a:xfrm>
-            <a:off x="5166360" y="3118104"/>
-            <a:ext cx="3474720" cy="365760"/>
+            <a:off x="457200" y="4736592"/>
+            <a:ext cx="8229600" cy="274320"/>
           </a:xfrm>
           <a:prstGeom prst="rect">
             <a:avLst/>
@@ -10933,239 +10984,13 @@
           <a:lstStyle/>
           <a:p>
             <a:r>
-              <a:rPr sz="1200" b="0">
-                <a:solidFill>
-                  <a:srgbClr val="2F313F"/>
-                </a:solidFill>
-                <a:latin typeface="Arial"/>
-              </a:rPr>
-              <a:t>Запуск у топ-3 містах</a:t>
-            </a:r>
-          </a:p>
-        </p:txBody>
-      </p:sp>
-      <p:sp>
-        <p:nvSpPr>
-          <p:cNvPr id="31" name="Rounded Rectangle 30"/>
-          <p:cNvSpPr/>
-          <p:nvPr/>
-        </p:nvSpPr>
-        <p:spPr>
-          <a:xfrm>
-            <a:off x="4754880" y="3611880"/>
-            <a:ext cx="292608" cy="292608"/>
-          </a:xfrm>
-          <a:prstGeom prst="roundRect">
-            <a:avLst/>
-          </a:prstGeom>
-          <a:solidFill>
-            <a:srgbClr val="34D186"/>
-          </a:solidFill>
-          <a:ln>
-            <a:noFill/>
-          </a:ln>
-          <a:effectLst/>
-        </p:spPr>
-        <p:style>
-          <a:lnRef idx="1">
-            <a:schemeClr val="accent1"/>
-          </a:lnRef>
-          <a:fillRef idx="3">
-            <a:schemeClr val="accent1"/>
-          </a:fillRef>
-          <a:effectRef idx="2">
-            <a:schemeClr val="accent1"/>
-          </a:effectRef>
-          <a:fontRef idx="minor">
-            <a:schemeClr val="lt1"/>
-          </a:fontRef>
-        </p:style>
-        <p:txBody>
-          <a:bodyPr rtlCol="0" anchor="ctr"/>
-          <a:lstStyle/>
-          <a:p>
-            <a:pPr algn="ctr"/>
-          </a:p>
-        </p:txBody>
-      </p:sp>
-      <p:sp>
-        <p:nvSpPr>
-          <p:cNvPr id="32" name="TextBox 31"/>
-          <p:cNvSpPr txBox="1"/>
-          <p:nvPr/>
-        </p:nvSpPr>
-        <p:spPr>
-          <a:xfrm>
-            <a:off x="4754880" y="3593592"/>
-            <a:ext cx="292608" cy="292608"/>
-          </a:xfrm>
-          <a:prstGeom prst="rect">
-            <a:avLst/>
-          </a:prstGeom>
-          <a:noFill/>
-        </p:spPr>
-        <p:txBody>
-          <a:bodyPr wrap="square">
-            <a:spAutoFit/>
-          </a:bodyPr>
-          <a:lstStyle/>
-          <a:p>
-            <a:pPr algn="ctr"/>
-            <a:r>
-              <a:rPr sz="1100" b="1">
-                <a:solidFill>
-                  <a:srgbClr val="FFFFFF"/>
-                </a:solidFill>
-                <a:latin typeface="Arial"/>
-              </a:rPr>
-              <a:t>4</a:t>
-            </a:r>
-          </a:p>
-        </p:txBody>
-      </p:sp>
-      <p:sp>
-        <p:nvSpPr>
-          <p:cNvPr id="33" name="TextBox 32"/>
-          <p:cNvSpPr txBox="1"/>
-          <p:nvPr/>
-        </p:nvSpPr>
-        <p:spPr>
-          <a:xfrm>
-            <a:off x="5166360" y="3575304"/>
-            <a:ext cx="3474720" cy="365760"/>
-          </a:xfrm>
-          <a:prstGeom prst="rect">
-            <a:avLst/>
-          </a:prstGeom>
-          <a:noFill/>
-        </p:spPr>
-        <p:txBody>
-          <a:bodyPr wrap="square">
-            <a:spAutoFit/>
-          </a:bodyPr>
-          <a:lstStyle/>
-          <a:p>
-            <a:r>
-              <a:rPr sz="1200" b="0">
-                <a:solidFill>
-                  <a:srgbClr val="2F313F"/>
-                </a:solidFill>
-                <a:latin typeface="Arial"/>
-              </a:rPr>
-              <a:t>Спільний маркетинг на старті</a:t>
-            </a:r>
-          </a:p>
-        </p:txBody>
-      </p:sp>
-      <p:sp>
-        <p:nvSpPr>
-          <p:cNvPr id="34" name="Rounded Rectangle 33"/>
-          <p:cNvSpPr/>
-          <p:nvPr/>
-        </p:nvSpPr>
-        <p:spPr>
-          <a:xfrm>
-            <a:off x="4754880" y="4069080"/>
-            <a:ext cx="292608" cy="292608"/>
-          </a:xfrm>
-          <a:prstGeom prst="roundRect">
-            <a:avLst/>
-          </a:prstGeom>
-          <a:solidFill>
-            <a:srgbClr val="34D186"/>
-          </a:solidFill>
-          <a:ln>
-            <a:noFill/>
-          </a:ln>
-          <a:effectLst/>
-        </p:spPr>
-        <p:style>
-          <a:lnRef idx="1">
-            <a:schemeClr val="accent1"/>
-          </a:lnRef>
-          <a:fillRef idx="3">
-            <a:schemeClr val="accent1"/>
-          </a:fillRef>
-          <a:effectRef idx="2">
-            <a:schemeClr val="accent1"/>
-          </a:effectRef>
-          <a:fontRef idx="minor">
-            <a:schemeClr val="lt1"/>
-          </a:fontRef>
-        </p:style>
-        <p:txBody>
-          <a:bodyPr rtlCol="0" anchor="ctr"/>
-          <a:lstStyle/>
-          <a:p>
-            <a:pPr algn="ctr"/>
-          </a:p>
-        </p:txBody>
-      </p:sp>
-      <p:sp>
-        <p:nvSpPr>
-          <p:cNvPr id="35" name="TextBox 34"/>
-          <p:cNvSpPr txBox="1"/>
-          <p:nvPr/>
-        </p:nvSpPr>
-        <p:spPr>
-          <a:xfrm>
-            <a:off x="4754880" y="4050792"/>
-            <a:ext cx="292608" cy="292608"/>
-          </a:xfrm>
-          <a:prstGeom prst="rect">
-            <a:avLst/>
-          </a:prstGeom>
-          <a:noFill/>
-        </p:spPr>
-        <p:txBody>
-          <a:bodyPr wrap="square">
-            <a:spAutoFit/>
-          </a:bodyPr>
-          <a:lstStyle/>
-          <a:p>
-            <a:pPr algn="ctr"/>
-            <a:r>
-              <a:rPr sz="1100" b="1">
-                <a:solidFill>
-                  <a:srgbClr val="FFFFFF"/>
-                </a:solidFill>
-                <a:latin typeface="Arial"/>
-              </a:rPr>
-              <a:t>5</a:t>
-            </a:r>
-          </a:p>
-        </p:txBody>
-      </p:sp>
-      <p:sp>
-        <p:nvSpPr>
-          <p:cNvPr id="36" name="TextBox 35"/>
-          <p:cNvSpPr txBox="1"/>
-          <p:nvPr/>
-        </p:nvSpPr>
-        <p:spPr>
-          <a:xfrm>
-            <a:off x="5166360" y="4032504"/>
-            <a:ext cx="3474720" cy="365760"/>
-          </a:xfrm>
-          <a:prstGeom prst="rect">
-            <a:avLst/>
-          </a:prstGeom>
-          <a:noFill/>
-        </p:spPr>
-        <p:txBody>
-          <a:bodyPr wrap="square">
-            <a:spAutoFit/>
-          </a:bodyPr>
-          <a:lstStyle/>
-          <a:p>
-            <a:r>
-              <a:rPr sz="1200" b="0">
-                <a:solidFill>
-                  <a:srgbClr val="2F313F"/>
-                </a:solidFill>
-                <a:latin typeface="Arial"/>
-              </a:rPr>
-              <a:t>Огляд результатів через 4 тижні</a:t>
+              <a:rPr sz="850" b="0">
+                <a:solidFill>
+                  <a:srgbClr val="6B7080"/>
+                </a:solidFill>
+                <a:latin typeface="Arial"/>
+              </a:rPr>
+              <a:t>Джерело: гайд «Промо-активності на Bolt Food» для партнерів (Україна)</a:t>
             </a:r>
           </a:p>
         </p:txBody>
@@ -11179,6 +11004,1343 @@
 </file>
 
 <file path=ppt/slides/slide21.xml><?xml version="1.0" encoding="utf-8"?>
+<p:sld xmlns:a="http://schemas.openxmlformats.org/drawingml/2006/main" xmlns:p="http://schemas.openxmlformats.org/presentationml/2006/main" xmlns:r="http://schemas.openxmlformats.org/officeDocument/2006/relationships">
+  <p:cSld>
+    <p:bg>
+      <p:bgPr>
+        <a:solidFill>
+          <a:srgbClr val="FFFFFF"/>
+        </a:solidFill>
+        <a:effectLst/>
+      </p:bgPr>
+    </p:bg>
+    <p:spTree>
+      <p:nvGrpSpPr>
+        <p:cNvPr id="1" name=""/>
+        <p:cNvGrpSpPr/>
+        <p:nvPr/>
+      </p:nvGrpSpPr>
+      <p:grpSpPr/>
+      <p:pic>
+        <p:nvPicPr>
+          <p:cNvPr id="2" name="Picture 1" descr="bolt_food_logo.png"/>
+          <p:cNvPicPr>
+            <a:picLocks noChangeAspect="1"/>
+          </p:cNvPicPr>
+          <p:nvPr/>
+        </p:nvPicPr>
+        <p:blipFill>
+          <a:blip r:embed="rId2"/>
+          <a:stretch>
+            <a:fillRect/>
+          </a:stretch>
+        </p:blipFill>
+        <p:spPr>
+          <a:xfrm>
+            <a:off x="7543800" y="292608"/>
+            <a:ext cx="1280160" cy="508814"/>
+          </a:xfrm>
+          <a:prstGeom prst="rect">
+            <a:avLst/>
+          </a:prstGeom>
+        </p:spPr>
+      </p:pic>
+      <p:sp>
+        <p:nvSpPr>
+          <p:cNvPr id="3" name="Rectangle 2"/>
+          <p:cNvSpPr/>
+          <p:nvPr/>
+        </p:nvSpPr>
+        <p:spPr>
+          <a:xfrm>
+            <a:off x="502920" y="502920"/>
+            <a:ext cx="457200" cy="64008"/>
+          </a:xfrm>
+          <a:prstGeom prst="rect">
+            <a:avLst/>
+          </a:prstGeom>
+          <a:solidFill>
+            <a:srgbClr val="34D186"/>
+          </a:solidFill>
+          <a:ln>
+            <a:noFill/>
+          </a:ln>
+          <a:effectLst/>
+        </p:spPr>
+        <p:style>
+          <a:lnRef idx="1">
+            <a:schemeClr val="accent1"/>
+          </a:lnRef>
+          <a:fillRef idx="3">
+            <a:schemeClr val="accent1"/>
+          </a:fillRef>
+          <a:effectRef idx="2">
+            <a:schemeClr val="accent1"/>
+          </a:effectRef>
+          <a:fontRef idx="minor">
+            <a:schemeClr val="lt1"/>
+          </a:fontRef>
+        </p:style>
+        <p:txBody>
+          <a:bodyPr rtlCol="0" anchor="ctr"/>
+          <a:lstStyle/>
+          <a:p>
+            <a:pPr algn="ctr"/>
+          </a:p>
+        </p:txBody>
+      </p:sp>
+      <p:sp>
+        <p:nvSpPr>
+          <p:cNvPr id="4" name="TextBox 3"/>
+          <p:cNvSpPr txBox="1"/>
+          <p:nvPr/>
+        </p:nvSpPr>
+        <p:spPr>
+          <a:xfrm>
+            <a:off x="457200" y="612648"/>
+            <a:ext cx="8229600" cy="1097280"/>
+          </a:xfrm>
+          <a:prstGeom prst="rect">
+            <a:avLst/>
+          </a:prstGeom>
+          <a:noFill/>
+        </p:spPr>
+        <p:txBody>
+          <a:bodyPr wrap="square">
+            <a:spAutoFit/>
+          </a:bodyPr>
+          <a:lstStyle/>
+          <a:p>
+            <a:r>
+              <a:rPr sz="1200" b="1">
+                <a:solidFill>
+                  <a:srgbClr val="34D186"/>
+                </a:solidFill>
+                <a:latin typeface="Arial"/>
+              </a:rPr>
+              <a:t>ЗАПУСК</a:t>
+            </a:r>
+          </a:p>
+          <a:p>
+            <a:r>
+              <a:rPr sz="2700" b="1">
+                <a:solidFill>
+                  <a:srgbClr val="2F313F"/>
+                </a:solidFill>
+                <a:latin typeface="Arial"/>
+              </a:rPr>
+              <a:t>З чого починаємо</a:t>
+            </a:r>
+          </a:p>
+        </p:txBody>
+      </p:sp>
+      <p:sp>
+        <p:nvSpPr>
+          <p:cNvPr id="5" name="TextBox 4"/>
+          <p:cNvSpPr txBox="1"/>
+          <p:nvPr/>
+        </p:nvSpPr>
+        <p:spPr>
+          <a:xfrm>
+            <a:off x="548640" y="1783080"/>
+            <a:ext cx="3840480" cy="365760"/>
+          </a:xfrm>
+          <a:prstGeom prst="rect">
+            <a:avLst/>
+          </a:prstGeom>
+          <a:noFill/>
+        </p:spPr>
+        <p:txBody>
+          <a:bodyPr wrap="square">
+            <a:spAutoFit/>
+          </a:bodyPr>
+          <a:lstStyle/>
+          <a:p>
+            <a:r>
+              <a:rPr sz="1400" b="1">
+                <a:solidFill>
+                  <a:srgbClr val="2F313F"/>
+                </a:solidFill>
+                <a:latin typeface="Arial"/>
+              </a:rPr>
+              <a:t>Топ-міста для старту</a:t>
+            </a:r>
+          </a:p>
+        </p:txBody>
+      </p:sp>
+      <p:sp>
+        <p:nvSpPr>
+          <p:cNvPr id="6" name="Rounded Rectangle 5"/>
+          <p:cNvSpPr/>
+          <p:nvPr/>
+        </p:nvSpPr>
+        <p:spPr>
+          <a:xfrm>
+            <a:off x="548640" y="2240280"/>
+            <a:ext cx="3840480" cy="384048"/>
+          </a:xfrm>
+          <a:prstGeom prst="roundRect">
+            <a:avLst/>
+          </a:prstGeom>
+          <a:solidFill>
+            <a:srgbClr val="EEF6F1"/>
+          </a:solidFill>
+          <a:ln>
+            <a:noFill/>
+          </a:ln>
+          <a:effectLst/>
+        </p:spPr>
+        <p:style>
+          <a:lnRef idx="1">
+            <a:schemeClr val="accent1"/>
+          </a:lnRef>
+          <a:fillRef idx="3">
+            <a:schemeClr val="accent1"/>
+          </a:fillRef>
+          <a:effectRef idx="2">
+            <a:schemeClr val="accent1"/>
+          </a:effectRef>
+          <a:fontRef idx="minor">
+            <a:schemeClr val="lt1"/>
+          </a:fontRef>
+        </p:style>
+        <p:txBody>
+          <a:bodyPr rtlCol="0" anchor="ctr"/>
+          <a:lstStyle/>
+          <a:p>
+            <a:pPr algn="ctr"/>
+          </a:p>
+        </p:txBody>
+      </p:sp>
+      <p:sp>
+        <p:nvSpPr>
+          <p:cNvPr id="7" name="TextBox 6"/>
+          <p:cNvSpPr txBox="1"/>
+          <p:nvPr/>
+        </p:nvSpPr>
+        <p:spPr>
+          <a:xfrm>
+            <a:off x="713232" y="2276856"/>
+            <a:ext cx="3200400" cy="310896"/>
+          </a:xfrm>
+          <a:prstGeom prst="rect">
+            <a:avLst/>
+          </a:prstGeom>
+          <a:noFill/>
+        </p:spPr>
+        <p:txBody>
+          <a:bodyPr wrap="square">
+            <a:spAutoFit/>
+          </a:bodyPr>
+          <a:lstStyle/>
+          <a:p>
+            <a:r>
+              <a:rPr sz="1250" b="1">
+                <a:solidFill>
+                  <a:srgbClr val="2F313F"/>
+                </a:solidFill>
+                <a:latin typeface="Arial"/>
+              </a:rPr>
+              <a:t>Київ</a:t>
+            </a:r>
+          </a:p>
+        </p:txBody>
+      </p:sp>
+      <p:sp>
+        <p:nvSpPr>
+          <p:cNvPr id="8" name="TextBox 7"/>
+          <p:cNvSpPr txBox="1"/>
+          <p:nvPr/>
+        </p:nvSpPr>
+        <p:spPr>
+          <a:xfrm>
+            <a:off x="3566160" y="2276856"/>
+            <a:ext cx="731520" cy="310896"/>
+          </a:xfrm>
+          <a:prstGeom prst="rect">
+            <a:avLst/>
+          </a:prstGeom>
+          <a:noFill/>
+        </p:spPr>
+        <p:txBody>
+          <a:bodyPr wrap="square">
+            <a:spAutoFit/>
+          </a:bodyPr>
+          <a:lstStyle/>
+          <a:p>
+            <a:pPr algn="r"/>
+            <a:r>
+              <a:rPr sz="1250" b="1">
+                <a:solidFill>
+                  <a:srgbClr val="34D186"/>
+                </a:solidFill>
+                <a:latin typeface="Arial"/>
+              </a:rPr>
+              <a:t>41%</a:t>
+            </a:r>
+          </a:p>
+        </p:txBody>
+      </p:sp>
+      <p:sp>
+        <p:nvSpPr>
+          <p:cNvPr id="9" name="Rounded Rectangle 8"/>
+          <p:cNvSpPr/>
+          <p:nvPr/>
+        </p:nvSpPr>
+        <p:spPr>
+          <a:xfrm>
+            <a:off x="548640" y="2697480"/>
+            <a:ext cx="3840480" cy="384048"/>
+          </a:xfrm>
+          <a:prstGeom prst="roundRect">
+            <a:avLst/>
+          </a:prstGeom>
+          <a:solidFill>
+            <a:srgbClr val="EEF6F1"/>
+          </a:solidFill>
+          <a:ln>
+            <a:noFill/>
+          </a:ln>
+          <a:effectLst/>
+        </p:spPr>
+        <p:style>
+          <a:lnRef idx="1">
+            <a:schemeClr val="accent1"/>
+          </a:lnRef>
+          <a:fillRef idx="3">
+            <a:schemeClr val="accent1"/>
+          </a:fillRef>
+          <a:effectRef idx="2">
+            <a:schemeClr val="accent1"/>
+          </a:effectRef>
+          <a:fontRef idx="minor">
+            <a:schemeClr val="lt1"/>
+          </a:fontRef>
+        </p:style>
+        <p:txBody>
+          <a:bodyPr rtlCol="0" anchor="ctr"/>
+          <a:lstStyle/>
+          <a:p>
+            <a:pPr algn="ctr"/>
+          </a:p>
+        </p:txBody>
+      </p:sp>
+      <p:sp>
+        <p:nvSpPr>
+          <p:cNvPr id="10" name="TextBox 9"/>
+          <p:cNvSpPr txBox="1"/>
+          <p:nvPr/>
+        </p:nvSpPr>
+        <p:spPr>
+          <a:xfrm>
+            <a:off x="713232" y="2734056"/>
+            <a:ext cx="3200400" cy="310896"/>
+          </a:xfrm>
+          <a:prstGeom prst="rect">
+            <a:avLst/>
+          </a:prstGeom>
+          <a:noFill/>
+        </p:spPr>
+        <p:txBody>
+          <a:bodyPr wrap="square">
+            <a:spAutoFit/>
+          </a:bodyPr>
+          <a:lstStyle/>
+          <a:p>
+            <a:r>
+              <a:rPr sz="1250" b="1">
+                <a:solidFill>
+                  <a:srgbClr val="2F313F"/>
+                </a:solidFill>
+                <a:latin typeface="Arial"/>
+              </a:rPr>
+              <a:t>Львів</a:t>
+            </a:r>
+          </a:p>
+        </p:txBody>
+      </p:sp>
+      <p:sp>
+        <p:nvSpPr>
+          <p:cNvPr id="11" name="TextBox 10"/>
+          <p:cNvSpPr txBox="1"/>
+          <p:nvPr/>
+        </p:nvSpPr>
+        <p:spPr>
+          <a:xfrm>
+            <a:off x="3566160" y="2734056"/>
+            <a:ext cx="731520" cy="310896"/>
+          </a:xfrm>
+          <a:prstGeom prst="rect">
+            <a:avLst/>
+          </a:prstGeom>
+          <a:noFill/>
+        </p:spPr>
+        <p:txBody>
+          <a:bodyPr wrap="square">
+            <a:spAutoFit/>
+          </a:bodyPr>
+          <a:lstStyle/>
+          <a:p>
+            <a:pPr algn="r"/>
+            <a:r>
+              <a:rPr sz="1250" b="1">
+                <a:solidFill>
+                  <a:srgbClr val="34D186"/>
+                </a:solidFill>
+                <a:latin typeface="Arial"/>
+              </a:rPr>
+              <a:t>13%</a:t>
+            </a:r>
+          </a:p>
+        </p:txBody>
+      </p:sp>
+      <p:sp>
+        <p:nvSpPr>
+          <p:cNvPr id="12" name="Rounded Rectangle 11"/>
+          <p:cNvSpPr/>
+          <p:nvPr/>
+        </p:nvSpPr>
+        <p:spPr>
+          <a:xfrm>
+            <a:off x="548640" y="3154680"/>
+            <a:ext cx="3840480" cy="384048"/>
+          </a:xfrm>
+          <a:prstGeom prst="roundRect">
+            <a:avLst/>
+          </a:prstGeom>
+          <a:solidFill>
+            <a:srgbClr val="EEF6F1"/>
+          </a:solidFill>
+          <a:ln>
+            <a:noFill/>
+          </a:ln>
+          <a:effectLst/>
+        </p:spPr>
+        <p:style>
+          <a:lnRef idx="1">
+            <a:schemeClr val="accent1"/>
+          </a:lnRef>
+          <a:fillRef idx="3">
+            <a:schemeClr val="accent1"/>
+          </a:fillRef>
+          <a:effectRef idx="2">
+            <a:schemeClr val="accent1"/>
+          </a:effectRef>
+          <a:fontRef idx="minor">
+            <a:schemeClr val="lt1"/>
+          </a:fontRef>
+        </p:style>
+        <p:txBody>
+          <a:bodyPr rtlCol="0" anchor="ctr"/>
+          <a:lstStyle/>
+          <a:p>
+            <a:pPr algn="ctr"/>
+          </a:p>
+        </p:txBody>
+      </p:sp>
+      <p:sp>
+        <p:nvSpPr>
+          <p:cNvPr id="13" name="TextBox 12"/>
+          <p:cNvSpPr txBox="1"/>
+          <p:nvPr/>
+        </p:nvSpPr>
+        <p:spPr>
+          <a:xfrm>
+            <a:off x="713232" y="3191256"/>
+            <a:ext cx="3200400" cy="310896"/>
+          </a:xfrm>
+          <a:prstGeom prst="rect">
+            <a:avLst/>
+          </a:prstGeom>
+          <a:noFill/>
+        </p:spPr>
+        <p:txBody>
+          <a:bodyPr wrap="square">
+            <a:spAutoFit/>
+          </a:bodyPr>
+          <a:lstStyle/>
+          <a:p>
+            <a:r>
+              <a:rPr sz="1250" b="1">
+                <a:solidFill>
+                  <a:srgbClr val="2F313F"/>
+                </a:solidFill>
+                <a:latin typeface="Arial"/>
+              </a:rPr>
+              <a:t>Одеса</a:t>
+            </a:r>
+          </a:p>
+        </p:txBody>
+      </p:sp>
+      <p:sp>
+        <p:nvSpPr>
+          <p:cNvPr id="14" name="TextBox 13"/>
+          <p:cNvSpPr txBox="1"/>
+          <p:nvPr/>
+        </p:nvSpPr>
+        <p:spPr>
+          <a:xfrm>
+            <a:off x="3566160" y="3191256"/>
+            <a:ext cx="731520" cy="310896"/>
+          </a:xfrm>
+          <a:prstGeom prst="rect">
+            <a:avLst/>
+          </a:prstGeom>
+          <a:noFill/>
+        </p:spPr>
+        <p:txBody>
+          <a:bodyPr wrap="square">
+            <a:spAutoFit/>
+          </a:bodyPr>
+          <a:lstStyle/>
+          <a:p>
+            <a:pPr algn="r"/>
+            <a:r>
+              <a:rPr sz="1250" b="1">
+                <a:solidFill>
+                  <a:srgbClr val="34D186"/>
+                </a:solidFill>
+                <a:latin typeface="Arial"/>
+              </a:rPr>
+              <a:t>8%</a:t>
+            </a:r>
+          </a:p>
+        </p:txBody>
+      </p:sp>
+      <p:sp>
+        <p:nvSpPr>
+          <p:cNvPr id="15" name="Rounded Rectangle 14"/>
+          <p:cNvSpPr/>
+          <p:nvPr/>
+        </p:nvSpPr>
+        <p:spPr>
+          <a:xfrm>
+            <a:off x="548640" y="3611880"/>
+            <a:ext cx="3840480" cy="384048"/>
+          </a:xfrm>
+          <a:prstGeom prst="roundRect">
+            <a:avLst/>
+          </a:prstGeom>
+          <a:solidFill>
+            <a:srgbClr val="EEF6F1"/>
+          </a:solidFill>
+          <a:ln>
+            <a:noFill/>
+          </a:ln>
+          <a:effectLst/>
+        </p:spPr>
+        <p:style>
+          <a:lnRef idx="1">
+            <a:schemeClr val="accent1"/>
+          </a:lnRef>
+          <a:fillRef idx="3">
+            <a:schemeClr val="accent1"/>
+          </a:fillRef>
+          <a:effectRef idx="2">
+            <a:schemeClr val="accent1"/>
+          </a:effectRef>
+          <a:fontRef idx="minor">
+            <a:schemeClr val="lt1"/>
+          </a:fontRef>
+        </p:style>
+        <p:txBody>
+          <a:bodyPr rtlCol="0" anchor="ctr"/>
+          <a:lstStyle/>
+          <a:p>
+            <a:pPr algn="ctr"/>
+          </a:p>
+        </p:txBody>
+      </p:sp>
+      <p:sp>
+        <p:nvSpPr>
+          <p:cNvPr id="16" name="TextBox 15"/>
+          <p:cNvSpPr txBox="1"/>
+          <p:nvPr/>
+        </p:nvSpPr>
+        <p:spPr>
+          <a:xfrm>
+            <a:off x="713232" y="3648456"/>
+            <a:ext cx="3200400" cy="310896"/>
+          </a:xfrm>
+          <a:prstGeom prst="rect">
+            <a:avLst/>
+          </a:prstGeom>
+          <a:noFill/>
+        </p:spPr>
+        <p:txBody>
+          <a:bodyPr wrap="square">
+            <a:spAutoFit/>
+          </a:bodyPr>
+          <a:lstStyle/>
+          <a:p>
+            <a:r>
+              <a:rPr sz="1250" b="1">
+                <a:solidFill>
+                  <a:srgbClr val="2F313F"/>
+                </a:solidFill>
+                <a:latin typeface="Arial"/>
+              </a:rPr>
+              <a:t>Дніпро</a:t>
+            </a:r>
+          </a:p>
+        </p:txBody>
+      </p:sp>
+      <p:sp>
+        <p:nvSpPr>
+          <p:cNvPr id="17" name="TextBox 16"/>
+          <p:cNvSpPr txBox="1"/>
+          <p:nvPr/>
+        </p:nvSpPr>
+        <p:spPr>
+          <a:xfrm>
+            <a:off x="3566160" y="3648456"/>
+            <a:ext cx="731520" cy="310896"/>
+          </a:xfrm>
+          <a:prstGeom prst="rect">
+            <a:avLst/>
+          </a:prstGeom>
+          <a:noFill/>
+        </p:spPr>
+        <p:txBody>
+          <a:bodyPr wrap="square">
+            <a:spAutoFit/>
+          </a:bodyPr>
+          <a:lstStyle/>
+          <a:p>
+            <a:pPr algn="r"/>
+            <a:r>
+              <a:rPr sz="1250" b="1">
+                <a:solidFill>
+                  <a:srgbClr val="34D186"/>
+                </a:solidFill>
+                <a:latin typeface="Arial"/>
+              </a:rPr>
+              <a:t>4%</a:t>
+            </a:r>
+          </a:p>
+        </p:txBody>
+      </p:sp>
+      <p:sp>
+        <p:nvSpPr>
+          <p:cNvPr id="18" name="Rounded Rectangle 17"/>
+          <p:cNvSpPr/>
+          <p:nvPr/>
+        </p:nvSpPr>
+        <p:spPr>
+          <a:xfrm>
+            <a:off x="548640" y="4069080"/>
+            <a:ext cx="3840480" cy="384048"/>
+          </a:xfrm>
+          <a:prstGeom prst="roundRect">
+            <a:avLst/>
+          </a:prstGeom>
+          <a:solidFill>
+            <a:srgbClr val="EEF6F1"/>
+          </a:solidFill>
+          <a:ln>
+            <a:noFill/>
+          </a:ln>
+          <a:effectLst/>
+        </p:spPr>
+        <p:style>
+          <a:lnRef idx="1">
+            <a:schemeClr val="accent1"/>
+          </a:lnRef>
+          <a:fillRef idx="3">
+            <a:schemeClr val="accent1"/>
+          </a:fillRef>
+          <a:effectRef idx="2">
+            <a:schemeClr val="accent1"/>
+          </a:effectRef>
+          <a:fontRef idx="minor">
+            <a:schemeClr val="lt1"/>
+          </a:fontRef>
+        </p:style>
+        <p:txBody>
+          <a:bodyPr rtlCol="0" anchor="ctr"/>
+          <a:lstStyle/>
+          <a:p>
+            <a:pPr algn="ctr"/>
+          </a:p>
+        </p:txBody>
+      </p:sp>
+      <p:sp>
+        <p:nvSpPr>
+          <p:cNvPr id="19" name="TextBox 18"/>
+          <p:cNvSpPr txBox="1"/>
+          <p:nvPr/>
+        </p:nvSpPr>
+        <p:spPr>
+          <a:xfrm>
+            <a:off x="713232" y="4105656"/>
+            <a:ext cx="3200400" cy="310896"/>
+          </a:xfrm>
+          <a:prstGeom prst="rect">
+            <a:avLst/>
+          </a:prstGeom>
+          <a:noFill/>
+        </p:spPr>
+        <p:txBody>
+          <a:bodyPr wrap="square">
+            <a:spAutoFit/>
+          </a:bodyPr>
+          <a:lstStyle/>
+          <a:p>
+            <a:r>
+              <a:rPr sz="1250" b="1">
+                <a:solidFill>
+                  <a:srgbClr val="2F313F"/>
+                </a:solidFill>
+                <a:latin typeface="Arial"/>
+              </a:rPr>
+              <a:t>Івано-Франківськ</a:t>
+            </a:r>
+          </a:p>
+        </p:txBody>
+      </p:sp>
+      <p:sp>
+        <p:nvSpPr>
+          <p:cNvPr id="20" name="TextBox 19"/>
+          <p:cNvSpPr txBox="1"/>
+          <p:nvPr/>
+        </p:nvSpPr>
+        <p:spPr>
+          <a:xfrm>
+            <a:off x="3566160" y="4105656"/>
+            <a:ext cx="731520" cy="310896"/>
+          </a:xfrm>
+          <a:prstGeom prst="rect">
+            <a:avLst/>
+          </a:prstGeom>
+          <a:noFill/>
+        </p:spPr>
+        <p:txBody>
+          <a:bodyPr wrap="square">
+            <a:spAutoFit/>
+          </a:bodyPr>
+          <a:lstStyle/>
+          <a:p>
+            <a:pPr algn="r"/>
+            <a:r>
+              <a:rPr sz="1250" b="1">
+                <a:solidFill>
+                  <a:srgbClr val="34D186"/>
+                </a:solidFill>
+                <a:latin typeface="Arial"/>
+              </a:rPr>
+              <a:t>3%</a:t>
+            </a:r>
+          </a:p>
+        </p:txBody>
+      </p:sp>
+      <p:sp>
+        <p:nvSpPr>
+          <p:cNvPr id="21" name="TextBox 20"/>
+          <p:cNvSpPr txBox="1"/>
+          <p:nvPr/>
+        </p:nvSpPr>
+        <p:spPr>
+          <a:xfrm>
+            <a:off x="4754880" y="1783080"/>
+            <a:ext cx="3840480" cy="365760"/>
+          </a:xfrm>
+          <a:prstGeom prst="rect">
+            <a:avLst/>
+          </a:prstGeom>
+          <a:noFill/>
+        </p:spPr>
+        <p:txBody>
+          <a:bodyPr wrap="square">
+            <a:spAutoFit/>
+          </a:bodyPr>
+          <a:lstStyle/>
+          <a:p>
+            <a:r>
+              <a:rPr sz="1400" b="1">
+                <a:solidFill>
+                  <a:srgbClr val="2F313F"/>
+                </a:solidFill>
+                <a:latin typeface="Arial"/>
+              </a:rPr>
+              <a:t>Наступні кроки</a:t>
+            </a:r>
+          </a:p>
+        </p:txBody>
+      </p:sp>
+      <p:sp>
+        <p:nvSpPr>
+          <p:cNvPr id="22" name="Rounded Rectangle 21"/>
+          <p:cNvSpPr/>
+          <p:nvPr/>
+        </p:nvSpPr>
+        <p:spPr>
+          <a:xfrm>
+            <a:off x="4754880" y="2240280"/>
+            <a:ext cx="292608" cy="292608"/>
+          </a:xfrm>
+          <a:prstGeom prst="roundRect">
+            <a:avLst/>
+          </a:prstGeom>
+          <a:solidFill>
+            <a:srgbClr val="34D186"/>
+          </a:solidFill>
+          <a:ln>
+            <a:noFill/>
+          </a:ln>
+          <a:effectLst/>
+        </p:spPr>
+        <p:style>
+          <a:lnRef idx="1">
+            <a:schemeClr val="accent1"/>
+          </a:lnRef>
+          <a:fillRef idx="3">
+            <a:schemeClr val="accent1"/>
+          </a:fillRef>
+          <a:effectRef idx="2">
+            <a:schemeClr val="accent1"/>
+          </a:effectRef>
+          <a:fontRef idx="minor">
+            <a:schemeClr val="lt1"/>
+          </a:fontRef>
+        </p:style>
+        <p:txBody>
+          <a:bodyPr rtlCol="0" anchor="ctr"/>
+          <a:lstStyle/>
+          <a:p>
+            <a:pPr algn="ctr"/>
+          </a:p>
+        </p:txBody>
+      </p:sp>
+      <p:sp>
+        <p:nvSpPr>
+          <p:cNvPr id="23" name="TextBox 22"/>
+          <p:cNvSpPr txBox="1"/>
+          <p:nvPr/>
+        </p:nvSpPr>
+        <p:spPr>
+          <a:xfrm>
+            <a:off x="4754880" y="2221992"/>
+            <a:ext cx="292608" cy="292608"/>
+          </a:xfrm>
+          <a:prstGeom prst="rect">
+            <a:avLst/>
+          </a:prstGeom>
+          <a:noFill/>
+        </p:spPr>
+        <p:txBody>
+          <a:bodyPr wrap="square">
+            <a:spAutoFit/>
+          </a:bodyPr>
+          <a:lstStyle/>
+          <a:p>
+            <a:pPr algn="ctr"/>
+            <a:r>
+              <a:rPr sz="1100" b="1">
+                <a:solidFill>
+                  <a:srgbClr val="FFFFFF"/>
+                </a:solidFill>
+                <a:latin typeface="Arial"/>
+              </a:rPr>
+              <a:t>1</a:t>
+            </a:r>
+          </a:p>
+        </p:txBody>
+      </p:sp>
+      <p:sp>
+        <p:nvSpPr>
+          <p:cNvPr id="24" name="TextBox 23"/>
+          <p:cNvSpPr txBox="1"/>
+          <p:nvPr/>
+        </p:nvSpPr>
+        <p:spPr>
+          <a:xfrm>
+            <a:off x="5166360" y="2203704"/>
+            <a:ext cx="3474720" cy="365760"/>
+          </a:xfrm>
+          <a:prstGeom prst="rect">
+            <a:avLst/>
+          </a:prstGeom>
+          <a:noFill/>
+        </p:spPr>
+        <p:txBody>
+          <a:bodyPr wrap="square">
+            <a:spAutoFit/>
+          </a:bodyPr>
+          <a:lstStyle/>
+          <a:p>
+            <a:r>
+              <a:rPr sz="1200" b="0">
+                <a:solidFill>
+                  <a:srgbClr val="2F313F"/>
+                </a:solidFill>
+                <a:latin typeface="Arial"/>
+              </a:rPr>
+              <a:t>Підтвердити інтерес і scope пілоту</a:t>
+            </a:r>
+          </a:p>
+        </p:txBody>
+      </p:sp>
+      <p:sp>
+        <p:nvSpPr>
+          <p:cNvPr id="25" name="Rounded Rectangle 24"/>
+          <p:cNvSpPr/>
+          <p:nvPr/>
+        </p:nvSpPr>
+        <p:spPr>
+          <a:xfrm>
+            <a:off x="4754880" y="2697480"/>
+            <a:ext cx="292608" cy="292608"/>
+          </a:xfrm>
+          <a:prstGeom prst="roundRect">
+            <a:avLst/>
+          </a:prstGeom>
+          <a:solidFill>
+            <a:srgbClr val="34D186"/>
+          </a:solidFill>
+          <a:ln>
+            <a:noFill/>
+          </a:ln>
+          <a:effectLst/>
+        </p:spPr>
+        <p:style>
+          <a:lnRef idx="1">
+            <a:schemeClr val="accent1"/>
+          </a:lnRef>
+          <a:fillRef idx="3">
+            <a:schemeClr val="accent1"/>
+          </a:fillRef>
+          <a:effectRef idx="2">
+            <a:schemeClr val="accent1"/>
+          </a:effectRef>
+          <a:fontRef idx="minor">
+            <a:schemeClr val="lt1"/>
+          </a:fontRef>
+        </p:style>
+        <p:txBody>
+          <a:bodyPr rtlCol="0" anchor="ctr"/>
+          <a:lstStyle/>
+          <a:p>
+            <a:pPr algn="ctr"/>
+          </a:p>
+        </p:txBody>
+      </p:sp>
+      <p:sp>
+        <p:nvSpPr>
+          <p:cNvPr id="26" name="TextBox 25"/>
+          <p:cNvSpPr txBox="1"/>
+          <p:nvPr/>
+        </p:nvSpPr>
+        <p:spPr>
+          <a:xfrm>
+            <a:off x="4754880" y="2679192"/>
+            <a:ext cx="292608" cy="292608"/>
+          </a:xfrm>
+          <a:prstGeom prst="rect">
+            <a:avLst/>
+          </a:prstGeom>
+          <a:noFill/>
+        </p:spPr>
+        <p:txBody>
+          <a:bodyPr wrap="square">
+            <a:spAutoFit/>
+          </a:bodyPr>
+          <a:lstStyle/>
+          <a:p>
+            <a:pPr algn="ctr"/>
+            <a:r>
+              <a:rPr sz="1100" b="1">
+                <a:solidFill>
+                  <a:srgbClr val="FFFFFF"/>
+                </a:solidFill>
+                <a:latin typeface="Arial"/>
+              </a:rPr>
+              <a:t>2</a:t>
+            </a:r>
+          </a:p>
+        </p:txBody>
+      </p:sp>
+      <p:sp>
+        <p:nvSpPr>
+          <p:cNvPr id="27" name="TextBox 26"/>
+          <p:cNvSpPr txBox="1"/>
+          <p:nvPr/>
+        </p:nvSpPr>
+        <p:spPr>
+          <a:xfrm>
+            <a:off x="5166360" y="2660904"/>
+            <a:ext cx="3474720" cy="365760"/>
+          </a:xfrm>
+          <a:prstGeom prst="rect">
+            <a:avLst/>
+          </a:prstGeom>
+          <a:noFill/>
+        </p:spPr>
+        <p:txBody>
+          <a:bodyPr wrap="square">
+            <a:spAutoFit/>
+          </a:bodyPr>
+          <a:lstStyle/>
+          <a:p>
+            <a:r>
+              <a:rPr sz="1200" b="0">
+                <a:solidFill>
+                  <a:srgbClr val="2F313F"/>
+                </a:solidFill>
+                <a:latin typeface="Arial"/>
+              </a:rPr>
+              <a:t>Інтеграція каталогу та цін</a:t>
+            </a:r>
+          </a:p>
+        </p:txBody>
+      </p:sp>
+      <p:sp>
+        <p:nvSpPr>
+          <p:cNvPr id="28" name="Rounded Rectangle 27"/>
+          <p:cNvSpPr/>
+          <p:nvPr/>
+        </p:nvSpPr>
+        <p:spPr>
+          <a:xfrm>
+            <a:off x="4754880" y="3154680"/>
+            <a:ext cx="292608" cy="292608"/>
+          </a:xfrm>
+          <a:prstGeom prst="roundRect">
+            <a:avLst/>
+          </a:prstGeom>
+          <a:solidFill>
+            <a:srgbClr val="34D186"/>
+          </a:solidFill>
+          <a:ln>
+            <a:noFill/>
+          </a:ln>
+          <a:effectLst/>
+        </p:spPr>
+        <p:style>
+          <a:lnRef idx="1">
+            <a:schemeClr val="accent1"/>
+          </a:lnRef>
+          <a:fillRef idx="3">
+            <a:schemeClr val="accent1"/>
+          </a:fillRef>
+          <a:effectRef idx="2">
+            <a:schemeClr val="accent1"/>
+          </a:effectRef>
+          <a:fontRef idx="minor">
+            <a:schemeClr val="lt1"/>
+          </a:fontRef>
+        </p:style>
+        <p:txBody>
+          <a:bodyPr rtlCol="0" anchor="ctr"/>
+          <a:lstStyle/>
+          <a:p>
+            <a:pPr algn="ctr"/>
+          </a:p>
+        </p:txBody>
+      </p:sp>
+      <p:sp>
+        <p:nvSpPr>
+          <p:cNvPr id="29" name="TextBox 28"/>
+          <p:cNvSpPr txBox="1"/>
+          <p:nvPr/>
+        </p:nvSpPr>
+        <p:spPr>
+          <a:xfrm>
+            <a:off x="4754880" y="3136392"/>
+            <a:ext cx="292608" cy="292608"/>
+          </a:xfrm>
+          <a:prstGeom prst="rect">
+            <a:avLst/>
+          </a:prstGeom>
+          <a:noFill/>
+        </p:spPr>
+        <p:txBody>
+          <a:bodyPr wrap="square">
+            <a:spAutoFit/>
+          </a:bodyPr>
+          <a:lstStyle/>
+          <a:p>
+            <a:pPr algn="ctr"/>
+            <a:r>
+              <a:rPr sz="1100" b="1">
+                <a:solidFill>
+                  <a:srgbClr val="FFFFFF"/>
+                </a:solidFill>
+                <a:latin typeface="Arial"/>
+              </a:rPr>
+              <a:t>3</a:t>
+            </a:r>
+          </a:p>
+        </p:txBody>
+      </p:sp>
+      <p:sp>
+        <p:nvSpPr>
+          <p:cNvPr id="30" name="TextBox 29"/>
+          <p:cNvSpPr txBox="1"/>
+          <p:nvPr/>
+        </p:nvSpPr>
+        <p:spPr>
+          <a:xfrm>
+            <a:off x="5166360" y="3118104"/>
+            <a:ext cx="3474720" cy="365760"/>
+          </a:xfrm>
+          <a:prstGeom prst="rect">
+            <a:avLst/>
+          </a:prstGeom>
+          <a:noFill/>
+        </p:spPr>
+        <p:txBody>
+          <a:bodyPr wrap="square">
+            <a:spAutoFit/>
+          </a:bodyPr>
+          <a:lstStyle/>
+          <a:p>
+            <a:r>
+              <a:rPr sz="1200" b="0">
+                <a:solidFill>
+                  <a:srgbClr val="2F313F"/>
+                </a:solidFill>
+                <a:latin typeface="Arial"/>
+              </a:rPr>
+              <a:t>Запуск у топ-3 містах</a:t>
+            </a:r>
+          </a:p>
+        </p:txBody>
+      </p:sp>
+      <p:sp>
+        <p:nvSpPr>
+          <p:cNvPr id="31" name="Rounded Rectangle 30"/>
+          <p:cNvSpPr/>
+          <p:nvPr/>
+        </p:nvSpPr>
+        <p:spPr>
+          <a:xfrm>
+            <a:off x="4754880" y="3611880"/>
+            <a:ext cx="292608" cy="292608"/>
+          </a:xfrm>
+          <a:prstGeom prst="roundRect">
+            <a:avLst/>
+          </a:prstGeom>
+          <a:solidFill>
+            <a:srgbClr val="34D186"/>
+          </a:solidFill>
+          <a:ln>
+            <a:noFill/>
+          </a:ln>
+          <a:effectLst/>
+        </p:spPr>
+        <p:style>
+          <a:lnRef idx="1">
+            <a:schemeClr val="accent1"/>
+          </a:lnRef>
+          <a:fillRef idx="3">
+            <a:schemeClr val="accent1"/>
+          </a:fillRef>
+          <a:effectRef idx="2">
+            <a:schemeClr val="accent1"/>
+          </a:effectRef>
+          <a:fontRef idx="minor">
+            <a:schemeClr val="lt1"/>
+          </a:fontRef>
+        </p:style>
+        <p:txBody>
+          <a:bodyPr rtlCol="0" anchor="ctr"/>
+          <a:lstStyle/>
+          <a:p>
+            <a:pPr algn="ctr"/>
+          </a:p>
+        </p:txBody>
+      </p:sp>
+      <p:sp>
+        <p:nvSpPr>
+          <p:cNvPr id="32" name="TextBox 31"/>
+          <p:cNvSpPr txBox="1"/>
+          <p:nvPr/>
+        </p:nvSpPr>
+        <p:spPr>
+          <a:xfrm>
+            <a:off x="4754880" y="3593592"/>
+            <a:ext cx="292608" cy="292608"/>
+          </a:xfrm>
+          <a:prstGeom prst="rect">
+            <a:avLst/>
+          </a:prstGeom>
+          <a:noFill/>
+        </p:spPr>
+        <p:txBody>
+          <a:bodyPr wrap="square">
+            <a:spAutoFit/>
+          </a:bodyPr>
+          <a:lstStyle/>
+          <a:p>
+            <a:pPr algn="ctr"/>
+            <a:r>
+              <a:rPr sz="1100" b="1">
+                <a:solidFill>
+                  <a:srgbClr val="FFFFFF"/>
+                </a:solidFill>
+                <a:latin typeface="Arial"/>
+              </a:rPr>
+              <a:t>4</a:t>
+            </a:r>
+          </a:p>
+        </p:txBody>
+      </p:sp>
+      <p:sp>
+        <p:nvSpPr>
+          <p:cNvPr id="33" name="TextBox 32"/>
+          <p:cNvSpPr txBox="1"/>
+          <p:nvPr/>
+        </p:nvSpPr>
+        <p:spPr>
+          <a:xfrm>
+            <a:off x="5166360" y="3575304"/>
+            <a:ext cx="3474720" cy="365760"/>
+          </a:xfrm>
+          <a:prstGeom prst="rect">
+            <a:avLst/>
+          </a:prstGeom>
+          <a:noFill/>
+        </p:spPr>
+        <p:txBody>
+          <a:bodyPr wrap="square">
+            <a:spAutoFit/>
+          </a:bodyPr>
+          <a:lstStyle/>
+          <a:p>
+            <a:r>
+              <a:rPr sz="1200" b="0">
+                <a:solidFill>
+                  <a:srgbClr val="2F313F"/>
+                </a:solidFill>
+                <a:latin typeface="Arial"/>
+              </a:rPr>
+              <a:t>Спільний маркетинг на старті</a:t>
+            </a:r>
+          </a:p>
+        </p:txBody>
+      </p:sp>
+      <p:sp>
+        <p:nvSpPr>
+          <p:cNvPr id="34" name="Rounded Rectangle 33"/>
+          <p:cNvSpPr/>
+          <p:nvPr/>
+        </p:nvSpPr>
+        <p:spPr>
+          <a:xfrm>
+            <a:off x="4754880" y="4069080"/>
+            <a:ext cx="292608" cy="292608"/>
+          </a:xfrm>
+          <a:prstGeom prst="roundRect">
+            <a:avLst/>
+          </a:prstGeom>
+          <a:solidFill>
+            <a:srgbClr val="34D186"/>
+          </a:solidFill>
+          <a:ln>
+            <a:noFill/>
+          </a:ln>
+          <a:effectLst/>
+        </p:spPr>
+        <p:style>
+          <a:lnRef idx="1">
+            <a:schemeClr val="accent1"/>
+          </a:lnRef>
+          <a:fillRef idx="3">
+            <a:schemeClr val="accent1"/>
+          </a:fillRef>
+          <a:effectRef idx="2">
+            <a:schemeClr val="accent1"/>
+          </a:effectRef>
+          <a:fontRef idx="minor">
+            <a:schemeClr val="lt1"/>
+          </a:fontRef>
+        </p:style>
+        <p:txBody>
+          <a:bodyPr rtlCol="0" anchor="ctr"/>
+          <a:lstStyle/>
+          <a:p>
+            <a:pPr algn="ctr"/>
+          </a:p>
+        </p:txBody>
+      </p:sp>
+      <p:sp>
+        <p:nvSpPr>
+          <p:cNvPr id="35" name="TextBox 34"/>
+          <p:cNvSpPr txBox="1"/>
+          <p:nvPr/>
+        </p:nvSpPr>
+        <p:spPr>
+          <a:xfrm>
+            <a:off x="4754880" y="4050792"/>
+            <a:ext cx="292608" cy="292608"/>
+          </a:xfrm>
+          <a:prstGeom prst="rect">
+            <a:avLst/>
+          </a:prstGeom>
+          <a:noFill/>
+        </p:spPr>
+        <p:txBody>
+          <a:bodyPr wrap="square">
+            <a:spAutoFit/>
+          </a:bodyPr>
+          <a:lstStyle/>
+          <a:p>
+            <a:pPr algn="ctr"/>
+            <a:r>
+              <a:rPr sz="1100" b="1">
+                <a:solidFill>
+                  <a:srgbClr val="FFFFFF"/>
+                </a:solidFill>
+                <a:latin typeface="Arial"/>
+              </a:rPr>
+              <a:t>5</a:t>
+            </a:r>
+          </a:p>
+        </p:txBody>
+      </p:sp>
+      <p:sp>
+        <p:nvSpPr>
+          <p:cNvPr id="36" name="TextBox 35"/>
+          <p:cNvSpPr txBox="1"/>
+          <p:nvPr/>
+        </p:nvSpPr>
+        <p:spPr>
+          <a:xfrm>
+            <a:off x="5166360" y="4032504"/>
+            <a:ext cx="3474720" cy="365760"/>
+          </a:xfrm>
+          <a:prstGeom prst="rect">
+            <a:avLst/>
+          </a:prstGeom>
+          <a:noFill/>
+        </p:spPr>
+        <p:txBody>
+          <a:bodyPr wrap="square">
+            <a:spAutoFit/>
+          </a:bodyPr>
+          <a:lstStyle/>
+          <a:p>
+            <a:r>
+              <a:rPr sz="1200" b="0">
+                <a:solidFill>
+                  <a:srgbClr val="2F313F"/>
+                </a:solidFill>
+                <a:latin typeface="Arial"/>
+              </a:rPr>
+              <a:t>Огляд результатів через 4 тижні</a:t>
+            </a:r>
+          </a:p>
+        </p:txBody>
+      </p:sp>
+    </p:spTree>
+  </p:cSld>
+  <p:clrMapOvr>
+    <a:masterClrMapping/>
+  </p:clrMapOvr>
+</p:sld>
+</file>
+
+<file path=ppt/slides/slide22.xml><?xml version="1.0" encoding="utf-8"?>
 <p:sld xmlns:a="http://schemas.openxmlformats.org/drawingml/2006/main" xmlns:p="http://schemas.openxmlformats.org/presentationml/2006/main" xmlns:r="http://schemas.openxmlformats.org/officeDocument/2006/relationships">
   <p:cSld>
     <p:bg>
